--- a/Lec-15-19-pipelined-cpu.pptx
+++ b/Lec-15-19-pipelined-cpu.pptx
@@ -5,7 +5,7 @@
     <p:sldMasterId id="2147483648" r:id="rId1"/>
   </p:sldMasterIdLst>
   <p:notesMasterIdLst>
-    <p:notesMasterId r:id="rId15"/>
+    <p:notesMasterId r:id="rId17"/>
   </p:notesMasterIdLst>
   <p:sldIdLst>
     <p:sldId id="337" r:id="rId2"/>
@@ -19,8 +19,10 @@
     <p:sldId id="442" r:id="rId10"/>
     <p:sldId id="346" r:id="rId11"/>
     <p:sldId id="348" r:id="rId12"/>
-    <p:sldId id="349" r:id="rId13"/>
-    <p:sldId id="443" r:id="rId14"/>
+    <p:sldId id="443" r:id="rId13"/>
+    <p:sldId id="349" r:id="rId14"/>
+    <p:sldId id="350" r:id="rId15"/>
+    <p:sldId id="351" r:id="rId16"/>
   </p:sldIdLst>
   <p:sldSz cx="9144000" cy="6858000" type="screen4x3"/>
   <p:notesSz cx="6858000" cy="9144000"/>
@@ -302,7 +304,7 @@
               <a:pPr>
                 <a:defRPr/>
               </a:pPr>
-              <a:t>2/18/2026</a:t>
+              <a:t>2/20/2026</a:t>
             </a:fld>
             <a:endParaRPr lang="en-US"/>
           </a:p>
@@ -6001,37 +6003,8 @@
           <a:p>
             <a:fld id="{B4B13859-67C5-4393-B6C2-556CF3F770C0}" type="datetime3">
               <a:rPr lang="en-US" smtClean="0"/>
-              <a:t>18 February 2026</a:t>
+              <a:t>20 February 2026</a:t>
             </a:fld>
-            <a:endParaRPr lang="en-US"/>
-          </a:p>
-        </p:txBody>
-      </p:sp>
-      <p:sp>
-        <p:nvSpPr>
-          <p:cNvPr id="5" name="Footer Placeholder 4">
-            <a:extLst>
-              <a:ext uri="{FF2B5EF4-FFF2-40B4-BE49-F238E27FC236}">
-                <a16:creationId xmlns:a16="http://schemas.microsoft.com/office/drawing/2014/main" id="{F2B65194-2843-AAA6-1532-8E21AE47464E}"/>
-              </a:ext>
-            </a:extLst>
-          </p:cNvPr>
-          <p:cNvSpPr>
-            <a:spLocks noGrp="1"/>
-          </p:cNvSpPr>
-          <p:nvPr>
-            <p:ph type="ftr" sz="quarter" idx="11"/>
-          </p:nvPr>
-        </p:nvSpPr>
-        <p:spPr/>
-        <p:txBody>
-          <a:bodyPr/>
-          <a:lstStyle/>
-          <a:p>
-            <a:r>
-              <a:rPr lang="en-US"/>
-              <a:t>ELL305: Computer Architecture</a:t>
-            </a:r>
             <a:endParaRPr lang="en-US" dirty="0"/>
           </a:p>
         </p:txBody>
@@ -6583,9 +6556,9 @@
           <a:p>
             <a:fld id="{B4B13859-67C5-4393-B6C2-556CF3F770C0}" type="datetime3">
               <a:rPr lang="en-US" smtClean="0"/>
-              <a:t>18 February 2026</a:t>
+              <a:t>20 February 2026</a:t>
             </a:fld>
-            <a:endParaRPr lang="en-US"/>
+            <a:endParaRPr lang="en-US" dirty="0"/>
           </a:p>
         </p:txBody>
       </p:sp>
@@ -6717,6 +6690,364 @@
           <p:cNvPr id="2" name="Title 1">
             <a:extLst>
               <a:ext uri="{FF2B5EF4-FFF2-40B4-BE49-F238E27FC236}">
+                <a16:creationId xmlns:a16="http://schemas.microsoft.com/office/drawing/2014/main" id="{4340E343-C9B0-6137-E67E-CBEBA5E68CB1}"/>
+              </a:ext>
+            </a:extLst>
+          </p:cNvPr>
+          <p:cNvSpPr>
+            <a:spLocks noGrp="1"/>
+          </p:cNvSpPr>
+          <p:nvPr>
+            <p:ph type="title"/>
+          </p:nvPr>
+        </p:nvSpPr>
+        <p:spPr/>
+        <p:txBody>
+          <a:bodyPr/>
+          <a:lstStyle/>
+          <a:p>
+            <a:r>
+              <a:rPr lang="en-US" dirty="0"/>
+              <a:t>What about control?</a:t>
+            </a:r>
+            <a:endParaRPr lang="en-IN" dirty="0"/>
+          </a:p>
+        </p:txBody>
+      </p:sp>
+      <p:sp>
+        <p:nvSpPr>
+          <p:cNvPr id="3" name="Content Placeholder 2">
+            <a:extLst>
+              <a:ext uri="{FF2B5EF4-FFF2-40B4-BE49-F238E27FC236}">
+                <a16:creationId xmlns:a16="http://schemas.microsoft.com/office/drawing/2014/main" id="{83A67459-7D49-DB90-976B-81F1B5720070}"/>
+              </a:ext>
+            </a:extLst>
+          </p:cNvPr>
+          <p:cNvSpPr>
+            <a:spLocks noGrp="1"/>
+          </p:cNvSpPr>
+          <p:nvPr>
+            <p:ph idx="1"/>
+          </p:nvPr>
+        </p:nvSpPr>
+        <p:spPr/>
+        <p:txBody>
+          <a:bodyPr/>
+          <a:lstStyle/>
+          <a:p>
+            <a:pPr marL="0" indent="0">
+              <a:buNone/>
+            </a:pPr>
+            <a:r>
+              <a:rPr lang="en-US" dirty="0"/>
+              <a:t>How do we modify the control circuit from the single cycle control?</a:t>
+            </a:r>
+          </a:p>
+          <a:p>
+            <a:endParaRPr lang="en-US" dirty="0"/>
+          </a:p>
+          <a:p>
+            <a:endParaRPr lang="en-US" dirty="0"/>
+          </a:p>
+          <a:p>
+            <a:endParaRPr lang="en-US" dirty="0"/>
+          </a:p>
+          <a:p>
+            <a:pPr marL="0" indent="0">
+              <a:buNone/>
+            </a:pPr>
+            <a:r>
+              <a:rPr lang="en-US" dirty="0"/>
+              <a:t>Pipeline</a:t>
+            </a:r>
+            <a:br>
+              <a:rPr lang="en-US" dirty="0"/>
+            </a:br>
+            <a:r>
+              <a:rPr lang="en-US" dirty="0"/>
+              <a:t>control</a:t>
+            </a:r>
+            <a:br>
+              <a:rPr lang="en-US" dirty="0"/>
+            </a:br>
+            <a:r>
+              <a:rPr lang="en-US" dirty="0"/>
+              <a:t>bits!</a:t>
+            </a:r>
+            <a:endParaRPr lang="en-IN" dirty="0"/>
+          </a:p>
+        </p:txBody>
+      </p:sp>
+      <p:sp>
+        <p:nvSpPr>
+          <p:cNvPr id="5" name="Slide Number Placeholder 4">
+            <a:extLst>
+              <a:ext uri="{FF2B5EF4-FFF2-40B4-BE49-F238E27FC236}">
+                <a16:creationId xmlns:a16="http://schemas.microsoft.com/office/drawing/2014/main" id="{8175BFF6-1DCB-FA3F-9386-338D00A68E98}"/>
+              </a:ext>
+            </a:extLst>
+          </p:cNvPr>
+          <p:cNvSpPr>
+            <a:spLocks noGrp="1"/>
+          </p:cNvSpPr>
+          <p:nvPr>
+            <p:ph type="sldNum" sz="quarter" idx="12"/>
+          </p:nvPr>
+        </p:nvSpPr>
+        <p:spPr/>
+        <p:txBody>
+          <a:bodyPr/>
+          <a:lstStyle/>
+          <a:p>
+            <a:pPr>
+              <a:defRPr/>
+            </a:pPr>
+            <a:fld id="{CA887A73-1AE0-46F8-856A-18EA1CF30A1B}" type="slidenum">
+              <a:rPr lang="en-US" altLang="en-US" smtClean="0"/>
+              <a:pPr>
+                <a:defRPr/>
+              </a:pPr>
+              <a:t>12</a:t>
+            </a:fld>
+            <a:endParaRPr lang="en-US" altLang="en-US"/>
+          </a:p>
+        </p:txBody>
+      </p:sp>
+      <p:sp>
+        <p:nvSpPr>
+          <p:cNvPr id="7" name="Date Placeholder 3">
+            <a:extLst>
+              <a:ext uri="{FF2B5EF4-FFF2-40B4-BE49-F238E27FC236}">
+                <a16:creationId xmlns:a16="http://schemas.microsoft.com/office/drawing/2014/main" id="{CB4B1EFB-D648-A8D7-2000-C37DBBC849B5}"/>
+              </a:ext>
+            </a:extLst>
+          </p:cNvPr>
+          <p:cNvSpPr>
+            <a:spLocks noGrp="1"/>
+          </p:cNvSpPr>
+          <p:nvPr>
+            <p:ph type="dt" sz="half" idx="10"/>
+          </p:nvPr>
+        </p:nvSpPr>
+        <p:spPr>
+          <a:xfrm>
+            <a:off x="0" y="6599238"/>
+            <a:ext cx="1828800" cy="258762"/>
+          </a:xfrm>
+        </p:spPr>
+        <p:txBody>
+          <a:bodyPr/>
+          <a:lstStyle/>
+          <a:p>
+            <a:fld id="{B4B13859-67C5-4393-B6C2-556CF3F770C0}" type="datetime3">
+              <a:rPr lang="en-US" smtClean="0"/>
+              <a:t>20 February 2026</a:t>
+            </a:fld>
+            <a:endParaRPr lang="en-US" dirty="0"/>
+          </a:p>
+        </p:txBody>
+      </p:sp>
+      <p:pic>
+        <p:nvPicPr>
+          <p:cNvPr id="8" name="Picture 7">
+            <a:extLst>
+              <a:ext uri="{FF2B5EF4-FFF2-40B4-BE49-F238E27FC236}">
+                <a16:creationId xmlns:a16="http://schemas.microsoft.com/office/drawing/2014/main" id="{FE370119-C2F6-7450-F869-F743CD60A607}"/>
+              </a:ext>
+            </a:extLst>
+          </p:cNvPr>
+          <p:cNvPicPr>
+            <a:picLocks noChangeAspect="1"/>
+          </p:cNvPicPr>
+          <p:nvPr/>
+        </p:nvPicPr>
+        <p:blipFill>
+          <a:blip r:embed="rId2">
+            <a:extLst>
+              <a:ext uri="{28A0092B-C50C-407E-A947-70E740481C1C}">
+                <a14:useLocalDpi xmlns:a14="http://schemas.microsoft.com/office/drawing/2010/main" val="0"/>
+              </a:ext>
+            </a:extLst>
+          </a:blip>
+          <a:srcRect/>
+          <a:stretch/>
+        </p:blipFill>
+        <p:spPr>
+          <a:xfrm>
+            <a:off x="2041114" y="2514600"/>
+            <a:ext cx="6912386" cy="3855691"/>
+          </a:xfrm>
+          <a:prstGeom prst="rect">
+            <a:avLst/>
+          </a:prstGeom>
+        </p:spPr>
+      </p:pic>
+    </p:spTree>
+    <p:extLst>
+      <p:ext uri="{BB962C8B-B14F-4D97-AF65-F5344CB8AC3E}">
+        <p14:creationId xmlns:p14="http://schemas.microsoft.com/office/powerpoint/2010/main" val="3140419212"/>
+      </p:ext>
+    </p:extLst>
+  </p:cSld>
+  <p:clrMapOvr>
+    <a:masterClrMapping/>
+  </p:clrMapOvr>
+  <p:timing>
+    <p:tnLst>
+      <p:par>
+        <p:cTn id="1" dur="indefinite" restart="never" nodeType="tmRoot">
+          <p:childTnLst>
+            <p:seq concurrent="1" nextAc="seek">
+              <p:cTn id="2" dur="indefinite" nodeType="mainSeq">
+                <p:childTnLst>
+                  <p:par>
+                    <p:cTn id="3" fill="hold">
+                      <p:stCondLst>
+                        <p:cond delay="indefinite"/>
+                      </p:stCondLst>
+                      <p:childTnLst>
+                        <p:par>
+                          <p:cTn id="4" fill="hold">
+                            <p:stCondLst>
+                              <p:cond delay="0"/>
+                            </p:stCondLst>
+                            <p:childTnLst>
+                              <p:par>
+                                <p:cTn id="5" presetID="1" presetClass="entr" presetSubtype="0" fill="hold" grpId="0" nodeType="clickEffect">
+                                  <p:stCondLst>
+                                    <p:cond delay="0"/>
+                                  </p:stCondLst>
+                                  <p:childTnLst>
+                                    <p:set>
+                                      <p:cBhvr>
+                                        <p:cTn id="6" dur="1" fill="hold">
+                                          <p:stCondLst>
+                                            <p:cond delay="0"/>
+                                          </p:stCondLst>
+                                        </p:cTn>
+                                        <p:tgtEl>
+                                          <p:spTgt spid="3">
+                                            <p:txEl>
+                                              <p:pRg st="0" end="0"/>
+                                            </p:txEl>
+                                          </p:spTgt>
+                                        </p:tgtEl>
+                                        <p:attrNameLst>
+                                          <p:attrName>style.visibility</p:attrName>
+                                        </p:attrNameLst>
+                                      </p:cBhvr>
+                                      <p:to>
+                                        <p:strVal val="visible"/>
+                                      </p:to>
+                                    </p:set>
+                                  </p:childTnLst>
+                                </p:cTn>
+                              </p:par>
+                            </p:childTnLst>
+                          </p:cTn>
+                        </p:par>
+                      </p:childTnLst>
+                    </p:cTn>
+                  </p:par>
+                  <p:par>
+                    <p:cTn id="7" fill="hold">
+                      <p:stCondLst>
+                        <p:cond delay="indefinite"/>
+                      </p:stCondLst>
+                      <p:childTnLst>
+                        <p:par>
+                          <p:cTn id="8" fill="hold">
+                            <p:stCondLst>
+                              <p:cond delay="0"/>
+                            </p:stCondLst>
+                            <p:childTnLst>
+                              <p:par>
+                                <p:cTn id="9" presetID="1" presetClass="entr" presetSubtype="0" fill="hold" grpId="0" nodeType="clickEffect">
+                                  <p:stCondLst>
+                                    <p:cond delay="0"/>
+                                  </p:stCondLst>
+                                  <p:childTnLst>
+                                    <p:set>
+                                      <p:cBhvr>
+                                        <p:cTn id="10" dur="1" fill="hold">
+                                          <p:stCondLst>
+                                            <p:cond delay="0"/>
+                                          </p:stCondLst>
+                                        </p:cTn>
+                                        <p:tgtEl>
+                                          <p:spTgt spid="3">
+                                            <p:txEl>
+                                              <p:pRg st="4" end="4"/>
+                                            </p:txEl>
+                                          </p:spTgt>
+                                        </p:tgtEl>
+                                        <p:attrNameLst>
+                                          <p:attrName>style.visibility</p:attrName>
+                                        </p:attrNameLst>
+                                      </p:cBhvr>
+                                      <p:to>
+                                        <p:strVal val="visible"/>
+                                      </p:to>
+                                    </p:set>
+                                  </p:childTnLst>
+                                </p:cTn>
+                              </p:par>
+                            </p:childTnLst>
+                          </p:cTn>
+                        </p:par>
+                      </p:childTnLst>
+                    </p:cTn>
+                  </p:par>
+                </p:childTnLst>
+              </p:cTn>
+              <p:prevCondLst>
+                <p:cond evt="onPrev" delay="0">
+                  <p:tgtEl>
+                    <p:sldTgt/>
+                  </p:tgtEl>
+                </p:cond>
+              </p:prevCondLst>
+              <p:nextCondLst>
+                <p:cond evt="onNext" delay="0">
+                  <p:tgtEl>
+                    <p:sldTgt/>
+                  </p:tgtEl>
+                </p:cond>
+              </p:nextCondLst>
+            </p:seq>
+          </p:childTnLst>
+        </p:cTn>
+      </p:par>
+    </p:tnLst>
+    <p:bldLst>
+      <p:bldP spid="3" grpId="0" build="p"/>
+    </p:bldLst>
+  </p:timing>
+</p:sld>
+</file>
+
+<file path=ppt/slides/slide13.xml><?xml version="1.0" encoding="utf-8"?>
+<p:sld xmlns:a="http://schemas.openxmlformats.org/drawingml/2006/main" xmlns:r="http://schemas.openxmlformats.org/officeDocument/2006/relationships" xmlns:p="http://schemas.openxmlformats.org/presentationml/2006/main">
+  <p:cSld>
+    <p:spTree>
+      <p:nvGrpSpPr>
+        <p:cNvPr id="1" name=""/>
+        <p:cNvGrpSpPr/>
+        <p:nvPr/>
+      </p:nvGrpSpPr>
+      <p:grpSpPr>
+        <a:xfrm>
+          <a:off x="0" y="0"/>
+          <a:ext cx="0" cy="0"/>
+          <a:chOff x="0" y="0"/>
+          <a:chExt cx="0" cy="0"/>
+        </a:xfrm>
+      </p:grpSpPr>
+      <p:sp>
+        <p:nvSpPr>
+          <p:cNvPr id="2" name="Title 1">
+            <a:extLst>
+              <a:ext uri="{FF2B5EF4-FFF2-40B4-BE49-F238E27FC236}">
                 <a16:creationId xmlns:a16="http://schemas.microsoft.com/office/drawing/2014/main" id="{BF421145-0DE4-3ECF-C2A1-855B26F8C15A}"/>
               </a:ext>
             </a:extLst>
@@ -6763,7 +7094,7 @@
           <a:p>
             <a:fld id="{B4B13859-67C5-4393-B6C2-556CF3F770C0}" type="datetime3">
               <a:rPr lang="en-US" smtClean="0"/>
-              <a:t>18 February 2026</a:t>
+              <a:t>20 February 2026</a:t>
             </a:fld>
             <a:endParaRPr lang="en-US"/>
           </a:p>
@@ -6821,7 +7152,7 @@
           <a:p>
             <a:fld id="{98AC3541-01C1-4CA5-B68F-FEE868C7D1AF}" type="slidenum">
               <a:rPr lang="en-US" smtClean="0"/>
-              <a:t>12</a:t>
+              <a:t>13</a:t>
             </a:fld>
             <a:endParaRPr lang="en-US"/>
           </a:p>
@@ -6986,7 +7317,7 @@
 </p:sld>
 </file>
 
-<file path=ppt/slides/slide13.xml><?xml version="1.0" encoding="utf-8"?>
+<file path=ppt/slides/slide14.xml><?xml version="1.0" encoding="utf-8"?>
 <p:sld xmlns:a="http://schemas.openxmlformats.org/drawingml/2006/main" xmlns:r="http://schemas.openxmlformats.org/officeDocument/2006/relationships" xmlns:p="http://schemas.openxmlformats.org/presentationml/2006/main">
   <p:cSld>
     <p:spTree>
@@ -7008,7 +7339,7 @@
           <p:cNvPr id="2" name="Title 1">
             <a:extLst>
               <a:ext uri="{FF2B5EF4-FFF2-40B4-BE49-F238E27FC236}">
-                <a16:creationId xmlns:a16="http://schemas.microsoft.com/office/drawing/2014/main" id="{5B26FD6F-ECAF-401C-643C-43B8994A7B51}"/>
+                <a16:creationId xmlns:a16="http://schemas.microsoft.com/office/drawing/2014/main" id="{74A33A02-FC6C-A0A8-0477-75D0D368DFEE}"/>
               </a:ext>
             </a:extLst>
           </p:cNvPr>
@@ -7024,7 +7355,10 @@
           <a:bodyPr/>
           <a:lstStyle/>
           <a:p>
-            <a:endParaRPr lang="en-IN"/>
+            <a:r>
+              <a:rPr lang="en-US" dirty="0"/>
+              <a:t>Pipelining hazards</a:t>
+            </a:r>
           </a:p>
         </p:txBody>
       </p:sp>
@@ -7033,7 +7367,7 @@
           <p:cNvPr id="3" name="Content Placeholder 2">
             <a:extLst>
               <a:ext uri="{FF2B5EF4-FFF2-40B4-BE49-F238E27FC236}">
-                <a16:creationId xmlns:a16="http://schemas.microsoft.com/office/drawing/2014/main" id="{404F3DFA-CB54-2537-5528-EB390C8C3AB4}"/>
+                <a16:creationId xmlns:a16="http://schemas.microsoft.com/office/drawing/2014/main" id="{17C42703-A6C6-4F6F-2F81-3E5915C82C60}"/>
               </a:ext>
             </a:extLst>
           </p:cNvPr>
@@ -7046,10 +7380,92 @@
         </p:nvSpPr>
         <p:spPr/>
         <p:txBody>
-          <a:bodyPr/>
+          <a:bodyPr>
+            <a:normAutofit/>
+          </a:bodyPr>
           <a:lstStyle/>
           <a:p>
-            <a:endParaRPr lang="en-IN"/>
+            <a:pPr marL="0" indent="0">
+              <a:buNone/>
+            </a:pPr>
+            <a:r>
+              <a:rPr lang="en-US" sz="2800" dirty="0"/>
+              <a:t>A hazard is a situation that prevents starting the next instruction in the next clock cycle</a:t>
+            </a:r>
+          </a:p>
+          <a:p>
+            <a:pPr>
+              <a:buAutoNum type="arabicParenR"/>
+            </a:pPr>
+            <a:r>
+              <a:rPr lang="en-US" sz="2800" dirty="0">
+                <a:solidFill>
+                  <a:srgbClr val="FFC000"/>
+                </a:solidFill>
+              </a:rPr>
+              <a:t>Structural hazard</a:t>
+            </a:r>
+          </a:p>
+          <a:p>
+            <a:pPr lvl="1"/>
+            <a:r>
+              <a:rPr lang="en-US" sz="2400" dirty="0"/>
+              <a:t>A required resource is busy</a:t>
+            </a:r>
+          </a:p>
+          <a:p>
+            <a:pPr lvl="1"/>
+            <a:r>
+              <a:rPr lang="en-US" sz="2400" dirty="0"/>
+              <a:t>(e.g. needed in multiple stages)</a:t>
+            </a:r>
+          </a:p>
+          <a:p>
+            <a:pPr>
+              <a:buAutoNum type="arabicParenR"/>
+            </a:pPr>
+            <a:r>
+              <a:rPr lang="en-US" sz="2800" dirty="0">
+                <a:solidFill>
+                  <a:srgbClr val="FFC000"/>
+                </a:solidFill>
+              </a:rPr>
+              <a:t>Data hazard</a:t>
+            </a:r>
+          </a:p>
+          <a:p>
+            <a:pPr lvl="1"/>
+            <a:r>
+              <a:rPr lang="en-US" sz="2400" dirty="0"/>
+              <a:t>Data dependency between instructions</a:t>
+            </a:r>
+          </a:p>
+          <a:p>
+            <a:pPr lvl="1"/>
+            <a:r>
+              <a:rPr lang="en-US" sz="2400" dirty="0"/>
+              <a:t>Need to wait for previous instruction to complete its data write</a:t>
+            </a:r>
+          </a:p>
+          <a:p>
+            <a:pPr>
+              <a:buAutoNum type="arabicParenR"/>
+            </a:pPr>
+            <a:r>
+              <a:rPr lang="en-US" sz="2800" dirty="0">
+                <a:solidFill>
+                  <a:srgbClr val="FFC000"/>
+                </a:solidFill>
+              </a:rPr>
+              <a:t>Control hazard</a:t>
+            </a:r>
+          </a:p>
+          <a:p>
+            <a:pPr lvl="1"/>
+            <a:r>
+              <a:rPr lang="en-US" sz="2400" dirty="0"/>
+              <a:t>Flow of execution depends on previous instruction</a:t>
+            </a:r>
           </a:p>
         </p:txBody>
       </p:sp>
@@ -7058,7 +7474,7 @@
           <p:cNvPr id="4" name="Date Placeholder 3">
             <a:extLst>
               <a:ext uri="{FF2B5EF4-FFF2-40B4-BE49-F238E27FC236}">
-                <a16:creationId xmlns:a16="http://schemas.microsoft.com/office/drawing/2014/main" id="{844BCEC3-E2B4-4BEB-6A27-F76A111A4677}"/>
+                <a16:creationId xmlns:a16="http://schemas.microsoft.com/office/drawing/2014/main" id="{3E2BB736-11D8-F6CC-49C1-4C66FA6EDEAA}"/>
               </a:ext>
             </a:extLst>
           </p:cNvPr>
@@ -7074,22 +7490,49 @@
           <a:bodyPr/>
           <a:lstStyle/>
           <a:p>
-            <a:pPr>
-              <a:defRPr/>
-            </a:pPr>
-            <a:r>
-              <a:rPr lang="en-US"/>
-              <a:t>21/12/2020</a:t>
-            </a:r>
+            <a:fld id="{B4B13859-67C5-4393-B6C2-556CF3F770C0}" type="datetime3">
+              <a:rPr lang="en-US" smtClean="0"/>
+              <a:t>20 February 2026</a:t>
+            </a:fld>
+            <a:endParaRPr lang="en-US"/>
           </a:p>
         </p:txBody>
       </p:sp>
       <p:sp>
         <p:nvSpPr>
-          <p:cNvPr id="5" name="Slide Number Placeholder 4">
+          <p:cNvPr id="5" name="Footer Placeholder 4">
             <a:extLst>
               <a:ext uri="{FF2B5EF4-FFF2-40B4-BE49-F238E27FC236}">
-                <a16:creationId xmlns:a16="http://schemas.microsoft.com/office/drawing/2014/main" id="{36E04273-C593-F6A6-A6B1-5D459C6E137A}"/>
+                <a16:creationId xmlns:a16="http://schemas.microsoft.com/office/drawing/2014/main" id="{61D822FE-DDD3-4641-39F1-147E0BAC9EFC}"/>
+              </a:ext>
+            </a:extLst>
+          </p:cNvPr>
+          <p:cNvSpPr>
+            <a:spLocks noGrp="1"/>
+          </p:cNvSpPr>
+          <p:nvPr>
+            <p:ph type="ftr" sz="quarter" idx="11"/>
+          </p:nvPr>
+        </p:nvSpPr>
+        <p:spPr/>
+        <p:txBody>
+          <a:bodyPr/>
+          <a:lstStyle/>
+          <a:p>
+            <a:r>
+              <a:rPr lang="en-US"/>
+              <a:t>ELL305: Computer Architecture</a:t>
+            </a:r>
+            <a:endParaRPr lang="en-US" dirty="0"/>
+          </a:p>
+        </p:txBody>
+      </p:sp>
+      <p:sp>
+        <p:nvSpPr>
+          <p:cNvPr id="6" name="Slide Number Placeholder 5">
+            <a:extLst>
+              <a:ext uri="{FF2B5EF4-FFF2-40B4-BE49-F238E27FC236}">
+                <a16:creationId xmlns:a16="http://schemas.microsoft.com/office/drawing/2014/main" id="{14089318-C15E-6999-C6EB-C88BB3B6DCAB}"/>
               </a:ext>
             </a:extLst>
           </p:cNvPr>
@@ -7105,30 +7548,903 @@
           <a:bodyPr/>
           <a:lstStyle/>
           <a:p>
-            <a:pPr>
-              <a:defRPr/>
-            </a:pPr>
-            <a:fld id="{CA887A73-1AE0-46F8-856A-18EA1CF30A1B}" type="slidenum">
-              <a:rPr lang="en-US" altLang="en-US" smtClean="0"/>
-              <a:pPr>
-                <a:defRPr/>
-              </a:pPr>
-              <a:t>13</a:t>
+            <a:fld id="{98AC3541-01C1-4CA5-B68F-FEE868C7D1AF}" type="slidenum">
+              <a:rPr lang="en-US" smtClean="0"/>
+              <a:t>14</a:t>
             </a:fld>
-            <a:endParaRPr lang="en-US" altLang="en-US"/>
+            <a:endParaRPr lang="en-US"/>
           </a:p>
         </p:txBody>
       </p:sp>
     </p:spTree>
     <p:extLst>
       <p:ext uri="{BB962C8B-B14F-4D97-AF65-F5344CB8AC3E}">
-        <p14:creationId xmlns:p14="http://schemas.microsoft.com/office/powerpoint/2010/main" val="3986721700"/>
+        <p14:creationId xmlns:p14="http://schemas.microsoft.com/office/powerpoint/2010/main" val="58237651"/>
       </p:ext>
     </p:extLst>
   </p:cSld>
   <p:clrMapOvr>
     <a:masterClrMapping/>
   </p:clrMapOvr>
+</p:sld>
+</file>
+
+<file path=ppt/slides/slide15.xml><?xml version="1.0" encoding="utf-8"?>
+<p:sld xmlns:a="http://schemas.openxmlformats.org/drawingml/2006/main" xmlns:r="http://schemas.openxmlformats.org/officeDocument/2006/relationships" xmlns:p="http://schemas.openxmlformats.org/presentationml/2006/main">
+  <p:cSld>
+    <p:spTree>
+      <p:nvGrpSpPr>
+        <p:cNvPr id="1" name=""/>
+        <p:cNvGrpSpPr/>
+        <p:nvPr/>
+      </p:nvGrpSpPr>
+      <p:grpSpPr>
+        <a:xfrm>
+          <a:off x="0" y="0"/>
+          <a:ext cx="0" cy="0"/>
+          <a:chOff x="0" y="0"/>
+          <a:chExt cx="0" cy="0"/>
+        </a:xfrm>
+      </p:grpSpPr>
+      <p:sp>
+        <p:nvSpPr>
+          <p:cNvPr id="2" name="Title 1">
+            <a:extLst>
+              <a:ext uri="{FF2B5EF4-FFF2-40B4-BE49-F238E27FC236}">
+                <a16:creationId xmlns:a16="http://schemas.microsoft.com/office/drawing/2014/main" id="{9AB463D6-A5E6-065A-4267-2CDD84FEEF97}"/>
+              </a:ext>
+            </a:extLst>
+          </p:cNvPr>
+          <p:cNvSpPr>
+            <a:spLocks noGrp="1"/>
+          </p:cNvSpPr>
+          <p:nvPr>
+            <p:ph type="title"/>
+          </p:nvPr>
+        </p:nvSpPr>
+        <p:spPr/>
+        <p:txBody>
+          <a:bodyPr/>
+          <a:lstStyle/>
+          <a:p>
+            <a:r>
+              <a:rPr lang="en-US" dirty="0"/>
+              <a:t>Structural hazard</a:t>
+            </a:r>
+          </a:p>
+        </p:txBody>
+      </p:sp>
+      <p:sp>
+        <p:nvSpPr>
+          <p:cNvPr id="3" name="Content Placeholder 2">
+            <a:extLst>
+              <a:ext uri="{FF2B5EF4-FFF2-40B4-BE49-F238E27FC236}">
+                <a16:creationId xmlns:a16="http://schemas.microsoft.com/office/drawing/2014/main" id="{D7E8500F-3712-B7D2-E245-863E105847E6}"/>
+              </a:ext>
+            </a:extLst>
+          </p:cNvPr>
+          <p:cNvSpPr>
+            <a:spLocks noGrp="1"/>
+          </p:cNvSpPr>
+          <p:nvPr>
+            <p:ph idx="1"/>
+          </p:nvPr>
+        </p:nvSpPr>
+        <p:spPr>
+          <a:xfrm>
+            <a:off x="94576" y="1609808"/>
+            <a:ext cx="2871510" cy="4790991"/>
+          </a:xfrm>
+        </p:spPr>
+        <p:txBody>
+          <a:bodyPr>
+            <a:normAutofit fontScale="55000" lnSpcReduction="20000"/>
+          </a:bodyPr>
+          <a:lstStyle/>
+          <a:p>
+            <a:r>
+              <a:rPr lang="en-US" dirty="0"/>
+              <a:t>Problem: Two or more instructions in the pipeline compete for access to a single physical resource</a:t>
+            </a:r>
+          </a:p>
+          <a:p>
+            <a:endParaRPr lang="en-US" dirty="0"/>
+          </a:p>
+          <a:p>
+            <a:r>
+              <a:rPr lang="en-US" dirty="0"/>
+              <a:t>Solution 1: Instructions take turns using resource, some instructions have to stall (wait)</a:t>
+            </a:r>
+          </a:p>
+          <a:p>
+            <a:endParaRPr lang="en-US" dirty="0"/>
+          </a:p>
+          <a:p>
+            <a:r>
+              <a:rPr lang="en-US" dirty="0"/>
+              <a:t>Solution 2: Add more hardware to machine</a:t>
+            </a:r>
+          </a:p>
+          <a:p>
+            <a:endParaRPr lang="en-US" dirty="0"/>
+          </a:p>
+          <a:p>
+            <a:r>
+              <a:rPr lang="en-US" dirty="0"/>
+              <a:t>Can always solve a structural hazard by adding more hardware</a:t>
+            </a:r>
+          </a:p>
+        </p:txBody>
+      </p:sp>
+      <p:sp>
+        <p:nvSpPr>
+          <p:cNvPr id="4" name="Date Placeholder 3">
+            <a:extLst>
+              <a:ext uri="{FF2B5EF4-FFF2-40B4-BE49-F238E27FC236}">
+                <a16:creationId xmlns:a16="http://schemas.microsoft.com/office/drawing/2014/main" id="{A8226339-BD98-F827-0D43-63EE4124860F}"/>
+              </a:ext>
+            </a:extLst>
+          </p:cNvPr>
+          <p:cNvSpPr>
+            <a:spLocks noGrp="1"/>
+          </p:cNvSpPr>
+          <p:nvPr>
+            <p:ph type="dt" sz="half" idx="10"/>
+          </p:nvPr>
+        </p:nvSpPr>
+        <p:spPr/>
+        <p:txBody>
+          <a:bodyPr/>
+          <a:lstStyle/>
+          <a:p>
+            <a:fld id="{B4B13859-67C5-4393-B6C2-556CF3F770C0}" type="datetime3">
+              <a:rPr lang="en-US" smtClean="0"/>
+              <a:t>20 February 2026</a:t>
+            </a:fld>
+            <a:endParaRPr lang="en-US"/>
+          </a:p>
+        </p:txBody>
+      </p:sp>
+      <p:sp>
+        <p:nvSpPr>
+          <p:cNvPr id="5" name="Footer Placeholder 4">
+            <a:extLst>
+              <a:ext uri="{FF2B5EF4-FFF2-40B4-BE49-F238E27FC236}">
+                <a16:creationId xmlns:a16="http://schemas.microsoft.com/office/drawing/2014/main" id="{29D49AD5-BD30-F00E-BBA7-646FB48132C9}"/>
+              </a:ext>
+            </a:extLst>
+          </p:cNvPr>
+          <p:cNvSpPr>
+            <a:spLocks noGrp="1"/>
+          </p:cNvSpPr>
+          <p:nvPr>
+            <p:ph type="ftr" sz="quarter" idx="11"/>
+          </p:nvPr>
+        </p:nvSpPr>
+        <p:spPr/>
+        <p:txBody>
+          <a:bodyPr/>
+          <a:lstStyle/>
+          <a:p>
+            <a:r>
+              <a:rPr lang="en-US" dirty="0"/>
+              <a:t>ELL305: Computer Architecture</a:t>
+            </a:r>
+          </a:p>
+        </p:txBody>
+      </p:sp>
+      <p:sp>
+        <p:nvSpPr>
+          <p:cNvPr id="6" name="Slide Number Placeholder 5">
+            <a:extLst>
+              <a:ext uri="{FF2B5EF4-FFF2-40B4-BE49-F238E27FC236}">
+                <a16:creationId xmlns:a16="http://schemas.microsoft.com/office/drawing/2014/main" id="{C9362514-3A4E-C29C-920F-0586AEAFEB46}"/>
+              </a:ext>
+            </a:extLst>
+          </p:cNvPr>
+          <p:cNvSpPr>
+            <a:spLocks noGrp="1"/>
+          </p:cNvSpPr>
+          <p:nvPr>
+            <p:ph type="sldNum" sz="quarter" idx="12"/>
+          </p:nvPr>
+        </p:nvSpPr>
+        <p:spPr/>
+        <p:txBody>
+          <a:bodyPr/>
+          <a:lstStyle/>
+          <a:p>
+            <a:fld id="{98AC3541-01C1-4CA5-B68F-FEE868C7D1AF}" type="slidenum">
+              <a:rPr lang="en-US" smtClean="0"/>
+              <a:t>15</a:t>
+            </a:fld>
+            <a:endParaRPr lang="en-US"/>
+          </a:p>
+        </p:txBody>
+      </p:sp>
+      <p:pic>
+        <p:nvPicPr>
+          <p:cNvPr id="8" name="Picture 7">
+            <a:extLst>
+              <a:ext uri="{FF2B5EF4-FFF2-40B4-BE49-F238E27FC236}">
+                <a16:creationId xmlns:a16="http://schemas.microsoft.com/office/drawing/2014/main" id="{47A61C9C-E614-9CBC-2BAE-4C280B3974CF}"/>
+              </a:ext>
+            </a:extLst>
+          </p:cNvPr>
+          <p:cNvPicPr>
+            <a:picLocks noChangeAspect="1"/>
+          </p:cNvPicPr>
+          <p:nvPr/>
+        </p:nvPicPr>
+        <p:blipFill>
+          <a:blip r:embed="rId2"/>
+          <a:stretch>
+            <a:fillRect/>
+          </a:stretch>
+        </p:blipFill>
+        <p:spPr>
+          <a:xfrm>
+            <a:off x="3124200" y="1609808"/>
+            <a:ext cx="3372050" cy="2049902"/>
+          </a:xfrm>
+          <a:prstGeom prst="rect">
+            <a:avLst/>
+          </a:prstGeom>
+        </p:spPr>
+      </p:pic>
+      <p:sp>
+        <p:nvSpPr>
+          <p:cNvPr id="10" name="TextBox 9">
+            <a:extLst>
+              <a:ext uri="{FF2B5EF4-FFF2-40B4-BE49-F238E27FC236}">
+                <a16:creationId xmlns:a16="http://schemas.microsoft.com/office/drawing/2014/main" id="{3E5432F2-62F4-A922-1842-036EEC8C7022}"/>
+              </a:ext>
+            </a:extLst>
+          </p:cNvPr>
+          <p:cNvSpPr txBox="1"/>
+          <p:nvPr/>
+        </p:nvSpPr>
+        <p:spPr>
+          <a:xfrm>
+            <a:off x="6806564" y="1896070"/>
+            <a:ext cx="2337437" cy="923330"/>
+          </a:xfrm>
+          <a:prstGeom prst="rect">
+            <a:avLst/>
+          </a:prstGeom>
+          <a:noFill/>
+        </p:spPr>
+        <p:txBody>
+          <a:bodyPr wrap="square">
+            <a:spAutoFit/>
+          </a:bodyPr>
+          <a:lstStyle/>
+          <a:p>
+            <a:r>
+              <a:rPr lang="en-US" dirty="0"/>
+              <a:t>Multiple ports to the </a:t>
+            </a:r>
+            <a:r>
+              <a:rPr lang="en-US" dirty="0" err="1"/>
+              <a:t>regfile</a:t>
+            </a:r>
+            <a:r>
+              <a:rPr lang="en-US" dirty="0"/>
+              <a:t> solves the access problem</a:t>
+            </a:r>
+          </a:p>
+        </p:txBody>
+      </p:sp>
+      <p:pic>
+        <p:nvPicPr>
+          <p:cNvPr id="12" name="Picture 11">
+            <a:extLst>
+              <a:ext uri="{FF2B5EF4-FFF2-40B4-BE49-F238E27FC236}">
+                <a16:creationId xmlns:a16="http://schemas.microsoft.com/office/drawing/2014/main" id="{14E6A154-D5ED-5FA4-B172-5BA2F5506BC8}"/>
+              </a:ext>
+            </a:extLst>
+          </p:cNvPr>
+          <p:cNvPicPr>
+            <a:picLocks noChangeAspect="1"/>
+          </p:cNvPicPr>
+          <p:nvPr/>
+        </p:nvPicPr>
+        <p:blipFill>
+          <a:blip r:embed="rId3"/>
+          <a:stretch>
+            <a:fillRect/>
+          </a:stretch>
+        </p:blipFill>
+        <p:spPr>
+          <a:xfrm>
+            <a:off x="2971800" y="4179097"/>
+            <a:ext cx="3372050" cy="2069303"/>
+          </a:xfrm>
+          <a:prstGeom prst="rect">
+            <a:avLst/>
+          </a:prstGeom>
+        </p:spPr>
+      </p:pic>
+      <p:sp>
+        <p:nvSpPr>
+          <p:cNvPr id="13" name="TextBox 12">
+            <a:extLst>
+              <a:ext uri="{FF2B5EF4-FFF2-40B4-BE49-F238E27FC236}">
+                <a16:creationId xmlns:a16="http://schemas.microsoft.com/office/drawing/2014/main" id="{9CAB4324-3CC0-035C-CB24-6DED2649E3F7}"/>
+              </a:ext>
+            </a:extLst>
+          </p:cNvPr>
+          <p:cNvSpPr txBox="1"/>
+          <p:nvPr/>
+        </p:nvSpPr>
+        <p:spPr>
+          <a:xfrm>
+            <a:off x="6806565" y="3060680"/>
+            <a:ext cx="2337436" cy="3416320"/>
+          </a:xfrm>
+          <a:prstGeom prst="rect">
+            <a:avLst/>
+          </a:prstGeom>
+          <a:noFill/>
+        </p:spPr>
+        <p:txBody>
+          <a:bodyPr wrap="square">
+            <a:spAutoFit/>
+          </a:bodyPr>
+          <a:lstStyle/>
+          <a:p>
+            <a:r>
+              <a:rPr lang="en-US" dirty="0"/>
+              <a:t>Is this a problem for Harvard or von Neuman architecture (or both)?</a:t>
+            </a:r>
+          </a:p>
+          <a:p>
+            <a:endParaRPr lang="en-US" dirty="0"/>
+          </a:p>
+          <a:p>
+            <a:r>
+              <a:rPr lang="en-US" dirty="0" err="1"/>
+              <a:t>Soln</a:t>
+            </a:r>
+            <a:r>
+              <a:rPr lang="en-US" dirty="0"/>
+              <a:t>: Separate data and instruction caches</a:t>
+            </a:r>
+          </a:p>
+          <a:p>
+            <a:endParaRPr lang="en-US" dirty="0"/>
+          </a:p>
+          <a:p>
+            <a:r>
+              <a:rPr lang="en-US" dirty="0"/>
+              <a:t>ISA designed to avoid multiple accesses</a:t>
+            </a:r>
+          </a:p>
+        </p:txBody>
+      </p:sp>
+    </p:spTree>
+    <p:extLst>
+      <p:ext uri="{BB962C8B-B14F-4D97-AF65-F5344CB8AC3E}">
+        <p14:creationId xmlns:p14="http://schemas.microsoft.com/office/powerpoint/2010/main" val="4013881563"/>
+      </p:ext>
+    </p:extLst>
+  </p:cSld>
+  <p:clrMapOvr>
+    <a:masterClrMapping/>
+  </p:clrMapOvr>
+  <p:timing>
+    <p:tnLst>
+      <p:par>
+        <p:cTn id="1" dur="indefinite" restart="never" nodeType="tmRoot">
+          <p:childTnLst>
+            <p:seq concurrent="1" nextAc="seek">
+              <p:cTn id="2" dur="indefinite" nodeType="mainSeq">
+                <p:childTnLst>
+                  <p:par>
+                    <p:cTn id="3" fill="hold">
+                      <p:stCondLst>
+                        <p:cond delay="indefinite"/>
+                      </p:stCondLst>
+                      <p:childTnLst>
+                        <p:par>
+                          <p:cTn id="4" fill="hold">
+                            <p:stCondLst>
+                              <p:cond delay="0"/>
+                            </p:stCondLst>
+                            <p:childTnLst>
+                              <p:par>
+                                <p:cTn id="5" presetID="1" presetClass="entr" presetSubtype="0" fill="hold" grpId="0" nodeType="clickEffect">
+                                  <p:stCondLst>
+                                    <p:cond delay="0"/>
+                                  </p:stCondLst>
+                                  <p:childTnLst>
+                                    <p:set>
+                                      <p:cBhvr>
+                                        <p:cTn id="6" dur="1" fill="hold">
+                                          <p:stCondLst>
+                                            <p:cond delay="0"/>
+                                          </p:stCondLst>
+                                        </p:cTn>
+                                        <p:tgtEl>
+                                          <p:spTgt spid="3">
+                                            <p:txEl>
+                                              <p:pRg st="0" end="0"/>
+                                            </p:txEl>
+                                          </p:spTgt>
+                                        </p:tgtEl>
+                                        <p:attrNameLst>
+                                          <p:attrName>style.visibility</p:attrName>
+                                        </p:attrNameLst>
+                                      </p:cBhvr>
+                                      <p:to>
+                                        <p:strVal val="visible"/>
+                                      </p:to>
+                                    </p:set>
+                                  </p:childTnLst>
+                                </p:cTn>
+                              </p:par>
+                            </p:childTnLst>
+                          </p:cTn>
+                        </p:par>
+                      </p:childTnLst>
+                    </p:cTn>
+                  </p:par>
+                  <p:par>
+                    <p:cTn id="7" fill="hold">
+                      <p:stCondLst>
+                        <p:cond delay="indefinite"/>
+                      </p:stCondLst>
+                      <p:childTnLst>
+                        <p:par>
+                          <p:cTn id="8" fill="hold">
+                            <p:stCondLst>
+                              <p:cond delay="0"/>
+                            </p:stCondLst>
+                            <p:childTnLst>
+                              <p:par>
+                                <p:cTn id="9" presetID="1" presetClass="entr" presetSubtype="0" fill="hold" nodeType="clickEffect">
+                                  <p:stCondLst>
+                                    <p:cond delay="0"/>
+                                  </p:stCondLst>
+                                  <p:childTnLst>
+                                    <p:set>
+                                      <p:cBhvr>
+                                        <p:cTn id="10" dur="1" fill="hold">
+                                          <p:stCondLst>
+                                            <p:cond delay="0"/>
+                                          </p:stCondLst>
+                                        </p:cTn>
+                                        <p:tgtEl>
+                                          <p:spTgt spid="8"/>
+                                        </p:tgtEl>
+                                        <p:attrNameLst>
+                                          <p:attrName>style.visibility</p:attrName>
+                                        </p:attrNameLst>
+                                      </p:cBhvr>
+                                      <p:to>
+                                        <p:strVal val="visible"/>
+                                      </p:to>
+                                    </p:set>
+                                  </p:childTnLst>
+                                </p:cTn>
+                              </p:par>
+                            </p:childTnLst>
+                          </p:cTn>
+                        </p:par>
+                      </p:childTnLst>
+                    </p:cTn>
+                  </p:par>
+                  <p:par>
+                    <p:cTn id="11" fill="hold">
+                      <p:stCondLst>
+                        <p:cond delay="indefinite"/>
+                      </p:stCondLst>
+                      <p:childTnLst>
+                        <p:par>
+                          <p:cTn id="12" fill="hold">
+                            <p:stCondLst>
+                              <p:cond delay="0"/>
+                            </p:stCondLst>
+                            <p:childTnLst>
+                              <p:par>
+                                <p:cTn id="13" presetID="1" presetClass="entr" presetSubtype="0" fill="hold" grpId="0" nodeType="clickEffect">
+                                  <p:stCondLst>
+                                    <p:cond delay="0"/>
+                                  </p:stCondLst>
+                                  <p:childTnLst>
+                                    <p:set>
+                                      <p:cBhvr>
+                                        <p:cTn id="14" dur="1" fill="hold">
+                                          <p:stCondLst>
+                                            <p:cond delay="0"/>
+                                          </p:stCondLst>
+                                        </p:cTn>
+                                        <p:tgtEl>
+                                          <p:spTgt spid="10"/>
+                                        </p:tgtEl>
+                                        <p:attrNameLst>
+                                          <p:attrName>style.visibility</p:attrName>
+                                        </p:attrNameLst>
+                                      </p:cBhvr>
+                                      <p:to>
+                                        <p:strVal val="visible"/>
+                                      </p:to>
+                                    </p:set>
+                                  </p:childTnLst>
+                                </p:cTn>
+                              </p:par>
+                            </p:childTnLst>
+                          </p:cTn>
+                        </p:par>
+                      </p:childTnLst>
+                    </p:cTn>
+                  </p:par>
+                  <p:par>
+                    <p:cTn id="15" fill="hold">
+                      <p:stCondLst>
+                        <p:cond delay="indefinite"/>
+                      </p:stCondLst>
+                      <p:childTnLst>
+                        <p:par>
+                          <p:cTn id="16" fill="hold">
+                            <p:stCondLst>
+                              <p:cond delay="0"/>
+                            </p:stCondLst>
+                            <p:childTnLst>
+                              <p:par>
+                                <p:cTn id="17" presetID="1" presetClass="entr" presetSubtype="0" fill="hold" nodeType="clickEffect">
+                                  <p:stCondLst>
+                                    <p:cond delay="0"/>
+                                  </p:stCondLst>
+                                  <p:childTnLst>
+                                    <p:set>
+                                      <p:cBhvr>
+                                        <p:cTn id="18" dur="1" fill="hold">
+                                          <p:stCondLst>
+                                            <p:cond delay="0"/>
+                                          </p:stCondLst>
+                                        </p:cTn>
+                                        <p:tgtEl>
+                                          <p:spTgt spid="12"/>
+                                        </p:tgtEl>
+                                        <p:attrNameLst>
+                                          <p:attrName>style.visibility</p:attrName>
+                                        </p:attrNameLst>
+                                      </p:cBhvr>
+                                      <p:to>
+                                        <p:strVal val="visible"/>
+                                      </p:to>
+                                    </p:set>
+                                  </p:childTnLst>
+                                </p:cTn>
+                              </p:par>
+                            </p:childTnLst>
+                          </p:cTn>
+                        </p:par>
+                      </p:childTnLst>
+                    </p:cTn>
+                  </p:par>
+                  <p:par>
+                    <p:cTn id="19" fill="hold">
+                      <p:stCondLst>
+                        <p:cond delay="indefinite"/>
+                      </p:stCondLst>
+                      <p:childTnLst>
+                        <p:par>
+                          <p:cTn id="20" fill="hold">
+                            <p:stCondLst>
+                              <p:cond delay="0"/>
+                            </p:stCondLst>
+                            <p:childTnLst>
+                              <p:par>
+                                <p:cTn id="21" presetID="1" presetClass="entr" presetSubtype="0" fill="hold" grpId="0" nodeType="clickEffect">
+                                  <p:stCondLst>
+                                    <p:cond delay="0"/>
+                                  </p:stCondLst>
+                                  <p:childTnLst>
+                                    <p:set>
+                                      <p:cBhvr>
+                                        <p:cTn id="22" dur="1" fill="hold">
+                                          <p:stCondLst>
+                                            <p:cond delay="0"/>
+                                          </p:stCondLst>
+                                        </p:cTn>
+                                        <p:tgtEl>
+                                          <p:spTgt spid="13">
+                                            <p:txEl>
+                                              <p:pRg st="0" end="0"/>
+                                            </p:txEl>
+                                          </p:spTgt>
+                                        </p:tgtEl>
+                                        <p:attrNameLst>
+                                          <p:attrName>style.visibility</p:attrName>
+                                        </p:attrNameLst>
+                                      </p:cBhvr>
+                                      <p:to>
+                                        <p:strVal val="visible"/>
+                                      </p:to>
+                                    </p:set>
+                                  </p:childTnLst>
+                                </p:cTn>
+                              </p:par>
+                            </p:childTnLst>
+                          </p:cTn>
+                        </p:par>
+                      </p:childTnLst>
+                    </p:cTn>
+                  </p:par>
+                  <p:par>
+                    <p:cTn id="23" fill="hold">
+                      <p:stCondLst>
+                        <p:cond delay="indefinite"/>
+                      </p:stCondLst>
+                      <p:childTnLst>
+                        <p:par>
+                          <p:cTn id="24" fill="hold">
+                            <p:stCondLst>
+                              <p:cond delay="0"/>
+                            </p:stCondLst>
+                            <p:childTnLst>
+                              <p:par>
+                                <p:cTn id="25" presetID="1" presetClass="entr" presetSubtype="0" fill="hold" grpId="0" nodeType="clickEffect">
+                                  <p:stCondLst>
+                                    <p:cond delay="0"/>
+                                  </p:stCondLst>
+                                  <p:childTnLst>
+                                    <p:set>
+                                      <p:cBhvr>
+                                        <p:cTn id="26" dur="1" fill="hold">
+                                          <p:stCondLst>
+                                            <p:cond delay="0"/>
+                                          </p:stCondLst>
+                                        </p:cTn>
+                                        <p:tgtEl>
+                                          <p:spTgt spid="13">
+                                            <p:txEl>
+                                              <p:pRg st="2" end="2"/>
+                                            </p:txEl>
+                                          </p:spTgt>
+                                        </p:tgtEl>
+                                        <p:attrNameLst>
+                                          <p:attrName>style.visibility</p:attrName>
+                                        </p:attrNameLst>
+                                      </p:cBhvr>
+                                      <p:to>
+                                        <p:strVal val="visible"/>
+                                      </p:to>
+                                    </p:set>
+                                  </p:childTnLst>
+                                </p:cTn>
+                              </p:par>
+                            </p:childTnLst>
+                          </p:cTn>
+                        </p:par>
+                      </p:childTnLst>
+                    </p:cTn>
+                  </p:par>
+                  <p:par>
+                    <p:cTn id="27" fill="hold">
+                      <p:stCondLst>
+                        <p:cond delay="indefinite"/>
+                      </p:stCondLst>
+                      <p:childTnLst>
+                        <p:par>
+                          <p:cTn id="28" fill="hold">
+                            <p:stCondLst>
+                              <p:cond delay="0"/>
+                            </p:stCondLst>
+                            <p:childTnLst>
+                              <p:par>
+                                <p:cTn id="29" presetID="1" presetClass="entr" presetSubtype="0" fill="hold" grpId="0" nodeType="clickEffect">
+                                  <p:stCondLst>
+                                    <p:cond delay="0"/>
+                                  </p:stCondLst>
+                                  <p:childTnLst>
+                                    <p:set>
+                                      <p:cBhvr>
+                                        <p:cTn id="30" dur="1" fill="hold">
+                                          <p:stCondLst>
+                                            <p:cond delay="0"/>
+                                          </p:stCondLst>
+                                        </p:cTn>
+                                        <p:tgtEl>
+                                          <p:spTgt spid="13">
+                                            <p:txEl>
+                                              <p:pRg st="4" end="4"/>
+                                            </p:txEl>
+                                          </p:spTgt>
+                                        </p:tgtEl>
+                                        <p:attrNameLst>
+                                          <p:attrName>style.visibility</p:attrName>
+                                        </p:attrNameLst>
+                                      </p:cBhvr>
+                                      <p:to>
+                                        <p:strVal val="visible"/>
+                                      </p:to>
+                                    </p:set>
+                                  </p:childTnLst>
+                                </p:cTn>
+                              </p:par>
+                            </p:childTnLst>
+                          </p:cTn>
+                        </p:par>
+                      </p:childTnLst>
+                    </p:cTn>
+                  </p:par>
+                  <p:par>
+                    <p:cTn id="31" fill="hold">
+                      <p:stCondLst>
+                        <p:cond delay="indefinite"/>
+                      </p:stCondLst>
+                      <p:childTnLst>
+                        <p:par>
+                          <p:cTn id="32" fill="hold">
+                            <p:stCondLst>
+                              <p:cond delay="0"/>
+                            </p:stCondLst>
+                            <p:childTnLst>
+                              <p:par>
+                                <p:cTn id="33" presetID="1" presetClass="entr" presetSubtype="0" fill="hold" grpId="0" nodeType="clickEffect">
+                                  <p:stCondLst>
+                                    <p:cond delay="0"/>
+                                  </p:stCondLst>
+                                  <p:childTnLst>
+                                    <p:set>
+                                      <p:cBhvr>
+                                        <p:cTn id="34" dur="1" fill="hold">
+                                          <p:stCondLst>
+                                            <p:cond delay="0"/>
+                                          </p:stCondLst>
+                                        </p:cTn>
+                                        <p:tgtEl>
+                                          <p:spTgt spid="3">
+                                            <p:txEl>
+                                              <p:pRg st="2" end="2"/>
+                                            </p:txEl>
+                                          </p:spTgt>
+                                        </p:tgtEl>
+                                        <p:attrNameLst>
+                                          <p:attrName>style.visibility</p:attrName>
+                                        </p:attrNameLst>
+                                      </p:cBhvr>
+                                      <p:to>
+                                        <p:strVal val="visible"/>
+                                      </p:to>
+                                    </p:set>
+                                  </p:childTnLst>
+                                </p:cTn>
+                              </p:par>
+                            </p:childTnLst>
+                          </p:cTn>
+                        </p:par>
+                      </p:childTnLst>
+                    </p:cTn>
+                  </p:par>
+                  <p:par>
+                    <p:cTn id="35" fill="hold">
+                      <p:stCondLst>
+                        <p:cond delay="indefinite"/>
+                      </p:stCondLst>
+                      <p:childTnLst>
+                        <p:par>
+                          <p:cTn id="36" fill="hold">
+                            <p:stCondLst>
+                              <p:cond delay="0"/>
+                            </p:stCondLst>
+                            <p:childTnLst>
+                              <p:par>
+                                <p:cTn id="37" presetID="1" presetClass="entr" presetSubtype="0" fill="hold" grpId="0" nodeType="clickEffect">
+                                  <p:stCondLst>
+                                    <p:cond delay="0"/>
+                                  </p:stCondLst>
+                                  <p:childTnLst>
+                                    <p:set>
+                                      <p:cBhvr>
+                                        <p:cTn id="38" dur="1" fill="hold">
+                                          <p:stCondLst>
+                                            <p:cond delay="0"/>
+                                          </p:stCondLst>
+                                        </p:cTn>
+                                        <p:tgtEl>
+                                          <p:spTgt spid="3">
+                                            <p:txEl>
+                                              <p:pRg st="4" end="4"/>
+                                            </p:txEl>
+                                          </p:spTgt>
+                                        </p:tgtEl>
+                                        <p:attrNameLst>
+                                          <p:attrName>style.visibility</p:attrName>
+                                        </p:attrNameLst>
+                                      </p:cBhvr>
+                                      <p:to>
+                                        <p:strVal val="visible"/>
+                                      </p:to>
+                                    </p:set>
+                                  </p:childTnLst>
+                                </p:cTn>
+                              </p:par>
+                            </p:childTnLst>
+                          </p:cTn>
+                        </p:par>
+                      </p:childTnLst>
+                    </p:cTn>
+                  </p:par>
+                  <p:par>
+                    <p:cTn id="39" fill="hold">
+                      <p:stCondLst>
+                        <p:cond delay="indefinite"/>
+                      </p:stCondLst>
+                      <p:childTnLst>
+                        <p:par>
+                          <p:cTn id="40" fill="hold">
+                            <p:stCondLst>
+                              <p:cond delay="0"/>
+                            </p:stCondLst>
+                            <p:childTnLst>
+                              <p:par>
+                                <p:cTn id="41" presetID="1" presetClass="entr" presetSubtype="0" fill="hold" grpId="0" nodeType="clickEffect">
+                                  <p:stCondLst>
+                                    <p:cond delay="0"/>
+                                  </p:stCondLst>
+                                  <p:childTnLst>
+                                    <p:set>
+                                      <p:cBhvr>
+                                        <p:cTn id="42" dur="1" fill="hold">
+                                          <p:stCondLst>
+                                            <p:cond delay="0"/>
+                                          </p:stCondLst>
+                                        </p:cTn>
+                                        <p:tgtEl>
+                                          <p:spTgt spid="3">
+                                            <p:txEl>
+                                              <p:pRg st="6" end="6"/>
+                                            </p:txEl>
+                                          </p:spTgt>
+                                        </p:tgtEl>
+                                        <p:attrNameLst>
+                                          <p:attrName>style.visibility</p:attrName>
+                                        </p:attrNameLst>
+                                      </p:cBhvr>
+                                      <p:to>
+                                        <p:strVal val="visible"/>
+                                      </p:to>
+                                    </p:set>
+                                  </p:childTnLst>
+                                </p:cTn>
+                              </p:par>
+                            </p:childTnLst>
+                          </p:cTn>
+                        </p:par>
+                      </p:childTnLst>
+                    </p:cTn>
+                  </p:par>
+                </p:childTnLst>
+              </p:cTn>
+              <p:prevCondLst>
+                <p:cond evt="onPrev" delay="0">
+                  <p:tgtEl>
+                    <p:sldTgt/>
+                  </p:tgtEl>
+                </p:cond>
+              </p:prevCondLst>
+              <p:nextCondLst>
+                <p:cond evt="onNext" delay="0">
+                  <p:tgtEl>
+                    <p:sldTgt/>
+                  </p:tgtEl>
+                </p:cond>
+              </p:nextCondLst>
+            </p:seq>
+          </p:childTnLst>
+        </p:cTn>
+      </p:par>
+    </p:tnLst>
+    <p:bldLst>
+      <p:bldP spid="3" grpId="0" uiExpand="1" build="p"/>
+      <p:bldP spid="10" grpId="0"/>
+      <p:bldP spid="13" grpId="0" build="p"/>
+    </p:bldLst>
+  </p:timing>
 </p:sld>
 </file>
 
@@ -7179,37 +8495,6 @@
       </p:sp>
       <p:sp>
         <p:nvSpPr>
-          <p:cNvPr id="3" name="Date Placeholder 2">
-            <a:extLst>
-              <a:ext uri="{FF2B5EF4-FFF2-40B4-BE49-F238E27FC236}">
-                <a16:creationId xmlns:a16="http://schemas.microsoft.com/office/drawing/2014/main" id="{9F47329B-4072-4E06-B738-820471EB1086}"/>
-              </a:ext>
-            </a:extLst>
-          </p:cNvPr>
-          <p:cNvSpPr>
-            <a:spLocks noGrp="1"/>
-          </p:cNvSpPr>
-          <p:nvPr>
-            <p:ph type="dt" sz="half" idx="10"/>
-          </p:nvPr>
-        </p:nvSpPr>
-        <p:spPr/>
-        <p:txBody>
-          <a:bodyPr/>
-          <a:lstStyle/>
-          <a:p>
-            <a:pPr>
-              <a:defRPr/>
-            </a:pPr>
-            <a:r>
-              <a:rPr lang="en-US"/>
-              <a:t>21/12/2020</a:t>
-            </a:r>
-          </a:p>
-        </p:txBody>
-      </p:sp>
-      <p:sp>
-        <p:nvSpPr>
           <p:cNvPr id="4" name="Slide Number Placeholder 3">
             <a:extLst>
               <a:ext uri="{FF2B5EF4-FFF2-40B4-BE49-F238E27FC236}">
@@ -7302,6 +8587,40 @@
               <a:rPr lang="en-US" dirty="0"/>
               <a:t>Irregular structure – difficult to optimize in silicon</a:t>
             </a:r>
+          </a:p>
+        </p:txBody>
+      </p:sp>
+      <p:sp>
+        <p:nvSpPr>
+          <p:cNvPr id="6" name="Date Placeholder 3">
+            <a:extLst>
+              <a:ext uri="{FF2B5EF4-FFF2-40B4-BE49-F238E27FC236}">
+                <a16:creationId xmlns:a16="http://schemas.microsoft.com/office/drawing/2014/main" id="{0F6149F9-AC43-B143-FA9F-C4BBA38720D4}"/>
+              </a:ext>
+            </a:extLst>
+          </p:cNvPr>
+          <p:cNvSpPr>
+            <a:spLocks noGrp="1"/>
+          </p:cNvSpPr>
+          <p:nvPr>
+            <p:ph type="dt" sz="half" idx="10"/>
+          </p:nvPr>
+        </p:nvSpPr>
+        <p:spPr>
+          <a:xfrm>
+            <a:off x="0" y="6599238"/>
+            <a:ext cx="1828800" cy="258762"/>
+          </a:xfrm>
+        </p:spPr>
+        <p:txBody>
+          <a:bodyPr/>
+          <a:lstStyle/>
+          <a:p>
+            <a:fld id="{B4B13859-67C5-4393-B6C2-556CF3F770C0}" type="datetime3">
+              <a:rPr lang="en-US" smtClean="0"/>
+              <a:t>20 February 2026</a:t>
+            </a:fld>
+            <a:endParaRPr lang="en-US" dirty="0"/>
           </a:p>
         </p:txBody>
       </p:sp>
@@ -7723,37 +9042,6 @@
       </p:sp>
       <p:sp>
         <p:nvSpPr>
-          <p:cNvPr id="4" name="Date Placeholder 3">
-            <a:extLst>
-              <a:ext uri="{FF2B5EF4-FFF2-40B4-BE49-F238E27FC236}">
-                <a16:creationId xmlns:a16="http://schemas.microsoft.com/office/drawing/2014/main" id="{E9B97D55-59A9-4A12-A815-48B7D6D3F4F5}"/>
-              </a:ext>
-            </a:extLst>
-          </p:cNvPr>
-          <p:cNvSpPr>
-            <a:spLocks noGrp="1"/>
-          </p:cNvSpPr>
-          <p:nvPr>
-            <p:ph type="dt" sz="half" idx="10"/>
-          </p:nvPr>
-        </p:nvSpPr>
-        <p:spPr/>
-        <p:txBody>
-          <a:bodyPr/>
-          <a:lstStyle/>
-          <a:p>
-            <a:pPr>
-              <a:defRPr/>
-            </a:pPr>
-            <a:r>
-              <a:rPr lang="en-US" dirty="0"/>
-              <a:t>21/12/2020</a:t>
-            </a:r>
-          </a:p>
-        </p:txBody>
-      </p:sp>
-      <p:sp>
-        <p:nvSpPr>
           <p:cNvPr id="5" name="Slide Number Placeholder 4">
             <a:extLst>
               <a:ext uri="{FF2B5EF4-FFF2-40B4-BE49-F238E27FC236}">
@@ -7784,6 +9072,40 @@
               <a:t>3</a:t>
             </a:fld>
             <a:endParaRPr lang="en-US" altLang="en-US"/>
+          </a:p>
+        </p:txBody>
+      </p:sp>
+      <p:sp>
+        <p:nvSpPr>
+          <p:cNvPr id="6" name="Date Placeholder 3">
+            <a:extLst>
+              <a:ext uri="{FF2B5EF4-FFF2-40B4-BE49-F238E27FC236}">
+                <a16:creationId xmlns:a16="http://schemas.microsoft.com/office/drawing/2014/main" id="{DD8FD825-8547-4437-DB1C-EA4949BC187A}"/>
+              </a:ext>
+            </a:extLst>
+          </p:cNvPr>
+          <p:cNvSpPr>
+            <a:spLocks noGrp="1"/>
+          </p:cNvSpPr>
+          <p:nvPr>
+            <p:ph type="dt" sz="half" idx="10"/>
+          </p:nvPr>
+        </p:nvSpPr>
+        <p:spPr>
+          <a:xfrm>
+            <a:off x="0" y="6599238"/>
+            <a:ext cx="1828800" cy="258762"/>
+          </a:xfrm>
+        </p:spPr>
+        <p:txBody>
+          <a:bodyPr/>
+          <a:lstStyle/>
+          <a:p>
+            <a:fld id="{B4B13859-67C5-4393-B6C2-556CF3F770C0}" type="datetime3">
+              <a:rPr lang="en-US" smtClean="0"/>
+              <a:t>20 February 2026</a:t>
+            </a:fld>
+            <a:endParaRPr lang="en-US" dirty="0"/>
           </a:p>
         </p:txBody>
       </p:sp>
@@ -8245,10 +9567,10 @@
       </p:pic>
       <p:sp>
         <p:nvSpPr>
-          <p:cNvPr id="10" name="Date Placeholder 3">
+          <p:cNvPr id="3" name="Date Placeholder 3">
             <a:extLst>
               <a:ext uri="{FF2B5EF4-FFF2-40B4-BE49-F238E27FC236}">
-                <a16:creationId xmlns:a16="http://schemas.microsoft.com/office/drawing/2014/main" id="{4840807E-3F5B-45F6-927A-AD2AF6DDC3C3}"/>
+                <a16:creationId xmlns:a16="http://schemas.microsoft.com/office/drawing/2014/main" id="{AA382A41-2180-A4F3-BB6B-CD62B631D1B0}"/>
               </a:ext>
             </a:extLst>
           </p:cNvPr>
@@ -8269,13 +9591,11 @@
           <a:bodyPr/>
           <a:lstStyle/>
           <a:p>
-            <a:pPr>
-              <a:defRPr/>
-            </a:pPr>
-            <a:r>
-              <a:rPr lang="en-US" dirty="0"/>
-              <a:t>21/12/2020</a:t>
-            </a:r>
+            <a:fld id="{B4B13859-67C5-4393-B6C2-556CF3F770C0}" type="datetime3">
+              <a:rPr lang="en-US" smtClean="0"/>
+              <a:t>20 February 2026</a:t>
+            </a:fld>
+            <a:endParaRPr lang="en-US" dirty="0"/>
           </a:p>
         </p:txBody>
       </p:sp>
@@ -10545,42 +11865,6 @@
           </a:p>
         </p:txBody>
       </p:sp>
-      <p:sp>
-        <p:nvSpPr>
-          <p:cNvPr id="16" name="Date Placeholder 3">
-            <a:extLst>
-              <a:ext uri="{FF2B5EF4-FFF2-40B4-BE49-F238E27FC236}">
-                <a16:creationId xmlns:a16="http://schemas.microsoft.com/office/drawing/2014/main" id="{A02D9AD4-993A-4D7D-B0F4-A67DAB541251}"/>
-              </a:ext>
-            </a:extLst>
-          </p:cNvPr>
-          <p:cNvSpPr>
-            <a:spLocks noGrp="1"/>
-          </p:cNvSpPr>
-          <p:nvPr>
-            <p:ph type="dt" sz="half" idx="10"/>
-          </p:nvPr>
-        </p:nvSpPr>
-        <p:spPr>
-          <a:xfrm>
-            <a:off x="0" y="6599238"/>
-            <a:ext cx="1828800" cy="258762"/>
-          </a:xfrm>
-        </p:spPr>
-        <p:txBody>
-          <a:bodyPr/>
-          <a:lstStyle/>
-          <a:p>
-            <a:pPr>
-              <a:defRPr/>
-            </a:pPr>
-            <a:r>
-              <a:rPr lang="en-US" dirty="0"/>
-              <a:t>21/12/2020</a:t>
-            </a:r>
-          </a:p>
-        </p:txBody>
-      </p:sp>
       <p:pic>
         <p:nvPicPr>
           <p:cNvPr id="12" name="Picture 11">
@@ -10705,6 +11989,40 @@
           </a:prstGeom>
         </p:spPr>
       </p:pic>
+      <p:sp>
+        <p:nvSpPr>
+          <p:cNvPr id="3" name="Date Placeholder 3">
+            <a:extLst>
+              <a:ext uri="{FF2B5EF4-FFF2-40B4-BE49-F238E27FC236}">
+                <a16:creationId xmlns:a16="http://schemas.microsoft.com/office/drawing/2014/main" id="{43258CD4-FA23-7357-7DC0-CAFD58FE905D}"/>
+              </a:ext>
+            </a:extLst>
+          </p:cNvPr>
+          <p:cNvSpPr>
+            <a:spLocks noGrp="1"/>
+          </p:cNvSpPr>
+          <p:nvPr>
+            <p:ph type="dt" sz="half" idx="10"/>
+          </p:nvPr>
+        </p:nvSpPr>
+        <p:spPr>
+          <a:xfrm>
+            <a:off x="0" y="6599238"/>
+            <a:ext cx="1828800" cy="258762"/>
+          </a:xfrm>
+        </p:spPr>
+        <p:txBody>
+          <a:bodyPr/>
+          <a:lstStyle/>
+          <a:p>
+            <a:fld id="{B4B13859-67C5-4393-B6C2-556CF3F770C0}" type="datetime3">
+              <a:rPr lang="en-US" smtClean="0"/>
+              <a:t>20 February 2026</a:t>
+            </a:fld>
+            <a:endParaRPr lang="en-US" dirty="0"/>
+          </a:p>
+        </p:txBody>
+      </p:sp>
     </p:spTree>
     <p:extLst>
       <p:ext uri="{BB962C8B-B14F-4D97-AF65-F5344CB8AC3E}">
@@ -11408,37 +12726,6 @@
       </p:pic>
       <p:sp>
         <p:nvSpPr>
-          <p:cNvPr id="4" name="Date Placeholder 3">
-            <a:extLst>
-              <a:ext uri="{FF2B5EF4-FFF2-40B4-BE49-F238E27FC236}">
-                <a16:creationId xmlns:a16="http://schemas.microsoft.com/office/drawing/2014/main" id="{E8A6A0E0-C870-428F-A9E3-56A56B3FF964}"/>
-              </a:ext>
-            </a:extLst>
-          </p:cNvPr>
-          <p:cNvSpPr>
-            <a:spLocks noGrp="1"/>
-          </p:cNvSpPr>
-          <p:nvPr>
-            <p:ph type="dt" sz="half" idx="10"/>
-          </p:nvPr>
-        </p:nvSpPr>
-        <p:spPr/>
-        <p:txBody>
-          <a:bodyPr/>
-          <a:lstStyle/>
-          <a:p>
-            <a:pPr>
-              <a:defRPr/>
-            </a:pPr>
-            <a:r>
-              <a:rPr lang="en-US"/>
-              <a:t>21/12/2020</a:t>
-            </a:r>
-          </a:p>
-        </p:txBody>
-      </p:sp>
-      <p:sp>
-        <p:nvSpPr>
           <p:cNvPr id="5" name="Slide Number Placeholder 4">
             <a:extLst>
               <a:ext uri="{FF2B5EF4-FFF2-40B4-BE49-F238E27FC236}">
@@ -11514,6 +12801,40 @@
           </a:prstGeom>
         </p:spPr>
       </p:pic>
+      <p:sp>
+        <p:nvSpPr>
+          <p:cNvPr id="3" name="Date Placeholder 3">
+            <a:extLst>
+              <a:ext uri="{FF2B5EF4-FFF2-40B4-BE49-F238E27FC236}">
+                <a16:creationId xmlns:a16="http://schemas.microsoft.com/office/drawing/2014/main" id="{D3C6321B-DC4B-7E7D-F10D-B8280E6228C2}"/>
+              </a:ext>
+            </a:extLst>
+          </p:cNvPr>
+          <p:cNvSpPr>
+            <a:spLocks noGrp="1"/>
+          </p:cNvSpPr>
+          <p:nvPr>
+            <p:ph type="dt" sz="half" idx="10"/>
+          </p:nvPr>
+        </p:nvSpPr>
+        <p:spPr>
+          <a:xfrm>
+            <a:off x="0" y="6599238"/>
+            <a:ext cx="1828800" cy="258762"/>
+          </a:xfrm>
+        </p:spPr>
+        <p:txBody>
+          <a:bodyPr/>
+          <a:lstStyle/>
+          <a:p>
+            <a:fld id="{B4B13859-67C5-4393-B6C2-556CF3F770C0}" type="datetime3">
+              <a:rPr lang="en-US" smtClean="0"/>
+              <a:t>20 February 2026</a:t>
+            </a:fld>
+            <a:endParaRPr lang="en-US" dirty="0"/>
+          </a:p>
+        </p:txBody>
+      </p:sp>
     </p:spTree>
     <p:extLst>
       <p:ext uri="{BB962C8B-B14F-4D97-AF65-F5344CB8AC3E}">
@@ -11687,37 +13008,6 @@
       </p:sp>
       <p:sp>
         <p:nvSpPr>
-          <p:cNvPr id="4" name="Date Placeholder 3">
-            <a:extLst>
-              <a:ext uri="{FF2B5EF4-FFF2-40B4-BE49-F238E27FC236}">
-                <a16:creationId xmlns:a16="http://schemas.microsoft.com/office/drawing/2014/main" id="{94493B57-A9A8-48A3-960D-F50717E55D59}"/>
-              </a:ext>
-            </a:extLst>
-          </p:cNvPr>
-          <p:cNvSpPr>
-            <a:spLocks noGrp="1"/>
-          </p:cNvSpPr>
-          <p:nvPr>
-            <p:ph type="dt" sz="half" idx="10"/>
-          </p:nvPr>
-        </p:nvSpPr>
-        <p:spPr/>
-        <p:txBody>
-          <a:bodyPr/>
-          <a:lstStyle/>
-          <a:p>
-            <a:pPr>
-              <a:defRPr/>
-            </a:pPr>
-            <a:r>
-              <a:rPr lang="en-US"/>
-              <a:t>21/12/2020</a:t>
-            </a:r>
-          </a:p>
-        </p:txBody>
-      </p:sp>
-      <p:sp>
-        <p:nvSpPr>
           <p:cNvPr id="5" name="Slide Number Placeholder 4">
             <a:extLst>
               <a:ext uri="{FF2B5EF4-FFF2-40B4-BE49-F238E27FC236}">
@@ -11748,6 +13038,40 @@
               <a:t>7</a:t>
             </a:fld>
             <a:endParaRPr lang="en-US" altLang="en-US"/>
+          </a:p>
+        </p:txBody>
+      </p:sp>
+      <p:sp>
+        <p:nvSpPr>
+          <p:cNvPr id="7" name="Date Placeholder 3">
+            <a:extLst>
+              <a:ext uri="{FF2B5EF4-FFF2-40B4-BE49-F238E27FC236}">
+                <a16:creationId xmlns:a16="http://schemas.microsoft.com/office/drawing/2014/main" id="{E9AE4983-FA7F-4DB3-E9D7-911348886ED5}"/>
+              </a:ext>
+            </a:extLst>
+          </p:cNvPr>
+          <p:cNvSpPr>
+            <a:spLocks noGrp="1"/>
+          </p:cNvSpPr>
+          <p:nvPr>
+            <p:ph type="dt" sz="half" idx="10"/>
+          </p:nvPr>
+        </p:nvSpPr>
+        <p:spPr>
+          <a:xfrm>
+            <a:off x="0" y="6599238"/>
+            <a:ext cx="1828800" cy="258762"/>
+          </a:xfrm>
+        </p:spPr>
+        <p:txBody>
+          <a:bodyPr/>
+          <a:lstStyle/>
+          <a:p>
+            <a:fld id="{B4B13859-67C5-4393-B6C2-556CF3F770C0}" type="datetime3">
+              <a:rPr lang="en-US" smtClean="0"/>
+              <a:t>20 February 2026</a:t>
+            </a:fld>
+            <a:endParaRPr lang="en-US" dirty="0"/>
           </a:p>
         </p:txBody>
       </p:sp>
@@ -12374,37 +13698,6 @@
       </p:sp>
       <p:sp>
         <p:nvSpPr>
-          <p:cNvPr id="4" name="Date Placeholder 3">
-            <a:extLst>
-              <a:ext uri="{FF2B5EF4-FFF2-40B4-BE49-F238E27FC236}">
-                <a16:creationId xmlns:a16="http://schemas.microsoft.com/office/drawing/2014/main" id="{1BF45115-CC17-48FD-B19B-A44A31756205}"/>
-              </a:ext>
-            </a:extLst>
-          </p:cNvPr>
-          <p:cNvSpPr>
-            <a:spLocks noGrp="1"/>
-          </p:cNvSpPr>
-          <p:nvPr>
-            <p:ph type="dt" sz="half" idx="10"/>
-          </p:nvPr>
-        </p:nvSpPr>
-        <p:spPr/>
-        <p:txBody>
-          <a:bodyPr/>
-          <a:lstStyle/>
-          <a:p>
-            <a:pPr>
-              <a:defRPr/>
-            </a:pPr>
-            <a:r>
-              <a:rPr lang="en-US"/>
-              <a:t>21/12/2020</a:t>
-            </a:r>
-          </a:p>
-        </p:txBody>
-      </p:sp>
-      <p:sp>
-        <p:nvSpPr>
           <p:cNvPr id="5" name="Slide Number Placeholder 4">
             <a:extLst>
               <a:ext uri="{FF2B5EF4-FFF2-40B4-BE49-F238E27FC236}">
@@ -12435,6 +13728,40 @@
               <a:t>8</a:t>
             </a:fld>
             <a:endParaRPr lang="en-US" altLang="en-US"/>
+          </a:p>
+        </p:txBody>
+      </p:sp>
+      <p:sp>
+        <p:nvSpPr>
+          <p:cNvPr id="6" name="Date Placeholder 3">
+            <a:extLst>
+              <a:ext uri="{FF2B5EF4-FFF2-40B4-BE49-F238E27FC236}">
+                <a16:creationId xmlns:a16="http://schemas.microsoft.com/office/drawing/2014/main" id="{ADA22CF2-6854-FBA1-1ED5-F9818A0DEE4B}"/>
+              </a:ext>
+            </a:extLst>
+          </p:cNvPr>
+          <p:cNvSpPr>
+            <a:spLocks noGrp="1"/>
+          </p:cNvSpPr>
+          <p:nvPr>
+            <p:ph type="dt" sz="half" idx="10"/>
+          </p:nvPr>
+        </p:nvSpPr>
+        <p:spPr>
+          <a:xfrm>
+            <a:off x="0" y="6599238"/>
+            <a:ext cx="1828800" cy="258762"/>
+          </a:xfrm>
+        </p:spPr>
+        <p:txBody>
+          <a:bodyPr/>
+          <a:lstStyle/>
+          <a:p>
+            <a:fld id="{B4B13859-67C5-4393-B6C2-556CF3F770C0}" type="datetime3">
+              <a:rPr lang="en-US" smtClean="0"/>
+              <a:t>20 February 2026</a:t>
+            </a:fld>
+            <a:endParaRPr lang="en-US" dirty="0"/>
           </a:p>
         </p:txBody>
       </p:sp>
@@ -12957,37 +14284,6 @@
       </p:sp>
       <p:sp>
         <p:nvSpPr>
-          <p:cNvPr id="4" name="Date Placeholder 3">
-            <a:extLst>
-              <a:ext uri="{FF2B5EF4-FFF2-40B4-BE49-F238E27FC236}">
-                <a16:creationId xmlns:a16="http://schemas.microsoft.com/office/drawing/2014/main" id="{56835AB4-A8D8-BD87-EAE3-BB8757B3BF2F}"/>
-              </a:ext>
-            </a:extLst>
-          </p:cNvPr>
-          <p:cNvSpPr>
-            <a:spLocks noGrp="1"/>
-          </p:cNvSpPr>
-          <p:nvPr>
-            <p:ph type="dt" sz="half" idx="10"/>
-          </p:nvPr>
-        </p:nvSpPr>
-        <p:spPr/>
-        <p:txBody>
-          <a:bodyPr/>
-          <a:lstStyle/>
-          <a:p>
-            <a:pPr>
-              <a:defRPr/>
-            </a:pPr>
-            <a:r>
-              <a:rPr lang="en-US"/>
-              <a:t>21/12/2020</a:t>
-            </a:r>
-          </a:p>
-        </p:txBody>
-      </p:sp>
-      <p:sp>
-        <p:nvSpPr>
           <p:cNvPr id="5" name="Slide Number Placeholder 4">
             <a:extLst>
               <a:ext uri="{FF2B5EF4-FFF2-40B4-BE49-F238E27FC236}">
@@ -13018,6 +14314,40 @@
               <a:t>9</a:t>
             </a:fld>
             <a:endParaRPr lang="en-US" altLang="en-US"/>
+          </a:p>
+        </p:txBody>
+      </p:sp>
+      <p:sp>
+        <p:nvSpPr>
+          <p:cNvPr id="6" name="Date Placeholder 3">
+            <a:extLst>
+              <a:ext uri="{FF2B5EF4-FFF2-40B4-BE49-F238E27FC236}">
+                <a16:creationId xmlns:a16="http://schemas.microsoft.com/office/drawing/2014/main" id="{A2CA7FC3-1BE6-ACBD-0C78-2DDDA8385E2B}"/>
+              </a:ext>
+            </a:extLst>
+          </p:cNvPr>
+          <p:cNvSpPr>
+            <a:spLocks noGrp="1"/>
+          </p:cNvSpPr>
+          <p:nvPr>
+            <p:ph type="dt" sz="half" idx="10"/>
+          </p:nvPr>
+        </p:nvSpPr>
+        <p:spPr>
+          <a:xfrm>
+            <a:off x="0" y="6599238"/>
+            <a:ext cx="1828800" cy="258762"/>
+          </a:xfrm>
+        </p:spPr>
+        <p:txBody>
+          <a:bodyPr/>
+          <a:lstStyle/>
+          <a:p>
+            <a:fld id="{B4B13859-67C5-4393-B6C2-556CF3F770C0}" type="datetime3">
+              <a:rPr lang="en-US" smtClean="0"/>
+              <a:t>20 February 2026</a:t>
+            </a:fld>
+            <a:endParaRPr lang="en-US" dirty="0"/>
           </a:p>
         </p:txBody>
       </p:sp>

--- a/Lec-15-19-pipelined-cpu.pptx
+++ b/Lec-15-19-pipelined-cpu.pptx
@@ -5,7 +5,7 @@
     <p:sldMasterId id="2147483648" r:id="rId1"/>
   </p:sldMasterIdLst>
   <p:notesMasterIdLst>
-    <p:notesMasterId r:id="rId17"/>
+    <p:notesMasterId r:id="rId22"/>
   </p:notesMasterIdLst>
   <p:sldIdLst>
     <p:sldId id="337" r:id="rId2"/>
@@ -20,9 +20,14 @@
     <p:sldId id="346" r:id="rId11"/>
     <p:sldId id="348" r:id="rId12"/>
     <p:sldId id="443" r:id="rId13"/>
-    <p:sldId id="349" r:id="rId14"/>
+    <p:sldId id="444" r:id="rId14"/>
     <p:sldId id="350" r:id="rId15"/>
     <p:sldId id="351" r:id="rId16"/>
+    <p:sldId id="352" r:id="rId17"/>
+    <p:sldId id="353" r:id="rId18"/>
+    <p:sldId id="354" r:id="rId19"/>
+    <p:sldId id="355" r:id="rId20"/>
+    <p:sldId id="356" r:id="rId21"/>
   </p:sldIdLst>
   <p:sldSz cx="9144000" cy="6858000" type="screen4x3"/>
   <p:notesSz cx="6858000" cy="9144000"/>
@@ -304,7 +309,7 @@
               <a:pPr>
                 <a:defRPr/>
               </a:pPr>
-              <a:t>2/20/2026</a:t>
+              <a:t>2/23/2026</a:t>
             </a:fld>
             <a:endParaRPr lang="en-US"/>
           </a:p>
@@ -1285,6 +1290,302 @@
 </file>
 
 <file path=ppt/slideLayouts/slideLayout10.xml><?xml version="1.0" encoding="utf-8"?>
+<p:sldLayout xmlns:a="http://schemas.openxmlformats.org/drawingml/2006/main" xmlns:r="http://schemas.openxmlformats.org/officeDocument/2006/relationships" xmlns:p="http://schemas.openxmlformats.org/presentationml/2006/main" type="picTx" preserve="1">
+  <p:cSld name="Picture with Caption">
+    <p:spTree>
+      <p:nvGrpSpPr>
+        <p:cNvPr id="1" name=""/>
+        <p:cNvGrpSpPr/>
+        <p:nvPr/>
+      </p:nvGrpSpPr>
+      <p:grpSpPr>
+        <a:xfrm>
+          <a:off x="0" y="0"/>
+          <a:ext cx="0" cy="0"/>
+          <a:chOff x="0" y="0"/>
+          <a:chExt cx="0" cy="0"/>
+        </a:xfrm>
+      </p:grpSpPr>
+      <p:sp>
+        <p:nvSpPr>
+          <p:cNvPr id="2" name="Title 1"/>
+          <p:cNvSpPr>
+            <a:spLocks noGrp="1"/>
+          </p:cNvSpPr>
+          <p:nvPr>
+            <p:ph type="title"/>
+          </p:nvPr>
+        </p:nvSpPr>
+        <p:spPr>
+          <a:xfrm>
+            <a:off x="1792288" y="4800600"/>
+            <a:ext cx="5486400" cy="566738"/>
+          </a:xfrm>
+        </p:spPr>
+        <p:txBody>
+          <a:bodyPr anchor="b"/>
+          <a:lstStyle>
+            <a:lvl1pPr algn="l">
+              <a:defRPr sz="2000" b="1"/>
+            </a:lvl1pPr>
+          </a:lstStyle>
+          <a:p>
+            <a:r>
+              <a:rPr lang="en-US"/>
+              <a:t>Click to edit Master title style</a:t>
+            </a:r>
+          </a:p>
+        </p:txBody>
+      </p:sp>
+      <p:sp>
+        <p:nvSpPr>
+          <p:cNvPr id="3" name="Picture Placeholder 2"/>
+          <p:cNvSpPr>
+            <a:spLocks noGrp="1"/>
+          </p:cNvSpPr>
+          <p:nvPr>
+            <p:ph type="pic" idx="1"/>
+          </p:nvPr>
+        </p:nvSpPr>
+        <p:spPr>
+          <a:xfrm>
+            <a:off x="1792288" y="612775"/>
+            <a:ext cx="5486400" cy="4114800"/>
+          </a:xfrm>
+        </p:spPr>
+        <p:txBody>
+          <a:bodyPr rtlCol="0">
+            <a:normAutofit/>
+          </a:bodyPr>
+          <a:lstStyle>
+            <a:lvl1pPr marL="0" indent="0">
+              <a:buNone/>
+              <a:defRPr sz="3200"/>
+            </a:lvl1pPr>
+            <a:lvl2pPr marL="457200" indent="0">
+              <a:buNone/>
+              <a:defRPr sz="2800"/>
+            </a:lvl2pPr>
+            <a:lvl3pPr marL="914400" indent="0">
+              <a:buNone/>
+              <a:defRPr sz="2400"/>
+            </a:lvl3pPr>
+            <a:lvl4pPr marL="1371600" indent="0">
+              <a:buNone/>
+              <a:defRPr sz="2000"/>
+            </a:lvl4pPr>
+            <a:lvl5pPr marL="1828800" indent="0">
+              <a:buNone/>
+              <a:defRPr sz="2000"/>
+            </a:lvl5pPr>
+            <a:lvl6pPr marL="2286000" indent="0">
+              <a:buNone/>
+              <a:defRPr sz="2000"/>
+            </a:lvl6pPr>
+            <a:lvl7pPr marL="2743200" indent="0">
+              <a:buNone/>
+              <a:defRPr sz="2000"/>
+            </a:lvl7pPr>
+            <a:lvl8pPr marL="3200400" indent="0">
+              <a:buNone/>
+              <a:defRPr sz="2000"/>
+            </a:lvl8pPr>
+            <a:lvl9pPr marL="3657600" indent="0">
+              <a:buNone/>
+              <a:defRPr sz="2000"/>
+            </a:lvl9pPr>
+          </a:lstStyle>
+          <a:p>
+            <a:pPr lvl="0"/>
+            <a:endParaRPr lang="en-US" noProof="0"/>
+          </a:p>
+        </p:txBody>
+      </p:sp>
+      <p:sp>
+        <p:nvSpPr>
+          <p:cNvPr id="4" name="Text Placeholder 3"/>
+          <p:cNvSpPr>
+            <a:spLocks noGrp="1"/>
+          </p:cNvSpPr>
+          <p:nvPr>
+            <p:ph type="body" sz="half" idx="2"/>
+          </p:nvPr>
+        </p:nvSpPr>
+        <p:spPr>
+          <a:xfrm>
+            <a:off x="1792288" y="5367338"/>
+            <a:ext cx="5486400" cy="804862"/>
+          </a:xfrm>
+        </p:spPr>
+        <p:txBody>
+          <a:bodyPr/>
+          <a:lstStyle>
+            <a:lvl1pPr marL="0" indent="0">
+              <a:buNone/>
+              <a:defRPr sz="1400"/>
+            </a:lvl1pPr>
+            <a:lvl2pPr marL="457200" indent="0">
+              <a:buNone/>
+              <a:defRPr sz="1200"/>
+            </a:lvl2pPr>
+            <a:lvl3pPr marL="914400" indent="0">
+              <a:buNone/>
+              <a:defRPr sz="1000"/>
+            </a:lvl3pPr>
+            <a:lvl4pPr marL="1371600" indent="0">
+              <a:buNone/>
+              <a:defRPr sz="900"/>
+            </a:lvl4pPr>
+            <a:lvl5pPr marL="1828800" indent="0">
+              <a:buNone/>
+              <a:defRPr sz="900"/>
+            </a:lvl5pPr>
+            <a:lvl6pPr marL="2286000" indent="0">
+              <a:buNone/>
+              <a:defRPr sz="900"/>
+            </a:lvl6pPr>
+            <a:lvl7pPr marL="2743200" indent="0">
+              <a:buNone/>
+              <a:defRPr sz="900"/>
+            </a:lvl7pPr>
+            <a:lvl8pPr marL="3200400" indent="0">
+              <a:buNone/>
+              <a:defRPr sz="900"/>
+            </a:lvl8pPr>
+            <a:lvl9pPr marL="3657600" indent="0">
+              <a:buNone/>
+              <a:defRPr sz="900"/>
+            </a:lvl9pPr>
+          </a:lstStyle>
+          <a:p>
+            <a:pPr lvl="0"/>
+            <a:r>
+              <a:rPr lang="en-US"/>
+              <a:t>Click to edit Master text styles</a:t>
+            </a:r>
+          </a:p>
+        </p:txBody>
+      </p:sp>
+      <p:sp>
+        <p:nvSpPr>
+          <p:cNvPr id="5" name="Date Placeholder 3">
+            <a:extLst>
+              <a:ext uri="{FF2B5EF4-FFF2-40B4-BE49-F238E27FC236}">
+                <a16:creationId xmlns:a16="http://schemas.microsoft.com/office/drawing/2014/main" id="{AE467ABF-5DBD-0F44-6269-D1296B669355}"/>
+              </a:ext>
+            </a:extLst>
+          </p:cNvPr>
+          <p:cNvSpPr>
+            <a:spLocks noGrp="1"/>
+          </p:cNvSpPr>
+          <p:nvPr>
+            <p:ph type="dt" sz="half" idx="10"/>
+          </p:nvPr>
+        </p:nvSpPr>
+        <p:spPr/>
+        <p:txBody>
+          <a:bodyPr/>
+          <a:lstStyle>
+            <a:lvl1pPr>
+              <a:defRPr/>
+            </a:lvl1pPr>
+          </a:lstStyle>
+          <a:p>
+            <a:pPr>
+              <a:defRPr/>
+            </a:pPr>
+            <a:r>
+              <a:rPr lang="en-US"/>
+              <a:t>21/12/2020</a:t>
+            </a:r>
+          </a:p>
+        </p:txBody>
+      </p:sp>
+      <p:sp>
+        <p:nvSpPr>
+          <p:cNvPr id="6" name="Footer Placeholder 4">
+            <a:extLst>
+              <a:ext uri="{FF2B5EF4-FFF2-40B4-BE49-F238E27FC236}">
+                <a16:creationId xmlns:a16="http://schemas.microsoft.com/office/drawing/2014/main" id="{31729259-95EB-ABB4-8CC1-6AAA526DCDAA}"/>
+              </a:ext>
+            </a:extLst>
+          </p:cNvPr>
+          <p:cNvSpPr>
+            <a:spLocks noGrp="1"/>
+          </p:cNvSpPr>
+          <p:nvPr>
+            <p:ph type="ftr" sz="quarter" idx="11"/>
+          </p:nvPr>
+        </p:nvSpPr>
+        <p:spPr/>
+        <p:txBody>
+          <a:bodyPr/>
+          <a:lstStyle>
+            <a:lvl1pPr>
+              <a:defRPr/>
+            </a:lvl1pPr>
+          </a:lstStyle>
+          <a:p>
+            <a:pPr>
+              <a:defRPr/>
+            </a:pPr>
+            <a:endParaRPr lang="en-US"/>
+          </a:p>
+        </p:txBody>
+      </p:sp>
+      <p:sp>
+        <p:nvSpPr>
+          <p:cNvPr id="7" name="Slide Number Placeholder 5">
+            <a:extLst>
+              <a:ext uri="{FF2B5EF4-FFF2-40B4-BE49-F238E27FC236}">
+                <a16:creationId xmlns:a16="http://schemas.microsoft.com/office/drawing/2014/main" id="{762D7086-DF65-36F8-E6B6-082068B3EE8C}"/>
+              </a:ext>
+            </a:extLst>
+          </p:cNvPr>
+          <p:cNvSpPr>
+            <a:spLocks noGrp="1"/>
+          </p:cNvSpPr>
+          <p:nvPr>
+            <p:ph type="sldNum" sz="quarter" idx="12"/>
+          </p:nvPr>
+        </p:nvSpPr>
+        <p:spPr/>
+        <p:txBody>
+          <a:bodyPr/>
+          <a:lstStyle>
+            <a:lvl1pPr>
+              <a:defRPr/>
+            </a:lvl1pPr>
+          </a:lstStyle>
+          <a:p>
+            <a:pPr>
+              <a:defRPr/>
+            </a:pPr>
+            <a:fld id="{FB2052F0-E69A-488D-AA78-DE7ABB9591C3}" type="slidenum">
+              <a:rPr lang="en-US" altLang="en-US"/>
+              <a:pPr>
+                <a:defRPr/>
+              </a:pPr>
+              <a:t>‹#›</a:t>
+            </a:fld>
+            <a:endParaRPr lang="en-US" altLang="en-US"/>
+          </a:p>
+        </p:txBody>
+      </p:sp>
+    </p:spTree>
+    <p:extLst>
+      <p:ext uri="{BB962C8B-B14F-4D97-AF65-F5344CB8AC3E}">
+        <p14:creationId xmlns:p14="http://schemas.microsoft.com/office/powerpoint/2010/main" val="2265026697"/>
+      </p:ext>
+    </p:extLst>
+  </p:cSld>
+  <p:clrMapOvr>
+    <a:masterClrMapping/>
+  </p:clrMapOvr>
+</p:sldLayout>
+</file>
+
+<file path=ppt/slideLayouts/slideLayout11.xml><?xml version="1.0" encoding="utf-8"?>
 <p:sldLayout xmlns:a="http://schemas.openxmlformats.org/drawingml/2006/main" xmlns:r="http://schemas.openxmlformats.org/officeDocument/2006/relationships" xmlns:p="http://schemas.openxmlformats.org/presentationml/2006/main" type="vertTx" preserve="1">
   <p:cSld name="Title and Vertical Text">
     <p:spTree>
@@ -1493,7 +1794,7 @@
 </p:sldLayout>
 </file>
 
-<file path=ppt/slideLayouts/slideLayout11.xml><?xml version="1.0" encoding="utf-8"?>
+<file path=ppt/slideLayouts/slideLayout12.xml><?xml version="1.0" encoding="utf-8"?>
 <p:sldLayout xmlns:a="http://schemas.openxmlformats.org/drawingml/2006/main" xmlns:r="http://schemas.openxmlformats.org/officeDocument/2006/relationships" xmlns:p="http://schemas.openxmlformats.org/presentationml/2006/main" type="vertTitleAndTx" preserve="1">
   <p:cSld name="Vertical Title and Text">
     <p:spTree>
@@ -1712,8 +2013,8 @@
 </p:sldLayout>
 </file>
 
-<file path=ppt/slideLayouts/slideLayout12.xml><?xml version="1.0" encoding="utf-8"?>
-<p:sldLayout xmlns:a="http://schemas.openxmlformats.org/drawingml/2006/main" xmlns:r="http://schemas.openxmlformats.org/officeDocument/2006/relationships" xmlns:p="http://schemas.openxmlformats.org/presentationml/2006/main" userDrawn="1">
+<file path=ppt/slideLayouts/slideLayout2.xml><?xml version="1.0" encoding="utf-8"?>
+<p:sldLayout xmlns:a="http://schemas.openxmlformats.org/drawingml/2006/main" xmlns:r="http://schemas.openxmlformats.org/officeDocument/2006/relationships" xmlns:p="http://schemas.openxmlformats.org/presentationml/2006/main" showMasterSp="0" userDrawn="1">
   <p:cSld name="Custom Layout">
     <p:bg>
       <p:bgPr>
@@ -2308,6 +2609,66 @@
           </a:p>
         </p:txBody>
       </p:sp>
+      <p:pic>
+        <p:nvPicPr>
+          <p:cNvPr id="11" name="Picture 11" descr="Picture 7.png">
+            <a:extLst>
+              <a:ext uri="{FF2B5EF4-FFF2-40B4-BE49-F238E27FC236}">
+                <a16:creationId xmlns:a16="http://schemas.microsoft.com/office/drawing/2014/main" id="{69F4A35B-A00F-8EED-48E9-204F14156994}"/>
+              </a:ext>
+            </a:extLst>
+          </p:cNvPr>
+          <p:cNvPicPr>
+            <a:picLocks noChangeAspect="1"/>
+          </p:cNvPicPr>
+          <p:nvPr userDrawn="1"/>
+        </p:nvPicPr>
+        <p:blipFill>
+          <a:blip r:embed="rId4">
+            <a:extLst>
+              <a:ext uri="{28A0092B-C50C-407E-A947-70E740481C1C}">
+                <a14:useLocalDpi xmlns:a14="http://schemas.microsoft.com/office/drawing/2010/main" val="0"/>
+              </a:ext>
+            </a:extLst>
+          </a:blip>
+          <a:srcRect l="1923" b="5336"/>
+          <a:stretch>
+            <a:fillRect/>
+          </a:stretch>
+        </p:blipFill>
+        <p:spPr bwMode="auto">
+          <a:xfrm>
+            <a:off x="6629400" y="0"/>
+            <a:ext cx="2193925" cy="692150"/>
+          </a:xfrm>
+          <a:prstGeom prst="rect">
+            <a:avLst/>
+          </a:prstGeom>
+          <a:noFill/>
+          <a:ln>
+            <a:noFill/>
+          </a:ln>
+          <a:extLst>
+            <a:ext uri="{909E8E84-426E-40DD-AFC4-6F175D3DCCD1}">
+              <a14:hiddenFill xmlns:a14="http://schemas.microsoft.com/office/drawing/2010/main">
+                <a:solidFill>
+                  <a:srgbClr val="FFFFFF"/>
+                </a:solidFill>
+              </a14:hiddenFill>
+            </a:ext>
+            <a:ext uri="{91240B29-F687-4F45-9708-019B960494DF}">
+              <a14:hiddenLine xmlns:a14="http://schemas.microsoft.com/office/drawing/2010/main" w="9525">
+                <a:solidFill>
+                  <a:srgbClr val="000000"/>
+                </a:solidFill>
+                <a:miter lim="800000"/>
+                <a:headEnd/>
+                <a:tailEnd/>
+              </a14:hiddenLine>
+            </a:ext>
+          </a:extLst>
+        </p:spPr>
+      </p:pic>
     </p:spTree>
     <p:extLst>
       <p:ext uri="{BB962C8B-B14F-4D97-AF65-F5344CB8AC3E}">
@@ -2321,7 +2682,7 @@
 </p:sldLayout>
 </file>
 
-<file path=ppt/slideLayouts/slideLayout2.xml><?xml version="1.0" encoding="utf-8"?>
+<file path=ppt/slideLayouts/slideLayout3.xml><?xml version="1.0" encoding="utf-8"?>
 <p:sldLayout xmlns:a="http://schemas.openxmlformats.org/drawingml/2006/main" xmlns:r="http://schemas.openxmlformats.org/officeDocument/2006/relationships" xmlns:p="http://schemas.openxmlformats.org/presentationml/2006/main" type="obj" preserve="1">
   <p:cSld name="Title and Content">
     <p:spTree>
@@ -2589,7 +2950,7 @@
 </p:sldLayout>
 </file>
 
-<file path=ppt/slideLayouts/slideLayout3.xml><?xml version="1.0" encoding="utf-8"?>
+<file path=ppt/slideLayouts/slideLayout4.xml><?xml version="1.0" encoding="utf-8"?>
 <p:sldLayout xmlns:a="http://schemas.openxmlformats.org/drawingml/2006/main" xmlns:r="http://schemas.openxmlformats.org/officeDocument/2006/relationships" xmlns:p="http://schemas.openxmlformats.org/presentationml/2006/main" preserve="1" userDrawn="1">
   <p:cSld name="Section Header">
     <p:spTree>
@@ -2876,7 +3237,7 @@
 </p:sldLayout>
 </file>
 
-<file path=ppt/slideLayouts/slideLayout4.xml><?xml version="1.0" encoding="utf-8"?>
+<file path=ppt/slideLayouts/slideLayout5.xml><?xml version="1.0" encoding="utf-8"?>
 <p:sldLayout xmlns:a="http://schemas.openxmlformats.org/drawingml/2006/main" xmlns:r="http://schemas.openxmlformats.org/officeDocument/2006/relationships" xmlns:p="http://schemas.openxmlformats.org/presentationml/2006/main" type="twoObj" preserve="1">
   <p:cSld name="Two Content">
     <p:spTree>
@@ -3202,7 +3563,7 @@
 </p:sldLayout>
 </file>
 
-<file path=ppt/slideLayouts/slideLayout5.xml><?xml version="1.0" encoding="utf-8"?>
+<file path=ppt/slideLayouts/slideLayout6.xml><?xml version="1.0" encoding="utf-8"?>
 <p:sldLayout xmlns:a="http://schemas.openxmlformats.org/drawingml/2006/main" xmlns:r="http://schemas.openxmlformats.org/officeDocument/2006/relationships" xmlns:p="http://schemas.openxmlformats.org/presentationml/2006/main" type="twoTxTwoObj" preserve="1">
   <p:cSld name="Comparison">
     <p:spTree>
@@ -3662,7 +4023,7 @@
 </p:sldLayout>
 </file>
 
-<file path=ppt/slideLayouts/slideLayout6.xml><?xml version="1.0" encoding="utf-8"?>
+<file path=ppt/slideLayouts/slideLayout7.xml><?xml version="1.0" encoding="utf-8"?>
 <p:sldLayout xmlns:a="http://schemas.openxmlformats.org/drawingml/2006/main" xmlns:r="http://schemas.openxmlformats.org/officeDocument/2006/relationships" xmlns:p="http://schemas.openxmlformats.org/presentationml/2006/main" type="titleOnly" preserve="1">
   <p:cSld name="Title Only">
     <p:spTree>
@@ -3820,7 +4181,7 @@
 </p:sldLayout>
 </file>
 
-<file path=ppt/slideLayouts/slideLayout7.xml><?xml version="1.0" encoding="utf-8"?>
+<file path=ppt/slideLayouts/slideLayout8.xml><?xml version="1.0" encoding="utf-8"?>
 <p:sldLayout xmlns:a="http://schemas.openxmlformats.org/drawingml/2006/main" xmlns:r="http://schemas.openxmlformats.org/officeDocument/2006/relationships" xmlns:p="http://schemas.openxmlformats.org/presentationml/2006/main" type="blank" preserve="1">
   <p:cSld name="Blank">
     <p:spTree>
@@ -3956,7 +4317,7 @@
 </p:sldLayout>
 </file>
 
-<file path=ppt/slideLayouts/slideLayout8.xml><?xml version="1.0" encoding="utf-8"?>
+<file path=ppt/slideLayouts/slideLayout9.xml><?xml version="1.0" encoding="utf-8"?>
 <p:sldLayout xmlns:a="http://schemas.openxmlformats.org/drawingml/2006/main" xmlns:r="http://schemas.openxmlformats.org/officeDocument/2006/relationships" xmlns:p="http://schemas.openxmlformats.org/presentationml/2006/main" type="objTx" preserve="1">
   <p:cSld name="Content with Caption">
     <p:spTree>
@@ -4263,302 +4624,6 @@
     <p:extLst>
       <p:ext uri="{BB962C8B-B14F-4D97-AF65-F5344CB8AC3E}">
         <p14:creationId xmlns:p14="http://schemas.microsoft.com/office/powerpoint/2010/main" val="3820446429"/>
-      </p:ext>
-    </p:extLst>
-  </p:cSld>
-  <p:clrMapOvr>
-    <a:masterClrMapping/>
-  </p:clrMapOvr>
-</p:sldLayout>
-</file>
-
-<file path=ppt/slideLayouts/slideLayout9.xml><?xml version="1.0" encoding="utf-8"?>
-<p:sldLayout xmlns:a="http://schemas.openxmlformats.org/drawingml/2006/main" xmlns:r="http://schemas.openxmlformats.org/officeDocument/2006/relationships" xmlns:p="http://schemas.openxmlformats.org/presentationml/2006/main" type="picTx" preserve="1">
-  <p:cSld name="Picture with Caption">
-    <p:spTree>
-      <p:nvGrpSpPr>
-        <p:cNvPr id="1" name=""/>
-        <p:cNvGrpSpPr/>
-        <p:nvPr/>
-      </p:nvGrpSpPr>
-      <p:grpSpPr>
-        <a:xfrm>
-          <a:off x="0" y="0"/>
-          <a:ext cx="0" cy="0"/>
-          <a:chOff x="0" y="0"/>
-          <a:chExt cx="0" cy="0"/>
-        </a:xfrm>
-      </p:grpSpPr>
-      <p:sp>
-        <p:nvSpPr>
-          <p:cNvPr id="2" name="Title 1"/>
-          <p:cNvSpPr>
-            <a:spLocks noGrp="1"/>
-          </p:cNvSpPr>
-          <p:nvPr>
-            <p:ph type="title"/>
-          </p:nvPr>
-        </p:nvSpPr>
-        <p:spPr>
-          <a:xfrm>
-            <a:off x="1792288" y="4800600"/>
-            <a:ext cx="5486400" cy="566738"/>
-          </a:xfrm>
-        </p:spPr>
-        <p:txBody>
-          <a:bodyPr anchor="b"/>
-          <a:lstStyle>
-            <a:lvl1pPr algn="l">
-              <a:defRPr sz="2000" b="1"/>
-            </a:lvl1pPr>
-          </a:lstStyle>
-          <a:p>
-            <a:r>
-              <a:rPr lang="en-US"/>
-              <a:t>Click to edit Master title style</a:t>
-            </a:r>
-          </a:p>
-        </p:txBody>
-      </p:sp>
-      <p:sp>
-        <p:nvSpPr>
-          <p:cNvPr id="3" name="Picture Placeholder 2"/>
-          <p:cNvSpPr>
-            <a:spLocks noGrp="1"/>
-          </p:cNvSpPr>
-          <p:nvPr>
-            <p:ph type="pic" idx="1"/>
-          </p:nvPr>
-        </p:nvSpPr>
-        <p:spPr>
-          <a:xfrm>
-            <a:off x="1792288" y="612775"/>
-            <a:ext cx="5486400" cy="4114800"/>
-          </a:xfrm>
-        </p:spPr>
-        <p:txBody>
-          <a:bodyPr rtlCol="0">
-            <a:normAutofit/>
-          </a:bodyPr>
-          <a:lstStyle>
-            <a:lvl1pPr marL="0" indent="0">
-              <a:buNone/>
-              <a:defRPr sz="3200"/>
-            </a:lvl1pPr>
-            <a:lvl2pPr marL="457200" indent="0">
-              <a:buNone/>
-              <a:defRPr sz="2800"/>
-            </a:lvl2pPr>
-            <a:lvl3pPr marL="914400" indent="0">
-              <a:buNone/>
-              <a:defRPr sz="2400"/>
-            </a:lvl3pPr>
-            <a:lvl4pPr marL="1371600" indent="0">
-              <a:buNone/>
-              <a:defRPr sz="2000"/>
-            </a:lvl4pPr>
-            <a:lvl5pPr marL="1828800" indent="0">
-              <a:buNone/>
-              <a:defRPr sz="2000"/>
-            </a:lvl5pPr>
-            <a:lvl6pPr marL="2286000" indent="0">
-              <a:buNone/>
-              <a:defRPr sz="2000"/>
-            </a:lvl6pPr>
-            <a:lvl7pPr marL="2743200" indent="0">
-              <a:buNone/>
-              <a:defRPr sz="2000"/>
-            </a:lvl7pPr>
-            <a:lvl8pPr marL="3200400" indent="0">
-              <a:buNone/>
-              <a:defRPr sz="2000"/>
-            </a:lvl8pPr>
-            <a:lvl9pPr marL="3657600" indent="0">
-              <a:buNone/>
-              <a:defRPr sz="2000"/>
-            </a:lvl9pPr>
-          </a:lstStyle>
-          <a:p>
-            <a:pPr lvl="0"/>
-            <a:endParaRPr lang="en-US" noProof="0"/>
-          </a:p>
-        </p:txBody>
-      </p:sp>
-      <p:sp>
-        <p:nvSpPr>
-          <p:cNvPr id="4" name="Text Placeholder 3"/>
-          <p:cNvSpPr>
-            <a:spLocks noGrp="1"/>
-          </p:cNvSpPr>
-          <p:nvPr>
-            <p:ph type="body" sz="half" idx="2"/>
-          </p:nvPr>
-        </p:nvSpPr>
-        <p:spPr>
-          <a:xfrm>
-            <a:off x="1792288" y="5367338"/>
-            <a:ext cx="5486400" cy="804862"/>
-          </a:xfrm>
-        </p:spPr>
-        <p:txBody>
-          <a:bodyPr/>
-          <a:lstStyle>
-            <a:lvl1pPr marL="0" indent="0">
-              <a:buNone/>
-              <a:defRPr sz="1400"/>
-            </a:lvl1pPr>
-            <a:lvl2pPr marL="457200" indent="0">
-              <a:buNone/>
-              <a:defRPr sz="1200"/>
-            </a:lvl2pPr>
-            <a:lvl3pPr marL="914400" indent="0">
-              <a:buNone/>
-              <a:defRPr sz="1000"/>
-            </a:lvl3pPr>
-            <a:lvl4pPr marL="1371600" indent="0">
-              <a:buNone/>
-              <a:defRPr sz="900"/>
-            </a:lvl4pPr>
-            <a:lvl5pPr marL="1828800" indent="0">
-              <a:buNone/>
-              <a:defRPr sz="900"/>
-            </a:lvl5pPr>
-            <a:lvl6pPr marL="2286000" indent="0">
-              <a:buNone/>
-              <a:defRPr sz="900"/>
-            </a:lvl6pPr>
-            <a:lvl7pPr marL="2743200" indent="0">
-              <a:buNone/>
-              <a:defRPr sz="900"/>
-            </a:lvl7pPr>
-            <a:lvl8pPr marL="3200400" indent="0">
-              <a:buNone/>
-              <a:defRPr sz="900"/>
-            </a:lvl8pPr>
-            <a:lvl9pPr marL="3657600" indent="0">
-              <a:buNone/>
-              <a:defRPr sz="900"/>
-            </a:lvl9pPr>
-          </a:lstStyle>
-          <a:p>
-            <a:pPr lvl="0"/>
-            <a:r>
-              <a:rPr lang="en-US"/>
-              <a:t>Click to edit Master text styles</a:t>
-            </a:r>
-          </a:p>
-        </p:txBody>
-      </p:sp>
-      <p:sp>
-        <p:nvSpPr>
-          <p:cNvPr id="5" name="Date Placeholder 3">
-            <a:extLst>
-              <a:ext uri="{FF2B5EF4-FFF2-40B4-BE49-F238E27FC236}">
-                <a16:creationId xmlns:a16="http://schemas.microsoft.com/office/drawing/2014/main" id="{AE467ABF-5DBD-0F44-6269-D1296B669355}"/>
-              </a:ext>
-            </a:extLst>
-          </p:cNvPr>
-          <p:cNvSpPr>
-            <a:spLocks noGrp="1"/>
-          </p:cNvSpPr>
-          <p:nvPr>
-            <p:ph type="dt" sz="half" idx="10"/>
-          </p:nvPr>
-        </p:nvSpPr>
-        <p:spPr/>
-        <p:txBody>
-          <a:bodyPr/>
-          <a:lstStyle>
-            <a:lvl1pPr>
-              <a:defRPr/>
-            </a:lvl1pPr>
-          </a:lstStyle>
-          <a:p>
-            <a:pPr>
-              <a:defRPr/>
-            </a:pPr>
-            <a:r>
-              <a:rPr lang="en-US"/>
-              <a:t>21/12/2020</a:t>
-            </a:r>
-          </a:p>
-        </p:txBody>
-      </p:sp>
-      <p:sp>
-        <p:nvSpPr>
-          <p:cNvPr id="6" name="Footer Placeholder 4">
-            <a:extLst>
-              <a:ext uri="{FF2B5EF4-FFF2-40B4-BE49-F238E27FC236}">
-                <a16:creationId xmlns:a16="http://schemas.microsoft.com/office/drawing/2014/main" id="{31729259-95EB-ABB4-8CC1-6AAA526DCDAA}"/>
-              </a:ext>
-            </a:extLst>
-          </p:cNvPr>
-          <p:cNvSpPr>
-            <a:spLocks noGrp="1"/>
-          </p:cNvSpPr>
-          <p:nvPr>
-            <p:ph type="ftr" sz="quarter" idx="11"/>
-          </p:nvPr>
-        </p:nvSpPr>
-        <p:spPr/>
-        <p:txBody>
-          <a:bodyPr/>
-          <a:lstStyle>
-            <a:lvl1pPr>
-              <a:defRPr/>
-            </a:lvl1pPr>
-          </a:lstStyle>
-          <a:p>
-            <a:pPr>
-              <a:defRPr/>
-            </a:pPr>
-            <a:endParaRPr lang="en-US"/>
-          </a:p>
-        </p:txBody>
-      </p:sp>
-      <p:sp>
-        <p:nvSpPr>
-          <p:cNvPr id="7" name="Slide Number Placeholder 5">
-            <a:extLst>
-              <a:ext uri="{FF2B5EF4-FFF2-40B4-BE49-F238E27FC236}">
-                <a16:creationId xmlns:a16="http://schemas.microsoft.com/office/drawing/2014/main" id="{762D7086-DF65-36F8-E6B6-082068B3EE8C}"/>
-              </a:ext>
-            </a:extLst>
-          </p:cNvPr>
-          <p:cNvSpPr>
-            <a:spLocks noGrp="1"/>
-          </p:cNvSpPr>
-          <p:nvPr>
-            <p:ph type="sldNum" sz="quarter" idx="12"/>
-          </p:nvPr>
-        </p:nvSpPr>
-        <p:spPr/>
-        <p:txBody>
-          <a:bodyPr/>
-          <a:lstStyle>
-            <a:lvl1pPr>
-              <a:defRPr/>
-            </a:lvl1pPr>
-          </a:lstStyle>
-          <a:p>
-            <a:pPr>
-              <a:defRPr/>
-            </a:pPr>
-            <a:fld id="{FB2052F0-E69A-488D-AA78-DE7ABB9591C3}" type="slidenum">
-              <a:rPr lang="en-US" altLang="en-US"/>
-              <a:pPr>
-                <a:defRPr/>
-              </a:pPr>
-              <a:t>‹#›</a:t>
-            </a:fld>
-            <a:endParaRPr lang="en-US" altLang="en-US"/>
-          </a:p>
-        </p:txBody>
-      </p:sp>
-    </p:spTree>
-    <p:extLst>
-      <p:ext uri="{BB962C8B-B14F-4D97-AF65-F5344CB8AC3E}">
-        <p14:creationId xmlns:p14="http://schemas.microsoft.com/office/powerpoint/2010/main" val="2265026697"/>
       </p:ext>
     </p:extLst>
   </p:cSld>
@@ -5443,17 +5508,17 @@
   <p:clrMap bg1="lt1" tx1="dk1" bg2="lt2" tx2="dk2" accent1="accent1" accent2="accent2" accent3="accent3" accent4="accent4" accent5="accent5" accent6="accent6" hlink="hlink" folHlink="folHlink"/>
   <p:sldLayoutIdLst>
     <p:sldLayoutId id="2147484833" r:id="rId1"/>
-    <p:sldLayoutId id="2147484834" r:id="rId2"/>
-    <p:sldLayoutId id="2147484835" r:id="rId3"/>
-    <p:sldLayoutId id="2147484836" r:id="rId4"/>
-    <p:sldLayoutId id="2147484837" r:id="rId5"/>
-    <p:sldLayoutId id="2147484838" r:id="rId6"/>
-    <p:sldLayoutId id="2147484839" r:id="rId7"/>
-    <p:sldLayoutId id="2147484840" r:id="rId8"/>
-    <p:sldLayoutId id="2147484841" r:id="rId9"/>
-    <p:sldLayoutId id="2147484842" r:id="rId10"/>
-    <p:sldLayoutId id="2147484843" r:id="rId11"/>
-    <p:sldLayoutId id="2147484844" r:id="rId12"/>
+    <p:sldLayoutId id="2147484844" r:id="rId2"/>
+    <p:sldLayoutId id="2147484834" r:id="rId3"/>
+    <p:sldLayoutId id="2147484835" r:id="rId4"/>
+    <p:sldLayoutId id="2147484836" r:id="rId5"/>
+    <p:sldLayoutId id="2147484837" r:id="rId6"/>
+    <p:sldLayoutId id="2147484838" r:id="rId7"/>
+    <p:sldLayoutId id="2147484839" r:id="rId8"/>
+    <p:sldLayoutId id="2147484840" r:id="rId9"/>
+    <p:sldLayoutId id="2147484841" r:id="rId10"/>
+    <p:sldLayoutId id="2147484842" r:id="rId11"/>
+    <p:sldLayoutId id="2147484843" r:id="rId12"/>
   </p:sldLayoutIdLst>
   <p:hf hdr="0" ftr="0"/>
   <p:txStyles>
@@ -6003,7 +6068,7 @@
           <a:p>
             <a:fld id="{B4B13859-67C5-4393-B6C2-556CF3F770C0}" type="datetime3">
               <a:rPr lang="en-US" smtClean="0"/>
-              <a:t>20 February 2026</a:t>
+              <a:t>23 February 2026</a:t>
             </a:fld>
             <a:endParaRPr lang="en-US" dirty="0"/>
           </a:p>
@@ -6556,37 +6621,8 @@
           <a:p>
             <a:fld id="{B4B13859-67C5-4393-B6C2-556CF3F770C0}" type="datetime3">
               <a:rPr lang="en-US" smtClean="0"/>
-              <a:t>20 February 2026</a:t>
+              <a:t>23 February 2026</a:t>
             </a:fld>
-            <a:endParaRPr lang="en-US" dirty="0"/>
-          </a:p>
-        </p:txBody>
-      </p:sp>
-      <p:sp>
-        <p:nvSpPr>
-          <p:cNvPr id="5" name="Footer Placeholder 4">
-            <a:extLst>
-              <a:ext uri="{FF2B5EF4-FFF2-40B4-BE49-F238E27FC236}">
-                <a16:creationId xmlns:a16="http://schemas.microsoft.com/office/drawing/2014/main" id="{5DA6DB8B-5424-AB6A-0274-1F3608CF68F2}"/>
-              </a:ext>
-            </a:extLst>
-          </p:cNvPr>
-          <p:cNvSpPr>
-            <a:spLocks noGrp="1"/>
-          </p:cNvSpPr>
-          <p:nvPr>
-            <p:ph type="ftr" sz="quarter" idx="11"/>
-          </p:nvPr>
-        </p:nvSpPr>
-        <p:spPr/>
-        <p:txBody>
-          <a:bodyPr/>
-          <a:lstStyle/>
-          <a:p>
-            <a:r>
-              <a:rPr lang="en-US"/>
-              <a:t>ELL305: Computer Architecture</a:t>
-            </a:r>
             <a:endParaRPr lang="en-US" dirty="0"/>
           </a:p>
         </p:txBody>
@@ -6841,7 +6877,7 @@
           <a:p>
             <a:fld id="{B4B13859-67C5-4393-B6C2-556CF3F770C0}" type="datetime3">
               <a:rPr lang="en-US" smtClean="0"/>
-              <a:t>20 February 2026</a:t>
+              <a:t>23 February 2026</a:t>
             </a:fld>
             <a:endParaRPr lang="en-US" dirty="0"/>
           </a:p>
@@ -7048,7 +7084,7 @@
           <p:cNvPr id="2" name="Title 1">
             <a:extLst>
               <a:ext uri="{FF2B5EF4-FFF2-40B4-BE49-F238E27FC236}">
-                <a16:creationId xmlns:a16="http://schemas.microsoft.com/office/drawing/2014/main" id="{BF421145-0DE4-3ECF-C2A1-855B26F8C15A}"/>
+                <a16:creationId xmlns:a16="http://schemas.microsoft.com/office/drawing/2014/main" id="{A3231187-F125-67D0-E4BE-0A4039CA85CB}"/>
               </a:ext>
             </a:extLst>
           </p:cNvPr>
@@ -7066,75 +7102,95 @@
           <a:p>
             <a:r>
               <a:rPr lang="en-US" dirty="0"/>
-              <a:t>Pipelined RISC-V processor</a:t>
-            </a:r>
+              <a:t>Pipelined </a:t>
+            </a:r>
+            <a:r>
+              <a:rPr lang="en-US" dirty="0" err="1"/>
+              <a:t>datapath</a:t>
+            </a:r>
+            <a:r>
+              <a:rPr lang="en-US" dirty="0"/>
+              <a:t> and control</a:t>
+            </a:r>
+            <a:endParaRPr lang="en-IN" dirty="0"/>
           </a:p>
         </p:txBody>
       </p:sp>
-      <p:sp>
-        <p:nvSpPr>
-          <p:cNvPr id="4" name="Date Placeholder 3">
+      <p:pic>
+        <p:nvPicPr>
+          <p:cNvPr id="7" name="Content Placeholder 6">
             <a:extLst>
               <a:ext uri="{FF2B5EF4-FFF2-40B4-BE49-F238E27FC236}">
-                <a16:creationId xmlns:a16="http://schemas.microsoft.com/office/drawing/2014/main" id="{1D2AE603-7286-AAEA-CFE4-1DDF5B37938C}"/>
+                <a16:creationId xmlns:a16="http://schemas.microsoft.com/office/drawing/2014/main" id="{93CCBE13-FF4F-9854-0ECC-2664C6AC9C85}"/>
               </a:ext>
             </a:extLst>
           </p:cNvPr>
-          <p:cNvSpPr>
-            <a:spLocks noGrp="1"/>
-          </p:cNvSpPr>
+          <p:cNvPicPr>
+            <a:picLocks noGrp="1" noChangeAspect="1"/>
+          </p:cNvPicPr>
           <p:nvPr>
-            <p:ph type="dt" sz="half" idx="10"/>
+            <p:ph idx="1"/>
           </p:nvPr>
-        </p:nvSpPr>
-        <p:spPr/>
-        <p:txBody>
-          <a:bodyPr/>
-          <a:lstStyle/>
-          <a:p>
-            <a:fld id="{B4B13859-67C5-4393-B6C2-556CF3F770C0}" type="datetime3">
-              <a:rPr lang="en-US" smtClean="0"/>
-              <a:t>20 February 2026</a:t>
-            </a:fld>
-            <a:endParaRPr lang="en-US"/>
-          </a:p>
-        </p:txBody>
-      </p:sp>
+        </p:nvPicPr>
+        <p:blipFill>
+          <a:blip r:embed="rId2">
+            <a:extLst>
+              <a:ext uri="{BEBA8EAE-BF5A-486C-A8C5-ECC9F3942E4B}">
+                <a14:imgProps xmlns:a14="http://schemas.microsoft.com/office/drawing/2010/main">
+                  <a14:imgLayer r:embed="rId3">
+                    <a14:imgEffect>
+                      <a14:artisticPhotocopy trans="54000"/>
+                    </a14:imgEffect>
+                  </a14:imgLayer>
+                </a14:imgProps>
+              </a:ext>
+              <a:ext uri="{28A0092B-C50C-407E-A947-70E740481C1C}">
+                <a14:useLocalDpi xmlns:a14="http://schemas.microsoft.com/office/drawing/2010/main" val="0"/>
+              </a:ext>
+            </a:extLst>
+          </a:blip>
+          <a:srcRect/>
+          <a:stretch/>
+        </p:blipFill>
+        <p:spPr bwMode="auto">
+          <a:xfrm>
+            <a:off x="152400" y="1513399"/>
+            <a:ext cx="8839200" cy="4880540"/>
+          </a:xfrm>
+          <a:prstGeom prst="rect">
+            <a:avLst/>
+          </a:prstGeom>
+          <a:noFill/>
+          <a:ln>
+            <a:noFill/>
+          </a:ln>
+          <a:extLst>
+            <a:ext uri="{909E8E84-426E-40DD-AFC4-6F175D3DCCD1}">
+              <a14:hiddenFill xmlns:a14="http://schemas.microsoft.com/office/drawing/2010/main">
+                <a:solidFill>
+                  <a:srgbClr val="FFFFFF"/>
+                </a:solidFill>
+              </a14:hiddenFill>
+            </a:ext>
+            <a:ext uri="{91240B29-F687-4F45-9708-019B960494DF}">
+              <a14:hiddenLine xmlns:a14="http://schemas.microsoft.com/office/drawing/2010/main" w="9525">
+                <a:solidFill>
+                  <a:srgbClr val="000000"/>
+                </a:solidFill>
+                <a:miter lim="800000"/>
+                <a:headEnd/>
+                <a:tailEnd/>
+              </a14:hiddenLine>
+            </a:ext>
+          </a:extLst>
+        </p:spPr>
+      </p:pic>
       <p:sp>
         <p:nvSpPr>
-          <p:cNvPr id="5" name="Footer Placeholder 4">
+          <p:cNvPr id="5" name="Slide Number Placeholder 4">
             <a:extLst>
               <a:ext uri="{FF2B5EF4-FFF2-40B4-BE49-F238E27FC236}">
-                <a16:creationId xmlns:a16="http://schemas.microsoft.com/office/drawing/2014/main" id="{49E0A889-A928-F0A5-E3F6-4B4680CF3E8F}"/>
-              </a:ext>
-            </a:extLst>
-          </p:cNvPr>
-          <p:cNvSpPr>
-            <a:spLocks noGrp="1"/>
-          </p:cNvSpPr>
-          <p:nvPr>
-            <p:ph type="ftr" sz="quarter" idx="11"/>
-          </p:nvPr>
-        </p:nvSpPr>
-        <p:spPr/>
-        <p:txBody>
-          <a:bodyPr/>
-          <a:lstStyle/>
-          <a:p>
-            <a:r>
-              <a:rPr lang="en-US"/>
-              <a:t>ELL305: Computer Architecture</a:t>
-            </a:r>
-            <a:endParaRPr lang="en-US" dirty="0"/>
-          </a:p>
-        </p:txBody>
-      </p:sp>
-      <p:sp>
-        <p:nvSpPr>
-          <p:cNvPr id="6" name="Slide Number Placeholder 5">
-            <a:extLst>
-              <a:ext uri="{FF2B5EF4-FFF2-40B4-BE49-F238E27FC236}">
-                <a16:creationId xmlns:a16="http://schemas.microsoft.com/office/drawing/2014/main" id="{B29DA800-094F-054A-F73D-3A4A2DA7C0E2}"/>
+                <a16:creationId xmlns:a16="http://schemas.microsoft.com/office/drawing/2014/main" id="{F28D89EB-2DF1-71E4-CD5C-E9986CEA56FD}"/>
               </a:ext>
             </a:extLst>
           </p:cNvPr>
@@ -7150,49 +7206,26 @@
           <a:bodyPr/>
           <a:lstStyle/>
           <a:p>
-            <a:fld id="{98AC3541-01C1-4CA5-B68F-FEE868C7D1AF}" type="slidenum">
-              <a:rPr lang="en-US" smtClean="0"/>
+            <a:pPr>
+              <a:defRPr/>
+            </a:pPr>
+            <a:fld id="{CA887A73-1AE0-46F8-856A-18EA1CF30A1B}" type="slidenum">
+              <a:rPr lang="en-US" altLang="en-US" smtClean="0"/>
+              <a:pPr>
+                <a:defRPr/>
+              </a:pPr>
               <a:t>13</a:t>
             </a:fld>
-            <a:endParaRPr lang="en-US"/>
+            <a:endParaRPr lang="en-US" altLang="en-US"/>
           </a:p>
         </p:txBody>
       </p:sp>
-      <p:pic>
-        <p:nvPicPr>
-          <p:cNvPr id="14" name="Content Placeholder 13">
+      <p:sp>
+        <p:nvSpPr>
+          <p:cNvPr id="8" name="TextBox 7">
             <a:extLst>
               <a:ext uri="{FF2B5EF4-FFF2-40B4-BE49-F238E27FC236}">
-                <a16:creationId xmlns:a16="http://schemas.microsoft.com/office/drawing/2014/main" id="{A1217202-A09F-5322-DA26-C55378F03E62}"/>
-              </a:ext>
-            </a:extLst>
-          </p:cNvPr>
-          <p:cNvPicPr>
-            <a:picLocks noGrp="1" noChangeAspect="1"/>
-          </p:cNvPicPr>
-          <p:nvPr>
-            <p:ph idx="1"/>
-          </p:nvPr>
-        </p:nvPicPr>
-        <p:blipFill>
-          <a:blip r:embed="rId2"/>
-          <a:stretch>
-            <a:fillRect/>
-          </a:stretch>
-        </p:blipFill>
-        <p:spPr>
-          <a:xfrm>
-            <a:off x="801943" y="1368029"/>
-            <a:ext cx="7557815" cy="3963591"/>
-          </a:xfrm>
-        </p:spPr>
-      </p:pic>
-      <p:sp>
-        <p:nvSpPr>
-          <p:cNvPr id="18" name="TextBox 17">
-            <a:extLst>
-              <a:ext uri="{FF2B5EF4-FFF2-40B4-BE49-F238E27FC236}">
-                <a16:creationId xmlns:a16="http://schemas.microsoft.com/office/drawing/2014/main" id="{6E8367E8-1DDA-EF87-332F-074D02336297}"/>
+                <a16:creationId xmlns:a16="http://schemas.microsoft.com/office/drawing/2014/main" id="{73382E28-74AC-31C7-2628-52B3C11FCD7D}"/>
               </a:ext>
             </a:extLst>
           </p:cNvPr>
@@ -7201,8 +7234,8 @@
         </p:nvSpPr>
         <p:spPr>
           <a:xfrm>
-            <a:off x="72866" y="5318117"/>
-            <a:ext cx="4586288" cy="415498"/>
+            <a:off x="4724400" y="1274243"/>
+            <a:ext cx="4419600" cy="415498"/>
           </a:xfrm>
           <a:prstGeom prst="rect">
             <a:avLst/>
@@ -7226,10 +7259,44 @@
           </a:p>
         </p:txBody>
       </p:sp>
+      <p:sp>
+        <p:nvSpPr>
+          <p:cNvPr id="3" name="Date Placeholder 3">
+            <a:extLst>
+              <a:ext uri="{FF2B5EF4-FFF2-40B4-BE49-F238E27FC236}">
+                <a16:creationId xmlns:a16="http://schemas.microsoft.com/office/drawing/2014/main" id="{A57F0CFA-E06B-262D-1617-BEDA17B2CABF}"/>
+              </a:ext>
+            </a:extLst>
+          </p:cNvPr>
+          <p:cNvSpPr>
+            <a:spLocks noGrp="1"/>
+          </p:cNvSpPr>
+          <p:nvPr>
+            <p:ph type="dt" sz="half" idx="10"/>
+          </p:nvPr>
+        </p:nvSpPr>
+        <p:spPr>
+          <a:xfrm>
+            <a:off x="0" y="6599238"/>
+            <a:ext cx="1828800" cy="258762"/>
+          </a:xfrm>
+        </p:spPr>
+        <p:txBody>
+          <a:bodyPr/>
+          <a:lstStyle/>
+          <a:p>
+            <a:fld id="{B4B13859-67C5-4393-B6C2-556CF3F770C0}" type="datetime3">
+              <a:rPr lang="en-US" smtClean="0"/>
+              <a:t>23 February 2026</a:t>
+            </a:fld>
+            <a:endParaRPr lang="en-US" dirty="0"/>
+          </a:p>
+        </p:txBody>
+      </p:sp>
     </p:spTree>
     <p:extLst>
       <p:ext uri="{BB962C8B-B14F-4D97-AF65-F5344CB8AC3E}">
-        <p14:creationId xmlns:p14="http://schemas.microsoft.com/office/powerpoint/2010/main" val="553420517"/>
+        <p14:creationId xmlns:p14="http://schemas.microsoft.com/office/powerpoint/2010/main" val="689940020"/>
       </p:ext>
     </p:extLst>
   </p:cSld>
@@ -7270,7 +7337,7 @@
                                           </p:stCondLst>
                                         </p:cTn>
                                         <p:tgtEl>
-                                          <p:spTgt spid="18"/>
+                                          <p:spTgt spid="8"/>
                                         </p:tgtEl>
                                         <p:attrNameLst>
                                           <p:attrName>style.visibility</p:attrName>
@@ -7311,7 +7378,7 @@
       </p:par>
     </p:tnLst>
     <p:bldLst>
-      <p:bldP spid="18" grpId="0"/>
+      <p:bldP spid="8" grpId="0"/>
     </p:bldLst>
   </p:timing>
 </p:sld>
@@ -7492,37 +7559,8 @@
           <a:p>
             <a:fld id="{B4B13859-67C5-4393-B6C2-556CF3F770C0}" type="datetime3">
               <a:rPr lang="en-US" smtClean="0"/>
-              <a:t>20 February 2026</a:t>
+              <a:t>23 February 2026</a:t>
             </a:fld>
-            <a:endParaRPr lang="en-US"/>
-          </a:p>
-        </p:txBody>
-      </p:sp>
-      <p:sp>
-        <p:nvSpPr>
-          <p:cNvPr id="5" name="Footer Placeholder 4">
-            <a:extLst>
-              <a:ext uri="{FF2B5EF4-FFF2-40B4-BE49-F238E27FC236}">
-                <a16:creationId xmlns:a16="http://schemas.microsoft.com/office/drawing/2014/main" id="{61D822FE-DDD3-4641-39F1-147E0BAC9EFC}"/>
-              </a:ext>
-            </a:extLst>
-          </p:cNvPr>
-          <p:cNvSpPr>
-            <a:spLocks noGrp="1"/>
-          </p:cNvSpPr>
-          <p:nvPr>
-            <p:ph type="ftr" sz="quarter" idx="11"/>
-          </p:nvPr>
-        </p:nvSpPr>
-        <p:spPr/>
-        <p:txBody>
-          <a:bodyPr/>
-          <a:lstStyle/>
-          <a:p>
-            <a:r>
-              <a:rPr lang="en-US"/>
-              <a:t>ELL305: Computer Architecture</a:t>
-            </a:r>
             <a:endParaRPr lang="en-US" dirty="0"/>
           </a:p>
         </p:txBody>
@@ -7632,45 +7670,36 @@
         </p:nvSpPr>
         <p:spPr>
           <a:xfrm>
-            <a:off x="94576" y="1609808"/>
-            <a:ext cx="2871510" cy="4790991"/>
+            <a:off x="97533" y="1459583"/>
+            <a:ext cx="2871510" cy="4943392"/>
           </a:xfrm>
         </p:spPr>
         <p:txBody>
           <a:bodyPr>
-            <a:normAutofit fontScale="55000" lnSpcReduction="20000"/>
+            <a:noAutofit/>
           </a:bodyPr>
           <a:lstStyle/>
           <a:p>
             <a:r>
-              <a:rPr lang="en-US" dirty="0"/>
+              <a:rPr lang="en-US" sz="2000" dirty="0"/>
               <a:t>Problem: Two or more instructions in the pipeline compete for access to a single physical resource</a:t>
             </a:r>
           </a:p>
           <a:p>
-            <a:endParaRPr lang="en-US" dirty="0"/>
-          </a:p>
-          <a:p>
-            <a:r>
-              <a:rPr lang="en-US" dirty="0"/>
+            <a:r>
+              <a:rPr lang="en-US" sz="2000" dirty="0"/>
               <a:t>Solution 1: Instructions take turns using resource, some instructions have to stall (wait)</a:t>
             </a:r>
           </a:p>
           <a:p>
-            <a:endParaRPr lang="en-US" dirty="0"/>
-          </a:p>
-          <a:p>
-            <a:r>
-              <a:rPr lang="en-US" dirty="0"/>
+            <a:r>
+              <a:rPr lang="en-US" sz="2000" dirty="0"/>
               <a:t>Solution 2: Add more hardware to machine</a:t>
             </a:r>
           </a:p>
           <a:p>
-            <a:endParaRPr lang="en-US" dirty="0"/>
-          </a:p>
-          <a:p>
-            <a:r>
-              <a:rPr lang="en-US" dirty="0"/>
+            <a:r>
+              <a:rPr lang="en-US" sz="2000" dirty="0"/>
               <a:t>Can always solve a structural hazard by adding more hardware</a:t>
             </a:r>
           </a:p>
@@ -7699,37 +7728,9 @@
           <a:p>
             <a:fld id="{B4B13859-67C5-4393-B6C2-556CF3F770C0}" type="datetime3">
               <a:rPr lang="en-US" smtClean="0"/>
-              <a:t>20 February 2026</a:t>
+              <a:t>23 February 2026</a:t>
             </a:fld>
             <a:endParaRPr lang="en-US"/>
-          </a:p>
-        </p:txBody>
-      </p:sp>
-      <p:sp>
-        <p:nvSpPr>
-          <p:cNvPr id="5" name="Footer Placeholder 4">
-            <a:extLst>
-              <a:ext uri="{FF2B5EF4-FFF2-40B4-BE49-F238E27FC236}">
-                <a16:creationId xmlns:a16="http://schemas.microsoft.com/office/drawing/2014/main" id="{29D49AD5-BD30-F00E-BBA7-646FB48132C9}"/>
-              </a:ext>
-            </a:extLst>
-          </p:cNvPr>
-          <p:cNvSpPr>
-            <a:spLocks noGrp="1"/>
-          </p:cNvSpPr>
-          <p:nvPr>
-            <p:ph type="ftr" sz="quarter" idx="11"/>
-          </p:nvPr>
-        </p:nvSpPr>
-        <p:spPr/>
-        <p:txBody>
-          <a:bodyPr/>
-          <a:lstStyle/>
-          <a:p>
-            <a:r>
-              <a:rPr lang="en-US" dirty="0"/>
-              <a:t>ELL305: Computer Architecture</a:t>
-            </a:r>
           </a:p>
         </p:txBody>
       </p:sp>
@@ -7784,8 +7785,8 @@
         </p:blipFill>
         <p:spPr>
           <a:xfrm>
-            <a:off x="3124200" y="1609808"/>
-            <a:ext cx="3372050" cy="2049902"/>
+            <a:off x="2969043" y="1579322"/>
+            <a:ext cx="3733800" cy="2269813"/>
           </a:xfrm>
           <a:prstGeom prst="rect">
             <a:avLst/>
@@ -7857,8 +7858,8 @@
         </p:blipFill>
         <p:spPr>
           <a:xfrm>
-            <a:off x="2971800" y="4179097"/>
-            <a:ext cx="3372050" cy="2069303"/>
+            <a:off x="2966415" y="3968874"/>
+            <a:ext cx="3733799" cy="2291295"/>
           </a:xfrm>
           <a:prstGeom prst="rect">
             <a:avLst/>
@@ -8299,7 +8300,7 @@
                                         <p:tgtEl>
                                           <p:spTgt spid="3">
                                             <p:txEl>
-                                              <p:pRg st="2" end="2"/>
+                                              <p:pRg st="1" end="1"/>
                                             </p:txEl>
                                           </p:spTgt>
                                         </p:tgtEl>
@@ -8348,7 +8349,7 @@
                                         <p:tgtEl>
                                           <p:spTgt spid="3">
                                             <p:txEl>
-                                              <p:pRg st="4" end="4"/>
+                                              <p:pRg st="2" end="2"/>
                                             </p:txEl>
                                           </p:spTgt>
                                         </p:tgtEl>
@@ -8397,7 +8398,7 @@
                                         <p:tgtEl>
                                           <p:spTgt spid="3">
                                             <p:txEl>
-                                              <p:pRg st="6" end="6"/>
+                                              <p:pRg st="3" end="3"/>
                                             </p:txEl>
                                           </p:spTgt>
                                         </p:tgtEl>
@@ -8448,6 +8449,2729 @@
 </p:sld>
 </file>
 
+<file path=ppt/slides/slide16.xml><?xml version="1.0" encoding="utf-8"?>
+<p:sld xmlns:a="http://schemas.openxmlformats.org/drawingml/2006/main" xmlns:r="http://schemas.openxmlformats.org/officeDocument/2006/relationships" xmlns:p="http://schemas.openxmlformats.org/presentationml/2006/main">
+  <p:cSld>
+    <p:spTree>
+      <p:nvGrpSpPr>
+        <p:cNvPr id="1" name=""/>
+        <p:cNvGrpSpPr/>
+        <p:nvPr/>
+      </p:nvGrpSpPr>
+      <p:grpSpPr>
+        <a:xfrm>
+          <a:off x="0" y="0"/>
+          <a:ext cx="0" cy="0"/>
+          <a:chOff x="0" y="0"/>
+          <a:chExt cx="0" cy="0"/>
+        </a:xfrm>
+      </p:grpSpPr>
+      <p:grpSp>
+        <p:nvGrpSpPr>
+          <p:cNvPr id="11" name="Group 10">
+            <a:extLst>
+              <a:ext uri="{FF2B5EF4-FFF2-40B4-BE49-F238E27FC236}">
+                <a16:creationId xmlns:a16="http://schemas.microsoft.com/office/drawing/2014/main" id="{C4922366-B05A-61C2-398D-CEECE9561EFE}"/>
+              </a:ext>
+            </a:extLst>
+          </p:cNvPr>
+          <p:cNvGrpSpPr/>
+          <p:nvPr/>
+        </p:nvGrpSpPr>
+        <p:grpSpPr>
+          <a:xfrm>
+            <a:off x="2841441" y="1464049"/>
+            <a:ext cx="5921559" cy="3700749"/>
+            <a:chOff x="2841441" y="1464049"/>
+            <a:chExt cx="5921559" cy="3700749"/>
+          </a:xfrm>
+        </p:grpSpPr>
+        <p:pic>
+          <p:nvPicPr>
+            <p:cNvPr id="3" name="Picture 2">
+              <a:extLst>
+                <a:ext uri="{FF2B5EF4-FFF2-40B4-BE49-F238E27FC236}">
+                  <a16:creationId xmlns:a16="http://schemas.microsoft.com/office/drawing/2014/main" id="{BF7C7CF1-2221-266A-D5DE-1DE59E6E5747}"/>
+                </a:ext>
+              </a:extLst>
+            </p:cNvPr>
+            <p:cNvPicPr>
+              <a:picLocks noChangeAspect="1"/>
+            </p:cNvPicPr>
+            <p:nvPr/>
+          </p:nvPicPr>
+          <p:blipFill>
+            <a:blip r:embed="rId2"/>
+            <a:srcRect t="2" r="17410" b="-529"/>
+            <a:stretch>
+              <a:fillRect/>
+            </a:stretch>
+          </p:blipFill>
+          <p:spPr>
+            <a:xfrm>
+              <a:off x="2841441" y="1464049"/>
+              <a:ext cx="5159560" cy="3641351"/>
+            </a:xfrm>
+            <a:prstGeom prst="rect">
+              <a:avLst/>
+            </a:prstGeom>
+          </p:spPr>
+        </p:pic>
+        <p:pic>
+          <p:nvPicPr>
+            <p:cNvPr id="9" name="Picture 8">
+              <a:extLst>
+                <a:ext uri="{FF2B5EF4-FFF2-40B4-BE49-F238E27FC236}">
+                  <a16:creationId xmlns:a16="http://schemas.microsoft.com/office/drawing/2014/main" id="{1300C606-CD95-DD41-93FE-F11419095FFD}"/>
+                </a:ext>
+              </a:extLst>
+            </p:cNvPr>
+            <p:cNvPicPr>
+              <a:picLocks noChangeAspect="1"/>
+            </p:cNvPicPr>
+            <p:nvPr/>
+          </p:nvPicPr>
+          <p:blipFill>
+            <a:blip r:embed="rId3"/>
+            <a:stretch>
+              <a:fillRect/>
+            </a:stretch>
+          </p:blipFill>
+          <p:spPr>
+            <a:xfrm>
+              <a:off x="5414595" y="2903538"/>
+              <a:ext cx="3348405" cy="2261260"/>
+            </a:xfrm>
+            <a:prstGeom prst="rect">
+              <a:avLst/>
+            </a:prstGeom>
+          </p:spPr>
+        </p:pic>
+      </p:grpSp>
+      <p:sp>
+        <p:nvSpPr>
+          <p:cNvPr id="2" name="Title 1">
+            <a:extLst>
+              <a:ext uri="{FF2B5EF4-FFF2-40B4-BE49-F238E27FC236}">
+                <a16:creationId xmlns:a16="http://schemas.microsoft.com/office/drawing/2014/main" id="{769AAB66-7D67-15C6-E864-827A2D021380}"/>
+              </a:ext>
+            </a:extLst>
+          </p:cNvPr>
+          <p:cNvSpPr>
+            <a:spLocks noGrp="1"/>
+          </p:cNvSpPr>
+          <p:nvPr>
+            <p:ph type="title"/>
+          </p:nvPr>
+        </p:nvSpPr>
+        <p:spPr/>
+        <p:txBody>
+          <a:bodyPr/>
+          <a:lstStyle/>
+          <a:p>
+            <a:r>
+              <a:rPr lang="en-US" dirty="0"/>
+              <a:t>Data hazards</a:t>
+            </a:r>
+          </a:p>
+        </p:txBody>
+      </p:sp>
+      <p:pic>
+        <p:nvPicPr>
+          <p:cNvPr id="8" name="Content Placeholder 7">
+            <a:extLst>
+              <a:ext uri="{FF2B5EF4-FFF2-40B4-BE49-F238E27FC236}">
+                <a16:creationId xmlns:a16="http://schemas.microsoft.com/office/drawing/2014/main" id="{5C90681D-9ADB-9A6A-0188-3CAAC9CF0C06}"/>
+              </a:ext>
+            </a:extLst>
+          </p:cNvPr>
+          <p:cNvPicPr>
+            <a:picLocks noGrp="1" noChangeAspect="1"/>
+          </p:cNvPicPr>
+          <p:nvPr>
+            <p:ph idx="1"/>
+          </p:nvPr>
+        </p:nvPicPr>
+        <p:blipFill rotWithShape="1">
+          <a:blip r:embed="rId4"/>
+          <a:srcRect l="27599" t="15255" r="13066"/>
+          <a:stretch/>
+        </p:blipFill>
+        <p:spPr>
+          <a:xfrm>
+            <a:off x="94575" y="1464049"/>
+            <a:ext cx="3011805" cy="2237423"/>
+          </a:xfrm>
+        </p:spPr>
+      </p:pic>
+      <p:sp>
+        <p:nvSpPr>
+          <p:cNvPr id="4" name="Date Placeholder 3">
+            <a:extLst>
+              <a:ext uri="{FF2B5EF4-FFF2-40B4-BE49-F238E27FC236}">
+                <a16:creationId xmlns:a16="http://schemas.microsoft.com/office/drawing/2014/main" id="{B2BC43D6-C103-542A-D3A6-CF6A6D60FEFE}"/>
+              </a:ext>
+            </a:extLst>
+          </p:cNvPr>
+          <p:cNvSpPr>
+            <a:spLocks noGrp="1"/>
+          </p:cNvSpPr>
+          <p:nvPr>
+            <p:ph type="dt" sz="half" idx="10"/>
+          </p:nvPr>
+        </p:nvSpPr>
+        <p:spPr/>
+        <p:txBody>
+          <a:bodyPr/>
+          <a:lstStyle/>
+          <a:p>
+            <a:fld id="{B4B13859-67C5-4393-B6C2-556CF3F770C0}" type="datetime3">
+              <a:rPr lang="en-US" smtClean="0"/>
+              <a:t>23 February 2026</a:t>
+            </a:fld>
+            <a:endParaRPr lang="en-US"/>
+          </a:p>
+        </p:txBody>
+      </p:sp>
+      <p:sp>
+        <p:nvSpPr>
+          <p:cNvPr id="6" name="Slide Number Placeholder 5">
+            <a:extLst>
+              <a:ext uri="{FF2B5EF4-FFF2-40B4-BE49-F238E27FC236}">
+                <a16:creationId xmlns:a16="http://schemas.microsoft.com/office/drawing/2014/main" id="{2F58CFCF-8205-BC7F-6CB8-5FFFBDEFF171}"/>
+              </a:ext>
+            </a:extLst>
+          </p:cNvPr>
+          <p:cNvSpPr>
+            <a:spLocks noGrp="1"/>
+          </p:cNvSpPr>
+          <p:nvPr>
+            <p:ph type="sldNum" sz="quarter" idx="12"/>
+          </p:nvPr>
+        </p:nvSpPr>
+        <p:spPr/>
+        <p:txBody>
+          <a:bodyPr/>
+          <a:lstStyle/>
+          <a:p>
+            <a:fld id="{98AC3541-01C1-4CA5-B68F-FEE868C7D1AF}" type="slidenum">
+              <a:rPr lang="en-US" smtClean="0"/>
+              <a:t>16</a:t>
+            </a:fld>
+            <a:endParaRPr lang="en-US"/>
+          </a:p>
+        </p:txBody>
+      </p:sp>
+      <p:pic>
+        <p:nvPicPr>
+          <p:cNvPr id="10" name="Picture 9">
+            <a:extLst>
+              <a:ext uri="{FF2B5EF4-FFF2-40B4-BE49-F238E27FC236}">
+                <a16:creationId xmlns:a16="http://schemas.microsoft.com/office/drawing/2014/main" id="{AA41F6F8-CEC2-30D7-7364-8CCAF876191C}"/>
+              </a:ext>
+            </a:extLst>
+          </p:cNvPr>
+          <p:cNvPicPr>
+            <a:picLocks noChangeAspect="1"/>
+          </p:cNvPicPr>
+          <p:nvPr/>
+        </p:nvPicPr>
+        <p:blipFill>
+          <a:blip r:embed="rId2"/>
+          <a:srcRect b="70997"/>
+          <a:stretch>
+            <a:fillRect/>
+          </a:stretch>
+        </p:blipFill>
+        <p:spPr>
+          <a:xfrm>
+            <a:off x="2841440" y="1464049"/>
+            <a:ext cx="6247185" cy="1050551"/>
+          </a:xfrm>
+          <a:prstGeom prst="rect">
+            <a:avLst/>
+          </a:prstGeom>
+        </p:spPr>
+      </p:pic>
+      <p:sp>
+        <p:nvSpPr>
+          <p:cNvPr id="12" name="TextBox 11">
+            <a:extLst>
+              <a:ext uri="{FF2B5EF4-FFF2-40B4-BE49-F238E27FC236}">
+                <a16:creationId xmlns:a16="http://schemas.microsoft.com/office/drawing/2014/main" id="{4037BDD5-40E0-1C83-CAAC-852AD2B1CA8F}"/>
+              </a:ext>
+            </a:extLst>
+          </p:cNvPr>
+          <p:cNvSpPr txBox="1"/>
+          <p:nvPr/>
+        </p:nvSpPr>
+        <p:spPr>
+          <a:xfrm>
+            <a:off x="152400" y="3926670"/>
+            <a:ext cx="4100036" cy="2585323"/>
+          </a:xfrm>
+          <a:prstGeom prst="rect">
+            <a:avLst/>
+          </a:prstGeom>
+          <a:noFill/>
+        </p:spPr>
+        <p:txBody>
+          <a:bodyPr wrap="square">
+            <a:spAutoFit/>
+          </a:bodyPr>
+          <a:lstStyle/>
+          <a:p>
+            <a:pPr marL="214313" indent="-214313">
+              <a:buFont typeface="Arial" panose="020B0604020202020204" pitchFamily="34" charset="0"/>
+              <a:buChar char="•"/>
+            </a:pPr>
+            <a:r>
+              <a:rPr lang="en-US" dirty="0">
+                <a:solidFill>
+                  <a:srgbClr val="FFC000"/>
+                </a:solidFill>
+              </a:rPr>
+              <a:t>RAW: Read After Write </a:t>
+            </a:r>
+            <a:r>
+              <a:rPr lang="en-US" dirty="0"/>
+              <a:t>(instruction tries to read before previous instruction has finished writing)</a:t>
+            </a:r>
+          </a:p>
+          <a:p>
+            <a:pPr marL="214313" indent="-214313">
+              <a:buFont typeface="Arial" panose="020B0604020202020204" pitchFamily="34" charset="0"/>
+              <a:buChar char="•"/>
+            </a:pPr>
+            <a:r>
+              <a:rPr lang="en-US" dirty="0">
+                <a:solidFill>
+                  <a:srgbClr val="FFC000"/>
+                </a:solidFill>
+              </a:rPr>
+              <a:t>WAR: Write After Read </a:t>
+            </a:r>
+            <a:r>
+              <a:rPr lang="en-US" dirty="0"/>
+              <a:t>(instruction writes to a register before a previous instruction has read from it)</a:t>
+            </a:r>
+          </a:p>
+          <a:p>
+            <a:pPr marL="214313" indent="-214313">
+              <a:buFont typeface="Arial" panose="020B0604020202020204" pitchFamily="34" charset="0"/>
+              <a:buChar char="•"/>
+            </a:pPr>
+            <a:r>
+              <a:rPr lang="en-US" dirty="0">
+                <a:solidFill>
+                  <a:srgbClr val="FFC000"/>
+                </a:solidFill>
+              </a:rPr>
+              <a:t>WAW: Write After Write </a:t>
+            </a:r>
+            <a:r>
+              <a:rPr lang="en-US" dirty="0"/>
+              <a:t>(instruction writes to a register before an earlier instruction writes to it)</a:t>
+            </a:r>
+          </a:p>
+        </p:txBody>
+      </p:sp>
+      <p:sp>
+        <p:nvSpPr>
+          <p:cNvPr id="13" name="Rectangle 12">
+            <a:extLst>
+              <a:ext uri="{FF2B5EF4-FFF2-40B4-BE49-F238E27FC236}">
+                <a16:creationId xmlns:a16="http://schemas.microsoft.com/office/drawing/2014/main" id="{B17C58D4-998D-B653-EBE9-881AEDF63DBF}"/>
+              </a:ext>
+            </a:extLst>
+          </p:cNvPr>
+          <p:cNvSpPr/>
+          <p:nvPr/>
+        </p:nvSpPr>
+        <p:spPr>
+          <a:xfrm>
+            <a:off x="6172200" y="3523861"/>
+            <a:ext cx="381000" cy="228600"/>
+          </a:xfrm>
+          <a:prstGeom prst="rect">
+            <a:avLst/>
+          </a:prstGeom>
+          <a:noFill/>
+          <a:ln w="38100">
+            <a:solidFill>
+              <a:srgbClr val="FF0000"/>
+            </a:solidFill>
+          </a:ln>
+        </p:spPr>
+        <p:style>
+          <a:lnRef idx="2">
+            <a:schemeClr val="accent6"/>
+          </a:lnRef>
+          <a:fillRef idx="1">
+            <a:schemeClr val="lt1"/>
+          </a:fillRef>
+          <a:effectRef idx="0">
+            <a:schemeClr val="accent6"/>
+          </a:effectRef>
+          <a:fontRef idx="minor">
+            <a:schemeClr val="dk1"/>
+          </a:fontRef>
+        </p:style>
+        <p:txBody>
+          <a:bodyPr rtlCol="0" anchor="ctr"/>
+          <a:lstStyle/>
+          <a:p>
+            <a:pPr algn="ctr"/>
+            <a:endParaRPr lang="en-IN"/>
+          </a:p>
+        </p:txBody>
+      </p:sp>
+      <p:sp>
+        <p:nvSpPr>
+          <p:cNvPr id="14" name="Rectangle 13">
+            <a:extLst>
+              <a:ext uri="{FF2B5EF4-FFF2-40B4-BE49-F238E27FC236}">
+                <a16:creationId xmlns:a16="http://schemas.microsoft.com/office/drawing/2014/main" id="{D712CA9C-B126-9270-E66B-BB7AC7DFBE6C}"/>
+              </a:ext>
+            </a:extLst>
+          </p:cNvPr>
+          <p:cNvSpPr/>
+          <p:nvPr/>
+        </p:nvSpPr>
+        <p:spPr>
+          <a:xfrm>
+            <a:off x="6567196" y="3956179"/>
+            <a:ext cx="381000" cy="228600"/>
+          </a:xfrm>
+          <a:prstGeom prst="rect">
+            <a:avLst/>
+          </a:prstGeom>
+          <a:noFill/>
+          <a:ln w="38100">
+            <a:solidFill>
+              <a:srgbClr val="FF0000"/>
+            </a:solidFill>
+          </a:ln>
+        </p:spPr>
+        <p:style>
+          <a:lnRef idx="2">
+            <a:schemeClr val="accent6"/>
+          </a:lnRef>
+          <a:fillRef idx="1">
+            <a:schemeClr val="lt1"/>
+          </a:fillRef>
+          <a:effectRef idx="0">
+            <a:schemeClr val="accent6"/>
+          </a:effectRef>
+          <a:fontRef idx="minor">
+            <a:schemeClr val="dk1"/>
+          </a:fontRef>
+        </p:style>
+        <p:txBody>
+          <a:bodyPr rtlCol="0" anchor="ctr"/>
+          <a:lstStyle/>
+          <a:p>
+            <a:pPr algn="ctr"/>
+            <a:endParaRPr lang="en-IN"/>
+          </a:p>
+        </p:txBody>
+      </p:sp>
+      <p:sp>
+        <p:nvSpPr>
+          <p:cNvPr id="15" name="Rectangle 14">
+            <a:extLst>
+              <a:ext uri="{FF2B5EF4-FFF2-40B4-BE49-F238E27FC236}">
+                <a16:creationId xmlns:a16="http://schemas.microsoft.com/office/drawing/2014/main" id="{BCCC1445-8308-0C4B-B11E-B639404B59F7}"/>
+              </a:ext>
+            </a:extLst>
+          </p:cNvPr>
+          <p:cNvSpPr/>
+          <p:nvPr/>
+        </p:nvSpPr>
+        <p:spPr>
+          <a:xfrm>
+            <a:off x="6941477" y="4371591"/>
+            <a:ext cx="381000" cy="228600"/>
+          </a:xfrm>
+          <a:prstGeom prst="rect">
+            <a:avLst/>
+          </a:prstGeom>
+          <a:noFill/>
+          <a:ln w="38100">
+            <a:solidFill>
+              <a:srgbClr val="FF0000"/>
+            </a:solidFill>
+          </a:ln>
+        </p:spPr>
+        <p:style>
+          <a:lnRef idx="2">
+            <a:schemeClr val="accent6"/>
+          </a:lnRef>
+          <a:fillRef idx="1">
+            <a:schemeClr val="lt1"/>
+          </a:fillRef>
+          <a:effectRef idx="0">
+            <a:schemeClr val="accent6"/>
+          </a:effectRef>
+          <a:fontRef idx="minor">
+            <a:schemeClr val="dk1"/>
+          </a:fontRef>
+        </p:style>
+        <p:txBody>
+          <a:bodyPr rtlCol="0" anchor="ctr"/>
+          <a:lstStyle/>
+          <a:p>
+            <a:pPr algn="ctr"/>
+            <a:endParaRPr lang="en-IN"/>
+          </a:p>
+        </p:txBody>
+      </p:sp>
+      <p:sp>
+        <p:nvSpPr>
+          <p:cNvPr id="16" name="Rectangle 15">
+            <a:extLst>
+              <a:ext uri="{FF2B5EF4-FFF2-40B4-BE49-F238E27FC236}">
+                <a16:creationId xmlns:a16="http://schemas.microsoft.com/office/drawing/2014/main" id="{7FF4D821-DB5E-ACDD-4D2A-D910480983A6}"/>
+              </a:ext>
+            </a:extLst>
+          </p:cNvPr>
+          <p:cNvSpPr/>
+          <p:nvPr/>
+        </p:nvSpPr>
+        <p:spPr>
+          <a:xfrm>
+            <a:off x="6941477" y="4377774"/>
+            <a:ext cx="381000" cy="222218"/>
+          </a:xfrm>
+          <a:prstGeom prst="rect">
+            <a:avLst/>
+          </a:prstGeom>
+          <a:noFill/>
+          <a:ln w="38100">
+            <a:solidFill>
+              <a:srgbClr val="00FF00"/>
+            </a:solidFill>
+          </a:ln>
+        </p:spPr>
+        <p:style>
+          <a:lnRef idx="2">
+            <a:schemeClr val="accent6"/>
+          </a:lnRef>
+          <a:fillRef idx="1">
+            <a:schemeClr val="lt1"/>
+          </a:fillRef>
+          <a:effectRef idx="0">
+            <a:schemeClr val="accent6"/>
+          </a:effectRef>
+          <a:fontRef idx="minor">
+            <a:schemeClr val="dk1"/>
+          </a:fontRef>
+        </p:style>
+        <p:txBody>
+          <a:bodyPr rtlCol="0" anchor="ctr"/>
+          <a:lstStyle/>
+          <a:p>
+            <a:pPr algn="ctr"/>
+            <a:endParaRPr lang="en-IN"/>
+          </a:p>
+        </p:txBody>
+      </p:sp>
+    </p:spTree>
+    <p:extLst>
+      <p:ext uri="{BB962C8B-B14F-4D97-AF65-F5344CB8AC3E}">
+        <p14:creationId xmlns:p14="http://schemas.microsoft.com/office/powerpoint/2010/main" val="766500991"/>
+      </p:ext>
+    </p:extLst>
+  </p:cSld>
+  <p:clrMapOvr>
+    <a:masterClrMapping/>
+  </p:clrMapOvr>
+  <p:timing>
+    <p:tnLst>
+      <p:par>
+        <p:cTn id="1" dur="indefinite" restart="never" nodeType="tmRoot">
+          <p:childTnLst>
+            <p:seq concurrent="1" nextAc="seek">
+              <p:cTn id="2" dur="indefinite" nodeType="mainSeq">
+                <p:childTnLst>
+                  <p:par>
+                    <p:cTn id="3" fill="hold">
+                      <p:stCondLst>
+                        <p:cond delay="indefinite"/>
+                      </p:stCondLst>
+                      <p:childTnLst>
+                        <p:par>
+                          <p:cTn id="4" fill="hold">
+                            <p:stCondLst>
+                              <p:cond delay="0"/>
+                            </p:stCondLst>
+                            <p:childTnLst>
+                              <p:par>
+                                <p:cTn id="5" presetID="1" presetClass="entr" presetSubtype="0" fill="hold" grpId="0" nodeType="clickEffect">
+                                  <p:stCondLst>
+                                    <p:cond delay="0"/>
+                                  </p:stCondLst>
+                                  <p:childTnLst>
+                                    <p:set>
+                                      <p:cBhvr>
+                                        <p:cTn id="6" dur="1" fill="hold">
+                                          <p:stCondLst>
+                                            <p:cond delay="0"/>
+                                          </p:stCondLst>
+                                        </p:cTn>
+                                        <p:tgtEl>
+                                          <p:spTgt spid="12">
+                                            <p:txEl>
+                                              <p:pRg st="0" end="0"/>
+                                            </p:txEl>
+                                          </p:spTgt>
+                                        </p:tgtEl>
+                                        <p:attrNameLst>
+                                          <p:attrName>style.visibility</p:attrName>
+                                        </p:attrNameLst>
+                                      </p:cBhvr>
+                                      <p:to>
+                                        <p:strVal val="visible"/>
+                                      </p:to>
+                                    </p:set>
+                                  </p:childTnLst>
+                                </p:cTn>
+                              </p:par>
+                            </p:childTnLst>
+                          </p:cTn>
+                        </p:par>
+                      </p:childTnLst>
+                    </p:cTn>
+                  </p:par>
+                  <p:par>
+                    <p:cTn id="7" fill="hold">
+                      <p:stCondLst>
+                        <p:cond delay="indefinite"/>
+                      </p:stCondLst>
+                      <p:childTnLst>
+                        <p:par>
+                          <p:cTn id="8" fill="hold">
+                            <p:stCondLst>
+                              <p:cond delay="0"/>
+                            </p:stCondLst>
+                            <p:childTnLst>
+                              <p:par>
+                                <p:cTn id="9" presetID="1" presetClass="entr" presetSubtype="0" fill="hold" grpId="0" nodeType="clickEffect">
+                                  <p:stCondLst>
+                                    <p:cond delay="0"/>
+                                  </p:stCondLst>
+                                  <p:childTnLst>
+                                    <p:set>
+                                      <p:cBhvr>
+                                        <p:cTn id="10" dur="1" fill="hold">
+                                          <p:stCondLst>
+                                            <p:cond delay="0"/>
+                                          </p:stCondLst>
+                                        </p:cTn>
+                                        <p:tgtEl>
+                                          <p:spTgt spid="12">
+                                            <p:txEl>
+                                              <p:pRg st="1" end="1"/>
+                                            </p:txEl>
+                                          </p:spTgt>
+                                        </p:tgtEl>
+                                        <p:attrNameLst>
+                                          <p:attrName>style.visibility</p:attrName>
+                                        </p:attrNameLst>
+                                      </p:cBhvr>
+                                      <p:to>
+                                        <p:strVal val="visible"/>
+                                      </p:to>
+                                    </p:set>
+                                  </p:childTnLst>
+                                </p:cTn>
+                              </p:par>
+                            </p:childTnLst>
+                          </p:cTn>
+                        </p:par>
+                      </p:childTnLst>
+                    </p:cTn>
+                  </p:par>
+                  <p:par>
+                    <p:cTn id="11" fill="hold">
+                      <p:stCondLst>
+                        <p:cond delay="indefinite"/>
+                      </p:stCondLst>
+                      <p:childTnLst>
+                        <p:par>
+                          <p:cTn id="12" fill="hold">
+                            <p:stCondLst>
+                              <p:cond delay="0"/>
+                            </p:stCondLst>
+                            <p:childTnLst>
+                              <p:par>
+                                <p:cTn id="13" presetID="1" presetClass="entr" presetSubtype="0" fill="hold" grpId="0" nodeType="clickEffect">
+                                  <p:stCondLst>
+                                    <p:cond delay="0"/>
+                                  </p:stCondLst>
+                                  <p:childTnLst>
+                                    <p:set>
+                                      <p:cBhvr>
+                                        <p:cTn id="14" dur="1" fill="hold">
+                                          <p:stCondLst>
+                                            <p:cond delay="0"/>
+                                          </p:stCondLst>
+                                        </p:cTn>
+                                        <p:tgtEl>
+                                          <p:spTgt spid="12">
+                                            <p:txEl>
+                                              <p:pRg st="2" end="2"/>
+                                            </p:txEl>
+                                          </p:spTgt>
+                                        </p:tgtEl>
+                                        <p:attrNameLst>
+                                          <p:attrName>style.visibility</p:attrName>
+                                        </p:attrNameLst>
+                                      </p:cBhvr>
+                                      <p:to>
+                                        <p:strVal val="visible"/>
+                                      </p:to>
+                                    </p:set>
+                                  </p:childTnLst>
+                                </p:cTn>
+                              </p:par>
+                            </p:childTnLst>
+                          </p:cTn>
+                        </p:par>
+                      </p:childTnLst>
+                    </p:cTn>
+                  </p:par>
+                  <p:par>
+                    <p:cTn id="15" fill="hold">
+                      <p:stCondLst>
+                        <p:cond delay="indefinite"/>
+                      </p:stCondLst>
+                      <p:childTnLst>
+                        <p:par>
+                          <p:cTn id="16" fill="hold">
+                            <p:stCondLst>
+                              <p:cond delay="0"/>
+                            </p:stCondLst>
+                            <p:childTnLst>
+                              <p:par>
+                                <p:cTn id="17" presetID="1" presetClass="entr" presetSubtype="0" fill="hold" nodeType="clickEffect">
+                                  <p:stCondLst>
+                                    <p:cond delay="0"/>
+                                  </p:stCondLst>
+                                  <p:childTnLst>
+                                    <p:set>
+                                      <p:cBhvr>
+                                        <p:cTn id="18" dur="1" fill="hold">
+                                          <p:stCondLst>
+                                            <p:cond delay="0"/>
+                                          </p:stCondLst>
+                                        </p:cTn>
+                                        <p:tgtEl>
+                                          <p:spTgt spid="10"/>
+                                        </p:tgtEl>
+                                        <p:attrNameLst>
+                                          <p:attrName>style.visibility</p:attrName>
+                                        </p:attrNameLst>
+                                      </p:cBhvr>
+                                      <p:to>
+                                        <p:strVal val="visible"/>
+                                      </p:to>
+                                    </p:set>
+                                  </p:childTnLst>
+                                </p:cTn>
+                              </p:par>
+                            </p:childTnLst>
+                          </p:cTn>
+                        </p:par>
+                      </p:childTnLst>
+                    </p:cTn>
+                  </p:par>
+                  <p:par>
+                    <p:cTn id="19" fill="hold">
+                      <p:stCondLst>
+                        <p:cond delay="indefinite"/>
+                      </p:stCondLst>
+                      <p:childTnLst>
+                        <p:par>
+                          <p:cTn id="20" fill="hold">
+                            <p:stCondLst>
+                              <p:cond delay="0"/>
+                            </p:stCondLst>
+                            <p:childTnLst>
+                              <p:par>
+                                <p:cTn id="21" presetID="1" presetClass="entr" presetSubtype="0" fill="hold" nodeType="clickEffect">
+                                  <p:stCondLst>
+                                    <p:cond delay="0"/>
+                                  </p:stCondLst>
+                                  <p:childTnLst>
+                                    <p:set>
+                                      <p:cBhvr>
+                                        <p:cTn id="22" dur="1" fill="hold">
+                                          <p:stCondLst>
+                                            <p:cond delay="0"/>
+                                          </p:stCondLst>
+                                        </p:cTn>
+                                        <p:tgtEl>
+                                          <p:spTgt spid="11"/>
+                                        </p:tgtEl>
+                                        <p:attrNameLst>
+                                          <p:attrName>style.visibility</p:attrName>
+                                        </p:attrNameLst>
+                                      </p:cBhvr>
+                                      <p:to>
+                                        <p:strVal val="visible"/>
+                                      </p:to>
+                                    </p:set>
+                                  </p:childTnLst>
+                                </p:cTn>
+                              </p:par>
+                            </p:childTnLst>
+                          </p:cTn>
+                        </p:par>
+                      </p:childTnLst>
+                    </p:cTn>
+                  </p:par>
+                  <p:par>
+                    <p:cTn id="23" fill="hold">
+                      <p:stCondLst>
+                        <p:cond delay="indefinite"/>
+                      </p:stCondLst>
+                      <p:childTnLst>
+                        <p:par>
+                          <p:cTn id="24" fill="hold">
+                            <p:stCondLst>
+                              <p:cond delay="0"/>
+                            </p:stCondLst>
+                            <p:childTnLst>
+                              <p:par>
+                                <p:cTn id="25" presetID="1" presetClass="entr" presetSubtype="0" fill="hold" grpId="0" nodeType="clickEffect">
+                                  <p:stCondLst>
+                                    <p:cond delay="0"/>
+                                  </p:stCondLst>
+                                  <p:childTnLst>
+                                    <p:set>
+                                      <p:cBhvr>
+                                        <p:cTn id="26" dur="1" fill="hold">
+                                          <p:stCondLst>
+                                            <p:cond delay="0"/>
+                                          </p:stCondLst>
+                                        </p:cTn>
+                                        <p:tgtEl>
+                                          <p:spTgt spid="13"/>
+                                        </p:tgtEl>
+                                        <p:attrNameLst>
+                                          <p:attrName>style.visibility</p:attrName>
+                                        </p:attrNameLst>
+                                      </p:cBhvr>
+                                      <p:to>
+                                        <p:strVal val="visible"/>
+                                      </p:to>
+                                    </p:set>
+                                  </p:childTnLst>
+                                </p:cTn>
+                              </p:par>
+                            </p:childTnLst>
+                          </p:cTn>
+                        </p:par>
+                      </p:childTnLst>
+                    </p:cTn>
+                  </p:par>
+                  <p:par>
+                    <p:cTn id="27" fill="hold">
+                      <p:stCondLst>
+                        <p:cond delay="indefinite"/>
+                      </p:stCondLst>
+                      <p:childTnLst>
+                        <p:par>
+                          <p:cTn id="28" fill="hold">
+                            <p:stCondLst>
+                              <p:cond delay="0"/>
+                            </p:stCondLst>
+                            <p:childTnLst>
+                              <p:par>
+                                <p:cTn id="29" presetID="1" presetClass="entr" presetSubtype="0" fill="hold" grpId="0" nodeType="clickEffect">
+                                  <p:stCondLst>
+                                    <p:cond delay="0"/>
+                                  </p:stCondLst>
+                                  <p:childTnLst>
+                                    <p:set>
+                                      <p:cBhvr>
+                                        <p:cTn id="30" dur="1" fill="hold">
+                                          <p:stCondLst>
+                                            <p:cond delay="0"/>
+                                          </p:stCondLst>
+                                        </p:cTn>
+                                        <p:tgtEl>
+                                          <p:spTgt spid="14"/>
+                                        </p:tgtEl>
+                                        <p:attrNameLst>
+                                          <p:attrName>style.visibility</p:attrName>
+                                        </p:attrNameLst>
+                                      </p:cBhvr>
+                                      <p:to>
+                                        <p:strVal val="visible"/>
+                                      </p:to>
+                                    </p:set>
+                                  </p:childTnLst>
+                                </p:cTn>
+                              </p:par>
+                            </p:childTnLst>
+                          </p:cTn>
+                        </p:par>
+                      </p:childTnLst>
+                    </p:cTn>
+                  </p:par>
+                  <p:par>
+                    <p:cTn id="31" fill="hold">
+                      <p:stCondLst>
+                        <p:cond delay="indefinite"/>
+                      </p:stCondLst>
+                      <p:childTnLst>
+                        <p:par>
+                          <p:cTn id="32" fill="hold">
+                            <p:stCondLst>
+                              <p:cond delay="0"/>
+                            </p:stCondLst>
+                            <p:childTnLst>
+                              <p:par>
+                                <p:cTn id="33" presetID="1" presetClass="entr" presetSubtype="0" fill="hold" grpId="0" nodeType="clickEffect">
+                                  <p:stCondLst>
+                                    <p:cond delay="0"/>
+                                  </p:stCondLst>
+                                  <p:childTnLst>
+                                    <p:set>
+                                      <p:cBhvr>
+                                        <p:cTn id="34" dur="1" fill="hold">
+                                          <p:stCondLst>
+                                            <p:cond delay="0"/>
+                                          </p:stCondLst>
+                                        </p:cTn>
+                                        <p:tgtEl>
+                                          <p:spTgt spid="15"/>
+                                        </p:tgtEl>
+                                        <p:attrNameLst>
+                                          <p:attrName>style.visibility</p:attrName>
+                                        </p:attrNameLst>
+                                      </p:cBhvr>
+                                      <p:to>
+                                        <p:strVal val="visible"/>
+                                      </p:to>
+                                    </p:set>
+                                  </p:childTnLst>
+                                </p:cTn>
+                              </p:par>
+                            </p:childTnLst>
+                          </p:cTn>
+                        </p:par>
+                      </p:childTnLst>
+                    </p:cTn>
+                  </p:par>
+                  <p:par>
+                    <p:cTn id="35" fill="hold">
+                      <p:stCondLst>
+                        <p:cond delay="indefinite"/>
+                      </p:stCondLst>
+                      <p:childTnLst>
+                        <p:par>
+                          <p:cTn id="36" fill="hold">
+                            <p:stCondLst>
+                              <p:cond delay="0"/>
+                            </p:stCondLst>
+                            <p:childTnLst>
+                              <p:par>
+                                <p:cTn id="37" presetID="1" presetClass="entr" presetSubtype="0" fill="hold" grpId="0" nodeType="clickEffect">
+                                  <p:stCondLst>
+                                    <p:cond delay="0"/>
+                                  </p:stCondLst>
+                                  <p:childTnLst>
+                                    <p:set>
+                                      <p:cBhvr>
+                                        <p:cTn id="38" dur="1" fill="hold">
+                                          <p:stCondLst>
+                                            <p:cond delay="0"/>
+                                          </p:stCondLst>
+                                        </p:cTn>
+                                        <p:tgtEl>
+                                          <p:spTgt spid="16"/>
+                                        </p:tgtEl>
+                                        <p:attrNameLst>
+                                          <p:attrName>style.visibility</p:attrName>
+                                        </p:attrNameLst>
+                                      </p:cBhvr>
+                                      <p:to>
+                                        <p:strVal val="visible"/>
+                                      </p:to>
+                                    </p:set>
+                                  </p:childTnLst>
+                                </p:cTn>
+                              </p:par>
+                            </p:childTnLst>
+                          </p:cTn>
+                        </p:par>
+                      </p:childTnLst>
+                    </p:cTn>
+                  </p:par>
+                </p:childTnLst>
+              </p:cTn>
+              <p:prevCondLst>
+                <p:cond evt="onPrev" delay="0">
+                  <p:tgtEl>
+                    <p:sldTgt/>
+                  </p:tgtEl>
+                </p:cond>
+              </p:prevCondLst>
+              <p:nextCondLst>
+                <p:cond evt="onNext" delay="0">
+                  <p:tgtEl>
+                    <p:sldTgt/>
+                  </p:tgtEl>
+                </p:cond>
+              </p:nextCondLst>
+            </p:seq>
+          </p:childTnLst>
+        </p:cTn>
+      </p:par>
+    </p:tnLst>
+    <p:bldLst>
+      <p:bldP spid="12" grpId="0" build="p"/>
+      <p:bldP spid="13" grpId="0" animBg="1"/>
+      <p:bldP spid="14" grpId="0" animBg="1"/>
+      <p:bldP spid="15" grpId="0" animBg="1"/>
+      <p:bldP spid="16" grpId="0" animBg="1"/>
+    </p:bldLst>
+  </p:timing>
+</p:sld>
+</file>
+
+<file path=ppt/slides/slide17.xml><?xml version="1.0" encoding="utf-8"?>
+<p:sld xmlns:a="http://schemas.openxmlformats.org/drawingml/2006/main" xmlns:r="http://schemas.openxmlformats.org/officeDocument/2006/relationships" xmlns:p="http://schemas.openxmlformats.org/presentationml/2006/main">
+  <p:cSld>
+    <p:spTree>
+      <p:nvGrpSpPr>
+        <p:cNvPr id="1" name=""/>
+        <p:cNvGrpSpPr/>
+        <p:nvPr/>
+      </p:nvGrpSpPr>
+      <p:grpSpPr>
+        <a:xfrm>
+          <a:off x="0" y="0"/>
+          <a:ext cx="0" cy="0"/>
+          <a:chOff x="0" y="0"/>
+          <a:chExt cx="0" cy="0"/>
+        </a:xfrm>
+      </p:grpSpPr>
+      <p:sp>
+        <p:nvSpPr>
+          <p:cNvPr id="2" name="Title 1">
+            <a:extLst>
+              <a:ext uri="{FF2B5EF4-FFF2-40B4-BE49-F238E27FC236}">
+                <a16:creationId xmlns:a16="http://schemas.microsoft.com/office/drawing/2014/main" id="{DC5B9578-289F-7361-6E7C-6F93AA70B0BC}"/>
+              </a:ext>
+            </a:extLst>
+          </p:cNvPr>
+          <p:cNvSpPr>
+            <a:spLocks noGrp="1"/>
+          </p:cNvSpPr>
+          <p:nvPr>
+            <p:ph type="title"/>
+          </p:nvPr>
+        </p:nvSpPr>
+        <p:spPr/>
+        <p:txBody>
+          <a:bodyPr/>
+          <a:lstStyle/>
+          <a:p>
+            <a:r>
+              <a:rPr lang="en-US" dirty="0"/>
+              <a:t>Data hazard solution – bubbles (stalling)</a:t>
+            </a:r>
+          </a:p>
+        </p:txBody>
+      </p:sp>
+      <p:pic>
+        <p:nvPicPr>
+          <p:cNvPr id="8" name="Content Placeholder 7">
+            <a:extLst>
+              <a:ext uri="{FF2B5EF4-FFF2-40B4-BE49-F238E27FC236}">
+                <a16:creationId xmlns:a16="http://schemas.microsoft.com/office/drawing/2014/main" id="{436127FF-0284-EEB4-CBBA-9F89ADA4BAAB}"/>
+              </a:ext>
+            </a:extLst>
+          </p:cNvPr>
+          <p:cNvPicPr>
+            <a:picLocks noGrp="1" noChangeAspect="1"/>
+          </p:cNvPicPr>
+          <p:nvPr>
+            <p:ph idx="1"/>
+          </p:nvPr>
+        </p:nvPicPr>
+        <p:blipFill>
+          <a:blip r:embed="rId2"/>
+          <a:stretch>
+            <a:fillRect/>
+          </a:stretch>
+        </p:blipFill>
+        <p:spPr>
+          <a:xfrm>
+            <a:off x="2231905" y="1552855"/>
+            <a:ext cx="6867998" cy="2352487"/>
+          </a:xfrm>
+        </p:spPr>
+      </p:pic>
+      <p:sp>
+        <p:nvSpPr>
+          <p:cNvPr id="4" name="Date Placeholder 3">
+            <a:extLst>
+              <a:ext uri="{FF2B5EF4-FFF2-40B4-BE49-F238E27FC236}">
+                <a16:creationId xmlns:a16="http://schemas.microsoft.com/office/drawing/2014/main" id="{C9E8E2A0-3D68-944C-2F37-6CA64E76A39F}"/>
+              </a:ext>
+            </a:extLst>
+          </p:cNvPr>
+          <p:cNvSpPr>
+            <a:spLocks noGrp="1"/>
+          </p:cNvSpPr>
+          <p:nvPr>
+            <p:ph type="dt" sz="half" idx="10"/>
+          </p:nvPr>
+        </p:nvSpPr>
+        <p:spPr/>
+        <p:txBody>
+          <a:bodyPr/>
+          <a:lstStyle/>
+          <a:p>
+            <a:fld id="{B4B13859-67C5-4393-B6C2-556CF3F770C0}" type="datetime3">
+              <a:rPr lang="en-US" smtClean="0"/>
+              <a:t>23 February 2026</a:t>
+            </a:fld>
+            <a:endParaRPr lang="en-US"/>
+          </a:p>
+        </p:txBody>
+      </p:sp>
+      <p:sp>
+        <p:nvSpPr>
+          <p:cNvPr id="6" name="Slide Number Placeholder 5">
+            <a:extLst>
+              <a:ext uri="{FF2B5EF4-FFF2-40B4-BE49-F238E27FC236}">
+                <a16:creationId xmlns:a16="http://schemas.microsoft.com/office/drawing/2014/main" id="{70146E4A-4437-AB75-1669-331861CFDDC9}"/>
+              </a:ext>
+            </a:extLst>
+          </p:cNvPr>
+          <p:cNvSpPr>
+            <a:spLocks noGrp="1"/>
+          </p:cNvSpPr>
+          <p:nvPr>
+            <p:ph type="sldNum" sz="quarter" idx="12"/>
+          </p:nvPr>
+        </p:nvSpPr>
+        <p:spPr/>
+        <p:txBody>
+          <a:bodyPr/>
+          <a:lstStyle/>
+          <a:p>
+            <a:fld id="{98AC3541-01C1-4CA5-B68F-FEE868C7D1AF}" type="slidenum">
+              <a:rPr lang="en-US" smtClean="0"/>
+              <a:t>17</a:t>
+            </a:fld>
+            <a:endParaRPr lang="en-US"/>
+          </a:p>
+        </p:txBody>
+      </p:sp>
+      <p:sp>
+        <p:nvSpPr>
+          <p:cNvPr id="10" name="TextBox 9">
+            <a:extLst>
+              <a:ext uri="{FF2B5EF4-FFF2-40B4-BE49-F238E27FC236}">
+                <a16:creationId xmlns:a16="http://schemas.microsoft.com/office/drawing/2014/main" id="{0F5C724A-47E6-F89F-984C-8DA468AFA23F}"/>
+              </a:ext>
+            </a:extLst>
+          </p:cNvPr>
+          <p:cNvSpPr txBox="1"/>
+          <p:nvPr/>
+        </p:nvSpPr>
+        <p:spPr>
+          <a:xfrm>
+            <a:off x="17106" y="2277853"/>
+            <a:ext cx="3259494" cy="1200329"/>
+          </a:xfrm>
+          <a:prstGeom prst="rect">
+            <a:avLst/>
+          </a:prstGeom>
+          <a:noFill/>
+        </p:spPr>
+        <p:txBody>
+          <a:bodyPr wrap="square">
+            <a:spAutoFit/>
+          </a:bodyPr>
+          <a:lstStyle/>
+          <a:p>
+            <a:r>
+              <a:rPr lang="en-US" dirty="0"/>
+              <a:t>Bubbles: affected pipeline stages do “nothing” for a  cycle.</a:t>
+            </a:r>
+          </a:p>
+          <a:p>
+            <a:r>
+              <a:rPr lang="en-US" dirty="0">
+                <a:solidFill>
+                  <a:srgbClr val="FF0000"/>
+                </a:solidFill>
+              </a:rPr>
+              <a:t>How many bubbles in RAW?</a:t>
+            </a:r>
+          </a:p>
+        </p:txBody>
+      </p:sp>
+      <p:sp>
+        <p:nvSpPr>
+          <p:cNvPr id="12" name="TextBox 11">
+            <a:extLst>
+              <a:ext uri="{FF2B5EF4-FFF2-40B4-BE49-F238E27FC236}">
+                <a16:creationId xmlns:a16="http://schemas.microsoft.com/office/drawing/2014/main" id="{B2BF490F-9CAB-7E2C-F585-4AF69BD0B502}"/>
+              </a:ext>
+            </a:extLst>
+          </p:cNvPr>
+          <p:cNvSpPr txBox="1"/>
+          <p:nvPr/>
+        </p:nvSpPr>
+        <p:spPr>
+          <a:xfrm>
+            <a:off x="172942" y="4149202"/>
+            <a:ext cx="5161058" cy="2308324"/>
+          </a:xfrm>
+          <a:prstGeom prst="rect">
+            <a:avLst/>
+          </a:prstGeom>
+          <a:noFill/>
+        </p:spPr>
+        <p:txBody>
+          <a:bodyPr wrap="square">
+            <a:spAutoFit/>
+          </a:bodyPr>
+          <a:lstStyle/>
+          <a:p>
+            <a:pPr marL="214313" indent="-214313">
+              <a:buFont typeface="Arial" panose="020B0604020202020204" pitchFamily="34" charset="0"/>
+              <a:buChar char="•"/>
+            </a:pPr>
+            <a:r>
+              <a:rPr lang="en-US" dirty="0"/>
+              <a:t>Stalls reduce performance</a:t>
+            </a:r>
+          </a:p>
+          <a:p>
+            <a:pPr marL="214313" indent="-214313">
+              <a:buFont typeface="Arial" panose="020B0604020202020204" pitchFamily="34" charset="0"/>
+              <a:buChar char="•"/>
+            </a:pPr>
+            <a:endParaRPr lang="en-US" dirty="0"/>
+          </a:p>
+          <a:p>
+            <a:pPr marL="214313" indent="-214313">
+              <a:buFont typeface="Arial" panose="020B0604020202020204" pitchFamily="34" charset="0"/>
+              <a:buChar char="•"/>
+            </a:pPr>
+            <a:r>
+              <a:rPr lang="en-US" dirty="0">
+                <a:solidFill>
+                  <a:srgbClr val="FF0000"/>
+                </a:solidFill>
+              </a:rPr>
+              <a:t>How to mitigate stall performance degradation?</a:t>
+            </a:r>
+          </a:p>
+          <a:p>
+            <a:pPr marL="214313" indent="-214313">
+              <a:buFont typeface="Arial" panose="020B0604020202020204" pitchFamily="34" charset="0"/>
+              <a:buChar char="•"/>
+            </a:pPr>
+            <a:r>
+              <a:rPr lang="en-US" dirty="0"/>
+              <a:t>Compilers can arrange the instructions such that these conditions are avoided</a:t>
+            </a:r>
+          </a:p>
+          <a:p>
+            <a:pPr marL="557213" lvl="1" indent="-214313">
+              <a:buFont typeface="Arial" panose="020B0604020202020204" pitchFamily="34" charset="0"/>
+              <a:buChar char="•"/>
+            </a:pPr>
+            <a:r>
+              <a:rPr lang="en-US" dirty="0"/>
+              <a:t>Compilers must know how the pipeline is implemented and how instructions interact</a:t>
+            </a:r>
+          </a:p>
+        </p:txBody>
+      </p:sp>
+      <p:pic>
+        <p:nvPicPr>
+          <p:cNvPr id="7" name="Picture 6">
+            <a:extLst>
+              <a:ext uri="{FF2B5EF4-FFF2-40B4-BE49-F238E27FC236}">
+                <a16:creationId xmlns:a16="http://schemas.microsoft.com/office/drawing/2014/main" id="{76DEE025-B5C6-7CF5-62F1-FA3D6C1E9A6C}"/>
+              </a:ext>
+            </a:extLst>
+          </p:cNvPr>
+          <p:cNvPicPr>
+            <a:picLocks noChangeAspect="1"/>
+          </p:cNvPicPr>
+          <p:nvPr/>
+        </p:nvPicPr>
+        <p:blipFill>
+          <a:blip r:embed="rId3"/>
+          <a:stretch>
+            <a:fillRect/>
+          </a:stretch>
+        </p:blipFill>
+        <p:spPr>
+          <a:xfrm>
+            <a:off x="5257800" y="4343400"/>
+            <a:ext cx="1676400" cy="838200"/>
+          </a:xfrm>
+          <a:prstGeom prst="rect">
+            <a:avLst/>
+          </a:prstGeom>
+        </p:spPr>
+      </p:pic>
+      <p:grpSp>
+        <p:nvGrpSpPr>
+          <p:cNvPr id="16" name="Group 15">
+            <a:extLst>
+              <a:ext uri="{FF2B5EF4-FFF2-40B4-BE49-F238E27FC236}">
+                <a16:creationId xmlns:a16="http://schemas.microsoft.com/office/drawing/2014/main" id="{0115D45D-2805-75B4-6D1C-66FFE9B6D287}"/>
+              </a:ext>
+            </a:extLst>
+          </p:cNvPr>
+          <p:cNvGrpSpPr/>
+          <p:nvPr/>
+        </p:nvGrpSpPr>
+        <p:grpSpPr>
+          <a:xfrm>
+            <a:off x="6035351" y="5292478"/>
+            <a:ext cx="2446951" cy="1165048"/>
+            <a:chOff x="6035351" y="5292478"/>
+            <a:chExt cx="2446951" cy="1165048"/>
+          </a:xfrm>
+        </p:grpSpPr>
+        <p:pic>
+          <p:nvPicPr>
+            <p:cNvPr id="11" name="Picture 10">
+              <a:extLst>
+                <a:ext uri="{FF2B5EF4-FFF2-40B4-BE49-F238E27FC236}">
+                  <a16:creationId xmlns:a16="http://schemas.microsoft.com/office/drawing/2014/main" id="{D83BBD28-DA05-943E-7586-EAB693AA85E4}"/>
+                </a:ext>
+              </a:extLst>
+            </p:cNvPr>
+            <p:cNvPicPr>
+              <a:picLocks noChangeAspect="1"/>
+            </p:cNvPicPr>
+            <p:nvPr/>
+          </p:nvPicPr>
+          <p:blipFill>
+            <a:blip r:embed="rId4"/>
+            <a:stretch>
+              <a:fillRect/>
+            </a:stretch>
+          </p:blipFill>
+          <p:spPr>
+            <a:xfrm>
+              <a:off x="6629399" y="5309312"/>
+              <a:ext cx="1676399" cy="845127"/>
+            </a:xfrm>
+            <a:prstGeom prst="rect">
+              <a:avLst/>
+            </a:prstGeom>
+          </p:spPr>
+        </p:pic>
+        <p:sp>
+          <p:nvSpPr>
+            <p:cNvPr id="13" name="Arrow: Bent-Up 12">
+              <a:extLst>
+                <a:ext uri="{FF2B5EF4-FFF2-40B4-BE49-F238E27FC236}">
+                  <a16:creationId xmlns:a16="http://schemas.microsoft.com/office/drawing/2014/main" id="{458E9916-23A1-F95F-5BD2-1D4801C652BD}"/>
+                </a:ext>
+              </a:extLst>
+            </p:cNvPr>
+            <p:cNvSpPr/>
+            <p:nvPr/>
+          </p:nvSpPr>
+          <p:spPr>
+            <a:xfrm rot="5400000">
+              <a:off x="5947552" y="5380277"/>
+              <a:ext cx="649562" cy="473964"/>
+            </a:xfrm>
+            <a:prstGeom prst="bentUpArrow">
+              <a:avLst/>
+            </a:prstGeom>
+            <a:solidFill>
+              <a:schemeClr val="dk1">
+                <a:alpha val="50000"/>
+              </a:schemeClr>
+            </a:solidFill>
+            <a:ln>
+              <a:noFill/>
+            </a:ln>
+          </p:spPr>
+          <p:style>
+            <a:lnRef idx="0">
+              <a:scrgbClr r="0" g="0" b="0"/>
+            </a:lnRef>
+            <a:fillRef idx="0">
+              <a:scrgbClr r="0" g="0" b="0"/>
+            </a:fillRef>
+            <a:effectRef idx="0">
+              <a:scrgbClr r="0" g="0" b="0"/>
+            </a:effectRef>
+            <a:fontRef idx="minor">
+              <a:schemeClr val="lt1"/>
+            </a:fontRef>
+          </p:style>
+          <p:txBody>
+            <a:bodyPr rtlCol="0" anchor="ctr"/>
+            <a:lstStyle/>
+            <a:p>
+              <a:pPr algn="ctr"/>
+              <a:endParaRPr lang="en-IN"/>
+            </a:p>
+          </p:txBody>
+        </p:sp>
+        <p:sp>
+          <p:nvSpPr>
+            <p:cNvPr id="15" name="TextBox 14">
+              <a:extLst>
+                <a:ext uri="{FF2B5EF4-FFF2-40B4-BE49-F238E27FC236}">
+                  <a16:creationId xmlns:a16="http://schemas.microsoft.com/office/drawing/2014/main" id="{E96978B8-FBE7-7B59-F1E4-06A5987CA086}"/>
+                </a:ext>
+              </a:extLst>
+            </p:cNvPr>
+            <p:cNvSpPr txBox="1"/>
+            <p:nvPr/>
+          </p:nvSpPr>
+          <p:spPr>
+            <a:xfrm>
+              <a:off x="6452894" y="6088194"/>
+              <a:ext cx="2029408" cy="369332"/>
+            </a:xfrm>
+            <a:prstGeom prst="rect">
+              <a:avLst/>
+            </a:prstGeom>
+            <a:noFill/>
+          </p:spPr>
+          <p:txBody>
+            <a:bodyPr wrap="square">
+              <a:spAutoFit/>
+            </a:bodyPr>
+            <a:lstStyle/>
+            <a:p>
+              <a:r>
+                <a:rPr lang="en-US" dirty="0">
+                  <a:solidFill>
+                    <a:srgbClr val="FF0000"/>
+                  </a:solidFill>
+                </a:rPr>
+                <a:t>Reduced one stall</a:t>
+              </a:r>
+              <a:endParaRPr lang="en-IN" dirty="0"/>
+            </a:p>
+          </p:txBody>
+        </p:sp>
+      </p:grpSp>
+    </p:spTree>
+    <p:extLst>
+      <p:ext uri="{BB962C8B-B14F-4D97-AF65-F5344CB8AC3E}">
+        <p14:creationId xmlns:p14="http://schemas.microsoft.com/office/powerpoint/2010/main" val="409151751"/>
+      </p:ext>
+    </p:extLst>
+  </p:cSld>
+  <p:clrMapOvr>
+    <a:masterClrMapping/>
+  </p:clrMapOvr>
+  <p:timing>
+    <p:tnLst>
+      <p:par>
+        <p:cTn id="1" dur="indefinite" restart="never" nodeType="tmRoot">
+          <p:childTnLst>
+            <p:seq concurrent="1" nextAc="seek">
+              <p:cTn id="2" dur="indefinite" nodeType="mainSeq">
+                <p:childTnLst>
+                  <p:par>
+                    <p:cTn id="3" fill="hold">
+                      <p:stCondLst>
+                        <p:cond delay="indefinite"/>
+                      </p:stCondLst>
+                      <p:childTnLst>
+                        <p:par>
+                          <p:cTn id="4" fill="hold">
+                            <p:stCondLst>
+                              <p:cond delay="0"/>
+                            </p:stCondLst>
+                            <p:childTnLst>
+                              <p:par>
+                                <p:cTn id="5" presetID="1" presetClass="entr" presetSubtype="0" fill="hold" grpId="0" nodeType="clickEffect">
+                                  <p:stCondLst>
+                                    <p:cond delay="0"/>
+                                  </p:stCondLst>
+                                  <p:childTnLst>
+                                    <p:set>
+                                      <p:cBhvr>
+                                        <p:cTn id="6" dur="1" fill="hold">
+                                          <p:stCondLst>
+                                            <p:cond delay="0"/>
+                                          </p:stCondLst>
+                                        </p:cTn>
+                                        <p:tgtEl>
+                                          <p:spTgt spid="10">
+                                            <p:txEl>
+                                              <p:pRg st="0" end="0"/>
+                                            </p:txEl>
+                                          </p:spTgt>
+                                        </p:tgtEl>
+                                        <p:attrNameLst>
+                                          <p:attrName>style.visibility</p:attrName>
+                                        </p:attrNameLst>
+                                      </p:cBhvr>
+                                      <p:to>
+                                        <p:strVal val="visible"/>
+                                      </p:to>
+                                    </p:set>
+                                  </p:childTnLst>
+                                </p:cTn>
+                              </p:par>
+                            </p:childTnLst>
+                          </p:cTn>
+                        </p:par>
+                      </p:childTnLst>
+                    </p:cTn>
+                  </p:par>
+                  <p:par>
+                    <p:cTn id="7" fill="hold">
+                      <p:stCondLst>
+                        <p:cond delay="indefinite"/>
+                      </p:stCondLst>
+                      <p:childTnLst>
+                        <p:par>
+                          <p:cTn id="8" fill="hold">
+                            <p:stCondLst>
+                              <p:cond delay="0"/>
+                            </p:stCondLst>
+                            <p:childTnLst>
+                              <p:par>
+                                <p:cTn id="9" presetID="1" presetClass="entr" presetSubtype="0" fill="hold" grpId="0" nodeType="clickEffect">
+                                  <p:stCondLst>
+                                    <p:cond delay="0"/>
+                                  </p:stCondLst>
+                                  <p:childTnLst>
+                                    <p:set>
+                                      <p:cBhvr>
+                                        <p:cTn id="10" dur="1" fill="hold">
+                                          <p:stCondLst>
+                                            <p:cond delay="0"/>
+                                          </p:stCondLst>
+                                        </p:cTn>
+                                        <p:tgtEl>
+                                          <p:spTgt spid="10">
+                                            <p:txEl>
+                                              <p:pRg st="1" end="1"/>
+                                            </p:txEl>
+                                          </p:spTgt>
+                                        </p:tgtEl>
+                                        <p:attrNameLst>
+                                          <p:attrName>style.visibility</p:attrName>
+                                        </p:attrNameLst>
+                                      </p:cBhvr>
+                                      <p:to>
+                                        <p:strVal val="visible"/>
+                                      </p:to>
+                                    </p:set>
+                                  </p:childTnLst>
+                                </p:cTn>
+                              </p:par>
+                            </p:childTnLst>
+                          </p:cTn>
+                        </p:par>
+                      </p:childTnLst>
+                    </p:cTn>
+                  </p:par>
+                  <p:par>
+                    <p:cTn id="11" fill="hold">
+                      <p:stCondLst>
+                        <p:cond delay="indefinite"/>
+                      </p:stCondLst>
+                      <p:childTnLst>
+                        <p:par>
+                          <p:cTn id="12" fill="hold">
+                            <p:stCondLst>
+                              <p:cond delay="0"/>
+                            </p:stCondLst>
+                            <p:childTnLst>
+                              <p:par>
+                                <p:cTn id="13" presetID="1" presetClass="entr" presetSubtype="0" fill="hold" nodeType="clickEffect">
+                                  <p:stCondLst>
+                                    <p:cond delay="0"/>
+                                  </p:stCondLst>
+                                  <p:childTnLst>
+                                    <p:set>
+                                      <p:cBhvr>
+                                        <p:cTn id="14" dur="1" fill="hold">
+                                          <p:stCondLst>
+                                            <p:cond delay="0"/>
+                                          </p:stCondLst>
+                                        </p:cTn>
+                                        <p:tgtEl>
+                                          <p:spTgt spid="8"/>
+                                        </p:tgtEl>
+                                        <p:attrNameLst>
+                                          <p:attrName>style.visibility</p:attrName>
+                                        </p:attrNameLst>
+                                      </p:cBhvr>
+                                      <p:to>
+                                        <p:strVal val="visible"/>
+                                      </p:to>
+                                    </p:set>
+                                  </p:childTnLst>
+                                </p:cTn>
+                              </p:par>
+                            </p:childTnLst>
+                          </p:cTn>
+                        </p:par>
+                      </p:childTnLst>
+                    </p:cTn>
+                  </p:par>
+                  <p:par>
+                    <p:cTn id="15" fill="hold">
+                      <p:stCondLst>
+                        <p:cond delay="indefinite"/>
+                      </p:stCondLst>
+                      <p:childTnLst>
+                        <p:par>
+                          <p:cTn id="16" fill="hold">
+                            <p:stCondLst>
+                              <p:cond delay="0"/>
+                            </p:stCondLst>
+                            <p:childTnLst>
+                              <p:par>
+                                <p:cTn id="17" presetID="1" presetClass="entr" presetSubtype="0" fill="hold" grpId="0" nodeType="clickEffect">
+                                  <p:stCondLst>
+                                    <p:cond delay="0"/>
+                                  </p:stCondLst>
+                                  <p:childTnLst>
+                                    <p:set>
+                                      <p:cBhvr>
+                                        <p:cTn id="18" dur="1" fill="hold">
+                                          <p:stCondLst>
+                                            <p:cond delay="0"/>
+                                          </p:stCondLst>
+                                        </p:cTn>
+                                        <p:tgtEl>
+                                          <p:spTgt spid="12">
+                                            <p:txEl>
+                                              <p:pRg st="0" end="0"/>
+                                            </p:txEl>
+                                          </p:spTgt>
+                                        </p:tgtEl>
+                                        <p:attrNameLst>
+                                          <p:attrName>style.visibility</p:attrName>
+                                        </p:attrNameLst>
+                                      </p:cBhvr>
+                                      <p:to>
+                                        <p:strVal val="visible"/>
+                                      </p:to>
+                                    </p:set>
+                                  </p:childTnLst>
+                                </p:cTn>
+                              </p:par>
+                            </p:childTnLst>
+                          </p:cTn>
+                        </p:par>
+                      </p:childTnLst>
+                    </p:cTn>
+                  </p:par>
+                  <p:par>
+                    <p:cTn id="19" fill="hold">
+                      <p:stCondLst>
+                        <p:cond delay="indefinite"/>
+                      </p:stCondLst>
+                      <p:childTnLst>
+                        <p:par>
+                          <p:cTn id="20" fill="hold">
+                            <p:stCondLst>
+                              <p:cond delay="0"/>
+                            </p:stCondLst>
+                            <p:childTnLst>
+                              <p:par>
+                                <p:cTn id="21" presetID="1" presetClass="entr" presetSubtype="0" fill="hold" grpId="0" nodeType="clickEffect">
+                                  <p:stCondLst>
+                                    <p:cond delay="0"/>
+                                  </p:stCondLst>
+                                  <p:childTnLst>
+                                    <p:set>
+                                      <p:cBhvr>
+                                        <p:cTn id="22" dur="1" fill="hold">
+                                          <p:stCondLst>
+                                            <p:cond delay="0"/>
+                                          </p:stCondLst>
+                                        </p:cTn>
+                                        <p:tgtEl>
+                                          <p:spTgt spid="12">
+                                            <p:txEl>
+                                              <p:pRg st="2" end="2"/>
+                                            </p:txEl>
+                                          </p:spTgt>
+                                        </p:tgtEl>
+                                        <p:attrNameLst>
+                                          <p:attrName>style.visibility</p:attrName>
+                                        </p:attrNameLst>
+                                      </p:cBhvr>
+                                      <p:to>
+                                        <p:strVal val="visible"/>
+                                      </p:to>
+                                    </p:set>
+                                  </p:childTnLst>
+                                </p:cTn>
+                              </p:par>
+                            </p:childTnLst>
+                          </p:cTn>
+                        </p:par>
+                      </p:childTnLst>
+                    </p:cTn>
+                  </p:par>
+                  <p:par>
+                    <p:cTn id="23" fill="hold">
+                      <p:stCondLst>
+                        <p:cond delay="indefinite"/>
+                      </p:stCondLst>
+                      <p:childTnLst>
+                        <p:par>
+                          <p:cTn id="24" fill="hold">
+                            <p:stCondLst>
+                              <p:cond delay="0"/>
+                            </p:stCondLst>
+                            <p:childTnLst>
+                              <p:par>
+                                <p:cTn id="25" presetID="1" presetClass="entr" presetSubtype="0" fill="hold" grpId="0" nodeType="clickEffect">
+                                  <p:stCondLst>
+                                    <p:cond delay="0"/>
+                                  </p:stCondLst>
+                                  <p:childTnLst>
+                                    <p:set>
+                                      <p:cBhvr>
+                                        <p:cTn id="26" dur="1" fill="hold">
+                                          <p:stCondLst>
+                                            <p:cond delay="0"/>
+                                          </p:stCondLst>
+                                        </p:cTn>
+                                        <p:tgtEl>
+                                          <p:spTgt spid="12">
+                                            <p:txEl>
+                                              <p:pRg st="3" end="3"/>
+                                            </p:txEl>
+                                          </p:spTgt>
+                                        </p:tgtEl>
+                                        <p:attrNameLst>
+                                          <p:attrName>style.visibility</p:attrName>
+                                        </p:attrNameLst>
+                                      </p:cBhvr>
+                                      <p:to>
+                                        <p:strVal val="visible"/>
+                                      </p:to>
+                                    </p:set>
+                                  </p:childTnLst>
+                                </p:cTn>
+                              </p:par>
+                              <p:par>
+                                <p:cTn id="27" presetID="1" presetClass="entr" presetSubtype="0" fill="hold" grpId="0" nodeType="withEffect">
+                                  <p:stCondLst>
+                                    <p:cond delay="0"/>
+                                  </p:stCondLst>
+                                  <p:childTnLst>
+                                    <p:set>
+                                      <p:cBhvr>
+                                        <p:cTn id="28" dur="1" fill="hold">
+                                          <p:stCondLst>
+                                            <p:cond delay="0"/>
+                                          </p:stCondLst>
+                                        </p:cTn>
+                                        <p:tgtEl>
+                                          <p:spTgt spid="12">
+                                            <p:txEl>
+                                              <p:pRg st="4" end="4"/>
+                                            </p:txEl>
+                                          </p:spTgt>
+                                        </p:tgtEl>
+                                        <p:attrNameLst>
+                                          <p:attrName>style.visibility</p:attrName>
+                                        </p:attrNameLst>
+                                      </p:cBhvr>
+                                      <p:to>
+                                        <p:strVal val="visible"/>
+                                      </p:to>
+                                    </p:set>
+                                  </p:childTnLst>
+                                </p:cTn>
+                              </p:par>
+                            </p:childTnLst>
+                          </p:cTn>
+                        </p:par>
+                      </p:childTnLst>
+                    </p:cTn>
+                  </p:par>
+                  <p:par>
+                    <p:cTn id="29" fill="hold">
+                      <p:stCondLst>
+                        <p:cond delay="indefinite"/>
+                      </p:stCondLst>
+                      <p:childTnLst>
+                        <p:par>
+                          <p:cTn id="30" fill="hold">
+                            <p:stCondLst>
+                              <p:cond delay="0"/>
+                            </p:stCondLst>
+                            <p:childTnLst>
+                              <p:par>
+                                <p:cTn id="31" presetID="1" presetClass="entr" presetSubtype="0" fill="hold" nodeType="clickEffect">
+                                  <p:stCondLst>
+                                    <p:cond delay="0"/>
+                                  </p:stCondLst>
+                                  <p:childTnLst>
+                                    <p:set>
+                                      <p:cBhvr>
+                                        <p:cTn id="32" dur="1" fill="hold">
+                                          <p:stCondLst>
+                                            <p:cond delay="0"/>
+                                          </p:stCondLst>
+                                        </p:cTn>
+                                        <p:tgtEl>
+                                          <p:spTgt spid="7"/>
+                                        </p:tgtEl>
+                                        <p:attrNameLst>
+                                          <p:attrName>style.visibility</p:attrName>
+                                        </p:attrNameLst>
+                                      </p:cBhvr>
+                                      <p:to>
+                                        <p:strVal val="visible"/>
+                                      </p:to>
+                                    </p:set>
+                                  </p:childTnLst>
+                                </p:cTn>
+                              </p:par>
+                            </p:childTnLst>
+                          </p:cTn>
+                        </p:par>
+                      </p:childTnLst>
+                    </p:cTn>
+                  </p:par>
+                  <p:par>
+                    <p:cTn id="33" fill="hold">
+                      <p:stCondLst>
+                        <p:cond delay="indefinite"/>
+                      </p:stCondLst>
+                      <p:childTnLst>
+                        <p:par>
+                          <p:cTn id="34" fill="hold">
+                            <p:stCondLst>
+                              <p:cond delay="0"/>
+                            </p:stCondLst>
+                            <p:childTnLst>
+                              <p:par>
+                                <p:cTn id="35" presetID="1" presetClass="entr" presetSubtype="0" fill="hold" nodeType="clickEffect">
+                                  <p:stCondLst>
+                                    <p:cond delay="0"/>
+                                  </p:stCondLst>
+                                  <p:childTnLst>
+                                    <p:set>
+                                      <p:cBhvr>
+                                        <p:cTn id="36" dur="1" fill="hold">
+                                          <p:stCondLst>
+                                            <p:cond delay="0"/>
+                                          </p:stCondLst>
+                                        </p:cTn>
+                                        <p:tgtEl>
+                                          <p:spTgt spid="16"/>
+                                        </p:tgtEl>
+                                        <p:attrNameLst>
+                                          <p:attrName>style.visibility</p:attrName>
+                                        </p:attrNameLst>
+                                      </p:cBhvr>
+                                      <p:to>
+                                        <p:strVal val="visible"/>
+                                      </p:to>
+                                    </p:set>
+                                  </p:childTnLst>
+                                </p:cTn>
+                              </p:par>
+                            </p:childTnLst>
+                          </p:cTn>
+                        </p:par>
+                      </p:childTnLst>
+                    </p:cTn>
+                  </p:par>
+                </p:childTnLst>
+              </p:cTn>
+              <p:prevCondLst>
+                <p:cond evt="onPrev" delay="0">
+                  <p:tgtEl>
+                    <p:sldTgt/>
+                  </p:tgtEl>
+                </p:cond>
+              </p:prevCondLst>
+              <p:nextCondLst>
+                <p:cond evt="onNext" delay="0">
+                  <p:tgtEl>
+                    <p:sldTgt/>
+                  </p:tgtEl>
+                </p:cond>
+              </p:nextCondLst>
+            </p:seq>
+          </p:childTnLst>
+        </p:cTn>
+      </p:par>
+    </p:tnLst>
+    <p:bldLst>
+      <p:bldP spid="10" grpId="0" build="p"/>
+      <p:bldP spid="12" grpId="0" build="p"/>
+    </p:bldLst>
+  </p:timing>
+</p:sld>
+</file>
+
+<file path=ppt/slides/slide18.xml><?xml version="1.0" encoding="utf-8"?>
+<p:sld xmlns:a="http://schemas.openxmlformats.org/drawingml/2006/main" xmlns:r="http://schemas.openxmlformats.org/officeDocument/2006/relationships" xmlns:p="http://schemas.openxmlformats.org/presentationml/2006/main">
+  <p:cSld>
+    <p:spTree>
+      <p:nvGrpSpPr>
+        <p:cNvPr id="1" name=""/>
+        <p:cNvGrpSpPr/>
+        <p:nvPr/>
+      </p:nvGrpSpPr>
+      <p:grpSpPr>
+        <a:xfrm>
+          <a:off x="0" y="0"/>
+          <a:ext cx="0" cy="0"/>
+          <a:chOff x="0" y="0"/>
+          <a:chExt cx="0" cy="0"/>
+        </a:xfrm>
+      </p:grpSpPr>
+      <p:sp>
+        <p:nvSpPr>
+          <p:cNvPr id="2" name="Title 1">
+            <a:extLst>
+              <a:ext uri="{FF2B5EF4-FFF2-40B4-BE49-F238E27FC236}">
+                <a16:creationId xmlns:a16="http://schemas.microsoft.com/office/drawing/2014/main" id="{BBD9DE93-9142-BE93-9409-508094E28F04}"/>
+              </a:ext>
+            </a:extLst>
+          </p:cNvPr>
+          <p:cNvSpPr>
+            <a:spLocks noGrp="1"/>
+          </p:cNvSpPr>
+          <p:nvPr>
+            <p:ph type="title"/>
+          </p:nvPr>
+        </p:nvSpPr>
+        <p:spPr/>
+        <p:txBody>
+          <a:bodyPr/>
+          <a:lstStyle/>
+          <a:p>
+            <a:r>
+              <a:rPr lang="en-US" dirty="0"/>
+              <a:t>Data hazard solution – forwarding</a:t>
+            </a:r>
+          </a:p>
+        </p:txBody>
+      </p:sp>
+      <p:sp>
+        <p:nvSpPr>
+          <p:cNvPr id="3" name="Content Placeholder 2">
+            <a:extLst>
+              <a:ext uri="{FF2B5EF4-FFF2-40B4-BE49-F238E27FC236}">
+                <a16:creationId xmlns:a16="http://schemas.microsoft.com/office/drawing/2014/main" id="{77E485F3-EBD2-0953-1741-21C5C52407DF}"/>
+              </a:ext>
+            </a:extLst>
+          </p:cNvPr>
+          <p:cNvSpPr>
+            <a:spLocks noGrp="1"/>
+          </p:cNvSpPr>
+          <p:nvPr>
+            <p:ph idx="1"/>
+          </p:nvPr>
+        </p:nvSpPr>
+        <p:spPr>
+          <a:xfrm>
+            <a:off x="94576" y="1371600"/>
+            <a:ext cx="8972549" cy="1929075"/>
+          </a:xfrm>
+        </p:spPr>
+        <p:txBody>
+          <a:bodyPr>
+            <a:normAutofit fontScale="92500" lnSpcReduction="10000"/>
+          </a:bodyPr>
+          <a:lstStyle/>
+          <a:p>
+            <a:pPr marL="0" indent="0">
+              <a:buNone/>
+            </a:pPr>
+            <a:r>
+              <a:rPr lang="en-US" dirty="0"/>
+              <a:t>Forwarding:</a:t>
+            </a:r>
+          </a:p>
+          <a:p>
+            <a:pPr marL="514350" indent="-514350">
+              <a:buAutoNum type="arabicPeriod"/>
+            </a:pPr>
+            <a:r>
+              <a:rPr lang="en-US" dirty="0"/>
+              <a:t>Data already available in cycle 3</a:t>
+            </a:r>
+          </a:p>
+          <a:p>
+            <a:pPr marL="514350" indent="-514350">
+              <a:buAutoNum type="arabicPeriod"/>
+            </a:pPr>
+            <a:r>
+              <a:rPr lang="en-US" dirty="0"/>
+              <a:t>Grab it from pipeline stage, rather than waiting to update the register file</a:t>
+            </a:r>
+          </a:p>
+        </p:txBody>
+      </p:sp>
+      <p:sp>
+        <p:nvSpPr>
+          <p:cNvPr id="4" name="Date Placeholder 3">
+            <a:extLst>
+              <a:ext uri="{FF2B5EF4-FFF2-40B4-BE49-F238E27FC236}">
+                <a16:creationId xmlns:a16="http://schemas.microsoft.com/office/drawing/2014/main" id="{AA86B360-2714-46D5-2DCC-75FD416FA166}"/>
+              </a:ext>
+            </a:extLst>
+          </p:cNvPr>
+          <p:cNvSpPr>
+            <a:spLocks noGrp="1"/>
+          </p:cNvSpPr>
+          <p:nvPr>
+            <p:ph type="dt" sz="half" idx="10"/>
+          </p:nvPr>
+        </p:nvSpPr>
+        <p:spPr/>
+        <p:txBody>
+          <a:bodyPr/>
+          <a:lstStyle/>
+          <a:p>
+            <a:fld id="{B4B13859-67C5-4393-B6C2-556CF3F770C0}" type="datetime3">
+              <a:rPr lang="en-US" smtClean="0"/>
+              <a:t>23 February 2026</a:t>
+            </a:fld>
+            <a:endParaRPr lang="en-US"/>
+          </a:p>
+        </p:txBody>
+      </p:sp>
+      <p:sp>
+        <p:nvSpPr>
+          <p:cNvPr id="6" name="Slide Number Placeholder 5">
+            <a:extLst>
+              <a:ext uri="{FF2B5EF4-FFF2-40B4-BE49-F238E27FC236}">
+                <a16:creationId xmlns:a16="http://schemas.microsoft.com/office/drawing/2014/main" id="{1C11FBBF-2726-6975-CA40-5CC9BBB0EA8A}"/>
+              </a:ext>
+            </a:extLst>
+          </p:cNvPr>
+          <p:cNvSpPr>
+            <a:spLocks noGrp="1"/>
+          </p:cNvSpPr>
+          <p:nvPr>
+            <p:ph type="sldNum" sz="quarter" idx="12"/>
+          </p:nvPr>
+        </p:nvSpPr>
+        <p:spPr/>
+        <p:txBody>
+          <a:bodyPr/>
+          <a:lstStyle/>
+          <a:p>
+            <a:fld id="{98AC3541-01C1-4CA5-B68F-FEE868C7D1AF}" type="slidenum">
+              <a:rPr lang="en-US" smtClean="0"/>
+              <a:t>18</a:t>
+            </a:fld>
+            <a:endParaRPr lang="en-US"/>
+          </a:p>
+        </p:txBody>
+      </p:sp>
+      <p:pic>
+        <p:nvPicPr>
+          <p:cNvPr id="8" name="Picture 7">
+            <a:extLst>
+              <a:ext uri="{FF2B5EF4-FFF2-40B4-BE49-F238E27FC236}">
+                <a16:creationId xmlns:a16="http://schemas.microsoft.com/office/drawing/2014/main" id="{25CFB899-4B76-5D86-9380-69A57630159F}"/>
+              </a:ext>
+            </a:extLst>
+          </p:cNvPr>
+          <p:cNvPicPr>
+            <a:picLocks noChangeAspect="1"/>
+          </p:cNvPicPr>
+          <p:nvPr/>
+        </p:nvPicPr>
+        <p:blipFill>
+          <a:blip r:embed="rId2"/>
+          <a:stretch>
+            <a:fillRect/>
+          </a:stretch>
+        </p:blipFill>
+        <p:spPr>
+          <a:xfrm>
+            <a:off x="488952" y="3557324"/>
+            <a:ext cx="5651495" cy="2564964"/>
+          </a:xfrm>
+          <a:prstGeom prst="rect">
+            <a:avLst/>
+          </a:prstGeom>
+        </p:spPr>
+      </p:pic>
+      <p:sp>
+        <p:nvSpPr>
+          <p:cNvPr id="9" name="Content Placeholder 2">
+            <a:extLst>
+              <a:ext uri="{FF2B5EF4-FFF2-40B4-BE49-F238E27FC236}">
+                <a16:creationId xmlns:a16="http://schemas.microsoft.com/office/drawing/2014/main" id="{C202BC39-15D1-8BFA-0A13-92033EC77F3A}"/>
+              </a:ext>
+            </a:extLst>
+          </p:cNvPr>
+          <p:cNvSpPr txBox="1">
+            <a:spLocks/>
+          </p:cNvSpPr>
+          <p:nvPr/>
+        </p:nvSpPr>
+        <p:spPr>
+          <a:xfrm>
+            <a:off x="5334000" y="3557324"/>
+            <a:ext cx="3540443" cy="1143000"/>
+          </a:xfrm>
+          <a:prstGeom prst="rect">
+            <a:avLst/>
+          </a:prstGeom>
+        </p:spPr>
+        <p:txBody>
+          <a:bodyPr vert="horz" lIns="68580" tIns="34290" rIns="68580" bIns="34290" rtlCol="0">
+            <a:normAutofit/>
+          </a:bodyPr>
+          <a:lstStyle>
+            <a:lvl1pPr marL="228600" indent="-228600" algn="l" defTabSz="914400" rtl="0" eaLnBrk="1" latinLnBrk="0" hangingPunct="1">
+              <a:lnSpc>
+                <a:spcPct val="90000"/>
+              </a:lnSpc>
+              <a:spcBef>
+                <a:spcPts val="1000"/>
+              </a:spcBef>
+              <a:buFont typeface="Arial" panose="020B0604020202020204" pitchFamily="34" charset="0"/>
+              <a:buChar char="•"/>
+              <a:defRPr sz="2400" kern="1200">
+                <a:solidFill>
+                  <a:schemeClr val="tx1"/>
+                </a:solidFill>
+                <a:latin typeface="+mn-lt"/>
+                <a:ea typeface="+mn-ea"/>
+                <a:cs typeface="+mn-cs"/>
+              </a:defRPr>
+            </a:lvl1pPr>
+            <a:lvl2pPr marL="685800" indent="-228600" algn="l" defTabSz="914400" rtl="0" eaLnBrk="1" latinLnBrk="0" hangingPunct="1">
+              <a:lnSpc>
+                <a:spcPct val="90000"/>
+              </a:lnSpc>
+              <a:spcBef>
+                <a:spcPts val="500"/>
+              </a:spcBef>
+              <a:buFont typeface="Arial" panose="020B0604020202020204" pitchFamily="34" charset="0"/>
+              <a:buChar char="•"/>
+              <a:defRPr sz="2000" kern="1200">
+                <a:solidFill>
+                  <a:schemeClr val="tx1"/>
+                </a:solidFill>
+                <a:latin typeface="+mn-lt"/>
+                <a:ea typeface="+mn-ea"/>
+                <a:cs typeface="+mn-cs"/>
+              </a:defRPr>
+            </a:lvl2pPr>
+            <a:lvl3pPr marL="1143000" indent="-228600" algn="l" defTabSz="914400" rtl="0" eaLnBrk="1" latinLnBrk="0" hangingPunct="1">
+              <a:lnSpc>
+                <a:spcPct val="90000"/>
+              </a:lnSpc>
+              <a:spcBef>
+                <a:spcPts val="500"/>
+              </a:spcBef>
+              <a:buFont typeface="Arial" panose="020B0604020202020204" pitchFamily="34" charset="0"/>
+              <a:buChar char="•"/>
+              <a:defRPr sz="1800" kern="1200">
+                <a:solidFill>
+                  <a:schemeClr val="tx1"/>
+                </a:solidFill>
+                <a:latin typeface="+mn-lt"/>
+                <a:ea typeface="+mn-ea"/>
+                <a:cs typeface="+mn-cs"/>
+              </a:defRPr>
+            </a:lvl3pPr>
+            <a:lvl4pPr marL="1600200" indent="-228600" algn="l" defTabSz="914400" rtl="0" eaLnBrk="1" latinLnBrk="0" hangingPunct="1">
+              <a:lnSpc>
+                <a:spcPct val="90000"/>
+              </a:lnSpc>
+              <a:spcBef>
+                <a:spcPts val="500"/>
+              </a:spcBef>
+              <a:buFont typeface="Arial" panose="020B0604020202020204" pitchFamily="34" charset="0"/>
+              <a:buChar char="•"/>
+              <a:defRPr sz="1600" kern="1200">
+                <a:solidFill>
+                  <a:schemeClr val="tx1"/>
+                </a:solidFill>
+                <a:latin typeface="+mn-lt"/>
+                <a:ea typeface="+mn-ea"/>
+                <a:cs typeface="+mn-cs"/>
+              </a:defRPr>
+            </a:lvl4pPr>
+            <a:lvl5pPr marL="2057400" indent="-228600" algn="l" defTabSz="914400" rtl="0" eaLnBrk="1" latinLnBrk="0" hangingPunct="1">
+              <a:lnSpc>
+                <a:spcPct val="90000"/>
+              </a:lnSpc>
+              <a:spcBef>
+                <a:spcPts val="500"/>
+              </a:spcBef>
+              <a:buFont typeface="Arial" panose="020B0604020202020204" pitchFamily="34" charset="0"/>
+              <a:buChar char="•"/>
+              <a:defRPr sz="1600" kern="1200">
+                <a:solidFill>
+                  <a:schemeClr val="tx1"/>
+                </a:solidFill>
+                <a:latin typeface="+mn-lt"/>
+                <a:ea typeface="+mn-ea"/>
+                <a:cs typeface="+mn-cs"/>
+              </a:defRPr>
+            </a:lvl5pPr>
+            <a:lvl6pPr marL="2514600" indent="-228600" algn="l" defTabSz="914400" rtl="0" eaLnBrk="1" latinLnBrk="0" hangingPunct="1">
+              <a:lnSpc>
+                <a:spcPct val="90000"/>
+              </a:lnSpc>
+              <a:spcBef>
+                <a:spcPts val="500"/>
+              </a:spcBef>
+              <a:buFont typeface="Arial" panose="020B0604020202020204" pitchFamily="34" charset="0"/>
+              <a:buChar char="•"/>
+              <a:defRPr sz="1800" kern="1200">
+                <a:solidFill>
+                  <a:schemeClr val="tx1"/>
+                </a:solidFill>
+                <a:latin typeface="+mn-lt"/>
+                <a:ea typeface="+mn-ea"/>
+                <a:cs typeface="+mn-cs"/>
+              </a:defRPr>
+            </a:lvl6pPr>
+            <a:lvl7pPr marL="2971800" indent="-228600" algn="l" defTabSz="914400" rtl="0" eaLnBrk="1" latinLnBrk="0" hangingPunct="1">
+              <a:lnSpc>
+                <a:spcPct val="90000"/>
+              </a:lnSpc>
+              <a:spcBef>
+                <a:spcPts val="500"/>
+              </a:spcBef>
+              <a:buFont typeface="Arial" panose="020B0604020202020204" pitchFamily="34" charset="0"/>
+              <a:buChar char="•"/>
+              <a:defRPr sz="1800" kern="1200">
+                <a:solidFill>
+                  <a:schemeClr val="tx1"/>
+                </a:solidFill>
+                <a:latin typeface="+mn-lt"/>
+                <a:ea typeface="+mn-ea"/>
+                <a:cs typeface="+mn-cs"/>
+              </a:defRPr>
+            </a:lvl7pPr>
+            <a:lvl8pPr marL="3429000" indent="-228600" algn="l" defTabSz="914400" rtl="0" eaLnBrk="1" latinLnBrk="0" hangingPunct="1">
+              <a:lnSpc>
+                <a:spcPct val="90000"/>
+              </a:lnSpc>
+              <a:spcBef>
+                <a:spcPts val="500"/>
+              </a:spcBef>
+              <a:buFont typeface="Arial" panose="020B0604020202020204" pitchFamily="34" charset="0"/>
+              <a:buChar char="•"/>
+              <a:defRPr sz="1800" kern="1200">
+                <a:solidFill>
+                  <a:schemeClr val="tx1"/>
+                </a:solidFill>
+                <a:latin typeface="+mn-lt"/>
+                <a:ea typeface="+mn-ea"/>
+                <a:cs typeface="+mn-cs"/>
+              </a:defRPr>
+            </a:lvl8pPr>
+            <a:lvl9pPr marL="3886200" indent="-228600" algn="l" defTabSz="914400" rtl="0" eaLnBrk="1" latinLnBrk="0" hangingPunct="1">
+              <a:lnSpc>
+                <a:spcPct val="90000"/>
+              </a:lnSpc>
+              <a:spcBef>
+                <a:spcPts val="500"/>
+              </a:spcBef>
+              <a:buFont typeface="Arial" panose="020B0604020202020204" pitchFamily="34" charset="0"/>
+              <a:buChar char="•"/>
+              <a:defRPr sz="1800" kern="1200">
+                <a:solidFill>
+                  <a:schemeClr val="tx1"/>
+                </a:solidFill>
+                <a:latin typeface="+mn-lt"/>
+                <a:ea typeface="+mn-ea"/>
+                <a:cs typeface="+mn-cs"/>
+              </a:defRPr>
+            </a:lvl9pPr>
+          </a:lstStyle>
+          <a:p>
+            <a:pPr marL="0" indent="0">
+              <a:buNone/>
+            </a:pPr>
+            <a:r>
+              <a:rPr lang="en-US" sz="1800" b="1" dirty="0">
+                <a:solidFill>
+                  <a:srgbClr val="FFC000"/>
+                </a:solidFill>
+              </a:rPr>
+              <a:t>Needs changes in </a:t>
+            </a:r>
+            <a:r>
+              <a:rPr lang="en-US" sz="1800" b="1" dirty="0" err="1">
+                <a:solidFill>
+                  <a:srgbClr val="FFC000"/>
+                </a:solidFill>
+              </a:rPr>
+              <a:t>datapath</a:t>
+            </a:r>
+            <a:r>
+              <a:rPr lang="en-US" sz="1800" b="1" dirty="0">
+                <a:solidFill>
+                  <a:srgbClr val="FFC000"/>
+                </a:solidFill>
+              </a:rPr>
+              <a:t> hardware as well as extra control signals!</a:t>
+            </a:r>
+          </a:p>
+        </p:txBody>
+      </p:sp>
+    </p:spTree>
+    <p:extLst>
+      <p:ext uri="{BB962C8B-B14F-4D97-AF65-F5344CB8AC3E}">
+        <p14:creationId xmlns:p14="http://schemas.microsoft.com/office/powerpoint/2010/main" val="2886565167"/>
+      </p:ext>
+    </p:extLst>
+  </p:cSld>
+  <p:clrMapOvr>
+    <a:masterClrMapping/>
+  </p:clrMapOvr>
+  <p:timing>
+    <p:tnLst>
+      <p:par>
+        <p:cTn id="1" dur="indefinite" restart="never" nodeType="tmRoot">
+          <p:childTnLst>
+            <p:seq concurrent="1" nextAc="seek">
+              <p:cTn id="2" dur="indefinite" nodeType="mainSeq">
+                <p:childTnLst>
+                  <p:par>
+                    <p:cTn id="3" fill="hold">
+                      <p:stCondLst>
+                        <p:cond delay="indefinite"/>
+                      </p:stCondLst>
+                      <p:childTnLst>
+                        <p:par>
+                          <p:cTn id="4" fill="hold">
+                            <p:stCondLst>
+                              <p:cond delay="0"/>
+                            </p:stCondLst>
+                            <p:childTnLst>
+                              <p:par>
+                                <p:cTn id="5" presetID="1" presetClass="entr" presetSubtype="0" fill="hold" grpId="0" nodeType="clickEffect">
+                                  <p:stCondLst>
+                                    <p:cond delay="0"/>
+                                  </p:stCondLst>
+                                  <p:childTnLst>
+                                    <p:set>
+                                      <p:cBhvr>
+                                        <p:cTn id="6" dur="1" fill="hold">
+                                          <p:stCondLst>
+                                            <p:cond delay="0"/>
+                                          </p:stCondLst>
+                                        </p:cTn>
+                                        <p:tgtEl>
+                                          <p:spTgt spid="3">
+                                            <p:txEl>
+                                              <p:pRg st="0" end="0"/>
+                                            </p:txEl>
+                                          </p:spTgt>
+                                        </p:tgtEl>
+                                        <p:attrNameLst>
+                                          <p:attrName>style.visibility</p:attrName>
+                                        </p:attrNameLst>
+                                      </p:cBhvr>
+                                      <p:to>
+                                        <p:strVal val="visible"/>
+                                      </p:to>
+                                    </p:set>
+                                  </p:childTnLst>
+                                </p:cTn>
+                              </p:par>
+                            </p:childTnLst>
+                          </p:cTn>
+                        </p:par>
+                      </p:childTnLst>
+                    </p:cTn>
+                  </p:par>
+                  <p:par>
+                    <p:cTn id="7" fill="hold">
+                      <p:stCondLst>
+                        <p:cond delay="indefinite"/>
+                      </p:stCondLst>
+                      <p:childTnLst>
+                        <p:par>
+                          <p:cTn id="8" fill="hold">
+                            <p:stCondLst>
+                              <p:cond delay="0"/>
+                            </p:stCondLst>
+                            <p:childTnLst>
+                              <p:par>
+                                <p:cTn id="9" presetID="1" presetClass="entr" presetSubtype="0" fill="hold" grpId="0" nodeType="clickEffect">
+                                  <p:stCondLst>
+                                    <p:cond delay="0"/>
+                                  </p:stCondLst>
+                                  <p:childTnLst>
+                                    <p:set>
+                                      <p:cBhvr>
+                                        <p:cTn id="10" dur="1" fill="hold">
+                                          <p:stCondLst>
+                                            <p:cond delay="0"/>
+                                          </p:stCondLst>
+                                        </p:cTn>
+                                        <p:tgtEl>
+                                          <p:spTgt spid="3">
+                                            <p:txEl>
+                                              <p:pRg st="1" end="1"/>
+                                            </p:txEl>
+                                          </p:spTgt>
+                                        </p:tgtEl>
+                                        <p:attrNameLst>
+                                          <p:attrName>style.visibility</p:attrName>
+                                        </p:attrNameLst>
+                                      </p:cBhvr>
+                                      <p:to>
+                                        <p:strVal val="visible"/>
+                                      </p:to>
+                                    </p:set>
+                                  </p:childTnLst>
+                                </p:cTn>
+                              </p:par>
+                            </p:childTnLst>
+                          </p:cTn>
+                        </p:par>
+                      </p:childTnLst>
+                    </p:cTn>
+                  </p:par>
+                  <p:par>
+                    <p:cTn id="11" fill="hold">
+                      <p:stCondLst>
+                        <p:cond delay="indefinite"/>
+                      </p:stCondLst>
+                      <p:childTnLst>
+                        <p:par>
+                          <p:cTn id="12" fill="hold">
+                            <p:stCondLst>
+                              <p:cond delay="0"/>
+                            </p:stCondLst>
+                            <p:childTnLst>
+                              <p:par>
+                                <p:cTn id="13" presetID="1" presetClass="entr" presetSubtype="0" fill="hold" grpId="0" nodeType="clickEffect">
+                                  <p:stCondLst>
+                                    <p:cond delay="0"/>
+                                  </p:stCondLst>
+                                  <p:childTnLst>
+                                    <p:set>
+                                      <p:cBhvr>
+                                        <p:cTn id="14" dur="1" fill="hold">
+                                          <p:stCondLst>
+                                            <p:cond delay="0"/>
+                                          </p:stCondLst>
+                                        </p:cTn>
+                                        <p:tgtEl>
+                                          <p:spTgt spid="3">
+                                            <p:txEl>
+                                              <p:pRg st="2" end="2"/>
+                                            </p:txEl>
+                                          </p:spTgt>
+                                        </p:tgtEl>
+                                        <p:attrNameLst>
+                                          <p:attrName>style.visibility</p:attrName>
+                                        </p:attrNameLst>
+                                      </p:cBhvr>
+                                      <p:to>
+                                        <p:strVal val="visible"/>
+                                      </p:to>
+                                    </p:set>
+                                  </p:childTnLst>
+                                </p:cTn>
+                              </p:par>
+                            </p:childTnLst>
+                          </p:cTn>
+                        </p:par>
+                      </p:childTnLst>
+                    </p:cTn>
+                  </p:par>
+                  <p:par>
+                    <p:cTn id="15" fill="hold">
+                      <p:stCondLst>
+                        <p:cond delay="indefinite"/>
+                      </p:stCondLst>
+                      <p:childTnLst>
+                        <p:par>
+                          <p:cTn id="16" fill="hold">
+                            <p:stCondLst>
+                              <p:cond delay="0"/>
+                            </p:stCondLst>
+                            <p:childTnLst>
+                              <p:par>
+                                <p:cTn id="17" presetID="1" presetClass="entr" presetSubtype="0" fill="hold" nodeType="clickEffect">
+                                  <p:stCondLst>
+                                    <p:cond delay="0"/>
+                                  </p:stCondLst>
+                                  <p:childTnLst>
+                                    <p:set>
+                                      <p:cBhvr>
+                                        <p:cTn id="18" dur="1" fill="hold">
+                                          <p:stCondLst>
+                                            <p:cond delay="0"/>
+                                          </p:stCondLst>
+                                        </p:cTn>
+                                        <p:tgtEl>
+                                          <p:spTgt spid="8"/>
+                                        </p:tgtEl>
+                                        <p:attrNameLst>
+                                          <p:attrName>style.visibility</p:attrName>
+                                        </p:attrNameLst>
+                                      </p:cBhvr>
+                                      <p:to>
+                                        <p:strVal val="visible"/>
+                                      </p:to>
+                                    </p:set>
+                                  </p:childTnLst>
+                                </p:cTn>
+                              </p:par>
+                            </p:childTnLst>
+                          </p:cTn>
+                        </p:par>
+                      </p:childTnLst>
+                    </p:cTn>
+                  </p:par>
+                  <p:par>
+                    <p:cTn id="19" fill="hold">
+                      <p:stCondLst>
+                        <p:cond delay="indefinite"/>
+                      </p:stCondLst>
+                      <p:childTnLst>
+                        <p:par>
+                          <p:cTn id="20" fill="hold">
+                            <p:stCondLst>
+                              <p:cond delay="0"/>
+                            </p:stCondLst>
+                            <p:childTnLst>
+                              <p:par>
+                                <p:cTn id="21" presetID="1" presetClass="entr" presetSubtype="0" fill="hold" grpId="0" nodeType="clickEffect">
+                                  <p:stCondLst>
+                                    <p:cond delay="0"/>
+                                  </p:stCondLst>
+                                  <p:childTnLst>
+                                    <p:set>
+                                      <p:cBhvr>
+                                        <p:cTn id="22" dur="1" fill="hold">
+                                          <p:stCondLst>
+                                            <p:cond delay="0"/>
+                                          </p:stCondLst>
+                                        </p:cTn>
+                                        <p:tgtEl>
+                                          <p:spTgt spid="9"/>
+                                        </p:tgtEl>
+                                        <p:attrNameLst>
+                                          <p:attrName>style.visibility</p:attrName>
+                                        </p:attrNameLst>
+                                      </p:cBhvr>
+                                      <p:to>
+                                        <p:strVal val="visible"/>
+                                      </p:to>
+                                    </p:set>
+                                  </p:childTnLst>
+                                </p:cTn>
+                              </p:par>
+                            </p:childTnLst>
+                          </p:cTn>
+                        </p:par>
+                      </p:childTnLst>
+                    </p:cTn>
+                  </p:par>
+                </p:childTnLst>
+              </p:cTn>
+              <p:prevCondLst>
+                <p:cond evt="onPrev" delay="0">
+                  <p:tgtEl>
+                    <p:sldTgt/>
+                  </p:tgtEl>
+                </p:cond>
+              </p:prevCondLst>
+              <p:nextCondLst>
+                <p:cond evt="onNext" delay="0">
+                  <p:tgtEl>
+                    <p:sldTgt/>
+                  </p:tgtEl>
+                </p:cond>
+              </p:nextCondLst>
+            </p:seq>
+          </p:childTnLst>
+        </p:cTn>
+      </p:par>
+    </p:tnLst>
+    <p:bldLst>
+      <p:bldP spid="3" grpId="0" build="p"/>
+      <p:bldP spid="9" grpId="0"/>
+    </p:bldLst>
+  </p:timing>
+</p:sld>
+</file>
+
+<file path=ppt/slides/slide19.xml><?xml version="1.0" encoding="utf-8"?>
+<p:sld xmlns:a="http://schemas.openxmlformats.org/drawingml/2006/main" xmlns:r="http://schemas.openxmlformats.org/officeDocument/2006/relationships" xmlns:p="http://schemas.openxmlformats.org/presentationml/2006/main">
+  <p:cSld>
+    <p:spTree>
+      <p:nvGrpSpPr>
+        <p:cNvPr id="1" name=""/>
+        <p:cNvGrpSpPr/>
+        <p:nvPr/>
+      </p:nvGrpSpPr>
+      <p:grpSpPr>
+        <a:xfrm>
+          <a:off x="0" y="0"/>
+          <a:ext cx="0" cy="0"/>
+          <a:chOff x="0" y="0"/>
+          <a:chExt cx="0" cy="0"/>
+        </a:xfrm>
+      </p:grpSpPr>
+      <p:sp>
+        <p:nvSpPr>
+          <p:cNvPr id="2" name="Title 1">
+            <a:extLst>
+              <a:ext uri="{FF2B5EF4-FFF2-40B4-BE49-F238E27FC236}">
+                <a16:creationId xmlns:a16="http://schemas.microsoft.com/office/drawing/2014/main" id="{09EC1025-E879-AF40-2767-F8956232F5B5}"/>
+              </a:ext>
+            </a:extLst>
+          </p:cNvPr>
+          <p:cNvSpPr>
+            <a:spLocks noGrp="1"/>
+          </p:cNvSpPr>
+          <p:nvPr>
+            <p:ph type="title"/>
+          </p:nvPr>
+        </p:nvSpPr>
+        <p:spPr/>
+        <p:txBody>
+          <a:bodyPr/>
+          <a:lstStyle/>
+          <a:p>
+            <a:r>
+              <a:rPr lang="en-US" dirty="0"/>
+              <a:t>Data hazard solution – forwarding</a:t>
+            </a:r>
+          </a:p>
+        </p:txBody>
+      </p:sp>
+      <p:pic>
+        <p:nvPicPr>
+          <p:cNvPr id="8" name="Content Placeholder 7">
+            <a:extLst>
+              <a:ext uri="{FF2B5EF4-FFF2-40B4-BE49-F238E27FC236}">
+                <a16:creationId xmlns:a16="http://schemas.microsoft.com/office/drawing/2014/main" id="{FDF9E3D3-7A51-7CA8-0349-E3F2A7E81DA4}"/>
+              </a:ext>
+            </a:extLst>
+          </p:cNvPr>
+          <p:cNvPicPr>
+            <a:picLocks noGrp="1" noChangeAspect="1"/>
+          </p:cNvPicPr>
+          <p:nvPr>
+            <p:ph idx="1"/>
+          </p:nvPr>
+        </p:nvPicPr>
+        <p:blipFill rotWithShape="1">
+          <a:blip r:embed="rId2"/>
+          <a:srcRect t="-1922"/>
+          <a:stretch>
+            <a:fillRect/>
+          </a:stretch>
+        </p:blipFill>
+        <p:spPr>
+          <a:xfrm>
+            <a:off x="875010" y="1524000"/>
+            <a:ext cx="7393980" cy="4876800"/>
+          </a:xfrm>
+        </p:spPr>
+      </p:pic>
+      <p:sp>
+        <p:nvSpPr>
+          <p:cNvPr id="4" name="Date Placeholder 3">
+            <a:extLst>
+              <a:ext uri="{FF2B5EF4-FFF2-40B4-BE49-F238E27FC236}">
+                <a16:creationId xmlns:a16="http://schemas.microsoft.com/office/drawing/2014/main" id="{CA14E1D7-3CFC-102F-BBAC-BD8A566C9A78}"/>
+              </a:ext>
+            </a:extLst>
+          </p:cNvPr>
+          <p:cNvSpPr>
+            <a:spLocks noGrp="1"/>
+          </p:cNvSpPr>
+          <p:nvPr>
+            <p:ph type="dt" sz="half" idx="10"/>
+          </p:nvPr>
+        </p:nvSpPr>
+        <p:spPr/>
+        <p:txBody>
+          <a:bodyPr/>
+          <a:lstStyle/>
+          <a:p>
+            <a:fld id="{B4B13859-67C5-4393-B6C2-556CF3F770C0}" type="datetime3">
+              <a:rPr lang="en-US" smtClean="0"/>
+              <a:t>23 February 2026</a:t>
+            </a:fld>
+            <a:endParaRPr lang="en-US"/>
+          </a:p>
+        </p:txBody>
+      </p:sp>
+      <p:sp>
+        <p:nvSpPr>
+          <p:cNvPr id="6" name="Slide Number Placeholder 5">
+            <a:extLst>
+              <a:ext uri="{FF2B5EF4-FFF2-40B4-BE49-F238E27FC236}">
+                <a16:creationId xmlns:a16="http://schemas.microsoft.com/office/drawing/2014/main" id="{B966C9E2-76C6-1273-B5FC-72EEBCEC114E}"/>
+              </a:ext>
+            </a:extLst>
+          </p:cNvPr>
+          <p:cNvSpPr>
+            <a:spLocks noGrp="1"/>
+          </p:cNvSpPr>
+          <p:nvPr>
+            <p:ph type="sldNum" sz="quarter" idx="12"/>
+          </p:nvPr>
+        </p:nvSpPr>
+        <p:spPr/>
+        <p:txBody>
+          <a:bodyPr/>
+          <a:lstStyle/>
+          <a:p>
+            <a:fld id="{98AC3541-01C1-4CA5-B68F-FEE868C7D1AF}" type="slidenum">
+              <a:rPr lang="en-US" smtClean="0"/>
+              <a:t>19</a:t>
+            </a:fld>
+            <a:endParaRPr lang="en-US"/>
+          </a:p>
+        </p:txBody>
+      </p:sp>
+    </p:spTree>
+    <p:extLst>
+      <p:ext uri="{BB962C8B-B14F-4D97-AF65-F5344CB8AC3E}">
+        <p14:creationId xmlns:p14="http://schemas.microsoft.com/office/powerpoint/2010/main" val="3419635446"/>
+      </p:ext>
+    </p:extLst>
+  </p:cSld>
+  <p:clrMapOvr>
+    <a:masterClrMapping/>
+  </p:clrMapOvr>
+</p:sld>
+</file>
+
 <file path=ppt/slides/slide2.xml><?xml version="1.0" encoding="utf-8"?>
 <p:sld xmlns:a="http://schemas.openxmlformats.org/drawingml/2006/main" xmlns:r="http://schemas.openxmlformats.org/officeDocument/2006/relationships" xmlns:p="http://schemas.openxmlformats.org/presentationml/2006/main">
   <p:cSld>
@@ -8618,7 +11342,7 @@
           <a:p>
             <a:fld id="{B4B13859-67C5-4393-B6C2-556CF3F770C0}" type="datetime3">
               <a:rPr lang="en-US" smtClean="0"/>
-              <a:t>20 February 2026</a:t>
+              <a:t>23 February 2026</a:t>
             </a:fld>
             <a:endParaRPr lang="en-US" dirty="0"/>
           </a:p>
@@ -8915,6 +11639,831 @@
 </p:sld>
 </file>
 
+<file path=ppt/slides/slide20.xml><?xml version="1.0" encoding="utf-8"?>
+<p:sld xmlns:a="http://schemas.openxmlformats.org/drawingml/2006/main" xmlns:r="http://schemas.openxmlformats.org/officeDocument/2006/relationships" xmlns:p="http://schemas.openxmlformats.org/presentationml/2006/main">
+  <p:cSld>
+    <p:spTree>
+      <p:nvGrpSpPr>
+        <p:cNvPr id="1" name=""/>
+        <p:cNvGrpSpPr/>
+        <p:nvPr/>
+      </p:nvGrpSpPr>
+      <p:grpSpPr>
+        <a:xfrm>
+          <a:off x="0" y="0"/>
+          <a:ext cx="0" cy="0"/>
+          <a:chOff x="0" y="0"/>
+          <a:chExt cx="0" cy="0"/>
+        </a:xfrm>
+      </p:grpSpPr>
+      <p:pic>
+        <p:nvPicPr>
+          <p:cNvPr id="3" name="Content Placeholder 7">
+            <a:extLst>
+              <a:ext uri="{FF2B5EF4-FFF2-40B4-BE49-F238E27FC236}">
+                <a16:creationId xmlns:a16="http://schemas.microsoft.com/office/drawing/2014/main" id="{A11395B8-9AC4-2E17-6D1B-4286633A1763}"/>
+              </a:ext>
+            </a:extLst>
+          </p:cNvPr>
+          <p:cNvPicPr>
+            <a:picLocks noChangeAspect="1"/>
+          </p:cNvPicPr>
+          <p:nvPr/>
+        </p:nvPicPr>
+        <p:blipFill rotWithShape="1">
+          <a:blip r:embed="rId2"/>
+          <a:srcRect/>
+          <a:stretch>
+            <a:fillRect/>
+          </a:stretch>
+        </p:blipFill>
+        <p:spPr bwMode="auto">
+          <a:xfrm>
+            <a:off x="139262" y="1910455"/>
+            <a:ext cx="4679038" cy="1421560"/>
+          </a:xfrm>
+          <a:prstGeom prst="rect">
+            <a:avLst/>
+          </a:prstGeom>
+          <a:noFill/>
+          <a:ln>
+            <a:noFill/>
+          </a:ln>
+          <a:extLst>
+            <a:ext uri="{909E8E84-426E-40DD-AFC4-6F175D3DCCD1}">
+              <a14:hiddenFill xmlns:a14="http://schemas.microsoft.com/office/drawing/2010/main">
+                <a:solidFill>
+                  <a:srgbClr val="FFFFFF"/>
+                </a:solidFill>
+              </a14:hiddenFill>
+            </a:ext>
+            <a:ext uri="{91240B29-F687-4F45-9708-019B960494DF}">
+              <a14:hiddenLine xmlns:a14="http://schemas.microsoft.com/office/drawing/2010/main" w="9525">
+                <a:solidFill>
+                  <a:srgbClr val="000000"/>
+                </a:solidFill>
+                <a:miter lim="800000"/>
+                <a:headEnd/>
+                <a:tailEnd/>
+              </a14:hiddenLine>
+            </a:ext>
+          </a:extLst>
+        </p:spPr>
+      </p:pic>
+      <p:sp>
+        <p:nvSpPr>
+          <p:cNvPr id="2" name="Title 1">
+            <a:extLst>
+              <a:ext uri="{FF2B5EF4-FFF2-40B4-BE49-F238E27FC236}">
+                <a16:creationId xmlns:a16="http://schemas.microsoft.com/office/drawing/2014/main" id="{62A7B986-5846-200C-0158-F8175DE15098}"/>
+              </a:ext>
+            </a:extLst>
+          </p:cNvPr>
+          <p:cNvSpPr>
+            <a:spLocks noGrp="1"/>
+          </p:cNvSpPr>
+          <p:nvPr>
+            <p:ph type="title"/>
+          </p:nvPr>
+        </p:nvSpPr>
+        <p:spPr/>
+        <p:txBody>
+          <a:bodyPr/>
+          <a:lstStyle/>
+          <a:p>
+            <a:r>
+              <a:rPr lang="en-US" dirty="0"/>
+              <a:t>Data hazards – forwarding does not always work!</a:t>
+            </a:r>
+          </a:p>
+        </p:txBody>
+      </p:sp>
+      <p:pic>
+        <p:nvPicPr>
+          <p:cNvPr id="8" name="Content Placeholder 7">
+            <a:extLst>
+              <a:ext uri="{FF2B5EF4-FFF2-40B4-BE49-F238E27FC236}">
+                <a16:creationId xmlns:a16="http://schemas.microsoft.com/office/drawing/2014/main" id="{6097FE54-B195-15D9-61BF-8A82D5CFB7AE}"/>
+              </a:ext>
+            </a:extLst>
+          </p:cNvPr>
+          <p:cNvPicPr>
+            <a:picLocks noGrp="1" noChangeAspect="1"/>
+          </p:cNvPicPr>
+          <p:nvPr>
+            <p:ph idx="1"/>
+          </p:nvPr>
+        </p:nvPicPr>
+        <p:blipFill rotWithShape="1">
+          <a:blip r:embed="rId2"/>
+          <a:srcRect r="64740"/>
+          <a:stretch>
+            <a:fillRect/>
+          </a:stretch>
+        </p:blipFill>
+        <p:spPr>
+          <a:xfrm>
+            <a:off x="139262" y="1901058"/>
+            <a:ext cx="1649826" cy="1421560"/>
+          </a:xfrm>
+        </p:spPr>
+      </p:pic>
+      <p:sp>
+        <p:nvSpPr>
+          <p:cNvPr id="4" name="Date Placeholder 3">
+            <a:extLst>
+              <a:ext uri="{FF2B5EF4-FFF2-40B4-BE49-F238E27FC236}">
+                <a16:creationId xmlns:a16="http://schemas.microsoft.com/office/drawing/2014/main" id="{C2A35710-55ED-87E9-B542-BF3EFE81D815}"/>
+              </a:ext>
+            </a:extLst>
+          </p:cNvPr>
+          <p:cNvSpPr>
+            <a:spLocks noGrp="1"/>
+          </p:cNvSpPr>
+          <p:nvPr>
+            <p:ph type="dt" sz="half" idx="10"/>
+          </p:nvPr>
+        </p:nvSpPr>
+        <p:spPr/>
+        <p:txBody>
+          <a:bodyPr/>
+          <a:lstStyle/>
+          <a:p>
+            <a:fld id="{B4B13859-67C5-4393-B6C2-556CF3F770C0}" type="datetime3">
+              <a:rPr lang="en-US" smtClean="0"/>
+              <a:t>23 February 2026</a:t>
+            </a:fld>
+            <a:endParaRPr lang="en-US"/>
+          </a:p>
+        </p:txBody>
+      </p:sp>
+      <p:sp>
+        <p:nvSpPr>
+          <p:cNvPr id="5" name="Footer Placeholder 4">
+            <a:extLst>
+              <a:ext uri="{FF2B5EF4-FFF2-40B4-BE49-F238E27FC236}">
+                <a16:creationId xmlns:a16="http://schemas.microsoft.com/office/drawing/2014/main" id="{0E2855F0-8069-8AC7-6D5C-8613549B3B44}"/>
+              </a:ext>
+            </a:extLst>
+          </p:cNvPr>
+          <p:cNvSpPr>
+            <a:spLocks noGrp="1"/>
+          </p:cNvSpPr>
+          <p:nvPr>
+            <p:ph type="ftr" sz="quarter" idx="11"/>
+          </p:nvPr>
+        </p:nvSpPr>
+        <p:spPr/>
+        <p:txBody>
+          <a:bodyPr/>
+          <a:lstStyle/>
+          <a:p>
+            <a:r>
+              <a:rPr lang="en-US"/>
+              <a:t>ELL305: Computer Architecture</a:t>
+            </a:r>
+            <a:endParaRPr lang="en-US" dirty="0"/>
+          </a:p>
+        </p:txBody>
+      </p:sp>
+      <p:sp>
+        <p:nvSpPr>
+          <p:cNvPr id="6" name="Slide Number Placeholder 5">
+            <a:extLst>
+              <a:ext uri="{FF2B5EF4-FFF2-40B4-BE49-F238E27FC236}">
+                <a16:creationId xmlns:a16="http://schemas.microsoft.com/office/drawing/2014/main" id="{DB89A614-1F21-792D-092C-618E9A9299DB}"/>
+              </a:ext>
+            </a:extLst>
+          </p:cNvPr>
+          <p:cNvSpPr>
+            <a:spLocks noGrp="1"/>
+          </p:cNvSpPr>
+          <p:nvPr>
+            <p:ph type="sldNum" sz="quarter" idx="12"/>
+          </p:nvPr>
+        </p:nvSpPr>
+        <p:spPr/>
+        <p:txBody>
+          <a:bodyPr/>
+          <a:lstStyle/>
+          <a:p>
+            <a:fld id="{98AC3541-01C1-4CA5-B68F-FEE868C7D1AF}" type="slidenum">
+              <a:rPr lang="en-US" smtClean="0"/>
+              <a:t>20</a:t>
+            </a:fld>
+            <a:endParaRPr lang="en-US"/>
+          </a:p>
+        </p:txBody>
+      </p:sp>
+      <p:sp>
+        <p:nvSpPr>
+          <p:cNvPr id="9" name="Content Placeholder 2">
+            <a:extLst>
+              <a:ext uri="{FF2B5EF4-FFF2-40B4-BE49-F238E27FC236}">
+                <a16:creationId xmlns:a16="http://schemas.microsoft.com/office/drawing/2014/main" id="{6D997545-774F-B322-3189-57299FC4645F}"/>
+              </a:ext>
+            </a:extLst>
+          </p:cNvPr>
+          <p:cNvSpPr txBox="1">
+            <a:spLocks/>
+          </p:cNvSpPr>
+          <p:nvPr/>
+        </p:nvSpPr>
+        <p:spPr>
+          <a:xfrm>
+            <a:off x="4953000" y="1803546"/>
+            <a:ext cx="4035254" cy="1976101"/>
+          </a:xfrm>
+          <a:prstGeom prst="rect">
+            <a:avLst/>
+          </a:prstGeom>
+        </p:spPr>
+        <p:txBody>
+          <a:bodyPr vert="horz" lIns="68580" tIns="34290" rIns="68580" bIns="34290" rtlCol="0">
+            <a:noAutofit/>
+          </a:bodyPr>
+          <a:lstStyle>
+            <a:lvl1pPr marL="228600" indent="-228600" algn="l" defTabSz="914400" rtl="0" eaLnBrk="1" latinLnBrk="0" hangingPunct="1">
+              <a:lnSpc>
+                <a:spcPct val="90000"/>
+              </a:lnSpc>
+              <a:spcBef>
+                <a:spcPts val="1000"/>
+              </a:spcBef>
+              <a:buFont typeface="Arial" panose="020B0604020202020204" pitchFamily="34" charset="0"/>
+              <a:buChar char="•"/>
+              <a:defRPr sz="2400" kern="1200">
+                <a:solidFill>
+                  <a:schemeClr val="tx1"/>
+                </a:solidFill>
+                <a:latin typeface="+mn-lt"/>
+                <a:ea typeface="+mn-ea"/>
+                <a:cs typeface="+mn-cs"/>
+              </a:defRPr>
+            </a:lvl1pPr>
+            <a:lvl2pPr marL="685800" indent="-228600" algn="l" defTabSz="914400" rtl="0" eaLnBrk="1" latinLnBrk="0" hangingPunct="1">
+              <a:lnSpc>
+                <a:spcPct val="90000"/>
+              </a:lnSpc>
+              <a:spcBef>
+                <a:spcPts val="500"/>
+              </a:spcBef>
+              <a:buFont typeface="Arial" panose="020B0604020202020204" pitchFamily="34" charset="0"/>
+              <a:buChar char="•"/>
+              <a:defRPr sz="2000" kern="1200">
+                <a:solidFill>
+                  <a:schemeClr val="tx1"/>
+                </a:solidFill>
+                <a:latin typeface="+mn-lt"/>
+                <a:ea typeface="+mn-ea"/>
+                <a:cs typeface="+mn-cs"/>
+              </a:defRPr>
+            </a:lvl2pPr>
+            <a:lvl3pPr marL="1143000" indent="-228600" algn="l" defTabSz="914400" rtl="0" eaLnBrk="1" latinLnBrk="0" hangingPunct="1">
+              <a:lnSpc>
+                <a:spcPct val="90000"/>
+              </a:lnSpc>
+              <a:spcBef>
+                <a:spcPts val="500"/>
+              </a:spcBef>
+              <a:buFont typeface="Arial" panose="020B0604020202020204" pitchFamily="34" charset="0"/>
+              <a:buChar char="•"/>
+              <a:defRPr sz="1800" kern="1200">
+                <a:solidFill>
+                  <a:schemeClr val="tx1"/>
+                </a:solidFill>
+                <a:latin typeface="+mn-lt"/>
+                <a:ea typeface="+mn-ea"/>
+                <a:cs typeface="+mn-cs"/>
+              </a:defRPr>
+            </a:lvl3pPr>
+            <a:lvl4pPr marL="1600200" indent="-228600" algn="l" defTabSz="914400" rtl="0" eaLnBrk="1" latinLnBrk="0" hangingPunct="1">
+              <a:lnSpc>
+                <a:spcPct val="90000"/>
+              </a:lnSpc>
+              <a:spcBef>
+                <a:spcPts val="500"/>
+              </a:spcBef>
+              <a:buFont typeface="Arial" panose="020B0604020202020204" pitchFamily="34" charset="0"/>
+              <a:buChar char="•"/>
+              <a:defRPr sz="1600" kern="1200">
+                <a:solidFill>
+                  <a:schemeClr val="tx1"/>
+                </a:solidFill>
+                <a:latin typeface="+mn-lt"/>
+                <a:ea typeface="+mn-ea"/>
+                <a:cs typeface="+mn-cs"/>
+              </a:defRPr>
+            </a:lvl4pPr>
+            <a:lvl5pPr marL="2057400" indent="-228600" algn="l" defTabSz="914400" rtl="0" eaLnBrk="1" latinLnBrk="0" hangingPunct="1">
+              <a:lnSpc>
+                <a:spcPct val="90000"/>
+              </a:lnSpc>
+              <a:spcBef>
+                <a:spcPts val="500"/>
+              </a:spcBef>
+              <a:buFont typeface="Arial" panose="020B0604020202020204" pitchFamily="34" charset="0"/>
+              <a:buChar char="•"/>
+              <a:defRPr sz="1600" kern="1200">
+                <a:solidFill>
+                  <a:schemeClr val="tx1"/>
+                </a:solidFill>
+                <a:latin typeface="+mn-lt"/>
+                <a:ea typeface="+mn-ea"/>
+                <a:cs typeface="+mn-cs"/>
+              </a:defRPr>
+            </a:lvl5pPr>
+            <a:lvl6pPr marL="2514600" indent="-228600" algn="l" defTabSz="914400" rtl="0" eaLnBrk="1" latinLnBrk="0" hangingPunct="1">
+              <a:lnSpc>
+                <a:spcPct val="90000"/>
+              </a:lnSpc>
+              <a:spcBef>
+                <a:spcPts val="500"/>
+              </a:spcBef>
+              <a:buFont typeface="Arial" panose="020B0604020202020204" pitchFamily="34" charset="0"/>
+              <a:buChar char="•"/>
+              <a:defRPr sz="1800" kern="1200">
+                <a:solidFill>
+                  <a:schemeClr val="tx1"/>
+                </a:solidFill>
+                <a:latin typeface="+mn-lt"/>
+                <a:ea typeface="+mn-ea"/>
+                <a:cs typeface="+mn-cs"/>
+              </a:defRPr>
+            </a:lvl6pPr>
+            <a:lvl7pPr marL="2971800" indent="-228600" algn="l" defTabSz="914400" rtl="0" eaLnBrk="1" latinLnBrk="0" hangingPunct="1">
+              <a:lnSpc>
+                <a:spcPct val="90000"/>
+              </a:lnSpc>
+              <a:spcBef>
+                <a:spcPts val="500"/>
+              </a:spcBef>
+              <a:buFont typeface="Arial" panose="020B0604020202020204" pitchFamily="34" charset="0"/>
+              <a:buChar char="•"/>
+              <a:defRPr sz="1800" kern="1200">
+                <a:solidFill>
+                  <a:schemeClr val="tx1"/>
+                </a:solidFill>
+                <a:latin typeface="+mn-lt"/>
+                <a:ea typeface="+mn-ea"/>
+                <a:cs typeface="+mn-cs"/>
+              </a:defRPr>
+            </a:lvl7pPr>
+            <a:lvl8pPr marL="3429000" indent="-228600" algn="l" defTabSz="914400" rtl="0" eaLnBrk="1" latinLnBrk="0" hangingPunct="1">
+              <a:lnSpc>
+                <a:spcPct val="90000"/>
+              </a:lnSpc>
+              <a:spcBef>
+                <a:spcPts val="500"/>
+              </a:spcBef>
+              <a:buFont typeface="Arial" panose="020B0604020202020204" pitchFamily="34" charset="0"/>
+              <a:buChar char="•"/>
+              <a:defRPr sz="1800" kern="1200">
+                <a:solidFill>
+                  <a:schemeClr val="tx1"/>
+                </a:solidFill>
+                <a:latin typeface="+mn-lt"/>
+                <a:ea typeface="+mn-ea"/>
+                <a:cs typeface="+mn-cs"/>
+              </a:defRPr>
+            </a:lvl8pPr>
+            <a:lvl9pPr marL="3886200" indent="-228600" algn="l" defTabSz="914400" rtl="0" eaLnBrk="1" latinLnBrk="0" hangingPunct="1">
+              <a:lnSpc>
+                <a:spcPct val="90000"/>
+              </a:lnSpc>
+              <a:spcBef>
+                <a:spcPts val="500"/>
+              </a:spcBef>
+              <a:buFont typeface="Arial" panose="020B0604020202020204" pitchFamily="34" charset="0"/>
+              <a:buChar char="•"/>
+              <a:defRPr sz="1800" kern="1200">
+                <a:solidFill>
+                  <a:schemeClr val="tx1"/>
+                </a:solidFill>
+                <a:latin typeface="+mn-lt"/>
+                <a:ea typeface="+mn-ea"/>
+                <a:cs typeface="+mn-cs"/>
+              </a:defRPr>
+            </a:lvl9pPr>
+          </a:lstStyle>
+          <a:p>
+            <a:r>
+              <a:rPr lang="en-US" sz="2000" dirty="0"/>
+              <a:t>Hardware can stall the pipeline – hardware interlocks</a:t>
+            </a:r>
+          </a:p>
+          <a:p>
+            <a:r>
+              <a:rPr lang="en-US" sz="2000" dirty="0"/>
+              <a:t>Slot after ‘load’ is called a ‘load delay slot’</a:t>
+            </a:r>
+          </a:p>
+          <a:p>
+            <a:r>
+              <a:rPr lang="en-US" sz="2000" dirty="0"/>
+              <a:t>Re-ordering code, if possible, is always a good solution!</a:t>
+            </a:r>
+          </a:p>
+        </p:txBody>
+      </p:sp>
+      <p:pic>
+        <p:nvPicPr>
+          <p:cNvPr id="11" name="Picture 10">
+            <a:extLst>
+              <a:ext uri="{FF2B5EF4-FFF2-40B4-BE49-F238E27FC236}">
+                <a16:creationId xmlns:a16="http://schemas.microsoft.com/office/drawing/2014/main" id="{E12F6CF1-D9B4-364C-015B-C46492A9B6EA}"/>
+              </a:ext>
+            </a:extLst>
+          </p:cNvPr>
+          <p:cNvPicPr>
+            <a:picLocks noChangeAspect="1"/>
+          </p:cNvPicPr>
+          <p:nvPr/>
+        </p:nvPicPr>
+        <p:blipFill>
+          <a:blip r:embed="rId3"/>
+          <a:stretch>
+            <a:fillRect/>
+          </a:stretch>
+        </p:blipFill>
+        <p:spPr>
+          <a:xfrm>
+            <a:off x="1295400" y="3886200"/>
+            <a:ext cx="6630326" cy="2407780"/>
+          </a:xfrm>
+          <a:prstGeom prst="rect">
+            <a:avLst/>
+          </a:prstGeom>
+        </p:spPr>
+      </p:pic>
+      <p:sp>
+        <p:nvSpPr>
+          <p:cNvPr id="12" name="TextBox 11">
+            <a:extLst>
+              <a:ext uri="{FF2B5EF4-FFF2-40B4-BE49-F238E27FC236}">
+                <a16:creationId xmlns:a16="http://schemas.microsoft.com/office/drawing/2014/main" id="{6EAC05DF-0A8D-1E60-154B-DA359313514F}"/>
+              </a:ext>
+            </a:extLst>
+          </p:cNvPr>
+          <p:cNvSpPr txBox="1"/>
+          <p:nvPr/>
+        </p:nvSpPr>
+        <p:spPr>
+          <a:xfrm>
+            <a:off x="86736" y="1439035"/>
+            <a:ext cx="6999863" cy="369332"/>
+          </a:xfrm>
+          <a:prstGeom prst="rect">
+            <a:avLst/>
+          </a:prstGeom>
+          <a:noFill/>
+        </p:spPr>
+        <p:txBody>
+          <a:bodyPr wrap="square">
+            <a:spAutoFit/>
+          </a:bodyPr>
+          <a:lstStyle/>
+          <a:p>
+            <a:r>
+              <a:rPr lang="en-US" dirty="0">
+                <a:solidFill>
+                  <a:srgbClr val="FF0000"/>
+                </a:solidFill>
+              </a:rPr>
+              <a:t>Analyze this RAW hazard. What will you forward?</a:t>
+            </a:r>
+          </a:p>
+        </p:txBody>
+      </p:sp>
+    </p:spTree>
+    <p:extLst>
+      <p:ext uri="{BB962C8B-B14F-4D97-AF65-F5344CB8AC3E}">
+        <p14:creationId xmlns:p14="http://schemas.microsoft.com/office/powerpoint/2010/main" val="2671844509"/>
+      </p:ext>
+    </p:extLst>
+  </p:cSld>
+  <p:clrMapOvr>
+    <a:masterClrMapping/>
+  </p:clrMapOvr>
+  <p:timing>
+    <p:tnLst>
+      <p:par>
+        <p:cTn id="1" dur="indefinite" restart="never" nodeType="tmRoot">
+          <p:childTnLst>
+            <p:seq concurrent="1" nextAc="seek">
+              <p:cTn id="2" dur="indefinite" nodeType="mainSeq">
+                <p:childTnLst>
+                  <p:par>
+                    <p:cTn id="3" fill="hold">
+                      <p:stCondLst>
+                        <p:cond delay="indefinite"/>
+                      </p:stCondLst>
+                      <p:childTnLst>
+                        <p:par>
+                          <p:cTn id="4" fill="hold">
+                            <p:stCondLst>
+                              <p:cond delay="0"/>
+                            </p:stCondLst>
+                            <p:childTnLst>
+                              <p:par>
+                                <p:cTn id="5" presetID="1" presetClass="entr" presetSubtype="0" fill="hold" nodeType="clickEffect">
+                                  <p:stCondLst>
+                                    <p:cond delay="0"/>
+                                  </p:stCondLst>
+                                  <p:childTnLst>
+                                    <p:set>
+                                      <p:cBhvr>
+                                        <p:cTn id="6" dur="1" fill="hold">
+                                          <p:stCondLst>
+                                            <p:cond delay="0"/>
+                                          </p:stCondLst>
+                                        </p:cTn>
+                                        <p:tgtEl>
+                                          <p:spTgt spid="3"/>
+                                        </p:tgtEl>
+                                        <p:attrNameLst>
+                                          <p:attrName>style.visibility</p:attrName>
+                                        </p:attrNameLst>
+                                      </p:cBhvr>
+                                      <p:to>
+                                        <p:strVal val="visible"/>
+                                      </p:to>
+                                    </p:set>
+                                  </p:childTnLst>
+                                </p:cTn>
+                              </p:par>
+                            </p:childTnLst>
+                          </p:cTn>
+                        </p:par>
+                      </p:childTnLst>
+                    </p:cTn>
+                  </p:par>
+                  <p:par>
+                    <p:cTn id="7" fill="hold">
+                      <p:stCondLst>
+                        <p:cond delay="indefinite"/>
+                      </p:stCondLst>
+                      <p:childTnLst>
+                        <p:par>
+                          <p:cTn id="8" fill="hold">
+                            <p:stCondLst>
+                              <p:cond delay="0"/>
+                            </p:stCondLst>
+                            <p:childTnLst>
+                              <p:par>
+                                <p:cTn id="9" presetID="1" presetClass="entr" presetSubtype="0" fill="hold" grpId="0" nodeType="clickEffect">
+                                  <p:stCondLst>
+                                    <p:cond delay="0"/>
+                                  </p:stCondLst>
+                                  <p:childTnLst>
+                                    <p:set>
+                                      <p:cBhvr>
+                                        <p:cTn id="10" dur="1" fill="hold">
+                                          <p:stCondLst>
+                                            <p:cond delay="0"/>
+                                          </p:stCondLst>
+                                        </p:cTn>
+                                        <p:tgtEl>
+                                          <p:spTgt spid="2"/>
+                                        </p:tgtEl>
+                                        <p:attrNameLst>
+                                          <p:attrName>style.visibility</p:attrName>
+                                        </p:attrNameLst>
+                                      </p:cBhvr>
+                                      <p:to>
+                                        <p:strVal val="visible"/>
+                                      </p:to>
+                                    </p:set>
+                                  </p:childTnLst>
+                                </p:cTn>
+                              </p:par>
+                            </p:childTnLst>
+                          </p:cTn>
+                        </p:par>
+                      </p:childTnLst>
+                    </p:cTn>
+                  </p:par>
+                  <p:par>
+                    <p:cTn id="11" fill="hold">
+                      <p:stCondLst>
+                        <p:cond delay="indefinite"/>
+                      </p:stCondLst>
+                      <p:childTnLst>
+                        <p:par>
+                          <p:cTn id="12" fill="hold">
+                            <p:stCondLst>
+                              <p:cond delay="0"/>
+                            </p:stCondLst>
+                            <p:childTnLst>
+                              <p:par>
+                                <p:cTn id="13" presetID="1" presetClass="entr" presetSubtype="0" fill="hold" grpId="0" nodeType="clickEffect">
+                                  <p:stCondLst>
+                                    <p:cond delay="0"/>
+                                  </p:stCondLst>
+                                  <p:childTnLst>
+                                    <p:set>
+                                      <p:cBhvr>
+                                        <p:cTn id="14" dur="1" fill="hold">
+                                          <p:stCondLst>
+                                            <p:cond delay="0"/>
+                                          </p:stCondLst>
+                                        </p:cTn>
+                                        <p:tgtEl>
+                                          <p:spTgt spid="9">
+                                            <p:txEl>
+                                              <p:pRg st="0" end="0"/>
+                                            </p:txEl>
+                                          </p:spTgt>
+                                        </p:tgtEl>
+                                        <p:attrNameLst>
+                                          <p:attrName>style.visibility</p:attrName>
+                                        </p:attrNameLst>
+                                      </p:cBhvr>
+                                      <p:to>
+                                        <p:strVal val="visible"/>
+                                      </p:to>
+                                    </p:set>
+                                  </p:childTnLst>
+                                </p:cTn>
+                              </p:par>
+                            </p:childTnLst>
+                          </p:cTn>
+                        </p:par>
+                      </p:childTnLst>
+                    </p:cTn>
+                  </p:par>
+                  <p:par>
+                    <p:cTn id="15" fill="hold">
+                      <p:stCondLst>
+                        <p:cond delay="indefinite"/>
+                      </p:stCondLst>
+                      <p:childTnLst>
+                        <p:par>
+                          <p:cTn id="16" fill="hold">
+                            <p:stCondLst>
+                              <p:cond delay="0"/>
+                            </p:stCondLst>
+                            <p:childTnLst>
+                              <p:par>
+                                <p:cTn id="17" presetID="1" presetClass="entr" presetSubtype="0" fill="hold" grpId="0" nodeType="clickEffect">
+                                  <p:stCondLst>
+                                    <p:cond delay="0"/>
+                                  </p:stCondLst>
+                                  <p:childTnLst>
+                                    <p:set>
+                                      <p:cBhvr>
+                                        <p:cTn id="18" dur="1" fill="hold">
+                                          <p:stCondLst>
+                                            <p:cond delay="0"/>
+                                          </p:stCondLst>
+                                        </p:cTn>
+                                        <p:tgtEl>
+                                          <p:spTgt spid="9">
+                                            <p:txEl>
+                                              <p:pRg st="1" end="1"/>
+                                            </p:txEl>
+                                          </p:spTgt>
+                                        </p:tgtEl>
+                                        <p:attrNameLst>
+                                          <p:attrName>style.visibility</p:attrName>
+                                        </p:attrNameLst>
+                                      </p:cBhvr>
+                                      <p:to>
+                                        <p:strVal val="visible"/>
+                                      </p:to>
+                                    </p:set>
+                                  </p:childTnLst>
+                                </p:cTn>
+                              </p:par>
+                            </p:childTnLst>
+                          </p:cTn>
+                        </p:par>
+                      </p:childTnLst>
+                    </p:cTn>
+                  </p:par>
+                  <p:par>
+                    <p:cTn id="19" fill="hold">
+                      <p:stCondLst>
+                        <p:cond delay="indefinite"/>
+                      </p:stCondLst>
+                      <p:childTnLst>
+                        <p:par>
+                          <p:cTn id="20" fill="hold">
+                            <p:stCondLst>
+                              <p:cond delay="0"/>
+                            </p:stCondLst>
+                            <p:childTnLst>
+                              <p:par>
+                                <p:cTn id="21" presetID="1" presetClass="entr" presetSubtype="0" fill="hold" grpId="0" nodeType="clickEffect">
+                                  <p:stCondLst>
+                                    <p:cond delay="0"/>
+                                  </p:stCondLst>
+                                  <p:childTnLst>
+                                    <p:set>
+                                      <p:cBhvr>
+                                        <p:cTn id="22" dur="1" fill="hold">
+                                          <p:stCondLst>
+                                            <p:cond delay="0"/>
+                                          </p:stCondLst>
+                                        </p:cTn>
+                                        <p:tgtEl>
+                                          <p:spTgt spid="9">
+                                            <p:txEl>
+                                              <p:pRg st="2" end="2"/>
+                                            </p:txEl>
+                                          </p:spTgt>
+                                        </p:tgtEl>
+                                        <p:attrNameLst>
+                                          <p:attrName>style.visibility</p:attrName>
+                                        </p:attrNameLst>
+                                      </p:cBhvr>
+                                      <p:to>
+                                        <p:strVal val="visible"/>
+                                      </p:to>
+                                    </p:set>
+                                  </p:childTnLst>
+                                </p:cTn>
+                              </p:par>
+                            </p:childTnLst>
+                          </p:cTn>
+                        </p:par>
+                      </p:childTnLst>
+                    </p:cTn>
+                  </p:par>
+                  <p:par>
+                    <p:cTn id="23" fill="hold">
+                      <p:stCondLst>
+                        <p:cond delay="indefinite"/>
+                      </p:stCondLst>
+                      <p:childTnLst>
+                        <p:par>
+                          <p:cTn id="24" fill="hold">
+                            <p:stCondLst>
+                              <p:cond delay="0"/>
+                            </p:stCondLst>
+                            <p:childTnLst>
+                              <p:par>
+                                <p:cTn id="25" presetID="1" presetClass="entr" presetSubtype="0" fill="hold" nodeType="clickEffect">
+                                  <p:stCondLst>
+                                    <p:cond delay="0"/>
+                                  </p:stCondLst>
+                                  <p:childTnLst>
+                                    <p:set>
+                                      <p:cBhvr>
+                                        <p:cTn id="26" dur="1" fill="hold">
+                                          <p:stCondLst>
+                                            <p:cond delay="0"/>
+                                          </p:stCondLst>
+                                        </p:cTn>
+                                        <p:tgtEl>
+                                          <p:spTgt spid="11"/>
+                                        </p:tgtEl>
+                                        <p:attrNameLst>
+                                          <p:attrName>style.visibility</p:attrName>
+                                        </p:attrNameLst>
+                                      </p:cBhvr>
+                                      <p:to>
+                                        <p:strVal val="visible"/>
+                                      </p:to>
+                                    </p:set>
+                                  </p:childTnLst>
+                                </p:cTn>
+                              </p:par>
+                            </p:childTnLst>
+                          </p:cTn>
+                        </p:par>
+                      </p:childTnLst>
+                    </p:cTn>
+                  </p:par>
+                </p:childTnLst>
+              </p:cTn>
+              <p:prevCondLst>
+                <p:cond evt="onPrev" delay="0">
+                  <p:tgtEl>
+                    <p:sldTgt/>
+                  </p:tgtEl>
+                </p:cond>
+              </p:prevCondLst>
+              <p:nextCondLst>
+                <p:cond evt="onNext" delay="0">
+                  <p:tgtEl>
+                    <p:sldTgt/>
+                  </p:tgtEl>
+                </p:cond>
+              </p:nextCondLst>
+            </p:seq>
+          </p:childTnLst>
+        </p:cTn>
+      </p:par>
+    </p:tnLst>
+    <p:bldLst>
+      <p:bldP spid="2" grpId="0"/>
+      <p:bldP spid="9" grpId="0" build="p"/>
+    </p:bldLst>
+  </p:timing>
+</p:sld>
+</file>
+
 <file path=ppt/slides/slide3.xml><?xml version="1.0" encoding="utf-8"?>
 <p:sld xmlns:a="http://schemas.openxmlformats.org/drawingml/2006/main" xmlns:r="http://schemas.openxmlformats.org/officeDocument/2006/relationships" xmlns:p="http://schemas.openxmlformats.org/presentationml/2006/main">
   <p:cSld>
@@ -9103,7 +12652,7 @@
           <a:p>
             <a:fld id="{B4B13859-67C5-4393-B6C2-556CF3F770C0}" type="datetime3">
               <a:rPr lang="en-US" smtClean="0"/>
-              <a:t>20 February 2026</a:t>
+              <a:t>23 February 2026</a:t>
             </a:fld>
             <a:endParaRPr lang="en-US" dirty="0"/>
           </a:p>
@@ -9593,7 +13142,7 @@
           <a:p>
             <a:fld id="{B4B13859-67C5-4393-B6C2-556CF3F770C0}" type="datetime3">
               <a:rPr lang="en-US" smtClean="0"/>
-              <a:t>20 February 2026</a:t>
+              <a:t>23 February 2026</a:t>
             </a:fld>
             <a:endParaRPr lang="en-US" dirty="0"/>
           </a:p>
@@ -12017,7 +15566,7 @@
           <a:p>
             <a:fld id="{B4B13859-67C5-4393-B6C2-556CF3F770C0}" type="datetime3">
               <a:rPr lang="en-US" smtClean="0"/>
-              <a:t>20 February 2026</a:t>
+              <a:t>23 February 2026</a:t>
             </a:fld>
             <a:endParaRPr lang="en-US" dirty="0"/>
           </a:p>
@@ -12829,7 +16378,7 @@
           <a:p>
             <a:fld id="{B4B13859-67C5-4393-B6C2-556CF3F770C0}" type="datetime3">
               <a:rPr lang="en-US" smtClean="0"/>
-              <a:t>20 February 2026</a:t>
+              <a:t>23 February 2026</a:t>
             </a:fld>
             <a:endParaRPr lang="en-US" dirty="0"/>
           </a:p>
@@ -13069,7 +16618,7 @@
           <a:p>
             <a:fld id="{B4B13859-67C5-4393-B6C2-556CF3F770C0}" type="datetime3">
               <a:rPr lang="en-US" smtClean="0"/>
-              <a:t>20 February 2026</a:t>
+              <a:t>23 February 2026</a:t>
             </a:fld>
             <a:endParaRPr lang="en-US" dirty="0"/>
           </a:p>
@@ -13759,7 +17308,7 @@
           <a:p>
             <a:fld id="{B4B13859-67C5-4393-B6C2-556CF3F770C0}" type="datetime3">
               <a:rPr lang="en-US" smtClean="0"/>
-              <a:t>20 February 2026</a:t>
+              <a:t>23 February 2026</a:t>
             </a:fld>
             <a:endParaRPr lang="en-US" dirty="0"/>
           </a:p>
@@ -14345,7 +17894,7 @@
           <a:p>
             <a:fld id="{B4B13859-67C5-4393-B6C2-556CF3F770C0}" type="datetime3">
               <a:rPr lang="en-US" smtClean="0"/>
-              <a:t>20 February 2026</a:t>
+              <a:t>23 February 2026</a:t>
             </a:fld>
             <a:endParaRPr lang="en-US" dirty="0"/>
           </a:p>

--- a/Lec-15-19-pipelined-cpu.pptx
+++ b/Lec-15-19-pipelined-cpu.pptx
@@ -5,7 +5,7 @@
     <p:sldMasterId id="2147483648" r:id="rId1"/>
   </p:sldMasterIdLst>
   <p:notesMasterIdLst>
-    <p:notesMasterId r:id="rId22"/>
+    <p:notesMasterId r:id="rId24"/>
   </p:notesMasterIdLst>
   <p:sldIdLst>
     <p:sldId id="337" r:id="rId2"/>
@@ -13,21 +13,23 @@
     <p:sldId id="437" r:id="rId4"/>
     <p:sldId id="344" r:id="rId5"/>
     <p:sldId id="345" r:id="rId6"/>
-    <p:sldId id="438" r:id="rId7"/>
-    <p:sldId id="439" r:id="rId8"/>
-    <p:sldId id="441" r:id="rId9"/>
-    <p:sldId id="442" r:id="rId10"/>
-    <p:sldId id="346" r:id="rId11"/>
-    <p:sldId id="348" r:id="rId12"/>
-    <p:sldId id="443" r:id="rId13"/>
-    <p:sldId id="444" r:id="rId14"/>
-    <p:sldId id="350" r:id="rId15"/>
-    <p:sldId id="351" r:id="rId16"/>
-    <p:sldId id="352" r:id="rId17"/>
-    <p:sldId id="353" r:id="rId18"/>
-    <p:sldId id="354" r:id="rId19"/>
-    <p:sldId id="355" r:id="rId20"/>
-    <p:sldId id="356" r:id="rId21"/>
+    <p:sldId id="439" r:id="rId7"/>
+    <p:sldId id="441" r:id="rId8"/>
+    <p:sldId id="442" r:id="rId9"/>
+    <p:sldId id="346" r:id="rId10"/>
+    <p:sldId id="348" r:id="rId11"/>
+    <p:sldId id="443" r:id="rId12"/>
+    <p:sldId id="444" r:id="rId13"/>
+    <p:sldId id="350" r:id="rId14"/>
+    <p:sldId id="351" r:id="rId15"/>
+    <p:sldId id="352" r:id="rId16"/>
+    <p:sldId id="353" r:id="rId17"/>
+    <p:sldId id="354" r:id="rId18"/>
+    <p:sldId id="355" r:id="rId19"/>
+    <p:sldId id="356" r:id="rId20"/>
+    <p:sldId id="357" r:id="rId21"/>
+    <p:sldId id="358" r:id="rId22"/>
+    <p:sldId id="359" r:id="rId23"/>
   </p:sldIdLst>
   <p:sldSz cx="9144000" cy="6858000" type="screen4x3"/>
   <p:notesSz cx="6858000" cy="9144000"/>
@@ -175,6 +177,230 @@
 </p:presentation>
 </file>
 
+<file path=ppt/ink/ink1.xml><?xml version="1.0" encoding="utf-8"?>
+<inkml:ink xmlns:inkml="http://www.w3.org/2003/InkML">
+  <inkml:definitions>
+    <inkml:context xml:id="ctx0">
+      <inkml:inkSource xml:id="inkSrc0">
+        <inkml:traceFormat>
+          <inkml:channel name="X" type="integer" min="-2.14748E9" max="2.14748E9" units="cm"/>
+          <inkml:channel name="Y" type="integer" min="-2.14748E9" max="2.14748E9" units="cm"/>
+          <inkml:channel name="F" type="integer" max="32767" units="dev"/>
+          <inkml:channel name="OA" type="integer" max="360" units="deg"/>
+          <inkml:channel name="OE" type="integer" max="90" units="deg"/>
+        </inkml:traceFormat>
+        <inkml:channelProperties>
+          <inkml:channelProperty channel="X" name="resolution" value="1000" units="1/cm"/>
+          <inkml:channelProperty channel="Y" name="resolution" value="1000" units="1/cm"/>
+          <inkml:channelProperty channel="F" name="resolution" value="0" units="1/dev"/>
+          <inkml:channelProperty channel="OA" name="resolution" value="1000" units="1/deg"/>
+          <inkml:channelProperty channel="OE" name="resolution" value="1000" units="1/deg"/>
+        </inkml:channelProperties>
+      </inkml:inkSource>
+      <inkml:timestamp xml:id="ts0" timeString="2026-02-25T05:37:28.022"/>
+    </inkml:context>
+    <inkml:brush xml:id="br0">
+      <inkml:brushProperty name="width" value="0.035" units="cm"/>
+      <inkml:brushProperty name="height" value="0.035" units="cm"/>
+      <inkml:brushProperty name="color" value="#E71224"/>
+    </inkml:brush>
+  </inkml:definitions>
+  <inkml:trace contextRef="#ctx0" brushRef="#br0">290 234 1496 0 0,'4'-10'8443'0'0,"-11"-9"-7596"0"0,-20-19 2010 0 0,25 36-2903 0 0,-1-1 0 0 0,1 1 0 0 0,0 0 0 0 0,-1 0 0 0 0,1 1 0 0 0,-1-1 0 0 0,1 0 0 0 0,-1 1 0 0 0,0 0 0 0 0,0-1 0 0 0,0 1 0 0 0,0 0 0 0 0,0 0 0 0 0,0 1 0 0 0,0-1 0 0 0,0 1 0 0 0,0-1 0 0 0,0 1 0 0 0,-3 0 0 0 0,-7 6 47 0 0,1-1 0 0 0,0 1 1 0 0,0 1-1 0 0,1 0 0 0 0,0 1 1 0 0,-14 12-1 0 0,0-1-277 0 0,18-15 514 0 0,0 0 0 0 0,1 1 1 0 0,0 0-1 0 0,-8 8 0 0 0,11-8-268 0 0,1-1 1 0 0,0 1-1 0 0,0-1 1 0 0,0 1-1 0 0,1-1 0 0 0,0 1 1 0 0,-1 7-1 0 0,-2 5-175 0 0,-4 27 508 0 0,2-10-88 0 0,2 5 348 0 0,2-13-157 0 0,1-11-238 0 0,0 1 0 0 0,1-1-1 0 0,1 0 1 0 0,4 27-1 0 0,19 58 578 0 0,-23-97-745 0 0,3 9 11 0 0,1 0-1 0 0,1 0 1 0 0,0 0-1 0 0,0-1 1 0 0,10 14-1 0 0,5 9 7 0 0,-15-27-18 0 0,-1 1 0 0 0,1-1-1 0 0,0 0 1 0 0,0-1 0 0 0,1 0-1 0 0,0 0 1 0 0,0 0 0 0 0,1-1-1 0 0,14 9 1 0 0,-10-9 116 0 0,1 0-1 0 0,0 0 1 0 0,0-1-1 0 0,0-1 1 0 0,0 0-1 0 0,0-1 0 0 0,0 0 1 0 0,1-1-1 0 0,-1-1 1 0 0,1 0-1 0 0,20-3 1 0 0,-28 1-124 0 0,-1 1 1 0 0,1-1-1 0 0,-1 0 1 0 0,1 0-1 0 0,-1 0 1 0 0,0-1-1 0 0,0 0 1 0 0,0 0 0 0 0,0 0-1 0 0,-1-1 1 0 0,1 1-1 0 0,4-6 1 0 0,1-1 115 0 0,-1-1 1 0 0,0 1-1 0 0,15-23 1 0 0,1-8-146 0 0,42-72-368 0 0,-59 97 358 0 0,-1 0-1 0 0,-1 0 0 0 0,0-1 0 0 0,-2 0 0 0 0,5-25 1 0 0,-4 9 59 0 0,0-11 63 0 0,21-82 1 0 0,-24 119-28 0 0,0 0 0 0 0,-1 0 1 0 0,-1 0-1 0 0,1 0 1 0 0,-1-1-1 0 0,0 1 0 0 0,-1 0 1 0 0,1 0-1 0 0,-2 0 1 0 0,1 0-1 0 0,-1 0 0 0 0,0 0 1 0 0,0 0-1 0 0,-1 0 0 0 0,0 0 1 0 0,0 1-1 0 0,0 0 1 0 0,-7-10-1 0 0,-1 1 82 0 0,-1 0-1 0 0,0 1 1 0 0,-1 1-1 0 0,0 0 1 0 0,-1 0 0 0 0,-16-10-1 0 0,23 17-204 0 0,-1 1 0 0 0,0 0 0 0 0,0 0 0 0 0,0 1 0 0 0,0 0 0 0 0,-1 1-1 0 0,1-1 1 0 0,-1 2 0 0 0,0-1 0 0 0,0 1 0 0 0,0 1 0 0 0,0-1 0 0 0,-1 2 0 0 0,1-1 0 0 0,0 1 0 0 0,0 1 0 0 0,-11 1-1 0 0,3 1-507 0 0,1 2 0 0 0,0 0 0 0 0,0 1 0 0 0,-29 14 0 0 0,12-1-2137 0 0,-33 25 1 0 0,45-28-936 0 0</inkml:trace>
+</inkml:ink>
+</file>
+
+<file path=ppt/ink/ink2.xml><?xml version="1.0" encoding="utf-8"?>
+<inkml:ink xmlns:inkml="http://www.w3.org/2003/InkML">
+  <inkml:definitions>
+    <inkml:context xml:id="ctx0">
+      <inkml:inkSource xml:id="inkSrc0">
+        <inkml:traceFormat>
+          <inkml:channel name="X" type="integer" min="-2.14748E9" max="2.14748E9" units="cm"/>
+          <inkml:channel name="Y" type="integer" min="-2.14748E9" max="2.14748E9" units="cm"/>
+          <inkml:channel name="F" type="integer" max="32767" units="dev"/>
+          <inkml:channel name="OA" type="integer" max="360" units="deg"/>
+          <inkml:channel name="OE" type="integer" max="90" units="deg"/>
+        </inkml:traceFormat>
+        <inkml:channelProperties>
+          <inkml:channelProperty channel="X" name="resolution" value="1000" units="1/cm"/>
+          <inkml:channelProperty channel="Y" name="resolution" value="1000" units="1/cm"/>
+          <inkml:channelProperty channel="F" name="resolution" value="0" units="1/dev"/>
+          <inkml:channelProperty channel="OA" name="resolution" value="1000" units="1/deg"/>
+          <inkml:channelProperty channel="OE" name="resolution" value="1000" units="1/deg"/>
+        </inkml:channelProperties>
+      </inkml:inkSource>
+      <inkml:timestamp xml:id="ts0" timeString="2026-02-25T05:37:33.786"/>
+    </inkml:context>
+    <inkml:brush xml:id="br0">
+      <inkml:brushProperty name="width" value="0.035" units="cm"/>
+      <inkml:brushProperty name="height" value="0.035" units="cm"/>
+      <inkml:brushProperty name="color" value="#E71224"/>
+    </inkml:brush>
+  </inkml:definitions>
+  <inkml:trace contextRef="#ctx0" brushRef="#br0">14 101 4345 0 0,'-1'0'54'0'0,"1"1"0"0"0,0-1 0 0 0,-1 0-1 0 0,1 0 1 0 0,-1 0 0 0 0,1 1 0 0 0,-1-1 0 0 0,1 0 0 0 0,0 1 0 0 0,-1-1-1 0 0,1 0 1 0 0,0 1 0 0 0,-1-1 0 0 0,1 0 0 0 0,0 1 0 0 0,-1-1 0 0 0,1 1-1 0 0,0 0 1 0 0,4 4 987 0 0,19 1-384 0 0,-14-3-260 0 0,12 1-364 0 0,-20-4 29 0 0,0 0 1 0 0,0 0 0 0 0,0 0 0 0 0,0 0 0 0 0,0 0-1 0 0,0 0 1 0 0,0 0 0 0 0,0 0 0 0 0,-1 0-1 0 0,1-1 1 0 0,0 1 0 0 0,0 0 0 0 0,0-1 0 0 0,0 1-1 0 0,0 0 1 0 0,-1-1 0 0 0,2 0 0 0 0,0-1-109 0 0,-1 1 1 0 0,-1-1-1 0 0,1 0 1 0 0,0 1-1 0 0,0-1 1 0 0,-1 0-1 0 0,1 0 0 0 0,-1 1 1 0 0,1-1-1 0 0,-1 0 1 0 0,0 0-1 0 0,1 0 1 0 0,-1 1-1 0 0,0-1 1 0 0,0 0-1 0 0,-1-2 0 0 0,1 0 311 0 0,0 3-243 0 0,0 1 0 0 0,0 0-1 0 0,0-1 1 0 0,0 1 0 0 0,0-1-1 0 0,0 1 1 0 0,0-1 0 0 0,-1 1 0 0 0,1 0-1 0 0,0-1 1 0 0,0 1 0 0 0,0 0-1 0 0,-1-1 1 0 0,1 1 0 0 0,0 0-1 0 0,0-1 1 0 0,-1 1 0 0 0,1 0-1 0 0,0-1 1 0 0,-1 1 0 0 0,1 0-1 0 0,0-1 1 0 0,-1 1 0 0 0,1 0-1 0 0,0 0 1 0 0,-1 0 0 0 0,1 0-1 0 0,-1-1 1 0 0,1 1 0 0 0,-1 0-1 0 0,1 0 1 0 0,0 0 0 0 0,-1 0-1 0 0,1 0 1 0 0,-1 0 0 0 0,1 0-1 0 0,-1 0 1 0 0,1 0 0 0 0,0 0 0 0 0,-1 0-1 0 0,1 0 1 0 0,-1 0 0 0 0,1 0-1 0 0,0 1 1 0 0,-1-1 0 0 0,0 0-1 0 0,-1 1 112 0 0,0-1 0 0 0,0 1 0 0 0,0 0 0 0 0,-1 0 0 0 0,1 0 0 0 0,-4 3 0 0 0,1 0-240 0 0,0 1 0 0 0,0 1 0 0 0,0-1 0 0 0,0 1 0 0 0,1-1 0 0 0,0 2 0 0 0,-4 7 0 0 0,6-10 32 0 0,0 0-1 0 0,0 1 1 0 0,0 0 0 0 0,1-1-1 0 0,0 1 1 0 0,0 0 0 0 0,0 0-1 0 0,0 0 1 0 0,1-1-1 0 0,0 1 1 0 0,0 7 0 0 0,1-9 49 0 0,-1-1 0 0 0,0 0 1 0 0,1 1-1 0 0,0-1 0 0 0,-1 1 1 0 0,1-1-1 0 0,0 0 0 0 0,0 1 0 0 0,0-1 1 0 0,1 0-1 0 0,1 3 0 0 0,-2-4 45 0 0,0 0-1 0 0,0 0 0 0 0,0 0 1 0 0,0 0-1 0 0,1-1 1 0 0,-1 1-1 0 0,0 0 0 0 0,0-1 1 0 0,1 1-1 0 0,-1 0 0 0 0,0-1 1 0 0,1 0-1 0 0,-1 1 1 0 0,1-1-1 0 0,-1 0 0 0 0,1 1 1 0 0,-1-1-1 0 0,1 0 0 0 0,-1 0 1 0 0,3-1-1 0 0,6 0 127 0 0,0-1-1 0 0,0 0 1 0 0,-1 0-1 0 0,1-1 1 0 0,-1 0-1 0 0,0-1 1 0 0,0 0-1 0 0,12-7 1 0 0,-16 7-137 0 0,1 1-1 0 0,-1-1 1 0 0,-1 0-1 0 0,1 0 1 0 0,0 0 0 0 0,-1 0-1 0 0,0-1 1 0 0,0 0-1 0 0,0 0 1 0 0,-1 0 0 0 0,0 0-1 0 0,0-1 1 0 0,0 1-1 0 0,3-10 1 0 0,-5 11-35 0 0,0-1-1 0 0,-1 1 0 0 0,1-1 1 0 0,-1 1-1 0 0,0-1 1 0 0,-1 1-1 0 0,1-1 1 0 0,-1 1-1 0 0,1-1 0 0 0,-1 1 1 0 0,-1-1-1 0 0,1 1 1 0 0,-1 0-1 0 0,1 0 1 0 0,-1 0-1 0 0,-1 0 1 0 0,-1-4-1 0 0,2 5 5 0 0,1 1 0 0 0,-1 0 1 0 0,0 0-1 0 0,1-1 0 0 0,-1 1 0 0 0,0 0 0 0 0,0 0 0 0 0,0 1 1 0 0,-1-1-1 0 0,1 0 0 0 0,0 1 0 0 0,-1-1 0 0 0,1 1 1 0 0,-1 0-1 0 0,1 0 0 0 0,-1 0 0 0 0,1 0 0 0 0,-1 0 1 0 0,0 1-1 0 0,0-1 0 0 0,1 1 0 0 0,-1 0 0 0 0,0-1 1 0 0,0 1-1 0 0,0 1 0 0 0,1-1 0 0 0,-1 0 0 0 0,-3 1 1 0 0,4 0 72 0 0,0-1 1 0 0,1 1 0 0 0,-1 0 0 0 0,0-1 0 0 0,1 1 0 0 0,-1 0 0 0 0,1 0 0 0 0,-1 0 0 0 0,1 0 0 0 0,-1 0 0 0 0,1 1 0 0 0,0-1 0 0 0,-1 0 0 0 0,1 1 0 0 0,0-1 0 0 0,0 1 0 0 0,0-1 0 0 0,0 1 0 0 0,0-1-1 0 0,0 1 1 0 0,1 0 0 0 0,-1-1 0 0 0,0 1 0 0 0,1 0 0 0 0,0 0 0 0 0,-1 3 0 0 0,1-2-59 0 0,0 1-1 0 0,0 0 1 0 0,0 0 0 0 0,0-1-1 0 0,1 1 1 0 0,0 0-1 0 0,0-1 1 0 0,0 1 0 0 0,0-1-1 0 0,0 1 1 0 0,4 6-1 0 0,-2-6-17 0 0,-1 1-1 0 0,1-1 0 0 0,0 0 1 0 0,0 0-1 0 0,0 0 0 0 0,0 0 1 0 0,8 6-1 0 0,-10-10 63 0 0,-1 1 1 0 0,1-1-1 0 0,-1 0 1 0 0,1 0-1 0 0,-1 0 1 0 0,1 0-1 0 0,-1 1 0 0 0,1-1 1 0 0,-1 0-1 0 0,1 0 1 0 0,0 0-1 0 0,-1 0 1 0 0,1 0-1 0 0,-1 0 0 0 0,1-1 1 0 0,-1 1-1 0 0,1 0 1 0 0,-1 0-1 0 0,1 0 1 0 0,-1 0-1 0 0,1-1 0 0 0,-1 1 1 0 0,1 0-1 0 0,-1 0 1 0 0,1-1-1 0 0,-1 1 1 0 0,0-1-1 0 0,1 1 0 0 0,-1 0 1 0 0,1-1-1 0 0,-1 1 1 0 0,0-1-1 0 0,1 1 1 0 0,-1 0-1 0 0,0-1 0 0 0,0 1 1 0 0,1-1-1 0 0,-1 1 1 0 0,0-1-1 0 0,0 0 1 0 0,1-1 12 0 0,0 0 1 0 0,0-1 0 0 0,0 1 0 0 0,0 0 0 0 0,0-1 0 0 0,-1 1 0 0 0,1-4-1 0 0,-1 2-53 0 0,0 1-1 0 0,0-1 1 0 0,-1 1-1 0 0,1-1 0 0 0,-1 1 1 0 0,0-1-1 0 0,0 1 0 0 0,0 0 1 0 0,0-1-1 0 0,-1 1 0 0 0,1 0 1 0 0,-1 0-1 0 0,0 0 0 0 0,0 0 1 0 0,0 0-1 0 0,-3-2 1 0 0,2 2-88 0 0,0 0 0 0 0,-1 0 0 0 0,1 1 0 0 0,-1-1 1 0 0,0 1-1 0 0,0 0 0 0 0,1 0 0 0 0,-2 0 0 0 0,1 1 1 0 0,0 0-1 0 0,0 0 0 0 0,-7-2 0 0 0,10 3 116 0 0,0 0 0 0 0,0 0 0 0 0,0 0 0 0 0,0 0 0 0 0,0 0 0 0 0,0 0 0 0 0,0 1 0 0 0,1-1 0 0 0,-1 0 0 0 0,0 0 0 0 0,0 1 0 0 0,0-1 0 0 0,0 1 0 0 0,0-1 0 0 0,1 0 0 0 0,-1 1 0 0 0,0-1 0 0 0,0 1 0 0 0,1 0 0 0 0,-1-1 0 0 0,0 1 0 0 0,1 0 0 0 0,-1-1 0 0 0,1 1 0 0 0,-1 0 0 0 0,1 0 0 0 0,-1-1 0 0 0,1 1 0 0 0,-1 0 0 0 0,1 0 0 0 0,0 0 0 0 0,-1 0 0 0 0,1 0 0 0 0,0 0 0 0 0,0 0 0 0 0,0 1 0 0 0,-1 6-62 0 0,0 0 1 0 0,0-1 0 0 0,1 13 0 0 0,1-12 106 0 0,-2-6-38 0 0,1 1-1 0 0,0-1 1 0 0,1 0-1 0 0,-1 0 1 0 0,0 0-1 0 0,0 1 1 0 0,1-1-1 0 0,-1 0 1 0 0,1 0-1 0 0,0 0 1 0 0,0 0-1 0 0,0 0 1 0 0,0 0-1 0 0,0 0 1 0 0,0 0-1 0 0,0-1 1 0 0,1 1-1 0 0,-1 0 1 0 0,1 0-1 0 0,-1-1 1 0 0,1 1-1 0 0,-1-1 0 0 0,1 0 1 0 0,0 1-1 0 0,0-1 1 0 0,0 0-1 0 0,0 0 1 0 0,0 0-1 0 0,0 0 1 0 0,0-1-1 0 0,0 1 1 0 0,0 0-1 0 0,0-1 1 0 0,0 0-1 0 0,0 1 1 0 0,3-1-1 0 0,2 0 5 0 0,-1 0 0 0 0,1 0-1 0 0,-1-1 1 0 0,0 0 0 0 0,1 0-1 0 0,-1-1 1 0 0,0 1 0 0 0,0-1 0 0 0,0-1-1 0 0,0 1 1 0 0,8-5 0 0 0,-11 4-55 0 0,1 1 1 0 0,-1 0 0 0 0,0-1-1 0 0,0 1 1 0 0,5-7 0 0 0,-7 9 15 0 0,0-1 1 0 0,0 0-1 0 0,-1 0 1 0 0,1 0-1 0 0,-1 0 0 0 0,1 0 1 0 0,-1 0-1 0 0,1 0 1 0 0,-1 0-1 0 0,1 0 1 0 0,-1 0-1 0 0,0 0 1 0 0,0-1-1 0 0,0 1 1 0 0,1 0-1 0 0,-1 0 1 0 0,0 0-1 0 0,0 0 0 0 0,-1 0 1 0 0,1 0-1 0 0,0 0 1 0 0,0-1-1 0 0,0 1 1 0 0,-1 0-1 0 0,0-2 1 0 0,-2-3 41 0 0,0 1 0 0 0,0-1 0 0 0,-1 0 0 0 0,0 1 0 0 0,0 0 0 0 0,0 0 0 0 0,-1 0 0 0 0,1 0 0 0 0,-8-5 0 0 0,10 8-44 0 0,-1 1 0 0 0,1-1 0 0 0,-1 1 0 0 0,1-1 0 0 0,-1 1 0 0 0,0 0 1 0 0,0 0-1 0 0,1 0 0 0 0,-1 0 0 0 0,0 0 0 0 0,0 1 0 0 0,0-1 0 0 0,0 1 0 0 0,-4 0 1 0 0,5 0 19 0 0,0 0 1 0 0,1 0 0 0 0,-1 1-1 0 0,1-1 1 0 0,-1 1 0 0 0,0-1 0 0 0,1 1-1 0 0,-1 0 1 0 0,1-1 0 0 0,-1 1 0 0 0,1 0-1 0 0,-1 0 1 0 0,1 0 0 0 0,0 0-1 0 0,0 0 1 0 0,-1 0 0 0 0,1 1 0 0 0,0-1-1 0 0,0 0 1 0 0,0 1 0 0 0,0-1 0 0 0,0 1-1 0 0,1-1 1 0 0,-1 1 0 0 0,-1 2-1 0 0,0 1 9 0 0,1 1-1 0 0,-1 0 0 0 0,1 0 0 0 0,0 0 0 0 0,0-1 0 0 0,1 1 0 0 0,0 0 0 0 0,1 9 0 0 0,-1-13-17 0 0,0-1-1 0 0,0 1 1 0 0,0 0-1 0 0,0-1 1 0 0,1 1-1 0 0,-1-1 1 0 0,1 1-1 0 0,-1 0 1 0 0,1-1 0 0 0,0 1-1 0 0,0-1 1 0 0,-1 0-1 0 0,1 1 1 0 0,0-1-1 0 0,0 0 1 0 0,0 1-1 0 0,1-1 1 0 0,-1 0-1 0 0,0 0 1 0 0,0 0-1 0 0,1 0 1 0 0,-1 0-1 0 0,0 0 1 0 0,1-1 0 0 0,-1 1-1 0 0,1 0 1 0 0,-1-1-1 0 0,1 1 1 0 0,-1-1-1 0 0,1 1 1 0 0,0-1-1 0 0,-1 0 1 0 0,1 0-1 0 0,2 1 1 0 0,-2-2-49 0 0,1 0 0 0 0,-1 1 1 0 0,0-1-1 0 0,1 0 0 0 0,-1 0 1 0 0,0 0-1 0 0,0-1 0 0 0,0 1 1 0 0,0 0-1 0 0,0-1 0 0 0,0 1 1 0 0,0-1-1 0 0,-1 0 0 0 0,1 0 0 0 0,0 0 1 0 0,1-3-1 0 0,3-2-146 0 0,-1 0 1 0 0,-1-1-1 0 0,6-10 0 0 0,-9 15 188 0 0,0 0-1 0 0,0 0 1 0 0,0 0-1 0 0,0 0 1 0 0,-1 0-1 0 0,1 0 1 0 0,-1 0-1 0 0,0 0 1 0 0,0 0-1 0 0,0 0 1 0 0,0 0-1 0 0,-2-5 1 0 0,2 6 11 0 0,0 0 1 0 0,-1 1 0 0 0,1-1-1 0 0,-1 1 1 0 0,0-1-1 0 0,0 1 1 0 0,1-1 0 0 0,-1 1-1 0 0,0 0 1 0 0,0-1-1 0 0,0 1 1 0 0,-1 0 0 0 0,1 0-1 0 0,0 0 1 0 0,0 0-1 0 0,-1 0 1 0 0,1 0 0 0 0,0 0-1 0 0,-1 0 1 0 0,1 0-1 0 0,-1 1 1 0 0,1-1 0 0 0,-1 1-1 0 0,0-1 1 0 0,1 1-1 0 0,-3-1 1 0 0,3 1 36 0 0,-1 0-1 0 0,0 0 1 0 0,1 0 0 0 0,-1 0 0 0 0,0 1-1 0 0,1-1 1 0 0,-1 0 0 0 0,0 1 0 0 0,1-1-1 0 0,-1 1 1 0 0,1 0 0 0 0,-1-1-1 0 0,1 1 1 0 0,-1 0 0 0 0,1 0 0 0 0,0 0-1 0 0,-1 0 1 0 0,1 0 0 0 0,0 0 0 0 0,0 0-1 0 0,0 1 1 0 0,-1-1 0 0 0,1 0 0 0 0,1 1-1 0 0,-3 2 1 0 0,-2 5 56 0 0,1 0 0 0 0,-1 0 1 0 0,-2 13-1 0 0,2-10 327 0 0,-21 52 699 0 0,26-64-1137 0 0,0 1 1 0 0,0-1-1 0 0,0 0 0 0 0,0 0 0 0 0,0 0 0 0 0,0 0 0 0 0,0 1 0 0 0,1-1 1 0 0,-1 0-1 0 0,0 0 0 0 0,0 0 0 0 0,0 0 0 0 0,0 0 0 0 0,0 1 0 0 0,0-1 1 0 0,0 0-1 0 0,1 0 0 0 0,-1 0 0 0 0,0 0 0 0 0,0 0 0 0 0,0 0 0 0 0,0 0 1 0 0,0 0-1 0 0,1 1 0 0 0,-1-1 0 0 0,0 0 0 0 0,0 0 0 0 0,0 0 0 0 0,0 0 0 0 0,0 0 1 0 0,1 0-1 0 0,-1 0 0 0 0,0 0 0 0 0,0 0 0 0 0,0 0 0 0 0,0 0 0 0 0,1 0 1 0 0,-1 0-1 0 0,0 0 0 0 0,0 0 0 0 0,0 0 0 0 0,0 0 0 0 0,1-1 0 0 0,-1 1 1 0 0,0 0-1 0 0,0 0 0 0 0,0 0 0 0 0,0 0 0 0 0,1 0 0 0 0,9-3-308 0 0,-2-1 49 0 0,-1-1 0 0 0,1 0-1 0 0,-1 0 1 0 0,0 0 0 0 0,0-1-1 0 0,-1 0 1 0 0,0-1 0 0 0,0 0-1 0 0,0 0 1 0 0,8-14 0 0 0,-13 20 320 0 0,0-1-1 0 0,-1 1 1 0 0,1 0 0 0 0,-1 0 0 0 0,1-1-1 0 0,-1 1 1 0 0,0 0 0 0 0,1-1 0 0 0,-1 1 0 0 0,0-1-1 0 0,0 1 1 0 0,0 0 0 0 0,0-1 0 0 0,0 1-1 0 0,0 0 1 0 0,0-1 0 0 0,-1 1 0 0 0,1-1-1 0 0,0 1 1 0 0,-1 0 0 0 0,1 0 0 0 0,-1-1 0 0 0,1 1-1 0 0,-1 0 1 0 0,0 0 0 0 0,0-1 0 0 0,1 1-1 0 0,-1 0 1 0 0,0 0 0 0 0,0 0 0 0 0,0 0 0 0 0,0 0-1 0 0,-2 0 1 0 0,2-1-6 0 0,-1 1 0 0 0,1 0 0 0 0,-1 0 0 0 0,0 0 0 0 0,0 1 0 0 0,1-1 0 0 0,-1 0 0 0 0,0 1 0 0 0,0-1 0 0 0,0 1 0 0 0,0-1 0 0 0,0 1 0 0 0,0 0 0 0 0,0 0 0 0 0,0 0 0 0 0,0 0 0 0 0,1 0 0 0 0,-1 1 0 0 0,0-1 0 0 0,0 0 0 0 0,0 1 0 0 0,-4 1 0 0 0,-1 2-8 0 0,-1 1 0 0 0,1 0 1 0 0,0 0-1 0 0,0 0 0 0 0,1 1 1 0 0,-10 10-1 0 0,12-12-3 0 0,1 1-1 0 0,-1-1 1 0 0,1 1 0 0 0,0 0 0 0 0,0 0 0 0 0,0 0-1 0 0,1 0 1 0 0,0 0 0 0 0,0 1 0 0 0,0-1-1 0 0,0 7 1 0 0,1-9-33 0 0,1 0 1 0 0,0 1-1 0 0,0-1 0 0 0,0 0 0 0 0,1 0 1 0 0,-1 0-1 0 0,2 6 0 0 0,-2-8-36 0 0,1 0 0 0 0,-1 0-1 0 0,0 0 1 0 0,1-1 0 0 0,-1 1-1 0 0,1 0 1 0 0,-1 0 0 0 0,1 0-1 0 0,-1 0 1 0 0,1-1 0 0 0,-1 1-1 0 0,1 0 1 0 0,0 0 0 0 0,-1-1-1 0 0,1 1 1 0 0,0-1 0 0 0,0 1-1 0 0,0-1 1 0 0,0 1 0 0 0,-1-1-1 0 0,1 1 1 0 0,0-1 0 0 0,0 0-1 0 0,0 1 1 0 0,0-1 0 0 0,0 0-1 0 0,0 0 1 0 0,1 1 0 0 0,-1-1 39 0 0,0 0 1 0 0,-1 0 0 0 0,1 0-1 0 0,0 0 1 0 0,0 0 0 0 0,-1-1-1 0 0,1 1 1 0 0,0 0 0 0 0,-1 0-1 0 0,1 0 1 0 0,0-1 0 0 0,-1 1-1 0 0,1 0 1 0 0,-1 0 0 0 0,1-1-1 0 0,0 1 1 0 0,-1-1 0 0 0,1 1 0 0 0,-1-1-1 0 0,1 1 1 0 0,-1-1 0 0 0,1 1-1 0 0,-1-1 1 0 0,1 1 0 0 0,-1-1-1 0 0,0 1 1 0 0,1-1 0 0 0,-1 0-1 0 0,0 1 1 0 0,1-1 0 0 0,-1 0-1 0 0,0 1 1 0 0,0-1 0 0 0,0 0-1 0 0,0-1 1 0 0,1-2 79 0 0,-1 0 0 0 0,-1 0 0 0 0,1 0 0 0 0,-1-1 0 0 0,0-3 0 0 0,-2-8 66 0 0,3 7-387 0 0,-1 1 0 0 0,1 0 0 0 0,-5-15 0 0 0,4 25 190 0 0,-2 8 652 0 0,-4 38-571 0 0,6-41-35 0 0,0-1-1 0 0,1 1 1 0 0,0-1-1 0 0,0 1 1 0 0,1 0 0 0 0,2 9-1 0 0,-3-15 1 0 0,0-1 0 0 0,0 0 0 0 0,0 0 0 0 0,0 1 0 0 0,0-1 0 0 0,1 0 0 0 0,-1 0 0 0 0,0 0 0 0 0,0 0 0 0 0,0 1 0 0 0,0-1 0 0 0,0 0 0 0 0,1 0 0 0 0,-1 0 0 0 0,0 0 0 0 0,0 1 0 0 0,0-1 0 0 0,0 0 0 0 0,1 0 0 0 0,-1 0 0 0 0,0 0 0 0 0,0 0 0 0 0,0 0 0 0 0,1 0 0 0 0,-1 0 0 0 0,0 0 0 0 0,0 0 0 0 0,1 0 0 0 0,-1 0 0 0 0,0 0 0 0 0,0 0 0 0 0,0 0 0 0 0,1 0 0 0 0,-1 0 0 0 0,0 0 0 0 0,10-5 56 0 0,4-9 10 0 0,-7 6-291 0 0,-2 0 1 0 0,0 0 0 0 0,9-17 0 0 0,-13 20 190 0 0,1 0-1 0 0,-1 1 1 0 0,1-1-1 0 0,-1 0 1 0 0,-1 0-1 0 0,1 0 0 0 0,-1 0 1 0 0,0 0-1 0 0,0-8 1 0 0,0 12 9 0 0,-4-23 240 0 0,3 22-186 0 0,1 1 0 0 0,0 0 0 0 0,-1 0-1 0 0,1-1 1 0 0,-1 1 0 0 0,1 0 0 0 0,-1 0 0 0 0,0 0-1 0 0,1-1 1 0 0,-1 1 0 0 0,0 0 0 0 0,0 0 0 0 0,0 0 0 0 0,0 0-1 0 0,0 1 1 0 0,-1-2 0 0 0,1 2-31 0 0,0-1 1 0 0,0 1-1 0 0,0 0 0 0 0,0 1 1 0 0,-1-1-1 0 0,1 0 0 0 0,0 0 0 0 0,0 0 1 0 0,0 1-1 0 0,0-1 0 0 0,0 0 1 0 0,0 1-1 0 0,0-1 0 0 0,0 1 1 0 0,0-1-1 0 0,0 1 0 0 0,0-1 1 0 0,1 1-1 0 0,-1 0 0 0 0,0 0 0 0 0,0-1 1 0 0,0 2-1 0 0,-2 1 62 0 0,0-1 1 0 0,0 1-1 0 0,1 0 0 0 0,0 0 0 0 0,-3 5 1 0 0,3-6 38 0 0,0 3 9 0 0,0 0 0 0 0,0-1-1 0 0,0 1 1 0 0,0 0 0 0 0,-1 7-1 0 0,3-11-145 0 0,0 1 1 0 0,0-1-1 0 0,0 0 0 0 0,0 0 0 0 0,0 0 0 0 0,0 0 0 0 0,0 0 0 0 0,0 0 0 0 0,0 1 0 0 0,1-1 1 0 0,-1 0-1 0 0,0 0 0 0 0,1 0 0 0 0,-1 0 0 0 0,1 0 0 0 0,-1 0 0 0 0,1 0 0 0 0,0 0 0 0 0,-1 0 1 0 0,1-1-1 0 0,0 1 0 0 0,-1 0 0 0 0,1 0 0 0 0,0 0 0 0 0,0-1 0 0 0,0 1 0 0 0,0 0 1 0 0,0-1-1 0 0,0 1 0 0 0,0-1 0 0 0,2 1 0 0 0,-1 0 26 0 0,-1-1-1 0 0,1 1 1 0 0,0-1-1 0 0,0 0 1 0 0,0 0-1 0 0,0 0 1 0 0,0 0-1 0 0,-1 0 1 0 0,1 0-1 0 0,3-1 1 0 0,8-5-1424 0 0,-8-1-3063 0 0</inkml:trace>
+</inkml:ink>
+</file>
+
+<file path=ppt/ink/ink3.xml><?xml version="1.0" encoding="utf-8"?>
+<inkml:ink xmlns:inkml="http://www.w3.org/2003/InkML">
+  <inkml:definitions>
+    <inkml:context xml:id="ctx0">
+      <inkml:inkSource xml:id="inkSrc0">
+        <inkml:traceFormat>
+          <inkml:channel name="X" type="integer" min="-2.14748E9" max="2.14748E9" units="cm"/>
+          <inkml:channel name="Y" type="integer" min="-2.14748E9" max="2.14748E9" units="cm"/>
+          <inkml:channel name="F" type="integer" max="32767" units="dev"/>
+          <inkml:channel name="OA" type="integer" max="360" units="deg"/>
+          <inkml:channel name="OE" type="integer" max="90" units="deg"/>
+        </inkml:traceFormat>
+        <inkml:channelProperties>
+          <inkml:channelProperty channel="X" name="resolution" value="1000" units="1/cm"/>
+          <inkml:channelProperty channel="Y" name="resolution" value="1000" units="1/cm"/>
+          <inkml:channelProperty channel="F" name="resolution" value="0" units="1/dev"/>
+          <inkml:channelProperty channel="OA" name="resolution" value="1000" units="1/deg"/>
+          <inkml:channelProperty channel="OE" name="resolution" value="1000" units="1/deg"/>
+        </inkml:channelProperties>
+      </inkml:inkSource>
+      <inkml:timestamp xml:id="ts0" timeString="2026-02-25T05:40:10.898"/>
+    </inkml:context>
+    <inkml:brush xml:id="br0">
+      <inkml:brushProperty name="width" value="0.05" units="cm"/>
+      <inkml:brushProperty name="height" value="0.05" units="cm"/>
+      <inkml:brushProperty name="color" value="#E71224"/>
+    </inkml:brush>
+  </inkml:definitions>
+  <inkml:trace contextRef="#ctx0" brushRef="#br0">11 115 2737 0 0,'-3'39'264'0'0,"3"-39"-259"0"0,0 0 1 0 0,0 0-1 0 0,0 0 0 0 0,0 0 1 0 0,0 0-1 0 0,0 0 1 0 0,0-1-1 0 0,0 1 1 0 0,0 0-1 0 0,0 0 0 0 0,0 0 1 0 0,-1 0-1 0 0,1 0 1 0 0,0 0-1 0 0,0 0 1 0 0,0 0-1 0 0,0 0 0 0 0,0 0 1 0 0,0 0-1 0 0,0 0 1 0 0,0 0-1 0 0,0 0 1 0 0,0 0-1 0 0,0 0 1 0 0,0 0-1 0 0,-1 0 0 0 0,1 0 1 0 0,0 0-1 0 0,0 0 1 0 0,0 0-1 0 0,0 0 1 0 0,0 0-1 0 0,0 0 0 0 0,0 0 1 0 0,0 0-1 0 0,0 0 1 0 0,0 0-1 0 0,0 0 1 0 0,0 0-1 0 0,-1 1 1 0 0,1-1-1 0 0,0 0 0 0 0,0 0 1 0 0,0 0-1 0 0,0 0 1 0 0,0 0-1 0 0,0 0 1 0 0,0 0-1 0 0,0 0 0 0 0,0 0 1 0 0,0 0-1 0 0,0 0 1 0 0,0 0-1 0 0,0 0 1 0 0,0 0-1 0 0,0 1 1 0 0,0-1-1 0 0,0 0 0 0 0,0 0 1 0 0,0 0-1 0 0,0 0 1 0 0,0 0-1 0 0,0 0 1 0 0,-2-1 328 0 0,2 7-92 0 0,0 9 276 0 0,-1-11-103 0 0,1-10-224 0 0,0-6-63 0 0,-1 8 1026 0 0,1-8-792 0 0,0 14-277 0 0,1 17-86 0 0,-1-14 123 0 0,1-9 223 0 0,4-8 607 0 0,-2 13-472 0 0,0 9-93 0 0,-3-10-326 0 0,2 3-165 0 0,0-7 911 0 0,2-30-114 0 0,-4 41-547 0 0,1-25 136 0 0,0 4-184 0 0,0 11-47 0 0,-1 5 9 0 0,0-5-220 0 0,-1 4 80 0 0,-3 6 629 0 0,4-6-362 0 0,-1-1 891 0 0,1 6-806 0 0,6 55 264 0 0,-6-61-424 0 0,4 7 425 0 0,-4-7-529 0 0,1 0 0 0 0,-1 0 0 0 0,0 0 1 0 0,0 0-1 0 0,0 0 0 0 0,0 0 0 0 0,0 0 1 0 0,0 0-1 0 0,0 0 0 0 0,0 0 0 0 0,0 0 1 0 0,0 0-1 0 0,1 0 0 0 0,-1 1 0 0 0,0-1 1 0 0,0 0-1 0 0,0 0 0 0 0,0 0 0 0 0,0 0 1 0 0,0 0-1 0 0,0 0 0 0 0,1 0 0 0 0,-1 0 0 0 0,0 0 1 0 0,0 0-1 0 0,0 0 0 0 0,0 0 0 0 0,0 0 1 0 0,0 0-1 0 0,0 0 0 0 0,1-1 0 0 0,-1 1 1 0 0,0 0-1 0 0,0 0 0 0 0,0 0 0 0 0,0 0 1 0 0,0 0-1 0 0,0 0 0 0 0,0 0 0 0 0,0 0 1 0 0,0 0-1 0 0,0 0 0 0 0,1 0 0 0 0,-1 0 1 0 0,0 0-1 0 0,0-1 0 0 0,0 1 0 0 0,0 0 1 0 0,0 0-1 0 0,0 0 0 0 0,0 0 0 0 0,0 0 1 0 0,0 0-1 0 0,0 0 0 0 0,0 0 0 0 0,0-1 1 0 0,0 1-1 0 0,0 0 0 0 0,0 0 0 0 0,0 0 1 0 0,0 0-1 0 0,0 0 0 0 0,2-8 119 0 0,-1-1 1 0 0,1-13-1 0 0,-2 16-139 0 0,1 0-1 0 0,0-1 1 0 0,0 1 0 0 0,3-11-1 0 0,-3 15-72 0 0,0-1-1 0 0,0 1 0 0 0,-1 0 1 0 0,1-1-1 0 0,-1 1 0 0 0,0-1 1 0 0,1 1-1 0 0,-1 0 1 0 0,-1-6-1 0 0,1 7 54 0 0,0 0-1 0 0,0 0 1 0 0,-1 0 0 0 0,1 1-1 0 0,0-1 1 0 0,-1 0 0 0 0,1 0-1 0 0,0 0 1 0 0,-1 0 0 0 0,1 0-1 0 0,-1 0 1 0 0,0 0 0 0 0,1 1-1 0 0,-1-1 1 0 0,0 0 0 0 0,1 0-1 0 0,-1 1 1 0 0,0-1 0 0 0,0 1-1 0 0,0-1 1 0 0,0 0 0 0 0,0 1 0 0 0,1 0-1 0 0,-3-1 1 0 0,3 0 26 0 0,0 1 1 0 0,-1 0-1 0 0,1 0 0 0 0,0 0 1 0 0,-1 0-1 0 0,1 0 1 0 0,0 0-1 0 0,-1-1 0 0 0,1 1 1 0 0,0 0-1 0 0,-1 0 1 0 0,1 0-1 0 0,0 0 0 0 0,-1 0 1 0 0,1 0-1 0 0,-1 0 1 0 0,1 0-1 0 0,0 1 0 0 0,-1-1 1 0 0,1 0-1 0 0,0 0 1 0 0,-1 0-1 0 0,1 0 0 0 0,0 0 1 0 0,-1 1-1 0 0,1-1 1 0 0,-3 10-233 0 0,3-7 209 0 0,-3 18-469 0 0,2-9 683 0 0,-1-1 0 0 0,1 1 0 0 0,1 0 0 0 0,2 22 0 0 0,0-29-8 0 0,-1-5-14 0 0,1-9 148 0 0,0 4-23 0 0,-2 7-242 0 0,0-1-42 0 0,1 0 1 0 0,-1 0 0 0 0,0 0 0 0 0,0-1-1 0 0,0 1 1 0 0,1 0 0 0 0,-1 0 0 0 0,0-1-1 0 0,1 1 1 0 0,-1 0 0 0 0,1-1-1 0 0,-1 1 1 0 0,1-1 0 0 0,-1 1 0 0 0,2 1-1 0 0,-2-2 31 0 0,1 1 0 0 0,-1-1-1 0 0,1 0 1 0 0,-1 1-1 0 0,1-1 1 0 0,0 0 0 0 0,-1 0-1 0 0,1 1 1 0 0,0-1-1 0 0,-1 0 1 0 0,1 0 0 0 0,0 0-1 0 0,-1 0 1 0 0,1 0-1 0 0,0 0 1 0 0,-1 0-1 0 0,1 0 1 0 0,0 0 0 0 0,-1 0-1 0 0,1 0 1 0 0,0 0-1 0 0,-1 0 1 0 0,2-1 0 0 0,-1 0-22 0 0,0 1 1 0 0,0-1 0 0 0,0 0 0 0 0,-1 0 0 0 0,1 1-1 0 0,0-1 1 0 0,0 0 0 0 0,-1 0 0 0 0,1 0-1 0 0,0 0 1 0 0,-1 0 0 0 0,1 0 0 0 0,0-1 0 0 0,1-6-89 0 0,1-1 1 0 0,-1 1-1 0 0,1-12 1 0 0,0 8 119 0 0,-2 7-78 0 0,0 2-39 0 0,-1 0 0 0 0,1 1 0 0 0,-1-1 0 0 0,1 0 1 0 0,-1 0-1 0 0,0 0 0 0 0,0 0 0 0 0,0 0 0 0 0,0 0 0 0 0,-1 0 0 0 0,1 1 0 0 0,-2-5 0 0 0,2 6 73 0 0,0 1 0 0 0,0 0 0 0 0,0 0 0 0 0,0 0 1 0 0,0 0-1 0 0,0 0 0 0 0,0-1 0 0 0,0 1 0 0 0,-1 0 0 0 0,1 0 0 0 0,0 0 0 0 0,0 0 0 0 0,0 0 0 0 0,0-1 1 0 0,0 1-1 0 0,0 0 0 0 0,0 0 0 0 0,-1 0 0 0 0,1 0 0 0 0,0 0 0 0 0,0 0 0 0 0,0 0 0 0 0,0 0 0 0 0,-1 0 1 0 0,1 0-1 0 0,0 0 0 0 0,0 0 0 0 0,0 0 0 0 0,0 0 0 0 0,0 0 0 0 0,-1 0 0 0 0,1 0 0 0 0,0 0 0 0 0,0 0 1 0 0,0 0-1 0 0,0 0 0 0 0,-1 0 0 0 0,1 0 0 0 0,0 0 0 0 0,0 0 0 0 0,0 0 0 0 0,0 0 0 0 0,0 0 0 0 0,-1 0 0 0 0,1 0 1 0 0,0 0-1 0 0,0 1 0 0 0,0-1 0 0 0,-1 0 1 0 0,1 0 0 0 0,0 0 1 0 0,0 1-1 0 0,-1-1 0 0 0,1 0 0 0 0,0 0 1 0 0,-1 0-1 0 0,1 0 0 0 0,0 0 0 0 0,-1 0 1 0 0,1 0-1 0 0,0 0 0 0 0,-1 0 0 0 0,1 0 1 0 0,0 0-1 0 0,-1 0 0 0 0,1 0 0 0 0,0 0 1 0 0,-1 0-1 0 0,1 0 0 0 0,0 0 0 0 0,-1 0 1 0 0,1 0-1 0 0,0 0 0 0 0,-1-1 0 0 0,1 1 0 0 0,0 0 1 0 0,0 0-1 0 0,-1 0 0 0 0,1-1 0 0 0,0 1 1 0 0,0 0-1 0 0,-1 0 0 0 0,1-1 0 0 0,0 1 1 0 0,0 0-1 0 0,0 0 0 0 0,-1-1 0 0 0,-6-7 64 0 0,2 14 15 0 0,1 1-65 0 0,1-3-127 0 0,2-3 91 0 0,1-1 1 0 0,0 0 0 0 0,-1 1-1 0 0,1-1 1 0 0,0 1 0 0 0,-1-1-1 0 0,1 0 1 0 0,0 1-1 0 0,0-1 1 0 0,0 1 0 0 0,-1-1-1 0 0,1 1 1 0 0,0-1 0 0 0,0 1-1 0 0,0-1 1 0 0,0 1 0 0 0,0-1-1 0 0,0 1 1 0 0,0-1-1 0 0,0 1 1 0 0,0-1 0 0 0,0 1-1 0 0,0 0 1 0 0,1 3-67 0 0,-1-2 102 0 0,0 0 1 0 0,0 0-1 0 0,0 0 1 0 0,1 1-1 0 0,-1-1 1 0 0,1 0-1 0 0,-1 0 1 0 0,1 0-1 0 0,1 2 1 0 0,1-5 205 0 0,-1 0-104 0 0,1 7-1 0 0,-1 11 62 0 0,3 12 88 0 0,-5-29-263 0 0,0 0 1 0 0,0 0-1 0 0,0 0 1 0 0,0 0 0 0 0,1 0-1 0 0,-1 0 1 0 0,0 0 0 0 0,0 1-1 0 0,0-1 1 0 0,0 0-1 0 0,0 0 1 0 0,0 0 0 0 0,0 0-1 0 0,0 0 1 0 0,0 0 0 0 0,0 0-1 0 0,0 0 1 0 0,0 0 0 0 0,0 0-1 0 0,0 0 1 0 0,0 0-1 0 0,1 0 1 0 0,-1 0 0 0 0,0 1-1 0 0,0-1 1 0 0,0 0 0 0 0,0 0-1 0 0,0 0 1 0 0,0 0-1 0 0,0 0 1 0 0,0 0 0 0 0,0 0-1 0 0,1 0 1 0 0,-1 0 0 0 0,0 0-1 0 0,0 0 1 0 0,0 0-1 0 0,0 0 1 0 0,0 0 0 0 0,0 0-1 0 0,0 0 1 0 0,0 0 0 0 0,0 0-1 0 0,1 0 1 0 0,-1-1 0 0 0,4-3 138 0 0,-1-4 135 0 0,0 23-24 0 0,3-26 244 0 0,-5 8-507 0 0,1 1 0 0 0,0-1 0 0 0,-1 0 0 0 0,0 1 0 0 0,1-1 1 0 0,0-5-1 0 0,-1 1-74 0 0,-1 0 0 0 0,0-1 1 0 0,0 1-1 0 0,-1 0 0 0 0,0 0 1 0 0,0 0-1 0 0,-3-10 0 0 0,3 16 79 0 0,1 1 0 0 0,0-1 0 0 0,-1 1 0 0 0,1-1 0 0 0,0 1 0 0 0,-1-1 0 0 0,1 1 0 0 0,-1 0 0 0 0,1-1 0 0 0,-1 1 0 0 0,1-1 0 0 0,-1 1 0 0 0,0 0-1 0 0,1-1 1 0 0,-1 1 0 0 0,1 0 0 0 0,-1 0 0 0 0,1 0 0 0 0,-1-1 0 0 0,0 1 0 0 0,1 0 0 0 0,-2 0 0 0 0,-8-3 19 0 0,-4-3 108 0 0,13 6-117 0 0,0 0-1 0 0,1 0 1 0 0,-1 0 0 0 0,0 1 0 0 0,1-1-1 0 0,-1 0 1 0 0,0 0 0 0 0,1 1 0 0 0,-1-1-1 0 0,0 1 1 0 0,1-1 0 0 0,-1 0 0 0 0,0 1-1 0 0,1-1 1 0 0,-1 1 0 0 0,1-1 0 0 0,-1 2-1 0 0,1-2-5 0 0,0 0-1 0 0,0 0 0 0 0,-1 0 0 0 0,1 0 0 0 0,0 0 1 0 0,0 1-1 0 0,0-1 0 0 0,0 0 0 0 0,0 0 0 0 0,0 0 1 0 0,-1 0-1 0 0,1 0 0 0 0,0 0 0 0 0,0 0 0 0 0,0 0 1 0 0,0 0-1 0 0,0 0 0 0 0,-1 0 0 0 0,1 0 0 0 0,0 0 1 0 0,0 1-1 0 0,0-1 0 0 0,0 0 0 0 0,0 0 0 0 0,-1 0 1 0 0,1-1-1 0 0,0 1 0 0 0,0 0 0 0 0,0 0 0 0 0,0 0 1 0 0,-1 0-1 0 0,1 0 0 0 0,0 0 0 0 0,0 0 0 0 0,0 0 1 0 0,0 0-1 0 0,0 0 0 0 0,-1 0 0 0 0,1 0 0 0 0,0 0 1 0 0,0-1-1 0 0,0 1 0 0 0,0 0 0 0 0,0 0 0 0 0,-2-1-29 0 0,0 8 16 0 0,1 4 159 0 0,1 1-1 0 0,0-1 0 0 0,1 1 1 0 0,3 17-1 0 0,-4-28 130 0 0,1 6-172 0 0,0 0 0 0 0,0 0-1 0 0,3 7 1 0 0,-3-13-99 0 0,-1-1 0 0 0,0 0 0 0 0,0 1 0 0 0,0-1 0 0 0,0 0-1 0 0,1 0 1 0 0,-1 1 0 0 0,0-1 0 0 0,0 0 0 0 0,0 0 0 0 0,1 0-1 0 0,-1 1 1 0 0,0-1 0 0 0,1 0 0 0 0,-1 0 0 0 0,0 0 0 0 0,0 0-1 0 0,1 0 1 0 0,-1 1 0 0 0,0-1 0 0 0,1 0 0 0 0,-1 0 0 0 0,0 0 0 0 0,1 0-1 0 0,-1 0 1 0 0,0 0 0 0 0,0 0 0 0 0,1 0 0 0 0,-1 0 0 0 0,0 0-1 0 0,1 0 1 0 0,-1 0 0 0 0,0-1 0 0 0,1 1 0 0 0,-1 0 0 0 0,0 0-1 0 0,0 0 1 0 0,1 0 0 0 0,-1 0 0 0 0,1-1 0 0 0,12-9 86 0 0,-8 6-60 0 0,-2 1-27 0 0,0 1-1 0 0,0-1 1 0 0,-1 1 0 0 0,1-1 0 0 0,0 0-1 0 0,-1 0 1 0 0,0 0 0 0 0,0 0 0 0 0,0 0-1 0 0,0-1 1 0 0,0 1 0 0 0,-1 0-1 0 0,1-1 1 0 0,0-4 0 0 0,1-1-79 0 0,-1 0 1 0 0,0 0-1 0 0,-1 0 0 0 0,1-17 1 0 0,-2 26 68 0 0,0 0 0 0 0,0 0 0 0 0,0-1 0 0 0,0 1 0 0 0,0 0 0 0 0,0 0 0 0 0,0-1 1 0 0,0 1-1 0 0,0 0 0 0 0,0 0 0 0 0,0-1 0 0 0,0 1 0 0 0,0 0 0 0 0,0 0 0 0 0,0-1 0 0 0,0 1 0 0 0,0 0 1 0 0,0 0-1 0 0,0-1 0 0 0,-1 1 0 0 0,1 0 0 0 0,0 0 0 0 0,0 0 0 0 0,0-1 0 0 0,0 1 0 0 0,-1 0 1 0 0,1 0-1 0 0,0 0 0 0 0,0 0 0 0 0,0-1 0 0 0,-1 1 0 0 0,1 0 0 0 0,0 0 0 0 0,0 0 0 0 0,-1 0 1 0 0,1 0-1 0 0,0 0 0 0 0,0 0 0 0 0,-1 0 0 0 0,1 0 0 0 0,-6-4-28 0 0,6 3 45 0 0,-1 1 1 0 0,1-1 0 0 0,-1 0-1 0 0,1 0 1 0 0,-1 1 0 0 0,1-1-1 0 0,-1 0 1 0 0,0 0 0 0 0,1 1 0 0 0,-1-1-1 0 0,0 1 1 0 0,0-1 0 0 0,1 1-1 0 0,-1-1 1 0 0,-2 0 0 0 0,2 1 18 0 0,0 0 0 0 0,0 0 0 0 0,0 0-1 0 0,0 1 1 0 0,0-1 0 0 0,0 0 0 0 0,0 0 0 0 0,0 1 0 0 0,0-1 0 0 0,0 1 0 0 0,-1 0 0 0 0,-2 1-6 0 0,4-2-26 0 0,0 0 1 0 0,0 1-1 0 0,-1-1 1 0 0,1 0 0 0 0,0 0-1 0 0,0 0 1 0 0,-1 0-1 0 0,1 0 1 0 0,0 0-1 0 0,0 0 1 0 0,0 0 0 0 0,-1 0-1 0 0,1 0 1 0 0,0 0-1 0 0,0 0 1 0 0,-1 0 0 0 0,1 0-1 0 0,0 0 1 0 0,0-1-1 0 0,0 1 1 0 0,-1 0-1 0 0,1 0 1 0 0,0 0 0 0 0,0 0-1 0 0,0 0 1 0 0,-1 0-1 0 0,1-1 1 0 0,-3 1-84 0 0,0 7 46 0 0,-5 28 27 0 0,2-15-132 0 0,5-7 243 0 0,-1 21 536 0 0,2-32-585 0 0,1 0 1 0 0,-1 1-1 0 0,0-1 0 0 0,0 0 0 0 0,1 1 1 0 0,0-1-1 0 0,-1 0 0 0 0,1 1 1 0 0,0-1-1 0 0,2 4 0 0 0,21 20 616 0 0,-24-25-662 0 0,1-1 0 0 0,-1 0 0 0 0,0 0 0 0 0,0 1 0 0 0,0-1 0 0 0,1 0-1 0 0,-1 1 1 0 0,0-1 0 0 0,0 0 0 0 0,1 0 0 0 0,-1 0 0 0 0,0 1 0 0 0,0-1-1 0 0,1 0 1 0 0,-1 0 0 0 0,0 0 0 0 0,1 1 0 0 0,-1-1 0 0 0,0 0 0 0 0,1 0 0 0 0,-1 0-1 0 0,1 0 1 0 0,-1 0 0 0 0,0 0 0 0 0,1 0 0 0 0,-1 0 0 0 0,0 0 0 0 0,1 0-1 0 0,-1 0 1 0 0,0 0 0 0 0,1 0 0 0 0,-1 0 0 0 0,0 0 0 0 0,1-1 0 0 0,-1 1 0 0 0,0 0-1 0 0,1 0 1 0 0,6-12 32 0 0,-6 10-40 0 0,-1 1 7 0 0,0 1 0 0 0,0 0 1 0 0,0-1-1 0 0,0 1 0 0 0,1 0 0 0 0,-1 0 0 0 0,0-1 1 0 0,0 1-1 0 0,0 0 0 0 0,0 0 0 0 0,1-1 0 0 0,-1 1 1 0 0,0 0-1 0 0,0 0 0 0 0,1-1 0 0 0,-1 1 0 0 0,0 0 0 0 0,0 0 1 0 0,1 0-1 0 0,-1 0 0 0 0,0-1 0 0 0,0 1 0 0 0,1 0 1 0 0,-1 0-1 0 0,0 0 0 0 0,1 0 0 0 0,-1 0 0 0 0,0 0 1 0 0,1 0-1 0 0,-1 0 0 0 0,0 0 0 0 0,1 0 0 0 0,-1 0 1 0 0,0 0-1 0 0,1 0 0 0 0,-1 0 0 0 0,0 0 0 0 0,1 0 1 0 0,-1 0-1 0 0,0 0 0 0 0,0 1 0 0 0,1-1 0 0 0,-1 0 1 0 0,0 0-1 0 0,1 0 0 0 0,-1 0 0 0 0,0 1 0 0 0,0-1 0 0 0,0 0 1 0 0,1 0-1 0 0,-1 1 0 0 0,0-1 0 0 0,0 0 0 0 0,1 1 1 0 0,-1-1-1 0 0,0 0 1 0 0,0 1 0 0 0,1-1-1 0 0,-1 0 1 0 0,0 1 0 0 0,1-1-1 0 0,-1 0 1 0 0,0 0-1 0 0,1 1 1 0 0,-1-1 0 0 0,0 0-1 0 0,1 0 1 0 0,-1 0 0 0 0,0 1-1 0 0,1-1 1 0 0,-1 0 0 0 0,1 0-1 0 0,-1 0 1 0 0,0 0 0 0 0,1 0-1 0 0,-1 0 1 0 0,1 0 0 0 0,-1 0-1 0 0,1 0 1 0 0,-1 0 0 0 0,0 0-1 0 0,1 0 1 0 0,-1 0-1 0 0,1 0 1 0 0,-1 0 0 0 0,0-1-1 0 0,1 1 1 0 0,-1 0 0 0 0,0 0-1 0 0,1 0 1 0 0,-1-1 0 0 0,1 1-1 0 0,-1 0 1 0 0,0 0 0 0 0,0-1-1 0 0,1 1 1 0 0,-1 0 0 0 0,0-1-1 0 0,1 1 1 0 0,-1 0 0 0 0,0-1-1 0 0,0 1 1 0 0,0 0-1 0 0,0-1 1 0 0,1 1 0 0 0,-1-1-1 0 0,0 1 1 0 0,0-1 0 0 0,17-49 104 0 0,-12 41-94 0 0,-5 7-12 0 0,1 1 0 0 0,0 0 0 0 0,0-1 0 0 0,-1 1 0 0 0,1-1 0 0 0,-1 1-1 0 0,1-1 1 0 0,-1 1 0 0 0,0-1 0 0 0,0 0 0 0 0,1-2 0 0 0,-3-4-17 0 0,0 1 0 0 0,0 0 0 0 0,-1 0 0 0 0,1 0 1 0 0,-2 0-1 0 0,1 1 0 0 0,-1-1 0 0 0,-7-9 0 0 0,10 15 17 0 0,0 0 0 0 0,-1 1 0 0 0,1-1 0 0 0,0 1 0 0 0,-1-1 0 0 0,1 1 0 0 0,0-1 1 0 0,-1 1-1 0 0,1 0 0 0 0,0 0 0 0 0,-1 0 0 0 0,1 0 0 0 0,-1 0 0 0 0,1 0 0 0 0,0 0 0 0 0,-1 0 0 0 0,1 0 0 0 0,-1 1 0 0 0,0 0 0 0 0,-13 0-28 0 0,14-1-1 0 0,0-1-1 0 0,-1 1 0 0 0,1 0 0 0 0,0-1 1 0 0,0 1-1 0 0,-1-1 0 0 0,1 1 1 0 0,0-1-1 0 0,0 0 0 0 0,0 1 0 0 0,0-1 1 0 0,-2-1-1 0 0,-7-5-194 0 0,9 7 216 0 0,1 0 1 0 0,-1 0 0 0 0,1 0 0 0 0,-1 1-1 0 0,0-1 1 0 0,1 0 0 0 0,-1 0 0 0 0,1 0-1 0 0,-1 1 1 0 0,1-1 0 0 0,-1 0-1 0 0,1 1 1 0 0,-1-1 0 0 0,1 0 0 0 0,-1 1-1 0 0,1-1 1 0 0,-1 0 0 0 0,1 1 0 0 0,-1-1-1 0 0,1 1 1 0 0,0-1 0 0 0,-1 1 0 0 0,1-1-1 0 0,0 1 1 0 0,0-1 0 0 0,-1 1 0 0 0,1-1-1 0 0,0 1 1 0 0,0 0 0 0 0,0 0 0 0 0,-7 19-275 0 0,6-10 269 0 0,0-1 0 0 0,1 1 0 0 0,0-1 0 0 0,0 1 1 0 0,1 0-1 0 0,1-1 0 0 0,-1 1 0 0 0,6 15 0 0 0,-1-2 14 0 0,-6-19 32 0 0,4 9 111 0 0,-4-13-132 0 0,0 0 0 0 0,0 0-1 0 0,0 1 1 0 0,0-1 0 0 0,1 0-1 0 0,-1 0 1 0 0,0 1-1 0 0,0-1 1 0 0,0 0 0 0 0,0 0-1 0 0,1 1 1 0 0,-1-1-1 0 0,0 0 1 0 0,0 0 0 0 0,0 0-1 0 0,1 0 1 0 0,-1 1 0 0 0,0-1-1 0 0,0 0 1 0 0,1 0-1 0 0,-1 0 1 0 0,0 0 0 0 0,0 0-1 0 0,1 0 1 0 0,-1 0-1 0 0,0 0 1 0 0,1 0 0 0 0,-1 0-1 0 0,0 0 1 0 0,0 0 0 0 0,1 0-1 0 0,-1 0 1 0 0,0 0-1 0 0,0 0 1 0 0,1 0 0 0 0,-1 0-1 0 0,1 0 1 0 0,5 2 179 0 0,-5-2-180 0 0,-1 1 0 0 0,0-1 0 0 0,1 1-1 0 0,-1-1 1 0 0,1 0 0 0 0,-1 0 0 0 0,1 1 0 0 0,0-1-1 0 0,-1 0 1 0 0,1 0 0 0 0,-1 0 0 0 0,1 0 0 0 0,-1 1-1 0 0,1-1 1 0 0,-1 0 0 0 0,1 0 0 0 0,0 0 0 0 0,-1 0-1 0 0,1 0 1 0 0,-1 0 0 0 0,1-1 0 0 0,0 1 0 0 0,-1 0-1 0 0,1 0 1 0 0,0-1 0 0 0,1-7 5 0 0,-1 6-10 0 0,-1 0-1 0 0,1 0 1 0 0,-1 0-1 0 0,1 1 1 0 0,0-1 0 0 0,-1 0-1 0 0,1 0 1 0 0,0 0-1 0 0,2-2 1 0 0,-3 4-6 0 0,0 0 0 0 0,1 0 0 0 0,-1 0 0 0 0,1 0 0 0 0,-1 0 0 0 0,1 0 0 0 0,-1-1 0 0 0,1 1 0 0 0,-1 0 0 0 0,0 0 0 0 0,1-1 0 0 0,-1 1 0 0 0,0 0 0 0 0,1-1 0 0 0,-1 1 0 0 0,0 0 0 0 0,1-1 0 0 0,-1 1 0 0 0,0 0 0 0 0,0-1 0 0 0,1 1 0 0 0,-1-1 0 0 0,0 1 0 0 0,0 0 0 0 0,0-1 0 0 0,0 1 0 0 0,1-1 0 0 0,-1 1 0 0 0,0-1 0 0 0,0 1 0 0 0,0-1 0 0 0,0 0 0 0 0,3-18 0 0 0,0-2-158 0 0,-2 14 46 0 0,1 0-1 0 0,-1-1 1 0 0,-1 1-1 0 0,0-12 1 0 0,-1 18 100 0 0,1 0 1 0 0,-1 0 0 0 0,0 1-1 0 0,0-1 1 0 0,0 0-1 0 0,0 0 1 0 0,0 0-1 0 0,0 1 1 0 0,-1-1 0 0 0,1 0-1 0 0,0 1 1 0 0,0-1-1 0 0,0 1 1 0 0,-1-1-1 0 0,1 1 1 0 0,0 0 0 0 0,0 0-1 0 0,-1-1 1 0 0,1 1-1 0 0,0 0 1 0 0,-1 0-1 0 0,1 0 1 0 0,0 0 0 0 0,-1 1-1 0 0,1-1 1 0 0,0 0-1 0 0,-3 1 1 0 0,3 2 2 0 0,0-1 1 0 0,0 0-1 0 0,-1 1 0 0 0,2-1 1 0 0,-1 1-1 0 0,0 0 0 0 0,0-1 1 0 0,1 1-1 0 0,-1 0 0 0 0,1-1 1 0 0,0 1-1 0 0,0 0 1 0 0,0 0-1 0 0,0 3 0 0 0,1-1 55 0 0,0 0 0 0 0,0 1 0 0 0,0-1 0 0 0,1 0 0 0 0,0 0 0 0 0,2 7 0 0 0,-3-13-10 0 0,0 0 0 0 0,-1 1 0 0 0,1-1 0 0 0,0 0 0 0 0,-1 1 0 0 0,1-1 0 0 0,-1 0 0 0 0,1 0-1 0 0,-1 0 1 0 0,1 1 0 0 0,-1-1 0 0 0,0 0 0 0 0,0 0 0 0 0,1 0 0 0 0,-1-1 0 0 0,5-8 217 0 0,1 15-164 0 0,-6-4-86 0 0,0-1 1 0 0,0 0 0 0 0,1 1-1 0 0,-1-1 1 0 0,0 0 0 0 0,0 1-1 0 0,0-1 1 0 0,1 0 0 0 0,-1 1 0 0 0,0-1-1 0 0,0 0 1 0 0,1 0 0 0 0,-1 1-1 0 0,0-1 1 0 0,1 0 0 0 0,-1 0-1 0 0,0 0 1 0 0,1 1 0 0 0,-1-1-1 0 0,0 0 1 0 0,1 0 0 0 0,-1 0-1 0 0,0 0 1 0 0,1 0 0 0 0,-1 0 0 0 0,0 0-1 0 0,1 0 1 0 0,-1 0 0 0 0,1 0-1 0 0,-1 0 1 0 0,0 0 0 0 0,1 0-1 0 0,-1 0 1 0 0,0 0 0 0 0,1 0-1 0 0,-1 0 1 0 0,0 0 0 0 0,1 0-1 0 0,-1 0 1 0 0,1-1 0 0 0,-1 1-1 0 0,0 0 1 0 0,0 0 0 0 0,1 0 0 0 0,-1-1-1 0 0,0 1 1 0 0,1 0 0 0 0,-1 0-1 0 0,0-1 1 0 0,0 1 0 0 0,1 0-1 0 0,-1-1 1 0 0,0 1 0 0 0,0 0-1 0 0,0-1 1 0 0,1 0 0 0 0,2-3 84 0 0,0 0 1 0 0,-1 0 0 0 0,1 0-1 0 0,-1-1 1 0 0,0 0 0 0 0,2-4-1 0 0,-2 1-25 0 0,0 1-1 0 0,-1-1 0 0 0,0 0 1 0 0,0 0-1 0 0,-1-8 1 0 0,0 15-53 0 0,0 0 0 0 0,0 0 0 0 0,0 0 0 0 0,0 0 0 0 0,0 0 0 0 0,0 1 0 0 0,0-1 0 0 0,-1 0 0 0 0,1 0 0 0 0,0 0 0 0 0,0 0 0 0 0,-1 1 0 0 0,1-1 0 0 0,-1 0 0 0 0,1 0 0 0 0,0 0 0 0 0,-1 1 0 0 0,1-1 0 0 0,-1 0 0 0 0,0 1 0 0 0,1-1 0 0 0,-1 1 0 0 0,0-1 0 0 0,1 0 0 0 0,-1 1 0 0 0,0-1 0 0 0,0 1 0 0 0,0-1 0 0 0,0 1-10 0 0,0 0 0 0 0,0 0-1 0 0,0 0 1 0 0,0 0 0 0 0,0 0 0 0 0,0 0 0 0 0,0 1 0 0 0,1-1 0 0 0,-1 0 0 0 0,0 0-1 0 0,0 1 1 0 0,0-1 0 0 0,0 0 0 0 0,1 1 0 0 0,-1-1 0 0 0,0 1 0 0 0,0-1 0 0 0,1 1-1 0 0,-1 0 1 0 0,0-1 0 0 0,1 1 0 0 0,-1 0 0 0 0,1-1 0 0 0,-1 1 0 0 0,0 0 0 0 0,1 0-1 0 0,-1 1 1 0 0,-4 6-135 0 0,0 1 1 0 0,0 0-1 0 0,1 0 0 0 0,0 0 0 0 0,1 0 0 0 0,-3 11 0 0 0,4-13-686 0 0</inkml:trace>
+</inkml:ink>
+</file>
+
+<file path=ppt/ink/ink4.xml><?xml version="1.0" encoding="utf-8"?>
+<inkml:ink xmlns:inkml="http://www.w3.org/2003/InkML">
+  <inkml:definitions>
+    <inkml:context xml:id="ctx0">
+      <inkml:inkSource xml:id="inkSrc0">
+        <inkml:traceFormat>
+          <inkml:channel name="X" type="integer" min="-2.14748E9" max="2.14748E9" units="cm"/>
+          <inkml:channel name="Y" type="integer" min="-2.14748E9" max="2.14748E9" units="cm"/>
+          <inkml:channel name="F" type="integer" max="32767" units="dev"/>
+          <inkml:channel name="OA" type="integer" max="360" units="deg"/>
+          <inkml:channel name="OE" type="integer" max="90" units="deg"/>
+        </inkml:traceFormat>
+        <inkml:channelProperties>
+          <inkml:channelProperty channel="X" name="resolution" value="1000" units="1/cm"/>
+          <inkml:channelProperty channel="Y" name="resolution" value="1000" units="1/cm"/>
+          <inkml:channelProperty channel="F" name="resolution" value="0" units="1/dev"/>
+          <inkml:channelProperty channel="OA" name="resolution" value="1000" units="1/deg"/>
+          <inkml:channelProperty channel="OE" name="resolution" value="1000" units="1/deg"/>
+        </inkml:channelProperties>
+      </inkml:inkSource>
+      <inkml:timestamp xml:id="ts0" timeString="2026-02-25T05:40:27.116"/>
+    </inkml:context>
+    <inkml:brush xml:id="br0">
+      <inkml:brushProperty name="width" value="0.05" units="cm"/>
+      <inkml:brushProperty name="height" value="0.05" units="cm"/>
+      <inkml:brushProperty name="color" value="#E71224"/>
+    </inkml:brush>
+  </inkml:definitions>
+  <inkml:trace contextRef="#ctx0" brushRef="#br0">17 0 1496 0 0,'1'4'14'0'0,"-1"-3"-4"0"0,0 1 0 0 0,0 0 0 0 0,1 0 0 0 0,-1-1 0 0 0,0 1 0 0 0,-1 0 0 0 0,1 0 0 0 0,0-1 0 0 0,0 1 0 0 0,-1 0 0 0 0,-6 3 6156 0 0,3 11-5590 0 0,2-12 648 0 0,-2 13 2686 0 0,5-12-3699 0 0,0 13-3 0 0,-1-15-88 0 0,0 0 0 0 0,0-1 0 0 0,0 1-1 0 0,1 0 1 0 0,-1-1 0 0 0,1 1 0 0 0,0-1 0 0 0,0 1 0 0 0,0-1 0 0 0,0 1 0 0 0,0-1-1 0 0,1 1 1 0 0,-1-1 0 0 0,1 0 0 0 0,-1 0 0 0 0,1 0 0 0 0,2 2 0 0 0,-3-2-43 0 0,1 0 1 0 0,-1 0-1 0 0,0 0 0 0 0,1 0 1 0 0,-1 1-1 0 0,1 3 0 0 0,6 9 543 0 0,-8-17-446 0 0,3 11-109 0 0,-3-2-43 0 0,0-6-19 0 0,-1 0-1 0 0,1-1 0 0 0,0 1 0 0 0,0 0 1 0 0,0-1-1 0 0,0 1 0 0 0,0 0 1 0 0,0-1-1 0 0,1 1 0 0 0,-1 0 0 0 0,0 0 1 0 0,0-1-1 0 0,0 1 0 0 0,1 0 1 0 0,-1-1-1 0 0,0 1 0 0 0,1-1 0 0 0,-1 1 1 0 0,0 0-1 0 0,1-1 0 0 0,-1 1 0 0 0,2 0 1 0 0,5 31 253 0 0,-5-28-253 0 0,-1-5-1 0 0,2-9 28 0 0,-3 7 63 0 0,1 29-23 0 0,-1-16-7 0 0,0 0-1 0 0,1 0 1 0 0,0 0 0 0 0,4 15 0 0 0,-3-18-125 0 0,4 9-65 0 0,-3-15 96 0 0,2-10 35 0 0,-2 5-7 0 0,1 9 3 0 0,5 20 12 0 0,-7-20-1 0 0,-1 0 0 0 0,1 0 0 0 0,0 0 0 0 0,5 8 0 0 0,-7-13-11 0 0,0 0 0 0 0,0 0 0 0 0,1 0 0 0 0,-1 0 0 0 0,0 0 0 0 0,0 0 0 0 0,0 1 0 0 0,0-1 0 0 0,1 0 0 0 0,-1 0 0 0 0,0 0 0 0 0,0 0 0 0 0,0 0 0 0 0,0 0 0 0 0,1 0 0 0 0,-1 0 0 0 0,0 0 0 0 0,0 0 0 0 0,0 0 0 0 0,1 0 0 0 0,-1 0 0 0 0,0 0 0 0 0,0 0 0 0 0,0 0 0 0 0,1 0 0 0 0,-1 0 0 0 0,0 0 0 0 0,0 0 0 0 0,0 0 0 0 0,0-1 0 0 0,1 1 0 0 0,-1 0 0 0 0,0 0 0 0 0,0 0 0 0 0,0 0 0 0 0,0 0 0 0 0,0 0 0 0 0,0 0 0 0 0,0 0 0 0 0,0 0 0 0 0,0-1 0 0 0,1 1 0 0 0,-1 0 0 0 0,0 0 0 0 0,0 0 0 0 0,0 0 0 0 0,0 0 0 0 0,0 0 0 0 0,0 0 0 0 0,0 0 0 0 0,0 0 0 0 0,0 0 0 0 0,0 0 0 0 0,1 0 0 0 0,-1 0 0 0 0,0 0 0 0 0,0 0 0 0 0,0 0 0 0 0,0 0 0 0 0,0 0 0 0 0,0 0 0 0 0,0 0 0 0 0,0 0 0 0 0,0 0 0 0 0,0 0 0 0 0,1 0 0 0 0,-1 0 0 0 0,0 0 0 0 0,0 1 0 0 0,0-1 0 0 0,0 0 0 0 0,0 0 0 0 0,0 0 0 0 0,0 0 0 0 0,0 0 0 0 0,0 0 0 0 0,0 0 0 0 0,0 0 0 0 0,0 0 0 0 0,0 0 0 0 0,0 0 0 0 0,0 0 0 0 0,0 0 0 0 0,1 1 0 0 0,23 65 0 0 0,-1 3 203 0 0,-20-60-196 0 0,1 0 1 0 0,-1 1-1 0 0,-1-1 1 0 0,1 1 0 0 0,-2-1-1 0 0,2 12 1 0 0,-3-19-1 0 0,1 1 0 0 0,0 0 0 0 0,0-1 0 0 0,0 1 0 0 0,0-1 0 0 0,0 1 0 0 0,1-1 0 0 0,2 4 0 0 0,2 4 47 0 0,-1-5 20 0 0,-5-4-69 0 0,1-1 0 0 0,-1 0 0 0 0,0 1 0 0 0,1-1 0 0 0,-1 0 1 0 0,1 1-1 0 0,-1-1 0 0 0,0 1 0 0 0,1-1 0 0 0,-1 1 0 0 0,0-1 0 0 0,0 1 0 0 0,1-1 0 0 0,-1 1 1 0 0,0-1-1 0 0,0 1 0 0 0,0-1 0 0 0,0 1 0 0 0,1 1 10 0 0,-1-1 1 0 0,0 1-1 0 0,1-1 1 0 0,-1 1-1 0 0,0-1 1 0 0,1 1-1 0 0,0-1 0 0 0,-1 0 1 0 0,1 1-1 0 0,0-1 1 0 0,0 0-1 0 0,0 0 1 0 0,1 2-1 0 0,7 19-15 0 0,11 26 0 0 0,-20-48 0 0 0,0 0 0 0 0,0 0 0 0 0,0-1 0 0 0,1 1 0 0 0,-1 0 0 0 0,0 0 0 0 0,0 0 0 0 0,0 0 0 0 0,0 0 0 0 0,0 0 0 0 0,0 0 0 0 0,0 0 0 0 0,0 0 0 0 0,0 0 0 0 0,0 0 0 0 0,0 0 0 0 0,1 0 0 0 0,-1 0 0 0 0,0 0 0 0 0,0 0 0 0 0,0 0 0 0 0,0 0 0 0 0,0 0 0 0 0,0 0 0 0 0,0 0 0 0 0,0 0 0 0 0,0 0 0 0 0,0 0 0 0 0,0 0 0 0 0,1 0 0 0 0,-1 1 0 0 0,0-1 0 0 0,0 0 0 0 0,0 0 0 0 0,0 0 0 0 0,0 0 0 0 0,0 0 0 0 0,0 0 0 0 0,0 0 0 0 0,0 0 0 0 0,0 0 0 0 0,0 0 0 0 0,0 0 0 0 0,0 0 0 0 0,0 0 0 0 0,0 0 0 0 0,0 1 0 0 0,0-1 0 0 0,0 0 0 0 0,0 0 0 0 0,0 0 0 0 0,0 0 0 0 0,0 0 0 0 0,0 0 0 0 0,0 0 0 0 0,0 0 0 0 0,0 0 0 0 0,0 0 0 0 0,0 1 0 0 0,0-1 0 0 0,0 0 0 0 0,0 0 0 0 0,5 31 200 0 0,-5-32-208 0 0,1-4-27 0 0,1 10 14 0 0,4 49 85 0 0,-6-56 9 0 0,1-3 18 0 0,0 14 6 0 0,-2-7-88 0 0,3 4 4 0 0,1 3 5 0 0,-1-1-31 0 0,1 0 35 0 0,4-20 138 0 0,-7 13-50 0 0,5 22 99 0 0,0-11-42 0 0,-3-18-3 0 0,0 10-38 0 0,-1 14-273 0 0,0-42 26 0 0,0 22 109 0 0,-1 4-12 0 0,0 17-102 0 0,-2-25-1282 0 0</inkml:trace>
+</inkml:ink>
+</file>
+
+<file path=ppt/ink/ink5.xml><?xml version="1.0" encoding="utf-8"?>
+<inkml:ink xmlns:inkml="http://www.w3.org/2003/InkML">
+  <inkml:definitions>
+    <inkml:context xml:id="ctx0">
+      <inkml:inkSource xml:id="inkSrc0">
+        <inkml:traceFormat>
+          <inkml:channel name="X" type="integer" min="-2.14748E9" max="2.14748E9" units="cm"/>
+          <inkml:channel name="Y" type="integer" min="-2.14748E9" max="2.14748E9" units="cm"/>
+          <inkml:channel name="F" type="integer" max="32767" units="dev"/>
+          <inkml:channel name="OA" type="integer" max="360" units="deg"/>
+          <inkml:channel name="OE" type="integer" max="90" units="deg"/>
+        </inkml:traceFormat>
+        <inkml:channelProperties>
+          <inkml:channelProperty channel="X" name="resolution" value="1000" units="1/cm"/>
+          <inkml:channelProperty channel="Y" name="resolution" value="1000" units="1/cm"/>
+          <inkml:channelProperty channel="F" name="resolution" value="0" units="1/dev"/>
+          <inkml:channelProperty channel="OA" name="resolution" value="1000" units="1/deg"/>
+          <inkml:channelProperty channel="OE" name="resolution" value="1000" units="1/deg"/>
+        </inkml:channelProperties>
+      </inkml:inkSource>
+      <inkml:timestamp xml:id="ts0" timeString="2026-02-25T05:40:27.820"/>
+    </inkml:context>
+    <inkml:brush xml:id="br0">
+      <inkml:brushProperty name="width" value="0.05" units="cm"/>
+      <inkml:brushProperty name="height" value="0.05" units="cm"/>
+      <inkml:brushProperty name="color" value="#E71224"/>
+    </inkml:brush>
+  </inkml:definitions>
+  <inkml:trace contextRef="#ctx0" brushRef="#br0">12 318 7890 0 0,'0'0'11'0'0,"0"0"-1"0"0,0 0 1 0 0,0 0 0 0 0,0 0 0 0 0,0 0 0 0 0,0 0 0 0 0,-1 0-1 0 0,1 0 1 0 0,0 0 0 0 0,0 0 0 0 0,0 0 0 0 0,0 0 0 0 0,0 0 0 0 0,0 0-1 0 0,0 0 1 0 0,-1 0 0 0 0,1 0 0 0 0,0 0 0 0 0,0 0 0 0 0,0 0-1 0 0,0 0 1 0 0,0 0 0 0 0,0 0 0 0 0,0 0 0 0 0,0 0 0 0 0,-1 0 0 0 0,1 0-1 0 0,0 0 1 0 0,0-1 0 0 0,0 1 0 0 0,0 0 0 0 0,0 0 0 0 0,0 0 0 0 0,0 0-1 0 0,0 0 1 0 0,0 0 0 0 0,0 0 0 0 0,0 0 0 0 0,0 0 0 0 0,0-1-1 0 0,0 1 1 0 0,0 0 0 0 0,0 0 0 0 0,0 0 0 0 0,0 0 0 0 0,0 0 0 0 0,0 0-1 0 0,0-1 1 0 0,0 1-5 0 0,-1 0 0 0 0,-6 4 6532 0 0,8-8-5256 0 0,5-15-979 0 0,-6 19-300 0 0,0 0 0 0 0,0 0-1 0 0,0 0 1 0 0,0 0 0 0 0,0 0 0 0 0,0 0 0 0 0,0 0 0 0 0,0 0 0 0 0,0 0 0 0 0,0 0 0 0 0,0 0 0 0 0,0-1 0 0 0,0 1 0 0 0,0 0 0 0 0,0 0 0 0 0,0 0 0 0 0,0 0 0 0 0,0 0 0 0 0,0 0 0 0 0,1 0 0 0 0,-1 0 0 0 0,0 0 0 0 0,0 0 0 0 0,0 0 0 0 0,0 0 0 0 0,0 0 0 0 0,0 0 0 0 0,0 0 0 0 0,0 0 0 0 0,0 0 0 0 0,0 0 0 0 0,0 0 0 0 0,0 0 0 0 0,0 0 0 0 0,0 0 0 0 0,0 0 0 0 0,0 0 0 0 0,0 0 0 0 0,0 0 0 0 0,1 0 0 0 0,-1 0 0 0 0,0 0 0 0 0,0 0 0 0 0,0 0 0 0 0,0 0 0 0 0,0 0 0 0 0,0 0 0 0 0,0 0 0 0 0,0 0 0 0 0,0 0 0 0 0,0 0 0 0 0,0 0 0 0 0,0 0 0 0 0,0 0 0 0 0,0 0 0 0 0,0 0 0 0 0,0 0 0 0 0,0 0 0 0 0,0 0 0 0 0,0 0 0 0 0,0 0 0 0 0,0 0 0 0 0,0 0 0 0 0,1 0 0 0 0,-1 1 0 0 0,2 4 229 0 0,3 5 415 0 0,-4-10-619 0 0,-1 0 0 0 0,0 0 1 0 0,0 0-1 0 0,0 0 0 0 0,1 0 0 0 0,-1 0 0 0 0,0 0 0 0 0,0 0 0 0 0,1 0 0 0 0,-1 0 0 0 0,0 0 0 0 0,0 0 0 0 0,0 0 0 0 0,1 0 1 0 0,-1-1-1 0 0,0 1 0 0 0,0 0 0 0 0,0 0 0 0 0,1 0 0 0 0,-1 0 0 0 0,0 0 0 0 0,0 0 0 0 0,0-1 0 0 0,0 1 0 0 0,1 0 0 0 0,-1 0 0 0 0,0 0 1 0 0,0 0-1 0 0,0-1 0 0 0,0 1 0 0 0,0 0 0 0 0,0 0 0 0 0,1 0 0 0 0,-1-1 0 0 0,0 1 0 0 0,0 0 0 0 0,0 0 0 0 0,0 0 0 0 0,0-1 0 0 0,0 1 1 0 0,0 0-1 0 0,0 0 0 0 0,0-1 0 0 0,0 1 0 0 0,0 0 0 0 0,0 0 0 0 0,5-11 254 0 0,-1 9 7 0 0,2 19 277 0 0,-3-5-331 0 0,-2-9-203 0 0,0-1 0 0 0,0 1 0 0 0,0 0 0 0 0,0-1 0 0 0,0 0 0 0 0,0 1 0 0 0,1-1 0 0 0,-1 0 0 0 0,1 1 0 0 0,0-1 0 0 0,-1 0 0 0 0,1 0 0 0 0,0 0 0 0 0,4 2 0 0 0,1 2 47 0 0,-7-6-77 0 0,0 0 1 0 0,0 0 0 0 0,0 1-1 0 0,0-1 1 0 0,0 0 0 0 0,0 0-1 0 0,1 0 1 0 0,-1 0-1 0 0,0 0 1 0 0,0 0 0 0 0,0 0-1 0 0,0 0 1 0 0,0 0 0 0 0,0 1-1 0 0,0-1 1 0 0,0 0 0 0 0,0 0-1 0 0,1 0 1 0 0,-1 0 0 0 0,0 0-1 0 0,0 0 1 0 0,0 0 0 0 0,0 0-1 0 0,0 0 1 0 0,0 0-1 0 0,1 0 1 0 0,-1 0 0 0 0,0 0-1 0 0,0 0 1 0 0,0 0 0 0 0,0 0-1 0 0,0 0 1 0 0,0 0 0 0 0,0 0-1 0 0,1 0 1 0 0,-1 0 0 0 0,0 0-1 0 0,0 0 1 0 0,0 0 0 0 0,0-1-1 0 0,0 1 1 0 0,0 0-1 0 0,0 0 1 0 0,0 0 0 0 0,1 0-1 0 0,-1 0 1 0 0,0 0 0 0 0,0 0-1 0 0,0 0 1 0 0,0 0 0 0 0,0 0-1 0 0,0-1 1 0 0,0 1 0 0 0,0 0-1 0 0,0 0 1 0 0,0 0 0 0 0,0 0-1 0 0,0 0 1 0 0,0 0-1 0 0,0 0 1 0 0,0-1 0 0 0,0 1-1 0 0,4-5 18 0 0,-3 5-20 0 0,-1 0 0 0 0,0 0 1 0 0,0 0-1 0 0,0 0 1 0 0,0 0-1 0 0,1 0 0 0 0,-1 0 1 0 0,0 0-1 0 0,0 0 1 0 0,0 0-1 0 0,0 0 0 0 0,1 0 1 0 0,-1 0-1 0 0,0 0 1 0 0,0 0-1 0 0,0 0 0 0 0,0 0 1 0 0,1 0-1 0 0,-1 0 1 0 0,0 1-1 0 0,0-1 1 0 0,0 0-1 0 0,0 0 0 0 0,0 0 1 0 0,1 0-1 0 0,-1 0 1 0 0,0 0-1 0 0,0 0 0 0 0,0 1 1 0 0,0-1-1 0 0,0 0 1 0 0,0 0-1 0 0,0 0 0 0 0,0 0 1 0 0,1 1-1 0 0,-1-1 1 0 0,0 0-1 0 0,0 0 1 0 0,0 0-1 0 0,0 0 0 0 0,0 1 1 0 0,0-1-1 0 0,0 0 1 0 0,0 0-1 0 0,0 0 0 0 0,0 0 1 0 0,0 1-1 0 0,0-1 1 0 0,2 11 37 0 0,-2-11-36 0 0,0 3-1 0 0,1-1 1 0 0,-1 1 0 0 0,1-1 0 0 0,-1 0-1 0 0,1 1 1 0 0,0-1 0 0 0,0 0 0 0 0,0 0 0 0 0,0 0-1 0 0,0 0 1 0 0,1 0 0 0 0,-1 0 0 0 0,1 0-1 0 0,2 3 1 0 0,-4-5 4 0 0,1-1 1 0 0,-1 1-1 0 0,1 0 0 0 0,-1 0 0 0 0,1-1 1 0 0,-1 1-1 0 0,0 0 0 0 0,1-1 0 0 0,-1 1 0 0 0,0 0 1 0 0,1-1-1 0 0,-1 1 0 0 0,0 0 0 0 0,1-1 1 0 0,-1 1-1 0 0,0-1 0 0 0,0 1 0 0 0,0-1 1 0 0,1 1-1 0 0,-1 0 0 0 0,0-1 0 0 0,0 1 0 0 0,0-1 1 0 0,0 1-1 0 0,0-2 0 0 0,4-12 87 0 0,0 33-82 0 0,-2-31-4 0 0,-1-15-38 0 0,-1 21 102 0 0,0 22 148 0 0,-6-136 420 0 0,4 31-88 0 0,2-15 13 0 0,-1 43-328 0 0,4 104-5420 0 0</inkml:trace>
+</inkml:ink>
+</file>
+
+<file path=ppt/ink/ink6.xml><?xml version="1.0" encoding="utf-8"?>
+<inkml:ink xmlns:inkml="http://www.w3.org/2003/InkML">
+  <inkml:definitions>
+    <inkml:context xml:id="ctx0">
+      <inkml:inkSource xml:id="inkSrc0">
+        <inkml:traceFormat>
+          <inkml:channel name="X" type="integer" min="-2.14748E9" max="2.14748E9" units="cm"/>
+          <inkml:channel name="Y" type="integer" min="-2.14748E9" max="2.14748E9" units="cm"/>
+          <inkml:channel name="F" type="integer" max="32767" units="dev"/>
+          <inkml:channel name="OA" type="integer" max="360" units="deg"/>
+          <inkml:channel name="OE" type="integer" max="90" units="deg"/>
+        </inkml:traceFormat>
+        <inkml:channelProperties>
+          <inkml:channelProperty channel="X" name="resolution" value="1000" units="1/cm"/>
+          <inkml:channelProperty channel="Y" name="resolution" value="1000" units="1/cm"/>
+          <inkml:channelProperty channel="F" name="resolution" value="0" units="1/dev"/>
+          <inkml:channelProperty channel="OA" name="resolution" value="1000" units="1/deg"/>
+          <inkml:channelProperty channel="OE" name="resolution" value="1000" units="1/deg"/>
+        </inkml:channelProperties>
+      </inkml:inkSource>
+      <inkml:timestamp xml:id="ts0" timeString="2026-02-25T05:40:31.352"/>
+    </inkml:context>
+    <inkml:brush xml:id="br0">
+      <inkml:brushProperty name="width" value="0.05" units="cm"/>
+      <inkml:brushProperty name="height" value="0.05" units="cm"/>
+      <inkml:brushProperty name="color" value="#E71224"/>
+    </inkml:brush>
+  </inkml:definitions>
+  <inkml:trace contextRef="#ctx0" brushRef="#br0">0 0 8178 0 0,'2'3'9567'0'0,"0"-1"-9457"0"0,0 0 0 0 0,1 0 0 0 0,-1 0 1 0 0,0 0-1 0 0,0 0 0 0 0,0 1 0 0 0,-1-1 0 0 0,3 3 0 0 0,14 11 402 0 0,-15-13-516 0 0,0 0 0 0 0,0-1-1 0 0,0 0 1 0 0,0 1 0 0 0,5 1 0 0 0,9 7-31 0 0,-15-9 55 0 0,0 0 1 0 0,1 0-1 0 0,-1 0 1 0 0,1 0-1 0 0,-1-1 0 0 0,1 1 1 0 0,0-1-1 0 0,0 0 0 0 0,-1 0 1 0 0,7 2-1 0 0,-6-2 57 0 0,0 1 0 0 0,0 0 0 0 0,0-1 0 0 0,-1 1 0 0 0,1 0 0 0 0,0 1 0 0 0,-1-1 0 0 0,1 0 0 0 0,-1 1 0 0 0,0-1-1 0 0,0 1 1 0 0,2 3 0 0 0,3 2-9 0 0,0-1 0 0 0,1 1-1 0 0,8 6 1 0 0,9 8 61 0 0,-25-22-129 0 0,0 0 0 0 0,0 0 0 0 0,0 0 0 0 0,1 0 0 0 0,-1 1 0 0 0,0-1 0 0 0,0 0 0 0 0,0 0 0 0 0,1 0 0 0 0,-1 0 0 0 0,0 0 0 0 0,0 0 0 0 0,0 0 0 0 0,1 0 0 0 0,-1 0 0 0 0,0 0 0 0 0,0 0 0 0 0,0 0 0 0 0,1 0 0 0 0,-1 0 0 0 0,0 0 0 0 0,0 0 0 0 0,0 0 0 0 0,1 0 0 0 0,-1 0 0 0 0,0-1 0 0 0,0 1 0 0 0,0 0 0 0 0,1 0 0 0 0,-1 0 0 0 0,0 0 0 0 0,0 0 0 0 0,0 0 0 0 0,0-1 0 0 0,0 1 0 0 0,1 0 0 0 0,-1 0 0 0 0,0 0 0 0 0,0 0 0 0 0,0-1 0 0 0,0 1 0 0 0,0 0 0 0 0,0 0 0 0 0,0 0 0 0 0,0-1 0 0 0,0 1 0 0 0,1 0 0 0 0,-1 0 0 0 0,0-1 0 0 0,3-3 1 0 0,1 13 9 0 0,-4-9-10 0 0,5 13 107 0 0,-5-13-103 0 0,0 0 0 0 0,0 0-1 0 0,0 0 1 0 0,0 0 0 0 0,0 0 0 0 0,0 1 0 0 0,1-1 0 0 0,-1 0 0 0 0,0 0 0 0 0,0 0 0 0 0,0 0 0 0 0,0 0 0 0 0,0 0 0 0 0,0 0 0 0 0,0 1 0 0 0,1-1 0 0 0,-1 0 0 0 0,0 0 0 0 0,0 0 0 0 0,0 0 0 0 0,0 0 0 0 0,1 0 0 0 0,-1 0 0 0 0,0 0 0 0 0,0 0 0 0 0,0 0 0 0 0,0 0 0 0 0,0 0 0 0 0,1 0 0 0 0,-1 0 0 0 0,0 0 0 0 0,0 0 0 0 0,0 0 0 0 0,0 0 0 0 0,1 0 0 0 0,-1 0 0 0 0,0 0 0 0 0,0 0 0 0 0,0 0 0 0 0,0 0 0 0 0,0 0 0 0 0,1 0 0 0 0,-1-1 0 0 0,0 1 0 0 0,0 0 0 0 0,0 0 0 0 0,0 0 0 0 0,0 0 0 0 0,0 0 0 0 0,1 0 0 0 0,-1-1 0 0 0,0 1 0 0 0,0 0 0 0 0,0 0 0 0 0,0 0 0 0 0,0 0 0 0 0,0 0 0 0 0,0-1 0 0 0,8 20 104 0 0,2 2-30 0 0,-10-21-75 0 0,0 1 0 0 0,0 0 1 0 0,1-1-1 0 0,-1 1 0 0 0,0 0 0 0 0,0-1 1 0 0,1 1-1 0 0,-1-1 0 0 0,1 1 1 0 0,-1-1-1 0 0,0 1 0 0 0,1-1 1 0 0,-1 1-1 0 0,1-1 0 0 0,-1 1 0 0 0,1-1 1 0 0,-1 1-1 0 0,1-1 0 0 0,1 1 1 0 0,2-11 40 0 0,0 3 12 0 0,-4 7-55 0 0,0 0 0 0 0,1 0 0 0 0,-1 0 0 0 0,0 1 1 0 0,1-1-1 0 0,-1 0 0 0 0,0 0 0 0 0,0 1 0 0 0,1-1 0 0 0,-1 0 1 0 0,0 1-1 0 0,0-1 0 0 0,0 0 0 0 0,0 1 0 0 0,1-1 1 0 0,-1 0-1 0 0,0 1 0 0 0,0-1 0 0 0,0 1 0 0 0,0-1 1 0 0,0 0-1 0 0,0 1 0 0 0,0-1 0 0 0,0 0 0 0 0,0 1 0 0 0,0 0 1 0 0,2 9 7 0 0,0 0 0 0 0,1 0 0 0 0,0-1 0 0 0,1 1 0 0 0,0-1 0 0 0,8 15 1 0 0,-11-24-10 0 0,-1 0 0 0 0,0 1 0 0 0,0-1 0 0 0,0 0 0 0 0,0 0 0 0 0,0 0 0 0 0,0 0 0 0 0,0 0 0 0 0,0 1 0 0 0,0-1 0 0 0,0 0 0 0 0,0 0 0 0 0,1 0 0 0 0,-1 0 0 0 0,0 0 0 0 0,0 0 0 0 0,0 0 0 0 0,0 0 0 0 0,0 1 0 0 0,0-1 0 0 0,1 0 0 0 0,-1 0 0 0 0,0 0 0 0 0,0 0 0 0 0,0 0 0 0 0,0 0 0 0 0,0 0 0 0 0,1 0 0 0 0,-1 0 0 0 0,0 0 0 0 0,0 0 0 0 0,0 0 0 0 0,0 0 0 0 0,1 0 0 0 0,-1 0 0 0 0,0 0 0 0 0,0 0 0 0 0,0 0 0 0 0,0 0 0 0 0,0 0 0 0 0,1 0 0 0 0,-1 0 0 0 0,0-1 0 0 0,0 1 0 0 0,0 0 0 0 0,4-7 0 0 0,-4 7 0 0 0,0 0 0 0 0,0 0 0 0 0,0-1 0 0 0,0 1 0 0 0,0 0 0 0 0,0 0 0 0 0,0 0 0 0 0,0 0 0 0 0,0 0 0 0 0,0-1 0 0 0,0 1 0 0 0,0 0 0 0 0,0 0 0 0 0,0 0 0 0 0,0 0 0 0 0,0 0 0 0 0,0-1 0 0 0,0 1 0 0 0,0 0 0 0 0,0 0 0 0 0,0 0 0 0 0,1 0 0 0 0,-1 0 0 0 0,0 0 0 0 0,0-1 0 0 0,0 1 0 0 0,0 0 0 0 0,0 0 0 0 0,0 0 0 0 0,1 0 0 0 0,-1 0 0 0 0,0 0 0 0 0,0 0 0 0 0,0 0 0 0 0,0 0 0 0 0,0 0 0 0 0,1 0 0 0 0,-1 0 0 0 0,0 0 0 0 0,0 0 0 0 0,3 5 1 0 0,-3-4 2 0 0,1-1 0 0 0,-1 1-1 0 0,0 0 1 0 0,1-1 0 0 0,-1 1 0 0 0,0-1 0 0 0,1 1 0 0 0,-1 0 0 0 0,1-1-1 0 0,-1 1 1 0 0,1-1 0 0 0,-1 1 0 0 0,1-1 0 0 0,-1 1 0 0 0,1-1 0 0 0,0 0-1 0 0,-1 1 1 0 0,1-1 0 0 0,0 0 0 0 0,-1 1 0 0 0,2-1 0 0 0,0 1 7 0 0,-1 0 0 0 0,0 0 1 0 0,0 1-1 0 0,0-1 0 0 0,0 0 1 0 0,0 0-1 0 0,0 1 1 0 0,-1-1-1 0 0,1 0 0 0 0,0 1 1 0 0,-1-1-1 0 0,1 1 0 0 0,-1-1 1 0 0,1 3-1 0 0,1 2 16 0 0,2 3-13 0 0,8 12-21 0 0,-12-20 12 0 0,1 0 0 0 0,0 0 0 0 0,0 0 0 0 0,0-1 0 0 0,0 1-1 0 0,0 0 1 0 0,0 0 0 0 0,0-1 0 0 0,0 1 0 0 0,0 0 0 0 0,0-1-1 0 0,0 1 1 0 0,1-1 0 0 0,-1 0 0 0 0,0 1 0 0 0,1-1 0 0 0,-1 0-4 0 0,-1 0 1 0 0,1-1 0 0 0,-1 1-1 0 0,1 0 1 0 0,-1-1 0 0 0,1 1-1 0 0,-1 0 1 0 0,1-1 0 0 0,-1 1-1 0 0,0-1 1 0 0,1 1 0 0 0,-1-1-1 0 0,0 1 1 0 0,1-1 0 0 0,-1 1-1 0 0,0-1 1 0 0,0 1 0 0 0,0-1-1 0 0,1 0 1 0 0,3-7-3 0 0,-4 8 2 0 0,0 0 0 0 0,0 0 0 0 0,0 0 0 0 0,0 0 0 0 0,0-1 0 0 0,0 1 0 0 0,0 0 0 0 0,1 0 0 0 0,-1 0 0 0 0,0 0 0 0 0,0 0 0 0 0,0 0 0 0 0,0 0 0 0 0,0 0 0 0 0,0 0 0 0 0,0 0 0 0 0,0 0 0 0 0,1 0 0 0 0,-1 0 0 0 0,0 0 0 0 0,0 0 0 0 0,0-1 0 0 0,0 1 0 0 0,0 0 0 0 0,0 0 0 0 0,0 0 0 0 0,1 0 0 0 0,-1 0 0 0 0,0 0 0 0 0,0 1 0 0 0,0-1 1 0 0,0 0-1 0 0,0 0 0 0 0,0 0 0 0 0,0 0 0 0 0,1 0 0 0 0,-1 0 0 0 0,0 0 0 0 0,0 0 0 0 0,0 0 0 0 0,0 0 0 0 0,0 0 0 0 0,0 0 0 0 0,0 0 0 0 0,0 0 0 0 0,0 0 0 0 0,1 1 0 0 0,3 7 0 0 0,-4-8 0 0 0,0 1 0 0 0,0-1 0 0 0,0 1 0 0 0,0-1 0 0 0,0 0 0 0 0,0 1 0 0 0,0-1 0 0 0,0 0 0 0 0,1 1 0 0 0,-1-1 0 0 0,0 0 0 0 0,0 1 0 0 0,0-1 0 0 0,1 0 0 0 0,-1 1 0 0 0,0-1 0 0 0,0 0 0 0 0,1 1 0 0 0,-1-1 0 0 0,0 0 0 0 0,1 0 0 0 0,-1 0 0 0 0,0 1 0 0 0,1-1 0 0 0,-1 0 0 0 0,0 0 0 0 0,1 0 0 0 0,-1 0 0 0 0,1 0 0 0 0,-1 1 0 0 0,0-1 0 0 0,1 0 0 0 0,-1 0 0 0 0,0 0 0 0 0,1 0 0 0 0,-1 0 0 0 0,1 0 0 0 0,-1 0 0 0 0,1-1 0 0 0,0 1 0 0 0,-1 1 0 0 0,1-1 0 0 0,-1 0 0 0 0,1 0 0 0 0,-1 1 0 0 0,1-1 0 0 0,-1 0 0 0 0,0 1 0 0 0,1-1 0 0 0,-1 0 0 0 0,1 1 0 0 0,-1-1 0 0 0,0 0 0 0 0,1 1 0 0 0,-1-1 0 0 0,0 1 0 0 0,0-1 0 0 0,1 1 0 0 0,-1-1 0 0 0,0 1 0 0 0,1 0 0 0 0,4 14 0 0 0,-3-12 0 0 0,-2-2 6 0 0,1 3-28 0 0,1 1-1 0 0,-1-1 1 0 0,1 0 0 0 0,0 0-1 0 0,0 0 1 0 0,1 0 0 0 0,-1 0-1 0 0,1-1 1 0 0,0 1 0 0 0,0-1-1 0 0,0 1 1 0 0,5 3 0 0 0,-1-2 148 0 0,-1-1-113 0 0,-1 0 0 0 0,0 0 0 0 0,0 1 0 0 0,0-1 0 0 0,4 7 0 0 0,8 9-13 0 0,0 0 0 0 0,1-1 0 0 0,2 0 0 0 0,31 22 0 0 0,-22-20 0 0 0,12 17 0 0 0,-41-38 0 0 0,18 15 0 0 0,-18-15 0 0 0,1 1 0 0 0,0-1 0 0 0,-1 0 0 0 0,1 1 0 0 0,-1-1 0 0 0,1 0 0 0 0,0 0 0 0 0,0 0 0 0 0,-1 1 0 0 0,1-1 0 0 0,0 0 0 0 0,-1 0 0 0 0,1 0 0 0 0,0 0 0 0 0,-1 0 0 0 0,1 0 0 0 0,0-1 0 0 0,-1 1 0 0 0,1 0 0 0 0,0 0 0 0 0,-1 0 0 0 0,1-1 0 0 0,0 1 0 0 0,-1 0 0 0 0,1-1 0 0 0,-1 1 0 0 0,2-1 0 0 0,-2 1 0 0 0,1 0 0 0 0,-1 0 0 0 0,1-1 0 0 0,-1 1 0 0 0,0 0 0 0 0,1 0 0 0 0,-1 0 0 0 0,1 0 0 0 0,-1 0 0 0 0,1 0 0 0 0,-1 0 0 0 0,1 0 0 0 0,-1 0 0 0 0,1 0 0 0 0,-1 0 0 0 0,1 0 0 0 0,-1 0 0 0 0,0 0 0 0 0,1 0 0 0 0,-1 1 0 0 0,1-1 0 0 0,-1 0 0 0 0,1 0 0 0 0,-1 1 0 0 0,1-1 0 0 0,13 10 0 0 0,-5-3 0 0 0,-7-5 3 0 0,0 0 0 0 0,1-1 0 0 0,-1 1 0 0 0,0 0 0 0 0,0 0 0 0 0,-1 0 0 0 0,1 1 0 0 0,0-1 0 0 0,-1 0 0 0 0,1 1 0 0 0,1 3 0 0 0,-2-3 1 0 0,1 0 0 0 0,0 0 0 0 0,0 0 0 0 0,0 0 0 0 0,1 0 0 0 0,3 4 0 0 0,-4-5-4 0 0,0 0 0 0 0,0 0 0 0 0,0 1 0 0 0,0-1 0 0 0,0 1 0 0 0,2 4 0 0 0,-3-5 0 0 0,0 0 0 0 0,0 0 0 0 0,0 0 0 0 0,0-1 0 0 0,0 1 0 0 0,1 0 0 0 0,-1-1 0 0 0,0 1 0 0 0,1-1 0 0 0,-1 0 0 0 0,1 1 0 0 0,0-1 0 0 0,0 0 0 0 0,3 2 0 0 0,5 6 0 0 0,-10-8 0 0 0,0 0 0 0 0,1-1 0 0 0,-1 1 0 0 0,0-1 0 0 0,1 1 0 0 0,-1 0 0 0 0,1-1 0 0 0,-1 1 0 0 0,1-1 0 0 0,-1 1 0 0 0,1-1 0 0 0,0 0 0 0 0,-1 1 0 0 0,1-1 0 0 0,0 1 0 0 0,-1-1 0 0 0,1 0 0 0 0,0 0 0 0 0,-1 1 0 0 0,1-1 0 0 0,0 0 0 0 0,-1 0 0 0 0,1 0 0 0 0,0 0 0 0 0,1 0 0 0 0,-2 0 0 0 0,1 0 0 0 0,-1 0 0 0 0,1 0 0 0 0,0 0 0 0 0,-1 0 0 0 0,1 0 0 0 0,-1 0 0 0 0,1 0 0 0 0,-1 0 0 0 0,1 1 0 0 0,-1-1 0 0 0,1 0 0 0 0,-1 0 0 0 0,1 0 0 0 0,-1 1 0 0 0,1-1 0 0 0,-1 0 0 0 0,1 1 0 0 0,-1-1 0 0 0,0 0 0 0 0,1 1 0 0 0,-1-1 0 0 0,1 1 0 0 0,-1-1 0 0 0,0 0 0 0 0,0 1 0 0 0,1-1 0 0 0,-1 1 0 0 0,0-1 0 0 0,0 1 0 0 0,1-1 0 0 0,-1 1 0 0 0,0 0 0 0 0,1 0 0 0 0,-1 0 0 0 0,1 0 0 0 0,-1-1 0 0 0,1 1 0 0 0,-1 0 0 0 0,1 0 0 0 0,0-1 0 0 0,-1 1 0 0 0,1-1 0 0 0,0 1 0 0 0,-1-1 0 0 0,1 1 0 0 0,1 0 0 0 0,-1 0 0 0 0,0-1 0 0 0,-1 0 0 0 0,1 1 0 0 0,-1-1 0 0 0,1 1 0 0 0,-1-1 0 0 0,1 1 0 0 0,-1-1 0 0 0,0 1 0 0 0,1 0 0 0 0,-1-1 0 0 0,0 1 0 0 0,1 0 0 0 0,-1-1 0 0 0,0 1 0 0 0,0 0 0 0 0,1-1 0 0 0,-1 1 0 0 0,0 1 0 0 0,3 17 0 0 0,-2-12 0 0 0,0-3 0 0 0,0 0 0 0 0,0-1 0 0 0,1 1 0 0 0,0 0 0 0 0,0-1 0 0 0,0 0 0 0 0,0 1 0 0 0,3 2 0 0 0,-1 0 0 0 0,-4-6 0 0 0,1 1 0 0 0,-1-1 0 0 0,1 1 0 0 0,-1-1 0 0 0,1 0 0 0 0,-1 1 0 0 0,1-1 0 0 0,-1 0 0 0 0,1 1 0 0 0,0-1 0 0 0,-1 0 0 0 0,1 0 0 0 0,-1 1 0 0 0,1-1 0 0 0,1 0 0 0 0,8 5 0 0 0,1 0 4 0 0,-11-5-5 0 0,1 0 0 0 0,0 0 0 0 0,-1 1 0 0 0,1-1 0 0 0,-1 0 1 0 0,1 0-1 0 0,0 1 0 0 0,-1-1 0 0 0,1 0 0 0 0,-1 0 0 0 0,1 1 0 0 0,-1-1 1 0 0,1 1-1 0 0,-1-1 0 0 0,1 0 0 0 0,-1 1 0 0 0,1-1 0 0 0,-1 1 0 0 0,0-1 1 0 0,1 1-1 0 0,-1-1 0 0 0,0 1 0 0 0,0 0 0 0 0,1 0 0 0 0,5 11-47 0 0,15 21 0 0 0,-14-23 70 0 0,0 0 0 0 0,7 17 0 0 0,-12-24-13 0 0,0 0 1 0 0,-1 0 0 0 0,1 0 0 0 0,1 0-1 0 0,-1 0 1 0 0,3 2 0 0 0,6 9-68 0 0,-3-1 136 0 0,10 24 0 0 0,-12-25-82 0 0,-1 0 1 0 0,2 0-1 0 0,11 16 1 0 0,-4-8 3 0 0,18 35 0 0 0,-32-54 0 0 0,18 29-70 0 0,1-2 1 0 0,43 50 0 0 0,-61-78 62 0 0,-1 1 0 0 0,0-1 0 0 0,1 1 0 0 0,-1-1 1 0 0,1 1-1 0 0,-1-1 0 0 0,0 0 0 0 0,1 1 0 0 0,-1-1 0 0 0,1 0 1 0 0,-1 1-1 0 0,1-1 0 0 0,0 0 0 0 0,-1 0 0 0 0,1 1 0 0 0,-1-1 1 0 0,1 0-1 0 0,-1 0 0 0 0,1 0 0 0 0,0 0 0 0 0,-1 0 0 0 0,1 0 1 0 0,-1 0-1 0 0,2 0 0 0 0,0 1 32 0 0,0 0 0 0 0,-1 0-1 0 0,1 0 1 0 0,-1 1 0 0 0,1-1 0 0 0,-1 1-1 0 0,1-1 1 0 0,-1 1 0 0 0,1-1 0 0 0,-1 1 0 0 0,1 1-1 0 0,5 6-14 0 0,-3-5-10 0 0,6 5 0 0 0,-10-9 0 0 0,1 0 0 0 0,-1 0 0 0 0,0 0 0 0 0,1 0 0 0 0,-1 0 0 0 0,0 0 0 0 0,1 0 0 0 0,-1 0 0 0 0,1 0 0 0 0,-1 0 0 0 0,1 0 0 0 0,-1 0 0 0 0,0 0 0 0 0,1 0 0 0 0,-1 0 0 0 0,1 0 0 0 0,-1 0 0 0 0,0 0 0 0 0,1-1 0 0 0,-1 1 0 0 0,0 0 0 0 0,1 0 0 0 0,-1 0 0 0 0,0-1 0 0 0,1 1 0 0 0,-1 0 0 0 0,0 0 0 0 0,1-1 0 0 0,-1 0 0 0 0,1 1 0 0 0,-1 0 1 0 0,0-1-1 0 0,1 1 1 0 0,-1 0-1 0 0,0-1 0 0 0,1 1 1 0 0,-1 0-1 0 0,1 0 1 0 0,-1-1-1 0 0,0 1 0 0 0,1 0 1 0 0,-1 0-1 0 0,1 0 1 0 0,-1 0-1 0 0,1 0 0 0 0,-1 0 1 0 0,1 0-1 0 0,-1-1 1 0 0,1 1-1 0 0,-1 0 0 0 0,1 1 1 0 0,-1-1-1 0 0,1 0 1 0 0,-1 0-1 0 0,0 0 0 0 0,1 0 1 0 0,-1 0-1 0 0,1 0 1 0 0,-1 1-1 0 0,1-1 0 0 0,-1 0 1 0 0,0 0-1 0 0,1 0 1 0 0,-1 1-1 0 0,1-1 0 0 0,-1 0 1 0 0,0 1-1 0 0,1-1 1 0 0,-1 0-1 0 0,0 1 0 0 0,1-1 1 0 0,-1 1-1 0 0,0-1 1 0 0,0 0-1 0 0,0 1 0 0 0,1-1 1 0 0,-1 1-1 0 0,0 0 1 0 0,12 29 47 0 0,-8-18-52 0 0,-3-8 4 0 0,1 0 0 0 0,0 0 0 0 0,0 0 0 0 0,0-1 0 0 0,0 1 0 0 0,1-1 0 0 0,-1 1 0 0 0,1-1 0 0 0,5 5 0 0 0,-3-14 0 0 0,-2 2 0 0 0,0 6 0 0 0,20 69-224 0 0,-23-71 225 0 0,0 0 1 0 0,0 0-1 0 0,1 1 1 0 0,-1-1 0 0 0,0 0-1 0 0,0 1 1 0 0,0-1 0 0 0,0 0-1 0 0,0 0 1 0 0,0 1-1 0 0,0-1 1 0 0,0 0 0 0 0,1 0-1 0 0,-1 1 1 0 0,0-1-1 0 0,0 0 1 0 0,0 0 0 0 0,1 1-1 0 0,-1-1 1 0 0,0 0-1 0 0,0 0 1 0 0,1 0 0 0 0,-1 0-1 0 0,0 1 1 0 0,0-1-1 0 0,1 0 1 0 0,-1 0 0 0 0,0 0-1 0 0,0 0 1 0 0,1 0-1 0 0,-1 0 1 0 0,0 0 0 0 0,1 0-1 0 0,-1 0 1 0 0,1 0-1 0 0,-1 0-3 0 0,0 0 0 0 0,1 0 0 0 0,-1 0 0 0 0,0 0 0 0 0,1 0 0 0 0,-1 1 0 0 0,0-1 0 0 0,1 0 0 0 0,-1 0-1 0 0,0 0 1 0 0,1 0 0 0 0,-1 0 0 0 0,0 1 0 0 0,0-1 0 0 0,1 0 0 0 0,-1 0 0 0 0,0 0 0 0 0,0 1-1 0 0,1-1 1 0 0,-1 0 0 0 0,0 0 0 0 0,0 1 0 0 0,1-1 0 0 0,-1 0 0 0 0,0 0 0 0 0,0 1 0 0 0,0-1-1 0 0,0 0 1 0 0,0 1 0 0 0,0-1 0 0 0,1 0 0 0 0,-1 1 0 0 0,0-1 0 0 0,0 1 0 0 0,12 34 2 0 0,5 17 64 0 0,-14-32-64 0 0,-2-4 0 0 0,4 12 0 0 0,3 9 0 0 0,2 5-96 0 0,-5-27 96 0 0,6 12-12 0 0,3 4-48 0 0,-4-12 60 0 0,1 7-72 0 0,-8-20 46 0 0,0 0 0 0 0,0 0 0 0 0,-1 0 0 0 0,4 11 0 0 0,4 13 129 0 0,-3-10 1 0 0,-2-11-125 0 0,0 0-1 0 0,-1 0 1 0 0,3 10 0 0 0,-5-14 13 0 0,27 96 80 0 0,-20-67-336 0 0,-9-32 263 0 0,1-2 0 0 0,1-5 13 0 0,1 7 31 0 0,9 11-18 0 0,-8-7 34 0 0,-4 2 1182 0 0</inkml:trace>
+</inkml:ink>
+</file>
+
+<file path=ppt/ink/ink7.xml><?xml version="1.0" encoding="utf-8"?>
+<inkml:ink xmlns:inkml="http://www.w3.org/2003/InkML">
+  <inkml:definitions>
+    <inkml:context xml:id="ctx0">
+      <inkml:inkSource xml:id="inkSrc0">
+        <inkml:traceFormat>
+          <inkml:channel name="X" type="integer" min="-2.14748E9" max="2.14748E9" units="cm"/>
+          <inkml:channel name="Y" type="integer" min="-2.14748E9" max="2.14748E9" units="cm"/>
+          <inkml:channel name="F" type="integer" max="32767" units="dev"/>
+          <inkml:channel name="OA" type="integer" max="360" units="deg"/>
+          <inkml:channel name="OE" type="integer" max="90" units="deg"/>
+        </inkml:traceFormat>
+        <inkml:channelProperties>
+          <inkml:channelProperty channel="X" name="resolution" value="1000" units="1/cm"/>
+          <inkml:channelProperty channel="Y" name="resolution" value="1000" units="1/cm"/>
+          <inkml:channelProperty channel="F" name="resolution" value="0" units="1/dev"/>
+          <inkml:channelProperty channel="OA" name="resolution" value="1000" units="1/deg"/>
+          <inkml:channelProperty channel="OE" name="resolution" value="1000" units="1/deg"/>
+        </inkml:channelProperties>
+      </inkml:inkSource>
+      <inkml:timestamp xml:id="ts0" timeString="2026-02-25T05:40:31.916"/>
+    </inkml:context>
+    <inkml:brush xml:id="br0">
+      <inkml:brushProperty name="width" value="0.05" units="cm"/>
+      <inkml:brushProperty name="height" value="0.05" units="cm"/>
+      <inkml:brushProperty name="color" value="#E71224"/>
+    </inkml:brush>
+  </inkml:definitions>
+  <inkml:trace contextRef="#ctx0" brushRef="#br0">12 144 11634 0 0,'-1'0'70'0'0,"1"1"-1"0"0,0-1 0 0 0,0 0 0 0 0,-1 0 0 0 0,1 0 0 0 0,0 0 0 0 0,-1 1 0 0 0,1-1 0 0 0,0 0 0 0 0,-1 0 0 0 0,1 0 0 0 0,0 0 0 0 0,-1 0 0 0 0,1 0 0 0 0,0 0 0 0 0,0 0 0 0 0,-1 0 0 0 0,1 0 0 0 0,0 0 0 0 0,-1 0 0 0 0,1 0 0 0 0,0 0 0 0 0,-1 0 0 0 0,1-1 0 0 0,0 1 0 0 0,-1 0 0 0 0,1 0 0 0 0,0 0 0 0 0,0 0 0 0 0,-1-1 0 0 0,1 1 0 0 0,0 0 0 0 0,0 0 0 0 0,-1 0 0 0 0,1-1 0 0 0,0 1 0 0 0,0-1 0 0 0,0-11 1485 0 0,1 11-1488 0 0,-1 1 1 0 0,0-1-1 0 0,0 0 1 0 0,1 0-1 0 0,-1 0 0 0 0,0 1 1 0 0,0-1-1 0 0,0 0 0 0 0,0 0 1 0 0,0 0-1 0 0,0 1 1 0 0,-1-1-1 0 0,1 0 0 0 0,0 0 1 0 0,0 0-1 0 0,-1-1 1 0 0,4 12 998 0 0,-3-7-824 0 0,1 0 0 0 0,-1 0 0 0 0,1 0 0 0 0,0 0 0 0 0,2 5 0 0 0,28 23 1399 0 0,39 52-765 0 0,-67-80-844 0 0,0 0-1 0 0,0-1 1 0 0,0 1-1 0 0,1-1 1 0 0,-1 0-1 0 0,0 1 1 0 0,1-2-1 0 0,0 1 1 0 0,6 2-1 0 0,-9-4-28 0 0,-1 0-1 0 0,1 0 0 0 0,0-1 0 0 0,-1 1 1 0 0,1 0-1 0 0,-1 0 0 0 0,1-1 0 0 0,0 1 1 0 0,-1 0-1 0 0,1-1 0 0 0,-1 1 0 0 0,1 0 1 0 0,-1-1-1 0 0,1 1 0 0 0,-1-1 0 0 0,1 1 1 0 0,-1-1-1 0 0,1 1 0 0 0,-1-1 1 0 0,0 1-1 0 0,1-1 0 0 0,-1 0 0 0 0,0 1 1 0 0,0-1-1 0 0,1 1 0 0 0,-1-1 0 0 0,0 0 1 0 0,4-19-55 0 0,-4 18 60 0 0,1-6-7 0 0,0 10 0 0 0,-1-1 0 0 0,0-1 0 0 0,0 0 0 0 0,0 1 0 0 0,0-1 0 0 0,0 0 0 0 0,0 1 0 0 0,1-1 0 0 0,-1 0 0 0 0,0 1 0 0 0,0-1 0 0 0,0 0 0 0 0,0 1 0 0 0,1-1 0 0 0,-1 0 0 0 0,0 1 0 0 0,0-1 0 0 0,0 0 0 0 0,1 1 0 0 0,-1-1 0 0 0,0 0 0 0 0,1 0 0 0 0,-1 1 0 0 0,1-2 19 0 0,0-1-1 0 0,-1 1 1 0 0,1 0 0 0 0,-1-1 0 0 0,1 1 0 0 0,-1-1 0 0 0,1 1-1 0 0,-1-1 1 0 0,0 1 0 0 0,0-1 0 0 0,0 1 0 0 0,0-1-1 0 0,0-1 1 0 0,0 3-18 0 0,-2-63 515 0 0,0 38-565 0 0,1 0 1 0 0,2 0-1 0 0,3-27 0 0 0,-1 41-388 0 0,1-9 210 0 0,-5 8-8664 0 0</inkml:trace>
+</inkml:ink>
+</file>
+
 <file path=ppt/notesMasters/notesMaster1.xml><?xml version="1.0" encoding="utf-8"?>
 <p:notesMaster xmlns:a="http://schemas.openxmlformats.org/drawingml/2006/main" xmlns:r="http://schemas.openxmlformats.org/officeDocument/2006/relationships" xmlns:p="http://schemas.openxmlformats.org/presentationml/2006/main">
   <p:cSld>
@@ -309,7 +535,7 @@
               <a:pPr>
                 <a:defRPr/>
               </a:pPr>
-              <a:t>2/23/2026</a:t>
+              <a:t>2/25/2026</a:t>
             </a:fld>
             <a:endParaRPr lang="en-US"/>
           </a:p>
@@ -999,6 +1225,93 @@
     <p:extLst>
       <p:ext uri="{BB962C8B-B14F-4D97-AF65-F5344CB8AC3E}">
         <p14:creationId xmlns:p14="http://schemas.microsoft.com/office/powerpoint/2010/main" val="1064622332"/>
+      </p:ext>
+    </p:extLst>
+  </p:cSld>
+  <p:clrMapOvr>
+    <a:masterClrMapping/>
+  </p:clrMapOvr>
+</p:notes>
+</file>
+
+<file path=ppt/notesSlides/notesSlide3.xml><?xml version="1.0" encoding="utf-8"?>
+<p:notes xmlns:a="http://schemas.openxmlformats.org/drawingml/2006/main" xmlns:r="http://schemas.openxmlformats.org/officeDocument/2006/relationships" xmlns:p="http://schemas.openxmlformats.org/presentationml/2006/main">
+  <p:cSld>
+    <p:spTree>
+      <p:nvGrpSpPr>
+        <p:cNvPr id="1" name=""/>
+        <p:cNvGrpSpPr/>
+        <p:nvPr/>
+      </p:nvGrpSpPr>
+      <p:grpSpPr>
+        <a:xfrm>
+          <a:off x="0" y="0"/>
+          <a:ext cx="0" cy="0"/>
+          <a:chOff x="0" y="0"/>
+          <a:chExt cx="0" cy="0"/>
+        </a:xfrm>
+      </p:grpSpPr>
+      <p:sp>
+        <p:nvSpPr>
+          <p:cNvPr id="2" name="Slide Image Placeholder 1"/>
+          <p:cNvSpPr>
+            <a:spLocks noGrp="1" noRot="1" noChangeAspect="1"/>
+          </p:cNvSpPr>
+          <p:nvPr>
+            <p:ph type="sldImg"/>
+          </p:nvPr>
+        </p:nvSpPr>
+        <p:spPr/>
+      </p:sp>
+      <p:sp>
+        <p:nvSpPr>
+          <p:cNvPr id="3" name="Notes Placeholder 2"/>
+          <p:cNvSpPr>
+            <a:spLocks noGrp="1"/>
+          </p:cNvSpPr>
+          <p:nvPr>
+            <p:ph type="body" idx="1"/>
+          </p:nvPr>
+        </p:nvSpPr>
+        <p:spPr/>
+        <p:txBody>
+          <a:bodyPr/>
+          <a:lstStyle/>
+          <a:p>
+            <a:r>
+              <a:rPr lang="en-US"/>
+              <a:t>Backward branches are usually taken (loops)</a:t>
+            </a:r>
+          </a:p>
+        </p:txBody>
+      </p:sp>
+      <p:sp>
+        <p:nvSpPr>
+          <p:cNvPr id="4" name="Slide Number Placeholder 3"/>
+          <p:cNvSpPr>
+            <a:spLocks noGrp="1"/>
+          </p:cNvSpPr>
+          <p:nvPr>
+            <p:ph type="sldNum" sz="quarter" idx="5"/>
+          </p:nvPr>
+        </p:nvSpPr>
+        <p:spPr/>
+        <p:txBody>
+          <a:bodyPr/>
+          <a:lstStyle/>
+          <a:p>
+            <a:fld id="{5F79DCCC-EBE2-44AD-8EA0-6F319820E962}" type="slidenum">
+              <a:rPr lang="en-US" smtClean="0"/>
+              <a:t>21</a:t>
+            </a:fld>
+            <a:endParaRPr lang="en-US"/>
+          </a:p>
+        </p:txBody>
+      </p:sp>
+    </p:spTree>
+    <p:extLst>
+      <p:ext uri="{BB962C8B-B14F-4D97-AF65-F5344CB8AC3E}">
+        <p14:creationId xmlns:p14="http://schemas.microsoft.com/office/powerpoint/2010/main" val="4131345532"/>
       </p:ext>
     </p:extLst>
   </p:cSld>
@@ -6022,559 +6335,6 @@
           <p:cNvPr id="2" name="Title 1">
             <a:extLst>
               <a:ext uri="{FF2B5EF4-FFF2-40B4-BE49-F238E27FC236}">
-                <a16:creationId xmlns:a16="http://schemas.microsoft.com/office/drawing/2014/main" id="{4CAFC658-A3E8-2536-00F1-50771A3CE530}"/>
-              </a:ext>
-            </a:extLst>
-          </p:cNvPr>
-          <p:cNvSpPr>
-            <a:spLocks noGrp="1"/>
-          </p:cNvSpPr>
-          <p:nvPr>
-            <p:ph type="title"/>
-          </p:nvPr>
-        </p:nvSpPr>
-        <p:spPr/>
-        <p:txBody>
-          <a:bodyPr/>
-          <a:lstStyle/>
-          <a:p>
-            <a:r>
-              <a:rPr lang="en-US" dirty="0"/>
-              <a:t>Pipelined multi-cycle processors</a:t>
-            </a:r>
-          </a:p>
-        </p:txBody>
-      </p:sp>
-      <p:sp>
-        <p:nvSpPr>
-          <p:cNvPr id="4" name="Date Placeholder 3">
-            <a:extLst>
-              <a:ext uri="{FF2B5EF4-FFF2-40B4-BE49-F238E27FC236}">
-                <a16:creationId xmlns:a16="http://schemas.microsoft.com/office/drawing/2014/main" id="{3144782F-8224-745F-F8CB-36C3361C33D3}"/>
-              </a:ext>
-            </a:extLst>
-          </p:cNvPr>
-          <p:cNvSpPr>
-            <a:spLocks noGrp="1"/>
-          </p:cNvSpPr>
-          <p:nvPr>
-            <p:ph type="dt" sz="half" idx="10"/>
-          </p:nvPr>
-        </p:nvSpPr>
-        <p:spPr/>
-        <p:txBody>
-          <a:bodyPr/>
-          <a:lstStyle/>
-          <a:p>
-            <a:fld id="{B4B13859-67C5-4393-B6C2-556CF3F770C0}" type="datetime3">
-              <a:rPr lang="en-US" smtClean="0"/>
-              <a:t>23 February 2026</a:t>
-            </a:fld>
-            <a:endParaRPr lang="en-US" dirty="0"/>
-          </a:p>
-        </p:txBody>
-      </p:sp>
-      <p:sp>
-        <p:nvSpPr>
-          <p:cNvPr id="6" name="Slide Number Placeholder 5">
-            <a:extLst>
-              <a:ext uri="{FF2B5EF4-FFF2-40B4-BE49-F238E27FC236}">
-                <a16:creationId xmlns:a16="http://schemas.microsoft.com/office/drawing/2014/main" id="{A3B7FB0D-8C4F-F5BE-4C01-E0D2071220FD}"/>
-              </a:ext>
-            </a:extLst>
-          </p:cNvPr>
-          <p:cNvSpPr>
-            <a:spLocks noGrp="1"/>
-          </p:cNvSpPr>
-          <p:nvPr>
-            <p:ph type="sldNum" sz="quarter" idx="12"/>
-          </p:nvPr>
-        </p:nvSpPr>
-        <p:spPr/>
-        <p:txBody>
-          <a:bodyPr/>
-          <a:lstStyle/>
-          <a:p>
-            <a:fld id="{98AC3541-01C1-4CA5-B68F-FEE868C7D1AF}" type="slidenum">
-              <a:rPr lang="en-US" smtClean="0"/>
-              <a:t>10</a:t>
-            </a:fld>
-            <a:endParaRPr lang="en-US"/>
-          </a:p>
-        </p:txBody>
-      </p:sp>
-      <p:pic>
-        <p:nvPicPr>
-          <p:cNvPr id="8" name="Picture 7">
-            <a:extLst>
-              <a:ext uri="{FF2B5EF4-FFF2-40B4-BE49-F238E27FC236}">
-                <a16:creationId xmlns:a16="http://schemas.microsoft.com/office/drawing/2014/main" id="{1E0C559C-E30F-8A37-C7A5-1445949A4819}"/>
-              </a:ext>
-            </a:extLst>
-          </p:cNvPr>
-          <p:cNvPicPr>
-            <a:picLocks noChangeAspect="1"/>
-          </p:cNvPicPr>
-          <p:nvPr/>
-        </p:nvPicPr>
-        <p:blipFill rotWithShape="1">
-          <a:blip r:embed="rId2"/>
-          <a:srcRect t="10612" b="1523"/>
-          <a:stretch/>
-        </p:blipFill>
-        <p:spPr>
-          <a:xfrm>
-            <a:off x="241149" y="1765935"/>
-            <a:ext cx="4444033" cy="2486025"/>
-          </a:xfrm>
-          <a:prstGeom prst="rect">
-            <a:avLst/>
-          </a:prstGeom>
-        </p:spPr>
-      </p:pic>
-      <p:pic>
-        <p:nvPicPr>
-          <p:cNvPr id="10" name="Picture 9">
-            <a:extLst>
-              <a:ext uri="{FF2B5EF4-FFF2-40B4-BE49-F238E27FC236}">
-                <a16:creationId xmlns:a16="http://schemas.microsoft.com/office/drawing/2014/main" id="{7748ABB3-2D89-8407-1CDD-F822EA50BFF0}"/>
-              </a:ext>
-            </a:extLst>
-          </p:cNvPr>
-          <p:cNvPicPr>
-            <a:picLocks noChangeAspect="1"/>
-          </p:cNvPicPr>
-          <p:nvPr/>
-        </p:nvPicPr>
-        <p:blipFill>
-          <a:blip r:embed="rId3"/>
-          <a:stretch>
-            <a:fillRect/>
-          </a:stretch>
-        </p:blipFill>
-        <p:spPr>
-          <a:xfrm>
-            <a:off x="4877180" y="1831498"/>
-            <a:ext cx="4229690" cy="2286319"/>
-          </a:xfrm>
-          <a:prstGeom prst="rect">
-            <a:avLst/>
-          </a:prstGeom>
-        </p:spPr>
-      </p:pic>
-      <p:sp>
-        <p:nvSpPr>
-          <p:cNvPr id="11" name="Content Placeholder 2">
-            <a:extLst>
-              <a:ext uri="{FF2B5EF4-FFF2-40B4-BE49-F238E27FC236}">
-                <a16:creationId xmlns:a16="http://schemas.microsoft.com/office/drawing/2014/main" id="{4B7DC311-57D1-0B8F-499D-CA039307829C}"/>
-              </a:ext>
-            </a:extLst>
-          </p:cNvPr>
-          <p:cNvSpPr>
-            <a:spLocks noGrp="1"/>
-          </p:cNvSpPr>
-          <p:nvPr>
-            <p:ph idx="1"/>
-          </p:nvPr>
-        </p:nvSpPr>
-        <p:spPr>
-          <a:xfrm>
-            <a:off x="342900" y="4349632"/>
-            <a:ext cx="8724225" cy="1898768"/>
-          </a:xfrm>
-        </p:spPr>
-        <p:txBody>
-          <a:bodyPr/>
-          <a:lstStyle/>
-          <a:p>
-            <a:r>
-              <a:rPr lang="en-US" sz="2400" dirty="0"/>
-              <a:t>Does not change the latency of individual instructions</a:t>
-            </a:r>
-          </a:p>
-          <a:p>
-            <a:r>
-              <a:rPr lang="en-US" sz="2400" dirty="0"/>
-              <a:t>Increases the throughput of instructions</a:t>
-            </a:r>
-          </a:p>
-          <a:p>
-            <a:r>
-              <a:rPr lang="en-US" sz="2400" dirty="0"/>
-              <a:t>Speedup </a:t>
-            </a:r>
-            <a:r>
-              <a:rPr lang="el-GR" sz="2400" dirty="0"/>
-              <a:t>∝</a:t>
-            </a:r>
-            <a:r>
-              <a:rPr lang="en-US" sz="2400" dirty="0"/>
-              <a:t> #stages</a:t>
-            </a:r>
-          </a:p>
-          <a:p>
-            <a:r>
-              <a:rPr lang="en-US" sz="2400" dirty="0"/>
-              <a:t>Rate limited by slowest stage</a:t>
-            </a:r>
-          </a:p>
-        </p:txBody>
-      </p:sp>
-    </p:spTree>
-    <p:extLst>
-      <p:ext uri="{BB962C8B-B14F-4D97-AF65-F5344CB8AC3E}">
-        <p14:creationId xmlns:p14="http://schemas.microsoft.com/office/powerpoint/2010/main" val="2477014179"/>
-      </p:ext>
-    </p:extLst>
-  </p:cSld>
-  <p:clrMapOvr>
-    <a:masterClrMapping/>
-  </p:clrMapOvr>
-  <p:timing>
-    <p:tnLst>
-      <p:par>
-        <p:cTn id="1" dur="indefinite" restart="never" nodeType="tmRoot">
-          <p:childTnLst>
-            <p:seq concurrent="1" nextAc="seek">
-              <p:cTn id="2" dur="indefinite" nodeType="mainSeq">
-                <p:childTnLst>
-                  <p:par>
-                    <p:cTn id="3" fill="hold">
-                      <p:stCondLst>
-                        <p:cond delay="indefinite"/>
-                      </p:stCondLst>
-                      <p:childTnLst>
-                        <p:par>
-                          <p:cTn id="4" fill="hold">
-                            <p:stCondLst>
-                              <p:cond delay="0"/>
-                            </p:stCondLst>
-                            <p:childTnLst>
-                              <p:par>
-                                <p:cTn id="5" presetID="1" presetClass="entr" presetSubtype="0" fill="hold" nodeType="clickEffect">
-                                  <p:stCondLst>
-                                    <p:cond delay="0"/>
-                                  </p:stCondLst>
-                                  <p:childTnLst>
-                                    <p:set>
-                                      <p:cBhvr>
-                                        <p:cTn id="6" dur="1" fill="hold">
-                                          <p:stCondLst>
-                                            <p:cond delay="0"/>
-                                          </p:stCondLst>
-                                        </p:cTn>
-                                        <p:tgtEl>
-                                          <p:spTgt spid="8"/>
-                                        </p:tgtEl>
-                                        <p:attrNameLst>
-                                          <p:attrName>style.visibility</p:attrName>
-                                        </p:attrNameLst>
-                                      </p:cBhvr>
-                                      <p:to>
-                                        <p:strVal val="visible"/>
-                                      </p:to>
-                                    </p:set>
-                                  </p:childTnLst>
-                                </p:cTn>
-                              </p:par>
-                            </p:childTnLst>
-                          </p:cTn>
-                        </p:par>
-                      </p:childTnLst>
-                    </p:cTn>
-                  </p:par>
-                  <p:par>
-                    <p:cTn id="7" fill="hold">
-                      <p:stCondLst>
-                        <p:cond delay="indefinite"/>
-                      </p:stCondLst>
-                      <p:childTnLst>
-                        <p:par>
-                          <p:cTn id="8" fill="hold">
-                            <p:stCondLst>
-                              <p:cond delay="0"/>
-                            </p:stCondLst>
-                            <p:childTnLst>
-                              <p:par>
-                                <p:cTn id="9" presetID="1" presetClass="entr" presetSubtype="0" fill="hold" nodeType="clickEffect">
-                                  <p:stCondLst>
-                                    <p:cond delay="0"/>
-                                  </p:stCondLst>
-                                  <p:childTnLst>
-                                    <p:set>
-                                      <p:cBhvr>
-                                        <p:cTn id="10" dur="1" fill="hold">
-                                          <p:stCondLst>
-                                            <p:cond delay="0"/>
-                                          </p:stCondLst>
-                                        </p:cTn>
-                                        <p:tgtEl>
-                                          <p:spTgt spid="10"/>
-                                        </p:tgtEl>
-                                        <p:attrNameLst>
-                                          <p:attrName>style.visibility</p:attrName>
-                                        </p:attrNameLst>
-                                      </p:cBhvr>
-                                      <p:to>
-                                        <p:strVal val="visible"/>
-                                      </p:to>
-                                    </p:set>
-                                  </p:childTnLst>
-                                </p:cTn>
-                              </p:par>
-                            </p:childTnLst>
-                          </p:cTn>
-                        </p:par>
-                      </p:childTnLst>
-                    </p:cTn>
-                  </p:par>
-                  <p:par>
-                    <p:cTn id="11" fill="hold">
-                      <p:stCondLst>
-                        <p:cond delay="indefinite"/>
-                      </p:stCondLst>
-                      <p:childTnLst>
-                        <p:par>
-                          <p:cTn id="12" fill="hold">
-                            <p:stCondLst>
-                              <p:cond delay="0"/>
-                            </p:stCondLst>
-                            <p:childTnLst>
-                              <p:par>
-                                <p:cTn id="13" presetID="1" presetClass="entr" presetSubtype="0" fill="hold" grpId="0" nodeType="clickEffect">
-                                  <p:stCondLst>
-                                    <p:cond delay="0"/>
-                                  </p:stCondLst>
-                                  <p:childTnLst>
-                                    <p:set>
-                                      <p:cBhvr>
-                                        <p:cTn id="14" dur="1" fill="hold">
-                                          <p:stCondLst>
-                                            <p:cond delay="0"/>
-                                          </p:stCondLst>
-                                        </p:cTn>
-                                        <p:tgtEl>
-                                          <p:spTgt spid="11">
-                                            <p:txEl>
-                                              <p:pRg st="0" end="0"/>
-                                            </p:txEl>
-                                          </p:spTgt>
-                                        </p:tgtEl>
-                                        <p:attrNameLst>
-                                          <p:attrName>style.visibility</p:attrName>
-                                        </p:attrNameLst>
-                                      </p:cBhvr>
-                                      <p:to>
-                                        <p:strVal val="visible"/>
-                                      </p:to>
-                                    </p:set>
-                                  </p:childTnLst>
-                                </p:cTn>
-                              </p:par>
-                            </p:childTnLst>
-                          </p:cTn>
-                        </p:par>
-                      </p:childTnLst>
-                    </p:cTn>
-                  </p:par>
-                  <p:par>
-                    <p:cTn id="15" fill="hold">
-                      <p:stCondLst>
-                        <p:cond delay="indefinite"/>
-                      </p:stCondLst>
-                      <p:childTnLst>
-                        <p:par>
-                          <p:cTn id="16" fill="hold">
-                            <p:stCondLst>
-                              <p:cond delay="0"/>
-                            </p:stCondLst>
-                            <p:childTnLst>
-                              <p:par>
-                                <p:cTn id="17" presetID="1" presetClass="entr" presetSubtype="0" fill="hold" grpId="0" nodeType="clickEffect">
-                                  <p:stCondLst>
-                                    <p:cond delay="0"/>
-                                  </p:stCondLst>
-                                  <p:childTnLst>
-                                    <p:set>
-                                      <p:cBhvr>
-                                        <p:cTn id="18" dur="1" fill="hold">
-                                          <p:stCondLst>
-                                            <p:cond delay="0"/>
-                                          </p:stCondLst>
-                                        </p:cTn>
-                                        <p:tgtEl>
-                                          <p:spTgt spid="11">
-                                            <p:txEl>
-                                              <p:pRg st="1" end="1"/>
-                                            </p:txEl>
-                                          </p:spTgt>
-                                        </p:tgtEl>
-                                        <p:attrNameLst>
-                                          <p:attrName>style.visibility</p:attrName>
-                                        </p:attrNameLst>
-                                      </p:cBhvr>
-                                      <p:to>
-                                        <p:strVal val="visible"/>
-                                      </p:to>
-                                    </p:set>
-                                  </p:childTnLst>
-                                </p:cTn>
-                              </p:par>
-                            </p:childTnLst>
-                          </p:cTn>
-                        </p:par>
-                      </p:childTnLst>
-                    </p:cTn>
-                  </p:par>
-                  <p:par>
-                    <p:cTn id="19" fill="hold">
-                      <p:stCondLst>
-                        <p:cond delay="indefinite"/>
-                      </p:stCondLst>
-                      <p:childTnLst>
-                        <p:par>
-                          <p:cTn id="20" fill="hold">
-                            <p:stCondLst>
-                              <p:cond delay="0"/>
-                            </p:stCondLst>
-                            <p:childTnLst>
-                              <p:par>
-                                <p:cTn id="21" presetID="1" presetClass="entr" presetSubtype="0" fill="hold" grpId="0" nodeType="clickEffect">
-                                  <p:stCondLst>
-                                    <p:cond delay="0"/>
-                                  </p:stCondLst>
-                                  <p:childTnLst>
-                                    <p:set>
-                                      <p:cBhvr>
-                                        <p:cTn id="22" dur="1" fill="hold">
-                                          <p:stCondLst>
-                                            <p:cond delay="0"/>
-                                          </p:stCondLst>
-                                        </p:cTn>
-                                        <p:tgtEl>
-                                          <p:spTgt spid="11">
-                                            <p:txEl>
-                                              <p:pRg st="2" end="2"/>
-                                            </p:txEl>
-                                          </p:spTgt>
-                                        </p:tgtEl>
-                                        <p:attrNameLst>
-                                          <p:attrName>style.visibility</p:attrName>
-                                        </p:attrNameLst>
-                                      </p:cBhvr>
-                                      <p:to>
-                                        <p:strVal val="visible"/>
-                                      </p:to>
-                                    </p:set>
-                                  </p:childTnLst>
-                                </p:cTn>
-                              </p:par>
-                            </p:childTnLst>
-                          </p:cTn>
-                        </p:par>
-                      </p:childTnLst>
-                    </p:cTn>
-                  </p:par>
-                  <p:par>
-                    <p:cTn id="23" fill="hold">
-                      <p:stCondLst>
-                        <p:cond delay="indefinite"/>
-                      </p:stCondLst>
-                      <p:childTnLst>
-                        <p:par>
-                          <p:cTn id="24" fill="hold">
-                            <p:stCondLst>
-                              <p:cond delay="0"/>
-                            </p:stCondLst>
-                            <p:childTnLst>
-                              <p:par>
-                                <p:cTn id="25" presetID="1" presetClass="entr" presetSubtype="0" fill="hold" grpId="0" nodeType="clickEffect">
-                                  <p:stCondLst>
-                                    <p:cond delay="0"/>
-                                  </p:stCondLst>
-                                  <p:childTnLst>
-                                    <p:set>
-                                      <p:cBhvr>
-                                        <p:cTn id="26" dur="1" fill="hold">
-                                          <p:stCondLst>
-                                            <p:cond delay="0"/>
-                                          </p:stCondLst>
-                                        </p:cTn>
-                                        <p:tgtEl>
-                                          <p:spTgt spid="11">
-                                            <p:txEl>
-                                              <p:pRg st="3" end="3"/>
-                                            </p:txEl>
-                                          </p:spTgt>
-                                        </p:tgtEl>
-                                        <p:attrNameLst>
-                                          <p:attrName>style.visibility</p:attrName>
-                                        </p:attrNameLst>
-                                      </p:cBhvr>
-                                      <p:to>
-                                        <p:strVal val="visible"/>
-                                      </p:to>
-                                    </p:set>
-                                  </p:childTnLst>
-                                </p:cTn>
-                              </p:par>
-                            </p:childTnLst>
-                          </p:cTn>
-                        </p:par>
-                      </p:childTnLst>
-                    </p:cTn>
-                  </p:par>
-                </p:childTnLst>
-              </p:cTn>
-              <p:prevCondLst>
-                <p:cond evt="onPrev" delay="0">
-                  <p:tgtEl>
-                    <p:sldTgt/>
-                  </p:tgtEl>
-                </p:cond>
-              </p:prevCondLst>
-              <p:nextCondLst>
-                <p:cond evt="onNext" delay="0">
-                  <p:tgtEl>
-                    <p:sldTgt/>
-                  </p:tgtEl>
-                </p:cond>
-              </p:nextCondLst>
-            </p:seq>
-          </p:childTnLst>
-        </p:cTn>
-      </p:par>
-    </p:tnLst>
-    <p:bldLst>
-      <p:bldP spid="11" grpId="0" build="p"/>
-    </p:bldLst>
-  </p:timing>
-</p:sld>
-</file>
-
-<file path=ppt/slides/slide11.xml><?xml version="1.0" encoding="utf-8"?>
-<p:sld xmlns:a="http://schemas.openxmlformats.org/drawingml/2006/main" xmlns:r="http://schemas.openxmlformats.org/officeDocument/2006/relationships" xmlns:p="http://schemas.openxmlformats.org/presentationml/2006/main">
-  <p:cSld>
-    <p:spTree>
-      <p:nvGrpSpPr>
-        <p:cNvPr id="1" name=""/>
-        <p:cNvGrpSpPr/>
-        <p:nvPr/>
-      </p:nvGrpSpPr>
-      <p:grpSpPr>
-        <a:xfrm>
-          <a:off x="0" y="0"/>
-          <a:ext cx="0" cy="0"/>
-          <a:chOff x="0" y="0"/>
-          <a:chExt cx="0" cy="0"/>
-        </a:xfrm>
-      </p:grpSpPr>
-      <p:sp>
-        <p:nvSpPr>
-          <p:cNvPr id="2" name="Title 1">
-            <a:extLst>
-              <a:ext uri="{FF2B5EF4-FFF2-40B4-BE49-F238E27FC236}">
                 <a16:creationId xmlns:a16="http://schemas.microsoft.com/office/drawing/2014/main" id="{DB4CD59F-4B86-DA75-52B0-5E3FD7FBA2C0}"/>
               </a:ext>
             </a:extLst>
@@ -6621,7 +6381,7 @@
           <a:p>
             <a:fld id="{B4B13859-67C5-4393-B6C2-556CF3F770C0}" type="datetime3">
               <a:rPr lang="en-US" smtClean="0"/>
-              <a:t>23 February 2026</a:t>
+              <a:t>25 February 2026</a:t>
             </a:fld>
             <a:endParaRPr lang="en-US" dirty="0"/>
           </a:p>
@@ -6650,7 +6410,7 @@
           <a:p>
             <a:fld id="{98AC3541-01C1-4CA5-B68F-FEE868C7D1AF}" type="slidenum">
               <a:rPr lang="en-US" smtClean="0"/>
-              <a:t>11</a:t>
+              <a:t>10</a:t>
             </a:fld>
             <a:endParaRPr lang="en-US"/>
           </a:p>
@@ -6704,7 +6464,7 @@
 </p:sld>
 </file>
 
-<file path=ppt/slides/slide12.xml><?xml version="1.0" encoding="utf-8"?>
+<file path=ppt/slides/slide11.xml><?xml version="1.0" encoding="utf-8"?>
 <p:sld xmlns:a="http://schemas.openxmlformats.org/drawingml/2006/main" xmlns:r="http://schemas.openxmlformats.org/officeDocument/2006/relationships" xmlns:p="http://schemas.openxmlformats.org/presentationml/2006/main">
   <p:cSld>
     <p:spTree>
@@ -6843,7 +6603,7 @@
               <a:pPr>
                 <a:defRPr/>
               </a:pPr>
-              <a:t>12</a:t>
+              <a:t>11</a:t>
             </a:fld>
             <a:endParaRPr lang="en-US" altLang="en-US"/>
           </a:p>
@@ -6877,7 +6637,7 @@
           <a:p>
             <a:fld id="{B4B13859-67C5-4393-B6C2-556CF3F770C0}" type="datetime3">
               <a:rPr lang="en-US" smtClean="0"/>
-              <a:t>23 February 2026</a:t>
+              <a:t>25 February 2026</a:t>
             </a:fld>
             <a:endParaRPr lang="en-US" dirty="0"/>
           </a:p>
@@ -7062,7 +6822,7 @@
 </p:sld>
 </file>
 
-<file path=ppt/slides/slide13.xml><?xml version="1.0" encoding="utf-8"?>
+<file path=ppt/slides/slide12.xml><?xml version="1.0" encoding="utf-8"?>
 <p:sld xmlns:a="http://schemas.openxmlformats.org/drawingml/2006/main" xmlns:r="http://schemas.openxmlformats.org/officeDocument/2006/relationships" xmlns:p="http://schemas.openxmlformats.org/presentationml/2006/main">
   <p:cSld>
     <p:spTree>
@@ -7214,7 +6974,7 @@
               <a:pPr>
                 <a:defRPr/>
               </a:pPr>
-              <a:t>13</a:t>
+              <a:t>12</a:t>
             </a:fld>
             <a:endParaRPr lang="en-US" altLang="en-US"/>
           </a:p>
@@ -7287,7 +7047,7 @@
           <a:p>
             <a:fld id="{B4B13859-67C5-4393-B6C2-556CF3F770C0}" type="datetime3">
               <a:rPr lang="en-US" smtClean="0"/>
-              <a:t>23 February 2026</a:t>
+              <a:t>25 February 2026</a:t>
             </a:fld>
             <a:endParaRPr lang="en-US" dirty="0"/>
           </a:p>
@@ -7384,7 +7144,7 @@
 </p:sld>
 </file>
 
-<file path=ppt/slides/slide14.xml><?xml version="1.0" encoding="utf-8"?>
+<file path=ppt/slides/slide13.xml><?xml version="1.0" encoding="utf-8"?>
 <p:sld xmlns:a="http://schemas.openxmlformats.org/drawingml/2006/main" xmlns:r="http://schemas.openxmlformats.org/officeDocument/2006/relationships" xmlns:p="http://schemas.openxmlformats.org/presentationml/2006/main">
   <p:cSld>
     <p:spTree>
@@ -7559,7 +7319,7 @@
           <a:p>
             <a:fld id="{B4B13859-67C5-4393-B6C2-556CF3F770C0}" type="datetime3">
               <a:rPr lang="en-US" smtClean="0"/>
-              <a:t>23 February 2026</a:t>
+              <a:t>25 February 2026</a:t>
             </a:fld>
             <a:endParaRPr lang="en-US" dirty="0"/>
           </a:p>
@@ -7588,7 +7348,7 @@
           <a:p>
             <a:fld id="{98AC3541-01C1-4CA5-B68F-FEE868C7D1AF}" type="slidenum">
               <a:rPr lang="en-US" smtClean="0"/>
-              <a:t>14</a:t>
+              <a:t>13</a:t>
             </a:fld>
             <a:endParaRPr lang="en-US"/>
           </a:p>
@@ -7607,7 +7367,7 @@
 </p:sld>
 </file>
 
-<file path=ppt/slides/slide15.xml><?xml version="1.0" encoding="utf-8"?>
+<file path=ppt/slides/slide14.xml><?xml version="1.0" encoding="utf-8"?>
 <p:sld xmlns:a="http://schemas.openxmlformats.org/drawingml/2006/main" xmlns:r="http://schemas.openxmlformats.org/officeDocument/2006/relationships" xmlns:p="http://schemas.openxmlformats.org/presentationml/2006/main">
   <p:cSld>
     <p:spTree>
@@ -7728,7 +7488,7 @@
           <a:p>
             <a:fld id="{B4B13859-67C5-4393-B6C2-556CF3F770C0}" type="datetime3">
               <a:rPr lang="en-US" smtClean="0"/>
-              <a:t>23 February 2026</a:t>
+              <a:t>25 February 2026</a:t>
             </a:fld>
             <a:endParaRPr lang="en-US"/>
           </a:p>
@@ -7757,7 +7517,7 @@
           <a:p>
             <a:fld id="{98AC3541-01C1-4CA5-B68F-FEE868C7D1AF}" type="slidenum">
               <a:rPr lang="en-US" smtClean="0"/>
-              <a:t>15</a:t>
+              <a:t>14</a:t>
             </a:fld>
             <a:endParaRPr lang="en-US"/>
           </a:p>
@@ -8449,7 +8209,7 @@
 </p:sld>
 </file>
 
-<file path=ppt/slides/slide16.xml><?xml version="1.0" encoding="utf-8"?>
+<file path=ppt/slides/slide15.xml><?xml version="1.0" encoding="utf-8"?>
 <p:sld xmlns:a="http://schemas.openxmlformats.org/drawingml/2006/main" xmlns:r="http://schemas.openxmlformats.org/officeDocument/2006/relationships" xmlns:p="http://schemas.openxmlformats.org/presentationml/2006/main">
   <p:cSld>
     <p:spTree>
@@ -8627,7 +8387,7 @@
           <a:p>
             <a:fld id="{B4B13859-67C5-4393-B6C2-556CF3F770C0}" type="datetime3">
               <a:rPr lang="en-US" smtClean="0"/>
-              <a:t>23 February 2026</a:t>
+              <a:t>25 February 2026</a:t>
             </a:fld>
             <a:endParaRPr lang="en-US"/>
           </a:p>
@@ -8656,7 +8416,7 @@
           <a:p>
             <a:fld id="{98AC3541-01C1-4CA5-B68F-FEE868C7D1AF}" type="slidenum">
               <a:rPr lang="en-US" smtClean="0"/>
-              <a:t>16</a:t>
+              <a:t>15</a:t>
             </a:fld>
             <a:endParaRPr lang="en-US"/>
           </a:p>
@@ -9443,7 +9203,7 @@
 </p:sld>
 </file>
 
-<file path=ppt/slides/slide17.xml><?xml version="1.0" encoding="utf-8"?>
+<file path=ppt/slides/slide16.xml><?xml version="1.0" encoding="utf-8"?>
 <p:sld xmlns:a="http://schemas.openxmlformats.org/drawingml/2006/main" xmlns:r="http://schemas.openxmlformats.org/officeDocument/2006/relationships" xmlns:p="http://schemas.openxmlformats.org/presentationml/2006/main">
   <p:cSld>
     <p:spTree>
@@ -9540,7 +9300,7 @@
           <a:p>
             <a:fld id="{B4B13859-67C5-4393-B6C2-556CF3F770C0}" type="datetime3">
               <a:rPr lang="en-US" smtClean="0"/>
-              <a:t>23 February 2026</a:t>
+              <a:t>25 February 2026</a:t>
             </a:fld>
             <a:endParaRPr lang="en-US"/>
           </a:p>
@@ -9569,7 +9329,7 @@
           <a:p>
             <a:fld id="{98AC3541-01C1-4CA5-B68F-FEE868C7D1AF}" type="slidenum">
               <a:rPr lang="en-US" smtClean="0"/>
-              <a:t>17</a:t>
+              <a:t>16</a:t>
             </a:fld>
             <a:endParaRPr lang="en-US"/>
           </a:p>
@@ -10331,7 +10091,7 @@
 </p:sld>
 </file>
 
-<file path=ppt/slides/slide18.xml><?xml version="1.0" encoding="utf-8"?>
+<file path=ppt/slides/slide17.xml><?xml version="1.0" encoding="utf-8"?>
 <p:sld xmlns:a="http://schemas.openxmlformats.org/drawingml/2006/main" xmlns:r="http://schemas.openxmlformats.org/officeDocument/2006/relationships" xmlns:p="http://schemas.openxmlformats.org/presentationml/2006/main">
   <p:cSld>
     <p:spTree>
@@ -10455,7 +10215,7 @@
           <a:p>
             <a:fld id="{B4B13859-67C5-4393-B6C2-556CF3F770C0}" type="datetime3">
               <a:rPr lang="en-US" smtClean="0"/>
-              <a:t>23 February 2026</a:t>
+              <a:t>25 February 2026</a:t>
             </a:fld>
             <a:endParaRPr lang="en-US"/>
           </a:p>
@@ -10484,7 +10244,7 @@
           <a:p>
             <a:fld id="{98AC3541-01C1-4CA5-B68F-FEE868C7D1AF}" type="slidenum">
               <a:rPr lang="en-US" smtClean="0"/>
-              <a:t>18</a:t>
+              <a:t>17</a:t>
             </a:fld>
             <a:endParaRPr lang="en-US"/>
           </a:p>
@@ -10506,14 +10266,15 @@
         </p:nvPicPr>
         <p:blipFill>
           <a:blip r:embed="rId2"/>
+          <a:srcRect r="70899"/>
           <a:stretch>
             <a:fillRect/>
           </a:stretch>
         </p:blipFill>
         <p:spPr>
           <a:xfrm>
-            <a:off x="488952" y="3557324"/>
-            <a:ext cx="5651495" cy="2564964"/>
+            <a:off x="488953" y="3557324"/>
+            <a:ext cx="1644648" cy="2564964"/>
           </a:xfrm>
           <a:prstGeom prst="rect">
             <a:avLst/>
@@ -10536,8 +10297,8 @@
         </p:nvSpPr>
         <p:spPr>
           <a:xfrm>
-            <a:off x="5334000" y="3557324"/>
-            <a:ext cx="3540443" cy="1143000"/>
+            <a:off x="5982867" y="3375630"/>
+            <a:ext cx="2790344" cy="3101370"/>
           </a:xfrm>
           <a:prstGeom prst="rect">
             <a:avLst/>
@@ -10716,7 +10477,7 @@
               <a:buNone/>
             </a:pPr>
             <a:r>
-              <a:rPr lang="en-US" sz="1800" b="1" dirty="0">
+              <a:rPr lang="en-US" b="1" dirty="0">
                 <a:solidFill>
                   <a:srgbClr val="FFC000"/>
                 </a:solidFill>
@@ -10724,7 +10485,7 @@
               <a:t>Needs changes in </a:t>
             </a:r>
             <a:r>
-              <a:rPr lang="en-US" sz="1800" b="1" dirty="0" err="1">
+              <a:rPr lang="en-US" b="1" dirty="0" err="1">
                 <a:solidFill>
                   <a:srgbClr val="FFC000"/>
                 </a:solidFill>
@@ -10732,7 +10493,7 @@
               <a:t>datapath</a:t>
             </a:r>
             <a:r>
-              <a:rPr lang="en-US" sz="1800" b="1" dirty="0">
+              <a:rPr lang="en-US" b="1" dirty="0">
                 <a:solidFill>
                   <a:srgbClr val="FFC000"/>
                 </a:solidFill>
@@ -10740,8 +10501,441 @@
               <a:t> hardware as well as extra control signals!</a:t>
             </a:r>
           </a:p>
+          <a:p>
+            <a:pPr marL="0" indent="0">
+              <a:buNone/>
+            </a:pPr>
+            <a:endParaRPr lang="en-US" b="1" dirty="0">
+              <a:solidFill>
+                <a:srgbClr val="FFC000"/>
+              </a:solidFill>
+            </a:endParaRPr>
+          </a:p>
+          <a:p>
+            <a:pPr marL="0" indent="0">
+              <a:buNone/>
+            </a:pPr>
+            <a:r>
+              <a:rPr lang="en-US" b="1" dirty="0">
+                <a:solidFill>
+                  <a:srgbClr val="FF0000"/>
+                </a:solidFill>
+              </a:rPr>
+              <a:t>From where should you feed the result back to ALU?</a:t>
+            </a:r>
+          </a:p>
         </p:txBody>
       </p:sp>
+      <p:pic>
+        <p:nvPicPr>
+          <p:cNvPr id="5" name="Picture 4">
+            <a:extLst>
+              <a:ext uri="{FF2B5EF4-FFF2-40B4-BE49-F238E27FC236}">
+                <a16:creationId xmlns:a16="http://schemas.microsoft.com/office/drawing/2014/main" id="{EE7AEC8F-0C24-D9E1-2E58-3F20C67452B3}"/>
+              </a:ext>
+            </a:extLst>
+          </p:cNvPr>
+          <p:cNvPicPr>
+            <a:picLocks noChangeAspect="1"/>
+          </p:cNvPicPr>
+          <p:nvPr/>
+        </p:nvPicPr>
+        <p:blipFill>
+          <a:blip r:embed="rId3">
+            <a:alphaModFix/>
+          </a:blip>
+          <a:stretch>
+            <a:fillRect/>
+          </a:stretch>
+        </p:blipFill>
+        <p:spPr>
+          <a:xfrm>
+            <a:off x="1952296" y="3386140"/>
+            <a:ext cx="3962400" cy="2825486"/>
+          </a:xfrm>
+          <a:prstGeom prst="rect">
+            <a:avLst/>
+          </a:prstGeom>
+        </p:spPr>
+      </p:pic>
+      <mc:AlternateContent xmlns:mc="http://schemas.openxmlformats.org/markup-compatibility/2006">
+        <mc:Choice xmlns:p14="http://schemas.microsoft.com/office/powerpoint/2010/main" Requires="p14">
+          <p:contentPart p14:bwMode="auto" r:id="rId4">
+            <p14:nvContentPartPr>
+              <p14:cNvPr id="7" name="Ink 6">
+                <a:extLst>
+                  <a:ext uri="{FF2B5EF4-FFF2-40B4-BE49-F238E27FC236}">
+                    <a16:creationId xmlns:a16="http://schemas.microsoft.com/office/drawing/2014/main" id="{D1242B5D-6199-B5A6-08AE-ED8E55F2401A}"/>
+                  </a:ext>
+                </a:extLst>
+              </p14:cNvPr>
+              <p14:cNvContentPartPr/>
+              <p14:nvPr/>
+            </p14:nvContentPartPr>
+            <p14:xfrm>
+              <a:off x="3138877" y="3592593"/>
+              <a:ext cx="234360" cy="317520"/>
+            </p14:xfrm>
+          </p:contentPart>
+        </mc:Choice>
+        <mc:Fallback>
+          <p:pic>
+            <p:nvPicPr>
+              <p:cNvPr id="7" name="Ink 6">
+                <a:extLst>
+                  <a:ext uri="{FF2B5EF4-FFF2-40B4-BE49-F238E27FC236}">
+                    <a16:creationId xmlns:a16="http://schemas.microsoft.com/office/drawing/2014/main" id="{D1242B5D-6199-B5A6-08AE-ED8E55F2401A}"/>
+                  </a:ext>
+                </a:extLst>
+              </p:cNvPr>
+              <p:cNvPicPr/>
+              <p:nvPr/>
+            </p:nvPicPr>
+            <p:blipFill>
+              <a:blip r:embed="rId5"/>
+              <a:stretch>
+                <a:fillRect/>
+              </a:stretch>
+            </p:blipFill>
+            <p:spPr>
+              <a:xfrm>
+                <a:off x="3132757" y="3586473"/>
+                <a:ext cx="246600" cy="329760"/>
+              </a:xfrm>
+              <a:prstGeom prst="rect">
+                <a:avLst/>
+              </a:prstGeom>
+            </p:spPr>
+          </p:pic>
+        </mc:Fallback>
+      </mc:AlternateContent>
+      <mc:AlternateContent xmlns:mc="http://schemas.openxmlformats.org/markup-compatibility/2006">
+        <mc:Choice xmlns:p14="http://schemas.microsoft.com/office/powerpoint/2010/main" Requires="p14">
+          <p:contentPart p14:bwMode="auto" r:id="rId6">
+            <p14:nvContentPartPr>
+              <p14:cNvPr id="10" name="Ink 9">
+                <a:extLst>
+                  <a:ext uri="{FF2B5EF4-FFF2-40B4-BE49-F238E27FC236}">
+                    <a16:creationId xmlns:a16="http://schemas.microsoft.com/office/drawing/2014/main" id="{53D79BAB-7018-34DD-1F9B-AE5F79664203}"/>
+                  </a:ext>
+                </a:extLst>
+              </p14:cNvPr>
+              <p14:cNvContentPartPr/>
+              <p14:nvPr/>
+            </p14:nvContentPartPr>
+            <p14:xfrm>
+              <a:off x="3279277" y="4161033"/>
+              <a:ext cx="76320" cy="87840"/>
+            </p14:xfrm>
+          </p:contentPart>
+        </mc:Choice>
+        <mc:Fallback>
+          <p:pic>
+            <p:nvPicPr>
+              <p:cNvPr id="10" name="Ink 9">
+                <a:extLst>
+                  <a:ext uri="{FF2B5EF4-FFF2-40B4-BE49-F238E27FC236}">
+                    <a16:creationId xmlns:a16="http://schemas.microsoft.com/office/drawing/2014/main" id="{53D79BAB-7018-34DD-1F9B-AE5F79664203}"/>
+                  </a:ext>
+                </a:extLst>
+              </p:cNvPr>
+              <p:cNvPicPr/>
+              <p:nvPr/>
+            </p:nvPicPr>
+            <p:blipFill>
+              <a:blip r:embed="rId7"/>
+              <a:stretch>
+                <a:fillRect/>
+              </a:stretch>
+            </p:blipFill>
+            <p:spPr>
+              <a:xfrm>
+                <a:off x="3273157" y="4154913"/>
+                <a:ext cx="88560" cy="100080"/>
+              </a:xfrm>
+              <a:prstGeom prst="rect">
+                <a:avLst/>
+              </a:prstGeom>
+            </p:spPr>
+          </p:pic>
+        </mc:Fallback>
+      </mc:AlternateContent>
+      <mc:AlternateContent xmlns:mc="http://schemas.openxmlformats.org/markup-compatibility/2006">
+        <mc:Choice xmlns:p14="http://schemas.microsoft.com/office/powerpoint/2010/main" Requires="p14">
+          <p:contentPart p14:bwMode="auto" r:id="rId8">
+            <p14:nvContentPartPr>
+              <p14:cNvPr id="26" name="Ink 25">
+                <a:extLst>
+                  <a:ext uri="{FF2B5EF4-FFF2-40B4-BE49-F238E27FC236}">
+                    <a16:creationId xmlns:a16="http://schemas.microsoft.com/office/drawing/2014/main" id="{9C9655DB-312A-6EF7-F6A0-EA87FC4B334F}"/>
+                  </a:ext>
+                </a:extLst>
+              </p14:cNvPr>
+              <p14:cNvContentPartPr/>
+              <p14:nvPr/>
+            </p14:nvContentPartPr>
+            <p14:xfrm>
+              <a:off x="3723294" y="4709673"/>
+              <a:ext cx="52200" cy="69120"/>
+            </p14:xfrm>
+          </p:contentPart>
+        </mc:Choice>
+        <mc:Fallback>
+          <p:pic>
+            <p:nvPicPr>
+              <p:cNvPr id="26" name="Ink 25">
+                <a:extLst>
+                  <a:ext uri="{FF2B5EF4-FFF2-40B4-BE49-F238E27FC236}">
+                    <a16:creationId xmlns:a16="http://schemas.microsoft.com/office/drawing/2014/main" id="{9C9655DB-312A-6EF7-F6A0-EA87FC4B334F}"/>
+                  </a:ext>
+                </a:extLst>
+              </p:cNvPr>
+              <p:cNvPicPr/>
+              <p:nvPr/>
+            </p:nvPicPr>
+            <p:blipFill>
+              <a:blip r:embed="rId9"/>
+              <a:stretch>
+                <a:fillRect/>
+              </a:stretch>
+            </p:blipFill>
+            <p:spPr>
+              <a:xfrm>
+                <a:off x="3714654" y="4701033"/>
+                <a:ext cx="69840" cy="86760"/>
+              </a:xfrm>
+              <a:prstGeom prst="rect">
+                <a:avLst/>
+              </a:prstGeom>
+            </p:spPr>
+          </p:pic>
+        </mc:Fallback>
+      </mc:AlternateContent>
+      <p:grpSp>
+        <p:nvGrpSpPr>
+          <p:cNvPr id="32" name="Group 31">
+            <a:extLst>
+              <a:ext uri="{FF2B5EF4-FFF2-40B4-BE49-F238E27FC236}">
+                <a16:creationId xmlns:a16="http://schemas.microsoft.com/office/drawing/2014/main" id="{0C23C053-0D2F-68D7-3AAD-F175BB7AEC62}"/>
+              </a:ext>
+            </a:extLst>
+          </p:cNvPr>
+          <p:cNvGrpSpPr/>
+          <p:nvPr/>
+        </p:nvGrpSpPr>
+        <p:grpSpPr>
+          <a:xfrm>
+            <a:off x="3177894" y="3800673"/>
+            <a:ext cx="614160" cy="835920"/>
+            <a:chOff x="3177894" y="3800673"/>
+            <a:chExt cx="614160" cy="835920"/>
+          </a:xfrm>
+        </p:grpSpPr>
+        <mc:AlternateContent xmlns:mc="http://schemas.openxmlformats.org/markup-compatibility/2006">
+          <mc:Choice xmlns:p14="http://schemas.microsoft.com/office/powerpoint/2010/main" Requires="p14">
+            <p:contentPart p14:bwMode="auto" r:id="rId10">
+              <p14:nvContentPartPr>
+                <p14:cNvPr id="27" name="Ink 26">
+                  <a:extLst>
+                    <a:ext uri="{FF2B5EF4-FFF2-40B4-BE49-F238E27FC236}">
+                      <a16:creationId xmlns:a16="http://schemas.microsoft.com/office/drawing/2014/main" id="{42A57305-ADBB-E76D-07C5-C5ECD91E937A}"/>
+                    </a:ext>
+                  </a:extLst>
+                </p14:cNvPr>
+                <p14:cNvContentPartPr/>
+                <p14:nvPr/>
+              </p14:nvContentPartPr>
+              <p14:xfrm>
+                <a:off x="3182214" y="3821553"/>
+                <a:ext cx="111600" cy="324360"/>
+              </p14:xfrm>
+            </p:contentPart>
+          </mc:Choice>
+          <mc:Fallback>
+            <p:pic>
+              <p:nvPicPr>
+                <p:cNvPr id="27" name="Ink 26">
+                  <a:extLst>
+                    <a:ext uri="{FF2B5EF4-FFF2-40B4-BE49-F238E27FC236}">
+                      <a16:creationId xmlns:a16="http://schemas.microsoft.com/office/drawing/2014/main" id="{42A57305-ADBB-E76D-07C5-C5ECD91E937A}"/>
+                    </a:ext>
+                  </a:extLst>
+                </p:cNvPr>
+                <p:cNvPicPr/>
+                <p:nvPr/>
+              </p:nvPicPr>
+              <p:blipFill>
+                <a:blip r:embed="rId11"/>
+                <a:stretch>
+                  <a:fillRect/>
+                </a:stretch>
+              </p:blipFill>
+              <p:spPr>
+                <a:xfrm>
+                  <a:off x="3173214" y="3812553"/>
+                  <a:ext cx="129240" cy="342000"/>
+                </a:xfrm>
+                <a:prstGeom prst="rect">
+                  <a:avLst/>
+                </a:prstGeom>
+              </p:spPr>
+            </p:pic>
+          </mc:Fallback>
+        </mc:AlternateContent>
+        <mc:AlternateContent xmlns:mc="http://schemas.openxmlformats.org/markup-compatibility/2006">
+          <mc:Choice xmlns:p14="http://schemas.microsoft.com/office/powerpoint/2010/main" Requires="p14">
+            <p:contentPart p14:bwMode="auto" r:id="rId12">
+              <p14:nvContentPartPr>
+                <p14:cNvPr id="28" name="Ink 27">
+                  <a:extLst>
+                    <a:ext uri="{FF2B5EF4-FFF2-40B4-BE49-F238E27FC236}">
+                      <a16:creationId xmlns:a16="http://schemas.microsoft.com/office/drawing/2014/main" id="{C61FDCD7-FF9F-A769-581C-90A5F3CB38F2}"/>
+                    </a:ext>
+                  </a:extLst>
+                </p14:cNvPr>
+                <p14:cNvContentPartPr/>
+                <p14:nvPr/>
+              </p14:nvContentPartPr>
+              <p14:xfrm>
+                <a:off x="3237654" y="4006233"/>
+                <a:ext cx="45720" cy="147600"/>
+              </p14:xfrm>
+            </p:contentPart>
+          </mc:Choice>
+          <mc:Fallback>
+            <p:pic>
+              <p:nvPicPr>
+                <p:cNvPr id="28" name="Ink 27">
+                  <a:extLst>
+                    <a:ext uri="{FF2B5EF4-FFF2-40B4-BE49-F238E27FC236}">
+                      <a16:creationId xmlns:a16="http://schemas.microsoft.com/office/drawing/2014/main" id="{C61FDCD7-FF9F-A769-581C-90A5F3CB38F2}"/>
+                    </a:ext>
+                  </a:extLst>
+                </p:cNvPr>
+                <p:cNvPicPr/>
+                <p:nvPr/>
+              </p:nvPicPr>
+              <p:blipFill>
+                <a:blip r:embed="rId13"/>
+                <a:stretch>
+                  <a:fillRect/>
+                </a:stretch>
+              </p:blipFill>
+              <p:spPr>
+                <a:xfrm>
+                  <a:off x="3229014" y="3997593"/>
+                  <a:ext cx="63360" cy="165240"/>
+                </a:xfrm>
+                <a:prstGeom prst="rect">
+                  <a:avLst/>
+                </a:prstGeom>
+              </p:spPr>
+            </p:pic>
+          </mc:Fallback>
+        </mc:AlternateContent>
+        <mc:AlternateContent xmlns:mc="http://schemas.openxmlformats.org/markup-compatibility/2006">
+          <mc:Choice xmlns:p14="http://schemas.microsoft.com/office/powerpoint/2010/main" Requires="p14">
+            <p:contentPart p14:bwMode="auto" r:id="rId14">
+              <p14:nvContentPartPr>
+                <p14:cNvPr id="30" name="Ink 29">
+                  <a:extLst>
+                    <a:ext uri="{FF2B5EF4-FFF2-40B4-BE49-F238E27FC236}">
+                      <a16:creationId xmlns:a16="http://schemas.microsoft.com/office/drawing/2014/main" id="{272DD8D0-2D4B-3297-AC20-9879A23CF37D}"/>
+                    </a:ext>
+                  </a:extLst>
+                </p14:cNvPr>
+                <p14:cNvContentPartPr/>
+                <p14:nvPr/>
+              </p14:nvContentPartPr>
+              <p14:xfrm>
+                <a:off x="3177894" y="3800673"/>
+                <a:ext cx="603360" cy="820080"/>
+              </p14:xfrm>
+            </p:contentPart>
+          </mc:Choice>
+          <mc:Fallback>
+            <p:pic>
+              <p:nvPicPr>
+                <p:cNvPr id="30" name="Ink 29">
+                  <a:extLst>
+                    <a:ext uri="{FF2B5EF4-FFF2-40B4-BE49-F238E27FC236}">
+                      <a16:creationId xmlns:a16="http://schemas.microsoft.com/office/drawing/2014/main" id="{272DD8D0-2D4B-3297-AC20-9879A23CF37D}"/>
+                    </a:ext>
+                  </a:extLst>
+                </p:cNvPr>
+                <p:cNvPicPr/>
+                <p:nvPr/>
+              </p:nvPicPr>
+              <p:blipFill>
+                <a:blip r:embed="rId15"/>
+                <a:stretch>
+                  <a:fillRect/>
+                </a:stretch>
+              </p:blipFill>
+              <p:spPr>
+                <a:xfrm>
+                  <a:off x="3168894" y="3791673"/>
+                  <a:ext cx="621000" cy="837720"/>
+                </a:xfrm>
+                <a:prstGeom prst="rect">
+                  <a:avLst/>
+                </a:prstGeom>
+              </p:spPr>
+            </p:pic>
+          </mc:Fallback>
+        </mc:AlternateContent>
+        <mc:AlternateContent xmlns:mc="http://schemas.openxmlformats.org/markup-compatibility/2006">
+          <mc:Choice xmlns:p14="http://schemas.microsoft.com/office/powerpoint/2010/main" Requires="p14">
+            <p:contentPart p14:bwMode="auto" r:id="rId16">
+              <p14:nvContentPartPr>
+                <p14:cNvPr id="31" name="Ink 30">
+                  <a:extLst>
+                    <a:ext uri="{FF2B5EF4-FFF2-40B4-BE49-F238E27FC236}">
+                      <a16:creationId xmlns:a16="http://schemas.microsoft.com/office/drawing/2014/main" id="{2D3CD757-A5D9-60BC-9B40-CC3310F5BD49}"/>
+                    </a:ext>
+                  </a:extLst>
+                </p14:cNvPr>
+                <p14:cNvContentPartPr/>
+                <p14:nvPr/>
+              </p14:nvContentPartPr>
+              <p14:xfrm>
+                <a:off x="3724734" y="4532913"/>
+                <a:ext cx="67320" cy="103680"/>
+              </p14:xfrm>
+            </p:contentPart>
+          </mc:Choice>
+          <mc:Fallback>
+            <p:pic>
+              <p:nvPicPr>
+                <p:cNvPr id="31" name="Ink 30">
+                  <a:extLst>
+                    <a:ext uri="{FF2B5EF4-FFF2-40B4-BE49-F238E27FC236}">
+                      <a16:creationId xmlns:a16="http://schemas.microsoft.com/office/drawing/2014/main" id="{2D3CD757-A5D9-60BC-9B40-CC3310F5BD49}"/>
+                    </a:ext>
+                  </a:extLst>
+                </p:cNvPr>
+                <p:cNvPicPr/>
+                <p:nvPr/>
+              </p:nvPicPr>
+              <p:blipFill>
+                <a:blip r:embed="rId17"/>
+                <a:stretch>
+                  <a:fillRect/>
+                </a:stretch>
+              </p:blipFill>
+              <p:spPr>
+                <a:xfrm>
+                  <a:off x="3716094" y="4523913"/>
+                  <a:ext cx="84960" cy="121320"/>
+                </a:xfrm>
+                <a:prstGeom prst="rect">
+                  <a:avLst/>
+                </a:prstGeom>
+              </p:spPr>
+            </p:pic>
+          </mc:Fallback>
+        </mc:AlternateContent>
+      </p:grpSp>
     </p:spTree>
     <p:extLst>
       <p:ext uri="{BB962C8B-B14F-4D97-AF65-F5344CB8AC3E}">
@@ -10773,7 +10967,7 @@
                             </p:stCondLst>
                             <p:childTnLst>
                               <p:par>
-                                <p:cTn id="5" presetID="1" presetClass="entr" presetSubtype="0" fill="hold" grpId="0" nodeType="clickEffect">
+                                <p:cTn id="5" presetID="63" presetClass="entr" presetSubtype="0" fill="hold" nodeType="clickEffect">
                                   <p:stCondLst>
                                     <p:cond delay="0"/>
                                   </p:stCondLst>
@@ -10781,6 +10975,376 @@
                                     <p:set>
                                       <p:cBhvr>
                                         <p:cTn id="6" dur="1" fill="hold">
+                                          <p:stCondLst>
+                                            <p:cond delay="0"/>
+                                          </p:stCondLst>
+                                        </p:cTn>
+                                        <p:tgtEl>
+                                          <p:spTgt spid="7"/>
+                                        </p:tgtEl>
+                                        <p:attrNameLst>
+                                          <p:attrName>style.visibility</p:attrName>
+                                        </p:attrNameLst>
+                                      </p:cBhvr>
+                                      <p:to>
+                                        <p:strVal val="visible"/>
+                                      </p:to>
+                                    </p:set>
+                                    <p:anim calcmode="lin" valueType="num">
+                                      <p:cBhvr>
+                                        <p:cTn id="7" dur="2000" fill="hold"/>
+                                        <p:tgtEl>
+                                          <p:spTgt spid="7"/>
+                                        </p:tgtEl>
+                                        <p:attrNameLst>
+                                          <p:attrName>drawProgress</p:attrName>
+                                        </p:attrNameLst>
+                                      </p:cBhvr>
+                                      <p:tavLst>
+                                        <p:tav tm="0">
+                                          <p:val>
+                                            <p:fltVal val="0"/>
+                                          </p:val>
+                                        </p:tav>
+                                        <p:tav tm="100000">
+                                          <p:val>
+                                            <p:fltVal val="1"/>
+                                          </p:val>
+                                        </p:tav>
+                                      </p:tavLst>
+                                    </p:anim>
+                                  </p:childTnLst>
+                                </p:cTn>
+                              </p:par>
+                            </p:childTnLst>
+                          </p:cTn>
+                        </p:par>
+                      </p:childTnLst>
+                    </p:cTn>
+                  </p:par>
+                  <p:par>
+                    <p:cTn id="8" fill="hold">
+                      <p:stCondLst>
+                        <p:cond delay="indefinite"/>
+                      </p:stCondLst>
+                      <p:childTnLst>
+                        <p:par>
+                          <p:cTn id="9" fill="hold">
+                            <p:stCondLst>
+                              <p:cond delay="0"/>
+                            </p:stCondLst>
+                            <p:childTnLst>
+                              <p:par>
+                                <p:cTn id="10" presetID="63" presetClass="entr" presetSubtype="0" fill="hold" nodeType="clickEffect">
+                                  <p:stCondLst>
+                                    <p:cond delay="0"/>
+                                  </p:stCondLst>
+                                  <p:childTnLst>
+                                    <p:set>
+                                      <p:cBhvr>
+                                        <p:cTn id="11" dur="1" fill="hold">
+                                          <p:stCondLst>
+                                            <p:cond delay="0"/>
+                                          </p:stCondLst>
+                                        </p:cTn>
+                                        <p:tgtEl>
+                                          <p:spTgt spid="10"/>
+                                        </p:tgtEl>
+                                        <p:attrNameLst>
+                                          <p:attrName>style.visibility</p:attrName>
+                                        </p:attrNameLst>
+                                      </p:cBhvr>
+                                      <p:to>
+                                        <p:strVal val="visible"/>
+                                      </p:to>
+                                    </p:set>
+                                    <p:anim calcmode="lin" valueType="num">
+                                      <p:cBhvr>
+                                        <p:cTn id="12" dur="2000" fill="hold"/>
+                                        <p:tgtEl>
+                                          <p:spTgt spid="10"/>
+                                        </p:tgtEl>
+                                        <p:attrNameLst>
+                                          <p:attrName>drawProgress</p:attrName>
+                                        </p:attrNameLst>
+                                      </p:cBhvr>
+                                      <p:tavLst>
+                                        <p:tav tm="0">
+                                          <p:val>
+                                            <p:fltVal val="0"/>
+                                          </p:val>
+                                        </p:tav>
+                                        <p:tav tm="100000">
+                                          <p:val>
+                                            <p:fltVal val="1"/>
+                                          </p:val>
+                                        </p:tav>
+                                      </p:tavLst>
+                                    </p:anim>
+                                  </p:childTnLst>
+                                </p:cTn>
+                              </p:par>
+                            </p:childTnLst>
+                          </p:cTn>
+                        </p:par>
+                      </p:childTnLst>
+                    </p:cTn>
+                  </p:par>
+                  <p:par>
+                    <p:cTn id="13" fill="hold">
+                      <p:stCondLst>
+                        <p:cond delay="indefinite"/>
+                      </p:stCondLst>
+                      <p:childTnLst>
+                        <p:par>
+                          <p:cTn id="14" fill="hold">
+                            <p:stCondLst>
+                              <p:cond delay="0"/>
+                            </p:stCondLst>
+                            <p:childTnLst>
+                              <p:par>
+                                <p:cTn id="15" presetID="63" presetClass="entr" presetSubtype="0" fill="hold" nodeType="clickEffect">
+                                  <p:stCondLst>
+                                    <p:cond delay="0"/>
+                                  </p:stCondLst>
+                                  <p:childTnLst>
+                                    <p:set>
+                                      <p:cBhvr>
+                                        <p:cTn id="16" dur="1" fill="hold">
+                                          <p:stCondLst>
+                                            <p:cond delay="0"/>
+                                          </p:stCondLst>
+                                        </p:cTn>
+                                        <p:tgtEl>
+                                          <p:spTgt spid="26"/>
+                                        </p:tgtEl>
+                                        <p:attrNameLst>
+                                          <p:attrName>style.visibility</p:attrName>
+                                        </p:attrNameLst>
+                                      </p:cBhvr>
+                                      <p:to>
+                                        <p:strVal val="visible"/>
+                                      </p:to>
+                                    </p:set>
+                                    <p:anim calcmode="lin" valueType="num">
+                                      <p:cBhvr>
+                                        <p:cTn id="17" dur="2000" fill="hold"/>
+                                        <p:tgtEl>
+                                          <p:spTgt spid="26"/>
+                                        </p:tgtEl>
+                                        <p:attrNameLst>
+                                          <p:attrName>drawProgress</p:attrName>
+                                        </p:attrNameLst>
+                                      </p:cBhvr>
+                                      <p:tavLst>
+                                        <p:tav tm="0">
+                                          <p:val>
+                                            <p:fltVal val="0"/>
+                                          </p:val>
+                                        </p:tav>
+                                        <p:tav tm="100000">
+                                          <p:val>
+                                            <p:fltVal val="1"/>
+                                          </p:val>
+                                        </p:tav>
+                                      </p:tavLst>
+                                    </p:anim>
+                                  </p:childTnLst>
+                                </p:cTn>
+                              </p:par>
+                            </p:childTnLst>
+                          </p:cTn>
+                        </p:par>
+                      </p:childTnLst>
+                    </p:cTn>
+                  </p:par>
+                  <p:par>
+                    <p:cTn id="18" fill="hold">
+                      <p:stCondLst>
+                        <p:cond delay="indefinite"/>
+                      </p:stCondLst>
+                      <p:childTnLst>
+                        <p:par>
+                          <p:cTn id="19" fill="hold">
+                            <p:stCondLst>
+                              <p:cond delay="0"/>
+                            </p:stCondLst>
+                            <p:childTnLst>
+                              <p:par>
+                                <p:cTn id="20" presetID="1" presetClass="entr" presetSubtype="0" fill="hold" grpId="0" nodeType="clickEffect">
+                                  <p:stCondLst>
+                                    <p:cond delay="0"/>
+                                  </p:stCondLst>
+                                  <p:childTnLst>
+                                    <p:set>
+                                      <p:cBhvr>
+                                        <p:cTn id="21" dur="1" fill="hold">
+                                          <p:stCondLst>
+                                            <p:cond delay="0"/>
+                                          </p:stCondLst>
+                                        </p:cTn>
+                                        <p:tgtEl>
+                                          <p:spTgt spid="3">
+                                            <p:txEl>
+                                              <p:pRg st="1" end="1"/>
+                                            </p:txEl>
+                                          </p:spTgt>
+                                        </p:tgtEl>
+                                        <p:attrNameLst>
+                                          <p:attrName>style.visibility</p:attrName>
+                                        </p:attrNameLst>
+                                      </p:cBhvr>
+                                      <p:to>
+                                        <p:strVal val="visible"/>
+                                      </p:to>
+                                    </p:set>
+                                  </p:childTnLst>
+                                </p:cTn>
+                              </p:par>
+                            </p:childTnLst>
+                          </p:cTn>
+                        </p:par>
+                      </p:childTnLst>
+                    </p:cTn>
+                  </p:par>
+                  <p:par>
+                    <p:cTn id="22" fill="hold">
+                      <p:stCondLst>
+                        <p:cond delay="indefinite"/>
+                      </p:stCondLst>
+                      <p:childTnLst>
+                        <p:par>
+                          <p:cTn id="23" fill="hold">
+                            <p:stCondLst>
+                              <p:cond delay="0"/>
+                            </p:stCondLst>
+                            <p:childTnLst>
+                              <p:par>
+                                <p:cTn id="24" presetID="63" presetClass="entr" presetSubtype="0" fill="hold" nodeType="clickEffect">
+                                  <p:stCondLst>
+                                    <p:cond delay="0"/>
+                                  </p:stCondLst>
+                                  <p:childTnLst>
+                                    <p:set>
+                                      <p:cBhvr>
+                                        <p:cTn id="25" dur="1" fill="hold">
+                                          <p:stCondLst>
+                                            <p:cond delay="0"/>
+                                          </p:stCondLst>
+                                        </p:cTn>
+                                        <p:tgtEl>
+                                          <p:spTgt spid="32"/>
+                                        </p:tgtEl>
+                                        <p:attrNameLst>
+                                          <p:attrName>style.visibility</p:attrName>
+                                        </p:attrNameLst>
+                                      </p:cBhvr>
+                                      <p:to>
+                                        <p:strVal val="visible"/>
+                                      </p:to>
+                                    </p:set>
+                                    <p:anim calcmode="lin" valueType="num">
+                                      <p:cBhvr>
+                                        <p:cTn id="26" dur="2000" fill="hold"/>
+                                        <p:tgtEl>
+                                          <p:spTgt spid="32"/>
+                                        </p:tgtEl>
+                                        <p:attrNameLst>
+                                          <p:attrName>drawProgress</p:attrName>
+                                        </p:attrNameLst>
+                                      </p:cBhvr>
+                                      <p:tavLst>
+                                        <p:tav tm="0">
+                                          <p:val>
+                                            <p:fltVal val="0"/>
+                                          </p:val>
+                                        </p:tav>
+                                        <p:tav tm="100000">
+                                          <p:val>
+                                            <p:fltVal val="1"/>
+                                          </p:val>
+                                        </p:tav>
+                                      </p:tavLst>
+                                    </p:anim>
+                                  </p:childTnLst>
+                                </p:cTn>
+                              </p:par>
+                            </p:childTnLst>
+                          </p:cTn>
+                        </p:par>
+                      </p:childTnLst>
+                    </p:cTn>
+                  </p:par>
+                  <p:par>
+                    <p:cTn id="27" fill="hold">
+                      <p:stCondLst>
+                        <p:cond delay="indefinite"/>
+                      </p:stCondLst>
+                      <p:childTnLst>
+                        <p:par>
+                          <p:cTn id="28" fill="hold">
+                            <p:stCondLst>
+                              <p:cond delay="0"/>
+                            </p:stCondLst>
+                            <p:childTnLst>
+                              <p:par>
+                                <p:cTn id="29" presetID="1" presetClass="entr" presetSubtype="0" fill="hold" grpId="0" nodeType="clickEffect">
+                                  <p:stCondLst>
+                                    <p:cond delay="0"/>
+                                  </p:stCondLst>
+                                  <p:childTnLst>
+                                    <p:set>
+                                      <p:cBhvr>
+                                        <p:cTn id="30" dur="1" fill="hold">
+                                          <p:stCondLst>
+                                            <p:cond delay="0"/>
+                                          </p:stCondLst>
+                                        </p:cTn>
+                                        <p:tgtEl>
+                                          <p:spTgt spid="3">
+                                            <p:txEl>
+                                              <p:pRg st="2" end="2"/>
+                                            </p:txEl>
+                                          </p:spTgt>
+                                        </p:tgtEl>
+                                        <p:attrNameLst>
+                                          <p:attrName>style.visibility</p:attrName>
+                                        </p:attrNameLst>
+                                      </p:cBhvr>
+                                      <p:to>
+                                        <p:strVal val="visible"/>
+                                      </p:to>
+                                    </p:set>
+                                  </p:childTnLst>
+                                </p:cTn>
+                              </p:par>
+                            </p:childTnLst>
+                          </p:cTn>
+                        </p:par>
+                      </p:childTnLst>
+                    </p:cTn>
+                  </p:par>
+                  <p:par>
+                    <p:cTn id="31" fill="hold">
+                      <p:stCondLst>
+                        <p:cond delay="indefinite"/>
+                      </p:stCondLst>
+                      <p:childTnLst>
+                        <p:par>
+                          <p:cTn id="32" fill="hold">
+                            <p:stCondLst>
+                              <p:cond delay="0"/>
+                            </p:stCondLst>
+                            <p:childTnLst>
+                              <p:par>
+                                <p:cTn id="33" presetID="1" presetClass="entr" presetSubtype="0" fill="hold" grpId="0" nodeType="clickEffect">
+                                  <p:stCondLst>
+                                    <p:cond delay="0"/>
+                                  </p:stCondLst>
+                                  <p:childTnLst>
+                                    <p:set>
+                                      <p:cBhvr>
+                                        <p:cTn id="34" dur="1" fill="hold">
                                           <p:stCondLst>
                                             <p:cond delay="0"/>
                                           </p:stCondLst>
@@ -10810,169 +11374,26 @@
                     </p:cTn>
                   </p:par>
                   <p:par>
-                    <p:cTn id="7" fill="hold">
+                    <p:cTn id="35" fill="hold">
                       <p:stCondLst>
                         <p:cond delay="indefinite"/>
                       </p:stCondLst>
                       <p:childTnLst>
                         <p:par>
-                          <p:cTn id="8" fill="hold">
+                          <p:cTn id="36" fill="hold">
                             <p:stCondLst>
                               <p:cond delay="0"/>
                             </p:stCondLst>
                             <p:childTnLst>
                               <p:par>
-                                <p:cTn id="9" presetID="1" presetClass="entr" presetSubtype="0" fill="hold" grpId="0" nodeType="clickEffect">
+                                <p:cTn id="37" presetID="1" presetClass="entr" presetSubtype="0" fill="hold" grpId="0" nodeType="clickEffect">
                                   <p:stCondLst>
                                     <p:cond delay="0"/>
                                   </p:stCondLst>
                                   <p:childTnLst>
                                     <p:set>
                                       <p:cBhvr>
-                                        <p:cTn id="10" dur="1" fill="hold">
-                                          <p:stCondLst>
-                                            <p:cond delay="0"/>
-                                          </p:stCondLst>
-                                        </p:cTn>
-                                        <p:tgtEl>
-                                          <p:spTgt spid="3">
-                                            <p:txEl>
-                                              <p:pRg st="1" end="1"/>
-                                            </p:txEl>
-                                          </p:spTgt>
-                                        </p:tgtEl>
-                                        <p:attrNameLst>
-                                          <p:attrName>style.visibility</p:attrName>
-                                        </p:attrNameLst>
-                                      </p:cBhvr>
-                                      <p:to>
-                                        <p:strVal val="visible"/>
-                                      </p:to>
-                                    </p:set>
-                                  </p:childTnLst>
-                                </p:cTn>
-                              </p:par>
-                            </p:childTnLst>
-                          </p:cTn>
-                        </p:par>
-                      </p:childTnLst>
-                    </p:cTn>
-                  </p:par>
-                  <p:par>
-                    <p:cTn id="11" fill="hold">
-                      <p:stCondLst>
-                        <p:cond delay="indefinite"/>
-                      </p:stCondLst>
-                      <p:childTnLst>
-                        <p:par>
-                          <p:cTn id="12" fill="hold">
-                            <p:stCondLst>
-                              <p:cond delay="0"/>
-                            </p:stCondLst>
-                            <p:childTnLst>
-                              <p:par>
-                                <p:cTn id="13" presetID="1" presetClass="entr" presetSubtype="0" fill="hold" grpId="0" nodeType="clickEffect">
-                                  <p:stCondLst>
-                                    <p:cond delay="0"/>
-                                  </p:stCondLst>
-                                  <p:childTnLst>
-                                    <p:set>
-                                      <p:cBhvr>
-                                        <p:cTn id="14" dur="1" fill="hold">
-                                          <p:stCondLst>
-                                            <p:cond delay="0"/>
-                                          </p:stCondLst>
-                                        </p:cTn>
-                                        <p:tgtEl>
-                                          <p:spTgt spid="3">
-                                            <p:txEl>
-                                              <p:pRg st="2" end="2"/>
-                                            </p:txEl>
-                                          </p:spTgt>
-                                        </p:tgtEl>
-                                        <p:attrNameLst>
-                                          <p:attrName>style.visibility</p:attrName>
-                                        </p:attrNameLst>
-                                      </p:cBhvr>
-                                      <p:to>
-                                        <p:strVal val="visible"/>
-                                      </p:to>
-                                    </p:set>
-                                  </p:childTnLst>
-                                </p:cTn>
-                              </p:par>
-                            </p:childTnLst>
-                          </p:cTn>
-                        </p:par>
-                      </p:childTnLst>
-                    </p:cTn>
-                  </p:par>
-                  <p:par>
-                    <p:cTn id="15" fill="hold">
-                      <p:stCondLst>
-                        <p:cond delay="indefinite"/>
-                      </p:stCondLst>
-                      <p:childTnLst>
-                        <p:par>
-                          <p:cTn id="16" fill="hold">
-                            <p:stCondLst>
-                              <p:cond delay="0"/>
-                            </p:stCondLst>
-                            <p:childTnLst>
-                              <p:par>
-                                <p:cTn id="17" presetID="1" presetClass="entr" presetSubtype="0" fill="hold" nodeType="clickEffect">
-                                  <p:stCondLst>
-                                    <p:cond delay="0"/>
-                                  </p:stCondLst>
-                                  <p:childTnLst>
-                                    <p:set>
-                                      <p:cBhvr>
-                                        <p:cTn id="18" dur="1" fill="hold">
-                                          <p:stCondLst>
-                                            <p:cond delay="0"/>
-                                          </p:stCondLst>
-                                        </p:cTn>
-                                        <p:tgtEl>
-                                          <p:spTgt spid="8"/>
-                                        </p:tgtEl>
-                                        <p:attrNameLst>
-                                          <p:attrName>style.visibility</p:attrName>
-                                        </p:attrNameLst>
-                                      </p:cBhvr>
-                                      <p:to>
-                                        <p:strVal val="visible"/>
-                                      </p:to>
-                                    </p:set>
-                                  </p:childTnLst>
-                                </p:cTn>
-                              </p:par>
-                            </p:childTnLst>
-                          </p:cTn>
-                        </p:par>
-                      </p:childTnLst>
-                    </p:cTn>
-                  </p:par>
-                  <p:par>
-                    <p:cTn id="19" fill="hold">
-                      <p:stCondLst>
-                        <p:cond delay="indefinite"/>
-                      </p:stCondLst>
-                      <p:childTnLst>
-                        <p:par>
-                          <p:cTn id="20" fill="hold">
-                            <p:stCondLst>
-                              <p:cond delay="0"/>
-                            </p:stCondLst>
-                            <p:childTnLst>
-                              <p:par>
-                                <p:cTn id="21" presetID="1" presetClass="entr" presetSubtype="0" fill="hold" grpId="0" nodeType="clickEffect">
-                                  <p:stCondLst>
-                                    <p:cond delay="0"/>
-                                  </p:stCondLst>
-                                  <p:childTnLst>
-                                    <p:set>
-                                      <p:cBhvr>
-                                        <p:cTn id="22" dur="1" fill="hold">
+                                        <p:cTn id="38" dur="1" fill="hold">
                                           <p:stCondLst>
                                             <p:cond delay="0"/>
                                           </p:stCondLst>
@@ -11019,14 +11440,14 @@
       </p:par>
     </p:tnLst>
     <p:bldLst>
-      <p:bldP spid="3" grpId="0" build="p"/>
+      <p:bldP spid="3" grpId="0" uiExpand="1" build="p"/>
       <p:bldP spid="9" grpId="0"/>
     </p:bldLst>
   </p:timing>
 </p:sld>
 </file>
 
-<file path=ppt/slides/slide19.xml><?xml version="1.0" encoding="utf-8"?>
+<file path=ppt/slides/slide18.xml><?xml version="1.0" encoding="utf-8"?>
 <p:sld xmlns:a="http://schemas.openxmlformats.org/drawingml/2006/main" xmlns:r="http://schemas.openxmlformats.org/officeDocument/2006/relationships" xmlns:p="http://schemas.openxmlformats.org/presentationml/2006/main">
   <p:cSld>
     <p:spTree>
@@ -11124,7 +11545,7 @@
           <a:p>
             <a:fld id="{B4B13859-67C5-4393-B6C2-556CF3F770C0}" type="datetime3">
               <a:rPr lang="en-US" smtClean="0"/>
-              <a:t>23 February 2026</a:t>
+              <a:t>25 February 2026</a:t>
             </a:fld>
             <a:endParaRPr lang="en-US"/>
           </a:p>
@@ -11153,7 +11574,7 @@
           <a:p>
             <a:fld id="{98AC3541-01C1-4CA5-B68F-FEE868C7D1AF}" type="slidenum">
               <a:rPr lang="en-US" smtClean="0"/>
-              <a:t>19</a:t>
+              <a:t>18</a:t>
             </a:fld>
             <a:endParaRPr lang="en-US"/>
           </a:p>
@@ -11172,474 +11593,7 @@
 </p:sld>
 </file>
 
-<file path=ppt/slides/slide2.xml><?xml version="1.0" encoding="utf-8"?>
-<p:sld xmlns:a="http://schemas.openxmlformats.org/drawingml/2006/main" xmlns:r="http://schemas.openxmlformats.org/officeDocument/2006/relationships" xmlns:p="http://schemas.openxmlformats.org/presentationml/2006/main">
-  <p:cSld>
-    <p:spTree>
-      <p:nvGrpSpPr>
-        <p:cNvPr id="1" name=""/>
-        <p:cNvGrpSpPr/>
-        <p:nvPr/>
-      </p:nvGrpSpPr>
-      <p:grpSpPr>
-        <a:xfrm>
-          <a:off x="0" y="0"/>
-          <a:ext cx="0" cy="0"/>
-          <a:chOff x="0" y="0"/>
-          <a:chExt cx="0" cy="0"/>
-        </a:xfrm>
-      </p:grpSpPr>
-      <p:sp>
-        <p:nvSpPr>
-          <p:cNvPr id="2" name="Title 1">
-            <a:extLst>
-              <a:ext uri="{FF2B5EF4-FFF2-40B4-BE49-F238E27FC236}">
-                <a16:creationId xmlns:a16="http://schemas.microsoft.com/office/drawing/2014/main" id="{7CA66C2A-CA34-4E01-AD5C-78E835848737}"/>
-              </a:ext>
-            </a:extLst>
-          </p:cNvPr>
-          <p:cNvSpPr>
-            <a:spLocks noGrp="1"/>
-          </p:cNvSpPr>
-          <p:nvPr>
-            <p:ph type="title"/>
-          </p:nvPr>
-        </p:nvSpPr>
-        <p:spPr/>
-        <p:txBody>
-          <a:bodyPr/>
-          <a:lstStyle/>
-          <a:p>
-            <a:r>
-              <a:rPr lang="en-US" dirty="0"/>
-              <a:t>Microprogramming</a:t>
-            </a:r>
-          </a:p>
-        </p:txBody>
-      </p:sp>
-      <p:sp>
-        <p:nvSpPr>
-          <p:cNvPr id="4" name="Slide Number Placeholder 3">
-            <a:extLst>
-              <a:ext uri="{FF2B5EF4-FFF2-40B4-BE49-F238E27FC236}">
-                <a16:creationId xmlns:a16="http://schemas.microsoft.com/office/drawing/2014/main" id="{51BF07FB-2B66-45BE-B34D-AC1A7E92DB29}"/>
-              </a:ext>
-            </a:extLst>
-          </p:cNvPr>
-          <p:cNvSpPr>
-            <a:spLocks noGrp="1"/>
-          </p:cNvSpPr>
-          <p:nvPr>
-            <p:ph type="sldNum" sz="quarter" idx="12"/>
-          </p:nvPr>
-        </p:nvSpPr>
-        <p:spPr/>
-        <p:txBody>
-          <a:bodyPr/>
-          <a:lstStyle/>
-          <a:p>
-            <a:pPr>
-              <a:defRPr/>
-            </a:pPr>
-            <a:fld id="{E79D9D01-1391-45E0-A9C5-C04635A43651}" type="slidenum">
-              <a:rPr lang="en-US" altLang="en-US" smtClean="0"/>
-              <a:pPr>
-                <a:defRPr/>
-              </a:pPr>
-              <a:t>2</a:t>
-            </a:fld>
-            <a:endParaRPr lang="en-US" altLang="en-US"/>
-          </a:p>
-        </p:txBody>
-      </p:sp>
-      <p:sp>
-        <p:nvSpPr>
-          <p:cNvPr id="5" name="Text Placeholder 4">
-            <a:extLst>
-              <a:ext uri="{FF2B5EF4-FFF2-40B4-BE49-F238E27FC236}">
-                <a16:creationId xmlns:a16="http://schemas.microsoft.com/office/drawing/2014/main" id="{4C6DBEC6-862C-44B4-B6E4-A872E69D351E}"/>
-              </a:ext>
-            </a:extLst>
-          </p:cNvPr>
-          <p:cNvSpPr>
-            <a:spLocks noGrp="1"/>
-          </p:cNvSpPr>
-          <p:nvPr>
-            <p:ph type="body" sz="quarter" idx="13"/>
-          </p:nvPr>
-        </p:nvSpPr>
-        <p:spPr>
-          <a:xfrm>
-            <a:off x="685800" y="2667000"/>
-            <a:ext cx="7772400" cy="3124200"/>
-          </a:xfrm>
-        </p:spPr>
-        <p:txBody>
-          <a:bodyPr>
-            <a:normAutofit fontScale="85000" lnSpcReduction="10000"/>
-          </a:bodyPr>
-          <a:lstStyle/>
-          <a:p>
-            <a:pPr marL="0" indent="0">
-              <a:buNone/>
-            </a:pPr>
-            <a:r>
-              <a:rPr lang="en-US" dirty="0"/>
-              <a:t>Pain points for hardwired FSM control</a:t>
-            </a:r>
-          </a:p>
-          <a:p>
-            <a:r>
-              <a:rPr lang="en-US" dirty="0"/>
-              <a:t>State explosion for rich ISAs</a:t>
-            </a:r>
-          </a:p>
-          <a:p>
-            <a:r>
-              <a:rPr lang="en-US" dirty="0"/>
-              <a:t>Difficult to modify / extend instruction set in a modular fashion</a:t>
-            </a:r>
-          </a:p>
-          <a:p>
-            <a:r>
-              <a:rPr lang="en-US" dirty="0"/>
-              <a:t>Difficult verification (verify everything after any modification</a:t>
-            </a:r>
-          </a:p>
-          <a:p>
-            <a:r>
-              <a:rPr lang="en-US" dirty="0"/>
-              <a:t>Irregular structure – difficult to optimize in silicon</a:t>
-            </a:r>
-          </a:p>
-        </p:txBody>
-      </p:sp>
-      <p:sp>
-        <p:nvSpPr>
-          <p:cNvPr id="6" name="Date Placeholder 3">
-            <a:extLst>
-              <a:ext uri="{FF2B5EF4-FFF2-40B4-BE49-F238E27FC236}">
-                <a16:creationId xmlns:a16="http://schemas.microsoft.com/office/drawing/2014/main" id="{0F6149F9-AC43-B143-FA9F-C4BBA38720D4}"/>
-              </a:ext>
-            </a:extLst>
-          </p:cNvPr>
-          <p:cNvSpPr>
-            <a:spLocks noGrp="1"/>
-          </p:cNvSpPr>
-          <p:nvPr>
-            <p:ph type="dt" sz="half" idx="10"/>
-          </p:nvPr>
-        </p:nvSpPr>
-        <p:spPr>
-          <a:xfrm>
-            <a:off x="0" y="6599238"/>
-            <a:ext cx="1828800" cy="258762"/>
-          </a:xfrm>
-        </p:spPr>
-        <p:txBody>
-          <a:bodyPr/>
-          <a:lstStyle/>
-          <a:p>
-            <a:fld id="{B4B13859-67C5-4393-B6C2-556CF3F770C0}" type="datetime3">
-              <a:rPr lang="en-US" smtClean="0"/>
-              <a:t>23 February 2026</a:t>
-            </a:fld>
-            <a:endParaRPr lang="en-US" dirty="0"/>
-          </a:p>
-        </p:txBody>
-      </p:sp>
-    </p:spTree>
-    <p:extLst>
-      <p:ext uri="{BB962C8B-B14F-4D97-AF65-F5344CB8AC3E}">
-        <p14:creationId xmlns:p14="http://schemas.microsoft.com/office/powerpoint/2010/main" val="3753598193"/>
-      </p:ext>
-    </p:extLst>
-  </p:cSld>
-  <p:clrMapOvr>
-    <a:masterClrMapping/>
-  </p:clrMapOvr>
-  <p:timing>
-    <p:tnLst>
-      <p:par>
-        <p:cTn id="1" dur="indefinite" restart="never" nodeType="tmRoot">
-          <p:childTnLst>
-            <p:seq concurrent="1" nextAc="seek">
-              <p:cTn id="2" dur="indefinite" nodeType="mainSeq">
-                <p:childTnLst>
-                  <p:par>
-                    <p:cTn id="3" fill="hold">
-                      <p:stCondLst>
-                        <p:cond delay="indefinite"/>
-                      </p:stCondLst>
-                      <p:childTnLst>
-                        <p:par>
-                          <p:cTn id="4" fill="hold">
-                            <p:stCondLst>
-                              <p:cond delay="0"/>
-                            </p:stCondLst>
-                            <p:childTnLst>
-                              <p:par>
-                                <p:cTn id="5" presetID="1" presetClass="entr" presetSubtype="0" fill="hold" grpId="0" nodeType="clickEffect">
-                                  <p:stCondLst>
-                                    <p:cond delay="0"/>
-                                  </p:stCondLst>
-                                  <p:childTnLst>
-                                    <p:set>
-                                      <p:cBhvr>
-                                        <p:cTn id="6" dur="1" fill="hold">
-                                          <p:stCondLst>
-                                            <p:cond delay="0"/>
-                                          </p:stCondLst>
-                                        </p:cTn>
-                                        <p:tgtEl>
-                                          <p:spTgt spid="5">
-                                            <p:txEl>
-                                              <p:pRg st="0" end="0"/>
-                                            </p:txEl>
-                                          </p:spTgt>
-                                        </p:tgtEl>
-                                        <p:attrNameLst>
-                                          <p:attrName>style.visibility</p:attrName>
-                                        </p:attrNameLst>
-                                      </p:cBhvr>
-                                      <p:to>
-                                        <p:strVal val="visible"/>
-                                      </p:to>
-                                    </p:set>
-                                  </p:childTnLst>
-                                </p:cTn>
-                              </p:par>
-                            </p:childTnLst>
-                          </p:cTn>
-                        </p:par>
-                      </p:childTnLst>
-                    </p:cTn>
-                  </p:par>
-                  <p:par>
-                    <p:cTn id="7" fill="hold">
-                      <p:stCondLst>
-                        <p:cond delay="indefinite"/>
-                      </p:stCondLst>
-                      <p:childTnLst>
-                        <p:par>
-                          <p:cTn id="8" fill="hold">
-                            <p:stCondLst>
-                              <p:cond delay="0"/>
-                            </p:stCondLst>
-                            <p:childTnLst>
-                              <p:par>
-                                <p:cTn id="9" presetID="1" presetClass="entr" presetSubtype="0" fill="hold" grpId="0" nodeType="clickEffect">
-                                  <p:stCondLst>
-                                    <p:cond delay="0"/>
-                                  </p:stCondLst>
-                                  <p:childTnLst>
-                                    <p:set>
-                                      <p:cBhvr>
-                                        <p:cTn id="10" dur="1" fill="hold">
-                                          <p:stCondLst>
-                                            <p:cond delay="0"/>
-                                          </p:stCondLst>
-                                        </p:cTn>
-                                        <p:tgtEl>
-                                          <p:spTgt spid="5">
-                                            <p:txEl>
-                                              <p:pRg st="1" end="1"/>
-                                            </p:txEl>
-                                          </p:spTgt>
-                                        </p:tgtEl>
-                                        <p:attrNameLst>
-                                          <p:attrName>style.visibility</p:attrName>
-                                        </p:attrNameLst>
-                                      </p:cBhvr>
-                                      <p:to>
-                                        <p:strVal val="visible"/>
-                                      </p:to>
-                                    </p:set>
-                                  </p:childTnLst>
-                                </p:cTn>
-                              </p:par>
-                            </p:childTnLst>
-                          </p:cTn>
-                        </p:par>
-                      </p:childTnLst>
-                    </p:cTn>
-                  </p:par>
-                  <p:par>
-                    <p:cTn id="11" fill="hold">
-                      <p:stCondLst>
-                        <p:cond delay="indefinite"/>
-                      </p:stCondLst>
-                      <p:childTnLst>
-                        <p:par>
-                          <p:cTn id="12" fill="hold">
-                            <p:stCondLst>
-                              <p:cond delay="0"/>
-                            </p:stCondLst>
-                            <p:childTnLst>
-                              <p:par>
-                                <p:cTn id="13" presetID="1" presetClass="entr" presetSubtype="0" fill="hold" grpId="0" nodeType="clickEffect">
-                                  <p:stCondLst>
-                                    <p:cond delay="0"/>
-                                  </p:stCondLst>
-                                  <p:childTnLst>
-                                    <p:set>
-                                      <p:cBhvr>
-                                        <p:cTn id="14" dur="1" fill="hold">
-                                          <p:stCondLst>
-                                            <p:cond delay="0"/>
-                                          </p:stCondLst>
-                                        </p:cTn>
-                                        <p:tgtEl>
-                                          <p:spTgt spid="5">
-                                            <p:txEl>
-                                              <p:pRg st="2" end="2"/>
-                                            </p:txEl>
-                                          </p:spTgt>
-                                        </p:tgtEl>
-                                        <p:attrNameLst>
-                                          <p:attrName>style.visibility</p:attrName>
-                                        </p:attrNameLst>
-                                      </p:cBhvr>
-                                      <p:to>
-                                        <p:strVal val="visible"/>
-                                      </p:to>
-                                    </p:set>
-                                  </p:childTnLst>
-                                </p:cTn>
-                              </p:par>
-                            </p:childTnLst>
-                          </p:cTn>
-                        </p:par>
-                      </p:childTnLst>
-                    </p:cTn>
-                  </p:par>
-                  <p:par>
-                    <p:cTn id="15" fill="hold">
-                      <p:stCondLst>
-                        <p:cond delay="indefinite"/>
-                      </p:stCondLst>
-                      <p:childTnLst>
-                        <p:par>
-                          <p:cTn id="16" fill="hold">
-                            <p:stCondLst>
-                              <p:cond delay="0"/>
-                            </p:stCondLst>
-                            <p:childTnLst>
-                              <p:par>
-                                <p:cTn id="17" presetID="1" presetClass="entr" presetSubtype="0" fill="hold" grpId="0" nodeType="clickEffect">
-                                  <p:stCondLst>
-                                    <p:cond delay="0"/>
-                                  </p:stCondLst>
-                                  <p:childTnLst>
-                                    <p:set>
-                                      <p:cBhvr>
-                                        <p:cTn id="18" dur="1" fill="hold">
-                                          <p:stCondLst>
-                                            <p:cond delay="0"/>
-                                          </p:stCondLst>
-                                        </p:cTn>
-                                        <p:tgtEl>
-                                          <p:spTgt spid="5">
-                                            <p:txEl>
-                                              <p:pRg st="3" end="3"/>
-                                            </p:txEl>
-                                          </p:spTgt>
-                                        </p:tgtEl>
-                                        <p:attrNameLst>
-                                          <p:attrName>style.visibility</p:attrName>
-                                        </p:attrNameLst>
-                                      </p:cBhvr>
-                                      <p:to>
-                                        <p:strVal val="visible"/>
-                                      </p:to>
-                                    </p:set>
-                                  </p:childTnLst>
-                                </p:cTn>
-                              </p:par>
-                            </p:childTnLst>
-                          </p:cTn>
-                        </p:par>
-                      </p:childTnLst>
-                    </p:cTn>
-                  </p:par>
-                  <p:par>
-                    <p:cTn id="19" fill="hold">
-                      <p:stCondLst>
-                        <p:cond delay="indefinite"/>
-                      </p:stCondLst>
-                      <p:childTnLst>
-                        <p:par>
-                          <p:cTn id="20" fill="hold">
-                            <p:stCondLst>
-                              <p:cond delay="0"/>
-                            </p:stCondLst>
-                            <p:childTnLst>
-                              <p:par>
-                                <p:cTn id="21" presetID="1" presetClass="entr" presetSubtype="0" fill="hold" grpId="0" nodeType="clickEffect">
-                                  <p:stCondLst>
-                                    <p:cond delay="0"/>
-                                  </p:stCondLst>
-                                  <p:childTnLst>
-                                    <p:set>
-                                      <p:cBhvr>
-                                        <p:cTn id="22" dur="1" fill="hold">
-                                          <p:stCondLst>
-                                            <p:cond delay="0"/>
-                                          </p:stCondLst>
-                                        </p:cTn>
-                                        <p:tgtEl>
-                                          <p:spTgt spid="5">
-                                            <p:txEl>
-                                              <p:pRg st="4" end="4"/>
-                                            </p:txEl>
-                                          </p:spTgt>
-                                        </p:tgtEl>
-                                        <p:attrNameLst>
-                                          <p:attrName>style.visibility</p:attrName>
-                                        </p:attrNameLst>
-                                      </p:cBhvr>
-                                      <p:to>
-                                        <p:strVal val="visible"/>
-                                      </p:to>
-                                    </p:set>
-                                  </p:childTnLst>
-                                </p:cTn>
-                              </p:par>
-                            </p:childTnLst>
-                          </p:cTn>
-                        </p:par>
-                      </p:childTnLst>
-                    </p:cTn>
-                  </p:par>
-                </p:childTnLst>
-              </p:cTn>
-              <p:prevCondLst>
-                <p:cond evt="onPrev" delay="0">
-                  <p:tgtEl>
-                    <p:sldTgt/>
-                  </p:tgtEl>
-                </p:cond>
-              </p:prevCondLst>
-              <p:nextCondLst>
-                <p:cond evt="onNext" delay="0">
-                  <p:tgtEl>
-                    <p:sldTgt/>
-                  </p:tgtEl>
-                </p:cond>
-              </p:nextCondLst>
-            </p:seq>
-          </p:childTnLst>
-        </p:cTn>
-      </p:par>
-    </p:tnLst>
-    <p:bldLst>
-      <p:bldP spid="5" grpId="0" build="p"/>
-    </p:bldLst>
-  </p:timing>
-</p:sld>
-</file>
-
-<file path=ppt/slides/slide20.xml><?xml version="1.0" encoding="utf-8"?>
+<file path=ppt/slides/slide19.xml><?xml version="1.0" encoding="utf-8"?>
 <p:sld xmlns:a="http://schemas.openxmlformats.org/drawingml/2006/main" xmlns:r="http://schemas.openxmlformats.org/officeDocument/2006/relationships" xmlns:p="http://schemas.openxmlformats.org/presentationml/2006/main">
   <p:cSld>
     <p:spTree>
@@ -11791,7 +11745,7 @@
           <a:p>
             <a:fld id="{B4B13859-67C5-4393-B6C2-556CF3F770C0}" type="datetime3">
               <a:rPr lang="en-US" smtClean="0"/>
-              <a:t>23 February 2026</a:t>
+              <a:t>25 February 2026</a:t>
             </a:fld>
             <a:endParaRPr lang="en-US"/>
           </a:p>
@@ -11849,7 +11803,7 @@
           <a:p>
             <a:fld id="{98AC3541-01C1-4CA5-B68F-FEE868C7D1AF}" type="slidenum">
               <a:rPr lang="en-US" smtClean="0"/>
-              <a:t>20</a:t>
+              <a:t>19</a:t>
             </a:fld>
             <a:endParaRPr lang="en-US"/>
           </a:p>
@@ -12111,7 +12065,7 @@
         <p:spPr>
           <a:xfrm>
             <a:off x="86736" y="1439035"/>
-            <a:ext cx="6999863" cy="369332"/>
+            <a:ext cx="7838990" cy="369332"/>
           </a:xfrm>
           <a:prstGeom prst="rect">
             <a:avLst/>
@@ -12130,7 +12084,7 @@
                   <a:srgbClr val="FF0000"/>
                 </a:solidFill>
               </a:rPr>
-              <a:t>Analyze this RAW hazard. What will you forward?</a:t>
+              <a:t>Analyze this RAW hazard. Will you need a stall if you have forwarding?</a:t>
             </a:r>
           </a:p>
         </p:txBody>
@@ -12464,6 +12418,1401 @@
 </p:sld>
 </file>
 
+<file path=ppt/slides/slide2.xml><?xml version="1.0" encoding="utf-8"?>
+<p:sld xmlns:a="http://schemas.openxmlformats.org/drawingml/2006/main" xmlns:r="http://schemas.openxmlformats.org/officeDocument/2006/relationships" xmlns:p="http://schemas.openxmlformats.org/presentationml/2006/main">
+  <p:cSld>
+    <p:spTree>
+      <p:nvGrpSpPr>
+        <p:cNvPr id="1" name=""/>
+        <p:cNvGrpSpPr/>
+        <p:nvPr/>
+      </p:nvGrpSpPr>
+      <p:grpSpPr>
+        <a:xfrm>
+          <a:off x="0" y="0"/>
+          <a:ext cx="0" cy="0"/>
+          <a:chOff x="0" y="0"/>
+          <a:chExt cx="0" cy="0"/>
+        </a:xfrm>
+      </p:grpSpPr>
+      <p:sp>
+        <p:nvSpPr>
+          <p:cNvPr id="2" name="Title 1">
+            <a:extLst>
+              <a:ext uri="{FF2B5EF4-FFF2-40B4-BE49-F238E27FC236}">
+                <a16:creationId xmlns:a16="http://schemas.microsoft.com/office/drawing/2014/main" id="{7CA66C2A-CA34-4E01-AD5C-78E835848737}"/>
+              </a:ext>
+            </a:extLst>
+          </p:cNvPr>
+          <p:cNvSpPr>
+            <a:spLocks noGrp="1"/>
+          </p:cNvSpPr>
+          <p:nvPr>
+            <p:ph type="title"/>
+          </p:nvPr>
+        </p:nvSpPr>
+        <p:spPr/>
+        <p:txBody>
+          <a:bodyPr/>
+          <a:lstStyle/>
+          <a:p>
+            <a:r>
+              <a:rPr lang="en-US" dirty="0"/>
+              <a:t>Microprogramming</a:t>
+            </a:r>
+          </a:p>
+        </p:txBody>
+      </p:sp>
+      <p:sp>
+        <p:nvSpPr>
+          <p:cNvPr id="4" name="Slide Number Placeholder 3">
+            <a:extLst>
+              <a:ext uri="{FF2B5EF4-FFF2-40B4-BE49-F238E27FC236}">
+                <a16:creationId xmlns:a16="http://schemas.microsoft.com/office/drawing/2014/main" id="{51BF07FB-2B66-45BE-B34D-AC1A7E92DB29}"/>
+              </a:ext>
+            </a:extLst>
+          </p:cNvPr>
+          <p:cNvSpPr>
+            <a:spLocks noGrp="1"/>
+          </p:cNvSpPr>
+          <p:nvPr>
+            <p:ph type="sldNum" sz="quarter" idx="12"/>
+          </p:nvPr>
+        </p:nvSpPr>
+        <p:spPr/>
+        <p:txBody>
+          <a:bodyPr/>
+          <a:lstStyle/>
+          <a:p>
+            <a:pPr>
+              <a:defRPr/>
+            </a:pPr>
+            <a:fld id="{E79D9D01-1391-45E0-A9C5-C04635A43651}" type="slidenum">
+              <a:rPr lang="en-US" altLang="en-US" smtClean="0"/>
+              <a:pPr>
+                <a:defRPr/>
+              </a:pPr>
+              <a:t>2</a:t>
+            </a:fld>
+            <a:endParaRPr lang="en-US" altLang="en-US"/>
+          </a:p>
+        </p:txBody>
+      </p:sp>
+      <p:sp>
+        <p:nvSpPr>
+          <p:cNvPr id="5" name="Text Placeholder 4">
+            <a:extLst>
+              <a:ext uri="{FF2B5EF4-FFF2-40B4-BE49-F238E27FC236}">
+                <a16:creationId xmlns:a16="http://schemas.microsoft.com/office/drawing/2014/main" id="{4C6DBEC6-862C-44B4-B6E4-A872E69D351E}"/>
+              </a:ext>
+            </a:extLst>
+          </p:cNvPr>
+          <p:cNvSpPr>
+            <a:spLocks noGrp="1"/>
+          </p:cNvSpPr>
+          <p:nvPr>
+            <p:ph type="body" sz="quarter" idx="13"/>
+          </p:nvPr>
+        </p:nvSpPr>
+        <p:spPr>
+          <a:xfrm>
+            <a:off x="685800" y="2667000"/>
+            <a:ext cx="7772400" cy="3124200"/>
+          </a:xfrm>
+        </p:spPr>
+        <p:txBody>
+          <a:bodyPr>
+            <a:normAutofit fontScale="85000" lnSpcReduction="10000"/>
+          </a:bodyPr>
+          <a:lstStyle/>
+          <a:p>
+            <a:pPr marL="0" indent="0">
+              <a:buNone/>
+            </a:pPr>
+            <a:r>
+              <a:rPr lang="en-US" dirty="0"/>
+              <a:t>Pain points for hardwired FSM control</a:t>
+            </a:r>
+          </a:p>
+          <a:p>
+            <a:r>
+              <a:rPr lang="en-US" dirty="0"/>
+              <a:t>State explosion for rich ISAs</a:t>
+            </a:r>
+          </a:p>
+          <a:p>
+            <a:r>
+              <a:rPr lang="en-US" dirty="0"/>
+              <a:t>Difficult to modify / extend instruction set in a modular fashion</a:t>
+            </a:r>
+          </a:p>
+          <a:p>
+            <a:r>
+              <a:rPr lang="en-US" dirty="0"/>
+              <a:t>Difficult verification (verify everything after any modification</a:t>
+            </a:r>
+          </a:p>
+          <a:p>
+            <a:r>
+              <a:rPr lang="en-US" dirty="0"/>
+              <a:t>Irregular structure – difficult to optimize in silicon</a:t>
+            </a:r>
+          </a:p>
+        </p:txBody>
+      </p:sp>
+      <p:sp>
+        <p:nvSpPr>
+          <p:cNvPr id="6" name="Date Placeholder 3">
+            <a:extLst>
+              <a:ext uri="{FF2B5EF4-FFF2-40B4-BE49-F238E27FC236}">
+                <a16:creationId xmlns:a16="http://schemas.microsoft.com/office/drawing/2014/main" id="{0F6149F9-AC43-B143-FA9F-C4BBA38720D4}"/>
+              </a:ext>
+            </a:extLst>
+          </p:cNvPr>
+          <p:cNvSpPr>
+            <a:spLocks noGrp="1"/>
+          </p:cNvSpPr>
+          <p:nvPr>
+            <p:ph type="dt" sz="half" idx="10"/>
+          </p:nvPr>
+        </p:nvSpPr>
+        <p:spPr>
+          <a:xfrm>
+            <a:off x="0" y="6599238"/>
+            <a:ext cx="1828800" cy="258762"/>
+          </a:xfrm>
+        </p:spPr>
+        <p:txBody>
+          <a:bodyPr/>
+          <a:lstStyle/>
+          <a:p>
+            <a:fld id="{B4B13859-67C5-4393-B6C2-556CF3F770C0}" type="datetime3">
+              <a:rPr lang="en-US" smtClean="0"/>
+              <a:t>25 February 2026</a:t>
+            </a:fld>
+            <a:endParaRPr lang="en-US" dirty="0"/>
+          </a:p>
+        </p:txBody>
+      </p:sp>
+    </p:spTree>
+    <p:extLst>
+      <p:ext uri="{BB962C8B-B14F-4D97-AF65-F5344CB8AC3E}">
+        <p14:creationId xmlns:p14="http://schemas.microsoft.com/office/powerpoint/2010/main" val="3753598193"/>
+      </p:ext>
+    </p:extLst>
+  </p:cSld>
+  <p:clrMapOvr>
+    <a:masterClrMapping/>
+  </p:clrMapOvr>
+  <p:timing>
+    <p:tnLst>
+      <p:par>
+        <p:cTn id="1" dur="indefinite" restart="never" nodeType="tmRoot">
+          <p:childTnLst>
+            <p:seq concurrent="1" nextAc="seek">
+              <p:cTn id="2" dur="indefinite" nodeType="mainSeq">
+                <p:childTnLst>
+                  <p:par>
+                    <p:cTn id="3" fill="hold">
+                      <p:stCondLst>
+                        <p:cond delay="indefinite"/>
+                      </p:stCondLst>
+                      <p:childTnLst>
+                        <p:par>
+                          <p:cTn id="4" fill="hold">
+                            <p:stCondLst>
+                              <p:cond delay="0"/>
+                            </p:stCondLst>
+                            <p:childTnLst>
+                              <p:par>
+                                <p:cTn id="5" presetID="1" presetClass="entr" presetSubtype="0" fill="hold" grpId="0" nodeType="clickEffect">
+                                  <p:stCondLst>
+                                    <p:cond delay="0"/>
+                                  </p:stCondLst>
+                                  <p:childTnLst>
+                                    <p:set>
+                                      <p:cBhvr>
+                                        <p:cTn id="6" dur="1" fill="hold">
+                                          <p:stCondLst>
+                                            <p:cond delay="0"/>
+                                          </p:stCondLst>
+                                        </p:cTn>
+                                        <p:tgtEl>
+                                          <p:spTgt spid="5">
+                                            <p:txEl>
+                                              <p:pRg st="0" end="0"/>
+                                            </p:txEl>
+                                          </p:spTgt>
+                                        </p:tgtEl>
+                                        <p:attrNameLst>
+                                          <p:attrName>style.visibility</p:attrName>
+                                        </p:attrNameLst>
+                                      </p:cBhvr>
+                                      <p:to>
+                                        <p:strVal val="visible"/>
+                                      </p:to>
+                                    </p:set>
+                                  </p:childTnLst>
+                                </p:cTn>
+                              </p:par>
+                            </p:childTnLst>
+                          </p:cTn>
+                        </p:par>
+                      </p:childTnLst>
+                    </p:cTn>
+                  </p:par>
+                  <p:par>
+                    <p:cTn id="7" fill="hold">
+                      <p:stCondLst>
+                        <p:cond delay="indefinite"/>
+                      </p:stCondLst>
+                      <p:childTnLst>
+                        <p:par>
+                          <p:cTn id="8" fill="hold">
+                            <p:stCondLst>
+                              <p:cond delay="0"/>
+                            </p:stCondLst>
+                            <p:childTnLst>
+                              <p:par>
+                                <p:cTn id="9" presetID="1" presetClass="entr" presetSubtype="0" fill="hold" grpId="0" nodeType="clickEffect">
+                                  <p:stCondLst>
+                                    <p:cond delay="0"/>
+                                  </p:stCondLst>
+                                  <p:childTnLst>
+                                    <p:set>
+                                      <p:cBhvr>
+                                        <p:cTn id="10" dur="1" fill="hold">
+                                          <p:stCondLst>
+                                            <p:cond delay="0"/>
+                                          </p:stCondLst>
+                                        </p:cTn>
+                                        <p:tgtEl>
+                                          <p:spTgt spid="5">
+                                            <p:txEl>
+                                              <p:pRg st="1" end="1"/>
+                                            </p:txEl>
+                                          </p:spTgt>
+                                        </p:tgtEl>
+                                        <p:attrNameLst>
+                                          <p:attrName>style.visibility</p:attrName>
+                                        </p:attrNameLst>
+                                      </p:cBhvr>
+                                      <p:to>
+                                        <p:strVal val="visible"/>
+                                      </p:to>
+                                    </p:set>
+                                  </p:childTnLst>
+                                </p:cTn>
+                              </p:par>
+                            </p:childTnLst>
+                          </p:cTn>
+                        </p:par>
+                      </p:childTnLst>
+                    </p:cTn>
+                  </p:par>
+                  <p:par>
+                    <p:cTn id="11" fill="hold">
+                      <p:stCondLst>
+                        <p:cond delay="indefinite"/>
+                      </p:stCondLst>
+                      <p:childTnLst>
+                        <p:par>
+                          <p:cTn id="12" fill="hold">
+                            <p:stCondLst>
+                              <p:cond delay="0"/>
+                            </p:stCondLst>
+                            <p:childTnLst>
+                              <p:par>
+                                <p:cTn id="13" presetID="1" presetClass="entr" presetSubtype="0" fill="hold" grpId="0" nodeType="clickEffect">
+                                  <p:stCondLst>
+                                    <p:cond delay="0"/>
+                                  </p:stCondLst>
+                                  <p:childTnLst>
+                                    <p:set>
+                                      <p:cBhvr>
+                                        <p:cTn id="14" dur="1" fill="hold">
+                                          <p:stCondLst>
+                                            <p:cond delay="0"/>
+                                          </p:stCondLst>
+                                        </p:cTn>
+                                        <p:tgtEl>
+                                          <p:spTgt spid="5">
+                                            <p:txEl>
+                                              <p:pRg st="2" end="2"/>
+                                            </p:txEl>
+                                          </p:spTgt>
+                                        </p:tgtEl>
+                                        <p:attrNameLst>
+                                          <p:attrName>style.visibility</p:attrName>
+                                        </p:attrNameLst>
+                                      </p:cBhvr>
+                                      <p:to>
+                                        <p:strVal val="visible"/>
+                                      </p:to>
+                                    </p:set>
+                                  </p:childTnLst>
+                                </p:cTn>
+                              </p:par>
+                            </p:childTnLst>
+                          </p:cTn>
+                        </p:par>
+                      </p:childTnLst>
+                    </p:cTn>
+                  </p:par>
+                  <p:par>
+                    <p:cTn id="15" fill="hold">
+                      <p:stCondLst>
+                        <p:cond delay="indefinite"/>
+                      </p:stCondLst>
+                      <p:childTnLst>
+                        <p:par>
+                          <p:cTn id="16" fill="hold">
+                            <p:stCondLst>
+                              <p:cond delay="0"/>
+                            </p:stCondLst>
+                            <p:childTnLst>
+                              <p:par>
+                                <p:cTn id="17" presetID="1" presetClass="entr" presetSubtype="0" fill="hold" grpId="0" nodeType="clickEffect">
+                                  <p:stCondLst>
+                                    <p:cond delay="0"/>
+                                  </p:stCondLst>
+                                  <p:childTnLst>
+                                    <p:set>
+                                      <p:cBhvr>
+                                        <p:cTn id="18" dur="1" fill="hold">
+                                          <p:stCondLst>
+                                            <p:cond delay="0"/>
+                                          </p:stCondLst>
+                                        </p:cTn>
+                                        <p:tgtEl>
+                                          <p:spTgt spid="5">
+                                            <p:txEl>
+                                              <p:pRg st="3" end="3"/>
+                                            </p:txEl>
+                                          </p:spTgt>
+                                        </p:tgtEl>
+                                        <p:attrNameLst>
+                                          <p:attrName>style.visibility</p:attrName>
+                                        </p:attrNameLst>
+                                      </p:cBhvr>
+                                      <p:to>
+                                        <p:strVal val="visible"/>
+                                      </p:to>
+                                    </p:set>
+                                  </p:childTnLst>
+                                </p:cTn>
+                              </p:par>
+                            </p:childTnLst>
+                          </p:cTn>
+                        </p:par>
+                      </p:childTnLst>
+                    </p:cTn>
+                  </p:par>
+                  <p:par>
+                    <p:cTn id="19" fill="hold">
+                      <p:stCondLst>
+                        <p:cond delay="indefinite"/>
+                      </p:stCondLst>
+                      <p:childTnLst>
+                        <p:par>
+                          <p:cTn id="20" fill="hold">
+                            <p:stCondLst>
+                              <p:cond delay="0"/>
+                            </p:stCondLst>
+                            <p:childTnLst>
+                              <p:par>
+                                <p:cTn id="21" presetID="1" presetClass="entr" presetSubtype="0" fill="hold" grpId="0" nodeType="clickEffect">
+                                  <p:stCondLst>
+                                    <p:cond delay="0"/>
+                                  </p:stCondLst>
+                                  <p:childTnLst>
+                                    <p:set>
+                                      <p:cBhvr>
+                                        <p:cTn id="22" dur="1" fill="hold">
+                                          <p:stCondLst>
+                                            <p:cond delay="0"/>
+                                          </p:stCondLst>
+                                        </p:cTn>
+                                        <p:tgtEl>
+                                          <p:spTgt spid="5">
+                                            <p:txEl>
+                                              <p:pRg st="4" end="4"/>
+                                            </p:txEl>
+                                          </p:spTgt>
+                                        </p:tgtEl>
+                                        <p:attrNameLst>
+                                          <p:attrName>style.visibility</p:attrName>
+                                        </p:attrNameLst>
+                                      </p:cBhvr>
+                                      <p:to>
+                                        <p:strVal val="visible"/>
+                                      </p:to>
+                                    </p:set>
+                                  </p:childTnLst>
+                                </p:cTn>
+                              </p:par>
+                            </p:childTnLst>
+                          </p:cTn>
+                        </p:par>
+                      </p:childTnLst>
+                    </p:cTn>
+                  </p:par>
+                </p:childTnLst>
+              </p:cTn>
+              <p:prevCondLst>
+                <p:cond evt="onPrev" delay="0">
+                  <p:tgtEl>
+                    <p:sldTgt/>
+                  </p:tgtEl>
+                </p:cond>
+              </p:prevCondLst>
+              <p:nextCondLst>
+                <p:cond evt="onNext" delay="0">
+                  <p:tgtEl>
+                    <p:sldTgt/>
+                  </p:tgtEl>
+                </p:cond>
+              </p:nextCondLst>
+            </p:seq>
+          </p:childTnLst>
+        </p:cTn>
+      </p:par>
+    </p:tnLst>
+    <p:bldLst>
+      <p:bldP spid="5" grpId="0" build="p"/>
+    </p:bldLst>
+  </p:timing>
+</p:sld>
+</file>
+
+<file path=ppt/slides/slide20.xml><?xml version="1.0" encoding="utf-8"?>
+<p:sld xmlns:a="http://schemas.openxmlformats.org/drawingml/2006/main" xmlns:r="http://schemas.openxmlformats.org/officeDocument/2006/relationships" xmlns:p="http://schemas.openxmlformats.org/presentationml/2006/main">
+  <p:cSld>
+    <p:spTree>
+      <p:nvGrpSpPr>
+        <p:cNvPr id="1" name=""/>
+        <p:cNvGrpSpPr/>
+        <p:nvPr/>
+      </p:nvGrpSpPr>
+      <p:grpSpPr>
+        <a:xfrm>
+          <a:off x="0" y="0"/>
+          <a:ext cx="0" cy="0"/>
+          <a:chOff x="0" y="0"/>
+          <a:chExt cx="0" cy="0"/>
+        </a:xfrm>
+      </p:grpSpPr>
+      <p:sp>
+        <p:nvSpPr>
+          <p:cNvPr id="2" name="Title 1">
+            <a:extLst>
+              <a:ext uri="{FF2B5EF4-FFF2-40B4-BE49-F238E27FC236}">
+                <a16:creationId xmlns:a16="http://schemas.microsoft.com/office/drawing/2014/main" id="{E76FFE9D-BCA6-DD0B-8684-5C0BB52455CE}"/>
+              </a:ext>
+            </a:extLst>
+          </p:cNvPr>
+          <p:cNvSpPr>
+            <a:spLocks noGrp="1"/>
+          </p:cNvSpPr>
+          <p:nvPr>
+            <p:ph type="title"/>
+          </p:nvPr>
+        </p:nvSpPr>
+        <p:spPr/>
+        <p:txBody>
+          <a:bodyPr/>
+          <a:lstStyle/>
+          <a:p>
+            <a:r>
+              <a:rPr lang="en-US" dirty="0"/>
+              <a:t>Control hazards – branch stalls</a:t>
+            </a:r>
+          </a:p>
+        </p:txBody>
+      </p:sp>
+      <p:sp>
+        <p:nvSpPr>
+          <p:cNvPr id="3" name="Content Placeholder 2">
+            <a:extLst>
+              <a:ext uri="{FF2B5EF4-FFF2-40B4-BE49-F238E27FC236}">
+                <a16:creationId xmlns:a16="http://schemas.microsoft.com/office/drawing/2014/main" id="{02B480BE-1051-AEC8-2AFF-0FCCE78B3617}"/>
+              </a:ext>
+            </a:extLst>
+          </p:cNvPr>
+          <p:cNvSpPr>
+            <a:spLocks noGrp="1"/>
+          </p:cNvSpPr>
+          <p:nvPr>
+            <p:ph idx="1"/>
+          </p:nvPr>
+        </p:nvSpPr>
+        <p:spPr>
+          <a:xfrm>
+            <a:off x="94576" y="1609809"/>
+            <a:ext cx="8840559" cy="3963076"/>
+          </a:xfrm>
+        </p:spPr>
+        <p:txBody>
+          <a:bodyPr/>
+          <a:lstStyle/>
+          <a:p>
+            <a:r>
+              <a:rPr lang="en-US" dirty="0"/>
+              <a:t>Fetching next instruction depends on branch outcome</a:t>
+            </a:r>
+          </a:p>
+          <a:p>
+            <a:r>
+              <a:rPr lang="en-US" dirty="0"/>
+              <a:t>Pipeline can’t always fetch correct instruction</a:t>
+            </a:r>
+          </a:p>
+          <a:p>
+            <a:r>
+              <a:rPr lang="en-US" dirty="0"/>
+              <a:t>Result isn’t known until end of execute</a:t>
+            </a:r>
+          </a:p>
+        </p:txBody>
+      </p:sp>
+      <p:sp>
+        <p:nvSpPr>
+          <p:cNvPr id="4" name="Date Placeholder 3">
+            <a:extLst>
+              <a:ext uri="{FF2B5EF4-FFF2-40B4-BE49-F238E27FC236}">
+                <a16:creationId xmlns:a16="http://schemas.microsoft.com/office/drawing/2014/main" id="{EDE9F410-2088-105F-7AAA-BAD2997804A3}"/>
+              </a:ext>
+            </a:extLst>
+          </p:cNvPr>
+          <p:cNvSpPr>
+            <a:spLocks noGrp="1"/>
+          </p:cNvSpPr>
+          <p:nvPr>
+            <p:ph type="dt" sz="half" idx="10"/>
+          </p:nvPr>
+        </p:nvSpPr>
+        <p:spPr/>
+        <p:txBody>
+          <a:bodyPr/>
+          <a:lstStyle/>
+          <a:p>
+            <a:fld id="{B4B13859-67C5-4393-B6C2-556CF3F770C0}" type="datetime3">
+              <a:rPr lang="en-US" smtClean="0"/>
+              <a:t>25 February 2026</a:t>
+            </a:fld>
+            <a:endParaRPr lang="en-US"/>
+          </a:p>
+        </p:txBody>
+      </p:sp>
+      <p:sp>
+        <p:nvSpPr>
+          <p:cNvPr id="5" name="Footer Placeholder 4">
+            <a:extLst>
+              <a:ext uri="{FF2B5EF4-FFF2-40B4-BE49-F238E27FC236}">
+                <a16:creationId xmlns:a16="http://schemas.microsoft.com/office/drawing/2014/main" id="{A6241A9F-BC2B-FA38-B089-ED71A646CE58}"/>
+              </a:ext>
+            </a:extLst>
+          </p:cNvPr>
+          <p:cNvSpPr>
+            <a:spLocks noGrp="1"/>
+          </p:cNvSpPr>
+          <p:nvPr>
+            <p:ph type="ftr" sz="quarter" idx="11"/>
+          </p:nvPr>
+        </p:nvSpPr>
+        <p:spPr/>
+        <p:txBody>
+          <a:bodyPr/>
+          <a:lstStyle/>
+          <a:p>
+            <a:r>
+              <a:rPr lang="en-US"/>
+              <a:t>ELL305: Computer Architecture</a:t>
+            </a:r>
+            <a:endParaRPr lang="en-US" dirty="0"/>
+          </a:p>
+        </p:txBody>
+      </p:sp>
+      <p:sp>
+        <p:nvSpPr>
+          <p:cNvPr id="6" name="Slide Number Placeholder 5">
+            <a:extLst>
+              <a:ext uri="{FF2B5EF4-FFF2-40B4-BE49-F238E27FC236}">
+                <a16:creationId xmlns:a16="http://schemas.microsoft.com/office/drawing/2014/main" id="{1E61EE2C-7B2D-89FD-6E96-E90F02B1DB42}"/>
+              </a:ext>
+            </a:extLst>
+          </p:cNvPr>
+          <p:cNvSpPr>
+            <a:spLocks noGrp="1"/>
+          </p:cNvSpPr>
+          <p:nvPr>
+            <p:ph type="sldNum" sz="quarter" idx="12"/>
+          </p:nvPr>
+        </p:nvSpPr>
+        <p:spPr/>
+        <p:txBody>
+          <a:bodyPr/>
+          <a:lstStyle/>
+          <a:p>
+            <a:fld id="{98AC3541-01C1-4CA5-B68F-FEE868C7D1AF}" type="slidenum">
+              <a:rPr lang="en-US" smtClean="0"/>
+              <a:t>20</a:t>
+            </a:fld>
+            <a:endParaRPr lang="en-US"/>
+          </a:p>
+        </p:txBody>
+      </p:sp>
+    </p:spTree>
+    <p:extLst>
+      <p:ext uri="{BB962C8B-B14F-4D97-AF65-F5344CB8AC3E}">
+        <p14:creationId xmlns:p14="http://schemas.microsoft.com/office/powerpoint/2010/main" val="1634247576"/>
+      </p:ext>
+    </p:extLst>
+  </p:cSld>
+  <p:clrMapOvr>
+    <a:masterClrMapping/>
+  </p:clrMapOvr>
+</p:sld>
+</file>
+
+<file path=ppt/slides/slide21.xml><?xml version="1.0" encoding="utf-8"?>
+<p:sld xmlns:a="http://schemas.openxmlformats.org/drawingml/2006/main" xmlns:r="http://schemas.openxmlformats.org/officeDocument/2006/relationships" xmlns:p="http://schemas.openxmlformats.org/presentationml/2006/main">
+  <p:cSld>
+    <p:spTree>
+      <p:nvGrpSpPr>
+        <p:cNvPr id="1" name=""/>
+        <p:cNvGrpSpPr/>
+        <p:nvPr/>
+      </p:nvGrpSpPr>
+      <p:grpSpPr>
+        <a:xfrm>
+          <a:off x="0" y="0"/>
+          <a:ext cx="0" cy="0"/>
+          <a:chOff x="0" y="0"/>
+          <a:chExt cx="0" cy="0"/>
+        </a:xfrm>
+      </p:grpSpPr>
+      <p:sp>
+        <p:nvSpPr>
+          <p:cNvPr id="2" name="Title 1">
+            <a:extLst>
+              <a:ext uri="{FF2B5EF4-FFF2-40B4-BE49-F238E27FC236}">
+                <a16:creationId xmlns:a16="http://schemas.microsoft.com/office/drawing/2014/main" id="{E76FFE9D-BCA6-DD0B-8684-5C0BB52455CE}"/>
+              </a:ext>
+            </a:extLst>
+          </p:cNvPr>
+          <p:cNvSpPr>
+            <a:spLocks noGrp="1"/>
+          </p:cNvSpPr>
+          <p:nvPr>
+            <p:ph type="title"/>
+          </p:nvPr>
+        </p:nvSpPr>
+        <p:spPr/>
+        <p:txBody>
+          <a:bodyPr/>
+          <a:lstStyle/>
+          <a:p>
+            <a:r>
+              <a:rPr lang="en-US" dirty="0"/>
+              <a:t>Control hazards – branch stalls</a:t>
+            </a:r>
+          </a:p>
+        </p:txBody>
+      </p:sp>
+      <p:sp>
+        <p:nvSpPr>
+          <p:cNvPr id="3" name="Content Placeholder 2">
+            <a:extLst>
+              <a:ext uri="{FF2B5EF4-FFF2-40B4-BE49-F238E27FC236}">
+                <a16:creationId xmlns:a16="http://schemas.microsoft.com/office/drawing/2014/main" id="{02B480BE-1051-AEC8-2AFF-0FCCE78B3617}"/>
+              </a:ext>
+            </a:extLst>
+          </p:cNvPr>
+          <p:cNvSpPr>
+            <a:spLocks noGrp="1"/>
+          </p:cNvSpPr>
+          <p:nvPr>
+            <p:ph idx="1"/>
+          </p:nvPr>
+        </p:nvSpPr>
+        <p:spPr>
+          <a:xfrm>
+            <a:off x="94576" y="1609809"/>
+            <a:ext cx="8840559" cy="970514"/>
+          </a:xfrm>
+        </p:spPr>
+        <p:txBody>
+          <a:bodyPr/>
+          <a:lstStyle/>
+          <a:p>
+            <a:r>
+              <a:rPr lang="en-US" dirty="0"/>
+              <a:t>If branch not taken, then instructions fetched sequentially after branch are correct</a:t>
+            </a:r>
+          </a:p>
+          <a:p>
+            <a:r>
+              <a:rPr lang="en-US" dirty="0"/>
+              <a:t>If branch or jump taken, then need to flush incorrect instructions from pipeline by converting to NOPs</a:t>
+            </a:r>
+          </a:p>
+        </p:txBody>
+      </p:sp>
+      <p:sp>
+        <p:nvSpPr>
+          <p:cNvPr id="4" name="Date Placeholder 3">
+            <a:extLst>
+              <a:ext uri="{FF2B5EF4-FFF2-40B4-BE49-F238E27FC236}">
+                <a16:creationId xmlns:a16="http://schemas.microsoft.com/office/drawing/2014/main" id="{EDE9F410-2088-105F-7AAA-BAD2997804A3}"/>
+              </a:ext>
+            </a:extLst>
+          </p:cNvPr>
+          <p:cNvSpPr>
+            <a:spLocks noGrp="1"/>
+          </p:cNvSpPr>
+          <p:nvPr>
+            <p:ph type="dt" sz="half" idx="10"/>
+          </p:nvPr>
+        </p:nvSpPr>
+        <p:spPr/>
+        <p:txBody>
+          <a:bodyPr/>
+          <a:lstStyle/>
+          <a:p>
+            <a:fld id="{B4B13859-67C5-4393-B6C2-556CF3F770C0}" type="datetime3">
+              <a:rPr lang="en-US" smtClean="0"/>
+              <a:t>25 February 2026</a:t>
+            </a:fld>
+            <a:endParaRPr lang="en-US"/>
+          </a:p>
+        </p:txBody>
+      </p:sp>
+      <p:sp>
+        <p:nvSpPr>
+          <p:cNvPr id="5" name="Footer Placeholder 4">
+            <a:extLst>
+              <a:ext uri="{FF2B5EF4-FFF2-40B4-BE49-F238E27FC236}">
+                <a16:creationId xmlns:a16="http://schemas.microsoft.com/office/drawing/2014/main" id="{A6241A9F-BC2B-FA38-B089-ED71A646CE58}"/>
+              </a:ext>
+            </a:extLst>
+          </p:cNvPr>
+          <p:cNvSpPr>
+            <a:spLocks noGrp="1"/>
+          </p:cNvSpPr>
+          <p:nvPr>
+            <p:ph type="ftr" sz="quarter" idx="11"/>
+          </p:nvPr>
+        </p:nvSpPr>
+        <p:spPr/>
+        <p:txBody>
+          <a:bodyPr/>
+          <a:lstStyle/>
+          <a:p>
+            <a:r>
+              <a:rPr lang="en-US"/>
+              <a:t>ELL305: Computer Architecture</a:t>
+            </a:r>
+            <a:endParaRPr lang="en-US" dirty="0"/>
+          </a:p>
+        </p:txBody>
+      </p:sp>
+      <p:sp>
+        <p:nvSpPr>
+          <p:cNvPr id="6" name="Slide Number Placeholder 5">
+            <a:extLst>
+              <a:ext uri="{FF2B5EF4-FFF2-40B4-BE49-F238E27FC236}">
+                <a16:creationId xmlns:a16="http://schemas.microsoft.com/office/drawing/2014/main" id="{1E61EE2C-7B2D-89FD-6E96-E90F02B1DB42}"/>
+              </a:ext>
+            </a:extLst>
+          </p:cNvPr>
+          <p:cNvSpPr>
+            <a:spLocks noGrp="1"/>
+          </p:cNvSpPr>
+          <p:nvPr>
+            <p:ph type="sldNum" sz="quarter" idx="12"/>
+          </p:nvPr>
+        </p:nvSpPr>
+        <p:spPr/>
+        <p:txBody>
+          <a:bodyPr/>
+          <a:lstStyle/>
+          <a:p>
+            <a:fld id="{98AC3541-01C1-4CA5-B68F-FEE868C7D1AF}" type="slidenum">
+              <a:rPr lang="en-US" smtClean="0"/>
+              <a:t>21</a:t>
+            </a:fld>
+            <a:endParaRPr lang="en-US"/>
+          </a:p>
+        </p:txBody>
+      </p:sp>
+      <p:pic>
+        <p:nvPicPr>
+          <p:cNvPr id="8" name="Picture 7">
+            <a:extLst>
+              <a:ext uri="{FF2B5EF4-FFF2-40B4-BE49-F238E27FC236}">
+                <a16:creationId xmlns:a16="http://schemas.microsoft.com/office/drawing/2014/main" id="{976CBBC5-B016-142A-2AA3-63460A35626D}"/>
+              </a:ext>
+            </a:extLst>
+          </p:cNvPr>
+          <p:cNvPicPr>
+            <a:picLocks noChangeAspect="1"/>
+          </p:cNvPicPr>
+          <p:nvPr/>
+        </p:nvPicPr>
+        <p:blipFill>
+          <a:blip r:embed="rId3"/>
+          <a:stretch>
+            <a:fillRect/>
+          </a:stretch>
+        </p:blipFill>
+        <p:spPr>
+          <a:xfrm>
+            <a:off x="2654876" y="3886200"/>
+            <a:ext cx="6394549" cy="2593544"/>
+          </a:xfrm>
+          <a:prstGeom prst="rect">
+            <a:avLst/>
+          </a:prstGeom>
+        </p:spPr>
+      </p:pic>
+      <p:sp>
+        <p:nvSpPr>
+          <p:cNvPr id="9" name="TextBox 8">
+            <a:extLst>
+              <a:ext uri="{FF2B5EF4-FFF2-40B4-BE49-F238E27FC236}">
+                <a16:creationId xmlns:a16="http://schemas.microsoft.com/office/drawing/2014/main" id="{E93AB98E-AE89-0F6D-10AE-E78AED97536E}"/>
+              </a:ext>
+            </a:extLst>
+          </p:cNvPr>
+          <p:cNvSpPr txBox="1"/>
+          <p:nvPr/>
+        </p:nvSpPr>
+        <p:spPr>
+          <a:xfrm>
+            <a:off x="208865" y="4499617"/>
+            <a:ext cx="2446011" cy="1754326"/>
+          </a:xfrm>
+          <a:prstGeom prst="rect">
+            <a:avLst/>
+          </a:prstGeom>
+          <a:noFill/>
+        </p:spPr>
+        <p:txBody>
+          <a:bodyPr wrap="square">
+            <a:spAutoFit/>
+          </a:bodyPr>
+          <a:lstStyle/>
+          <a:p>
+            <a:r>
+              <a:rPr lang="en-US" dirty="0"/>
+              <a:t>Branch prediction</a:t>
+            </a:r>
+          </a:p>
+          <a:p>
+            <a:endParaRPr lang="en-US" dirty="0"/>
+          </a:p>
+          <a:p>
+            <a:r>
+              <a:rPr lang="en-US" dirty="0"/>
+              <a:t>Branch history tables</a:t>
+            </a:r>
+          </a:p>
+          <a:p>
+            <a:endParaRPr lang="en-US" dirty="0"/>
+          </a:p>
+          <a:p>
+            <a:r>
+              <a:rPr lang="en-US" dirty="0"/>
+              <a:t>Many more innovations…</a:t>
+            </a:r>
+          </a:p>
+        </p:txBody>
+      </p:sp>
+    </p:spTree>
+    <p:extLst>
+      <p:ext uri="{BB962C8B-B14F-4D97-AF65-F5344CB8AC3E}">
+        <p14:creationId xmlns:p14="http://schemas.microsoft.com/office/powerpoint/2010/main" val="1316068338"/>
+      </p:ext>
+    </p:extLst>
+  </p:cSld>
+  <p:clrMapOvr>
+    <a:masterClrMapping/>
+  </p:clrMapOvr>
+  <p:timing>
+    <p:tnLst>
+      <p:par>
+        <p:cTn id="1" dur="indefinite" restart="never" nodeType="tmRoot">
+          <p:childTnLst>
+            <p:seq concurrent="1" nextAc="seek">
+              <p:cTn id="2" dur="indefinite" nodeType="mainSeq">
+                <p:childTnLst>
+                  <p:par>
+                    <p:cTn id="3" fill="hold">
+                      <p:stCondLst>
+                        <p:cond delay="indefinite"/>
+                      </p:stCondLst>
+                      <p:childTnLst>
+                        <p:par>
+                          <p:cTn id="4" fill="hold">
+                            <p:stCondLst>
+                              <p:cond delay="0"/>
+                            </p:stCondLst>
+                            <p:childTnLst>
+                              <p:par>
+                                <p:cTn id="5" presetID="1" presetClass="entr" presetSubtype="0" fill="hold" grpId="0" nodeType="clickEffect">
+                                  <p:stCondLst>
+                                    <p:cond delay="0"/>
+                                  </p:stCondLst>
+                                  <p:childTnLst>
+                                    <p:set>
+                                      <p:cBhvr>
+                                        <p:cTn id="6" dur="1" fill="hold">
+                                          <p:stCondLst>
+                                            <p:cond delay="0"/>
+                                          </p:stCondLst>
+                                        </p:cTn>
+                                        <p:tgtEl>
+                                          <p:spTgt spid="3">
+                                            <p:txEl>
+                                              <p:pRg st="0" end="0"/>
+                                            </p:txEl>
+                                          </p:spTgt>
+                                        </p:tgtEl>
+                                        <p:attrNameLst>
+                                          <p:attrName>style.visibility</p:attrName>
+                                        </p:attrNameLst>
+                                      </p:cBhvr>
+                                      <p:to>
+                                        <p:strVal val="visible"/>
+                                      </p:to>
+                                    </p:set>
+                                  </p:childTnLst>
+                                </p:cTn>
+                              </p:par>
+                            </p:childTnLst>
+                          </p:cTn>
+                        </p:par>
+                      </p:childTnLst>
+                    </p:cTn>
+                  </p:par>
+                  <p:par>
+                    <p:cTn id="7" fill="hold">
+                      <p:stCondLst>
+                        <p:cond delay="indefinite"/>
+                      </p:stCondLst>
+                      <p:childTnLst>
+                        <p:par>
+                          <p:cTn id="8" fill="hold">
+                            <p:stCondLst>
+                              <p:cond delay="0"/>
+                            </p:stCondLst>
+                            <p:childTnLst>
+                              <p:par>
+                                <p:cTn id="9" presetID="1" presetClass="entr" presetSubtype="0" fill="hold" grpId="0" nodeType="clickEffect">
+                                  <p:stCondLst>
+                                    <p:cond delay="0"/>
+                                  </p:stCondLst>
+                                  <p:childTnLst>
+                                    <p:set>
+                                      <p:cBhvr>
+                                        <p:cTn id="10" dur="1" fill="hold">
+                                          <p:stCondLst>
+                                            <p:cond delay="0"/>
+                                          </p:stCondLst>
+                                        </p:cTn>
+                                        <p:tgtEl>
+                                          <p:spTgt spid="3">
+                                            <p:txEl>
+                                              <p:pRg st="1" end="1"/>
+                                            </p:txEl>
+                                          </p:spTgt>
+                                        </p:tgtEl>
+                                        <p:attrNameLst>
+                                          <p:attrName>style.visibility</p:attrName>
+                                        </p:attrNameLst>
+                                      </p:cBhvr>
+                                      <p:to>
+                                        <p:strVal val="visible"/>
+                                      </p:to>
+                                    </p:set>
+                                  </p:childTnLst>
+                                </p:cTn>
+                              </p:par>
+                            </p:childTnLst>
+                          </p:cTn>
+                        </p:par>
+                      </p:childTnLst>
+                    </p:cTn>
+                  </p:par>
+                  <p:par>
+                    <p:cTn id="11" fill="hold">
+                      <p:stCondLst>
+                        <p:cond delay="indefinite"/>
+                      </p:stCondLst>
+                      <p:childTnLst>
+                        <p:par>
+                          <p:cTn id="12" fill="hold">
+                            <p:stCondLst>
+                              <p:cond delay="0"/>
+                            </p:stCondLst>
+                            <p:childTnLst>
+                              <p:par>
+                                <p:cTn id="13" presetID="1" presetClass="entr" presetSubtype="0" fill="hold" nodeType="clickEffect">
+                                  <p:stCondLst>
+                                    <p:cond delay="0"/>
+                                  </p:stCondLst>
+                                  <p:childTnLst>
+                                    <p:set>
+                                      <p:cBhvr>
+                                        <p:cTn id="14" dur="1" fill="hold">
+                                          <p:stCondLst>
+                                            <p:cond delay="0"/>
+                                          </p:stCondLst>
+                                        </p:cTn>
+                                        <p:tgtEl>
+                                          <p:spTgt spid="8"/>
+                                        </p:tgtEl>
+                                        <p:attrNameLst>
+                                          <p:attrName>style.visibility</p:attrName>
+                                        </p:attrNameLst>
+                                      </p:cBhvr>
+                                      <p:to>
+                                        <p:strVal val="visible"/>
+                                      </p:to>
+                                    </p:set>
+                                  </p:childTnLst>
+                                </p:cTn>
+                              </p:par>
+                            </p:childTnLst>
+                          </p:cTn>
+                        </p:par>
+                      </p:childTnLst>
+                    </p:cTn>
+                  </p:par>
+                  <p:par>
+                    <p:cTn id="15" fill="hold">
+                      <p:stCondLst>
+                        <p:cond delay="indefinite"/>
+                      </p:stCondLst>
+                      <p:childTnLst>
+                        <p:par>
+                          <p:cTn id="16" fill="hold">
+                            <p:stCondLst>
+                              <p:cond delay="0"/>
+                            </p:stCondLst>
+                            <p:childTnLst>
+                              <p:par>
+                                <p:cTn id="17" presetID="1" presetClass="entr" presetSubtype="0" fill="hold" grpId="0" nodeType="clickEffect">
+                                  <p:stCondLst>
+                                    <p:cond delay="0"/>
+                                  </p:stCondLst>
+                                  <p:childTnLst>
+                                    <p:set>
+                                      <p:cBhvr>
+                                        <p:cTn id="18" dur="1" fill="hold">
+                                          <p:stCondLst>
+                                            <p:cond delay="0"/>
+                                          </p:stCondLst>
+                                        </p:cTn>
+                                        <p:tgtEl>
+                                          <p:spTgt spid="9">
+                                            <p:txEl>
+                                              <p:pRg st="0" end="0"/>
+                                            </p:txEl>
+                                          </p:spTgt>
+                                        </p:tgtEl>
+                                        <p:attrNameLst>
+                                          <p:attrName>style.visibility</p:attrName>
+                                        </p:attrNameLst>
+                                      </p:cBhvr>
+                                      <p:to>
+                                        <p:strVal val="visible"/>
+                                      </p:to>
+                                    </p:set>
+                                  </p:childTnLst>
+                                </p:cTn>
+                              </p:par>
+                            </p:childTnLst>
+                          </p:cTn>
+                        </p:par>
+                      </p:childTnLst>
+                    </p:cTn>
+                  </p:par>
+                  <p:par>
+                    <p:cTn id="19" fill="hold">
+                      <p:stCondLst>
+                        <p:cond delay="indefinite"/>
+                      </p:stCondLst>
+                      <p:childTnLst>
+                        <p:par>
+                          <p:cTn id="20" fill="hold">
+                            <p:stCondLst>
+                              <p:cond delay="0"/>
+                            </p:stCondLst>
+                            <p:childTnLst>
+                              <p:par>
+                                <p:cTn id="21" presetID="1" presetClass="entr" presetSubtype="0" fill="hold" grpId="0" nodeType="clickEffect">
+                                  <p:stCondLst>
+                                    <p:cond delay="0"/>
+                                  </p:stCondLst>
+                                  <p:childTnLst>
+                                    <p:set>
+                                      <p:cBhvr>
+                                        <p:cTn id="22" dur="1" fill="hold">
+                                          <p:stCondLst>
+                                            <p:cond delay="0"/>
+                                          </p:stCondLst>
+                                        </p:cTn>
+                                        <p:tgtEl>
+                                          <p:spTgt spid="9">
+                                            <p:txEl>
+                                              <p:pRg st="2" end="2"/>
+                                            </p:txEl>
+                                          </p:spTgt>
+                                        </p:tgtEl>
+                                        <p:attrNameLst>
+                                          <p:attrName>style.visibility</p:attrName>
+                                        </p:attrNameLst>
+                                      </p:cBhvr>
+                                      <p:to>
+                                        <p:strVal val="visible"/>
+                                      </p:to>
+                                    </p:set>
+                                  </p:childTnLst>
+                                </p:cTn>
+                              </p:par>
+                            </p:childTnLst>
+                          </p:cTn>
+                        </p:par>
+                      </p:childTnLst>
+                    </p:cTn>
+                  </p:par>
+                  <p:par>
+                    <p:cTn id="23" fill="hold">
+                      <p:stCondLst>
+                        <p:cond delay="indefinite"/>
+                      </p:stCondLst>
+                      <p:childTnLst>
+                        <p:par>
+                          <p:cTn id="24" fill="hold">
+                            <p:stCondLst>
+                              <p:cond delay="0"/>
+                            </p:stCondLst>
+                            <p:childTnLst>
+                              <p:par>
+                                <p:cTn id="25" presetID="1" presetClass="entr" presetSubtype="0" fill="hold" grpId="0" nodeType="clickEffect">
+                                  <p:stCondLst>
+                                    <p:cond delay="0"/>
+                                  </p:stCondLst>
+                                  <p:childTnLst>
+                                    <p:set>
+                                      <p:cBhvr>
+                                        <p:cTn id="26" dur="1" fill="hold">
+                                          <p:stCondLst>
+                                            <p:cond delay="0"/>
+                                          </p:stCondLst>
+                                        </p:cTn>
+                                        <p:tgtEl>
+                                          <p:spTgt spid="9">
+                                            <p:txEl>
+                                              <p:pRg st="4" end="4"/>
+                                            </p:txEl>
+                                          </p:spTgt>
+                                        </p:tgtEl>
+                                        <p:attrNameLst>
+                                          <p:attrName>style.visibility</p:attrName>
+                                        </p:attrNameLst>
+                                      </p:cBhvr>
+                                      <p:to>
+                                        <p:strVal val="visible"/>
+                                      </p:to>
+                                    </p:set>
+                                  </p:childTnLst>
+                                </p:cTn>
+                              </p:par>
+                            </p:childTnLst>
+                          </p:cTn>
+                        </p:par>
+                      </p:childTnLst>
+                    </p:cTn>
+                  </p:par>
+                </p:childTnLst>
+              </p:cTn>
+              <p:prevCondLst>
+                <p:cond evt="onPrev" delay="0">
+                  <p:tgtEl>
+                    <p:sldTgt/>
+                  </p:tgtEl>
+                </p:cond>
+              </p:prevCondLst>
+              <p:nextCondLst>
+                <p:cond evt="onNext" delay="0">
+                  <p:tgtEl>
+                    <p:sldTgt/>
+                  </p:tgtEl>
+                </p:cond>
+              </p:nextCondLst>
+            </p:seq>
+          </p:childTnLst>
+        </p:cTn>
+      </p:par>
+    </p:tnLst>
+    <p:bldLst>
+      <p:bldP spid="3" grpId="0" build="p"/>
+      <p:bldP spid="9" grpId="0" build="p"/>
+    </p:bldLst>
+  </p:timing>
+</p:sld>
+</file>
+
+<file path=ppt/slides/slide22.xml><?xml version="1.0" encoding="utf-8"?>
+<p:sld xmlns:a="http://schemas.openxmlformats.org/drawingml/2006/main" xmlns:r="http://schemas.openxmlformats.org/officeDocument/2006/relationships" xmlns:p="http://schemas.openxmlformats.org/presentationml/2006/main">
+  <p:cSld>
+    <p:spTree>
+      <p:nvGrpSpPr>
+        <p:cNvPr id="1" name=""/>
+        <p:cNvGrpSpPr/>
+        <p:nvPr/>
+      </p:nvGrpSpPr>
+      <p:grpSpPr>
+        <a:xfrm>
+          <a:off x="0" y="0"/>
+          <a:ext cx="0" cy="0"/>
+          <a:chOff x="0" y="0"/>
+          <a:chExt cx="0" cy="0"/>
+        </a:xfrm>
+      </p:grpSpPr>
+      <p:sp>
+        <p:nvSpPr>
+          <p:cNvPr id="4" name="Date Placeholder 3">
+            <a:extLst>
+              <a:ext uri="{FF2B5EF4-FFF2-40B4-BE49-F238E27FC236}">
+                <a16:creationId xmlns:a16="http://schemas.microsoft.com/office/drawing/2014/main" id="{9AD89538-9E43-3C55-D9F8-0A60ACC84C47}"/>
+              </a:ext>
+            </a:extLst>
+          </p:cNvPr>
+          <p:cNvSpPr>
+            <a:spLocks noGrp="1"/>
+          </p:cNvSpPr>
+          <p:nvPr>
+            <p:ph type="dt" sz="half" idx="10"/>
+          </p:nvPr>
+        </p:nvSpPr>
+        <p:spPr/>
+        <p:txBody>
+          <a:bodyPr/>
+          <a:lstStyle/>
+          <a:p>
+            <a:fld id="{B4B13859-67C5-4393-B6C2-556CF3F770C0}" type="datetime3">
+              <a:rPr lang="en-US" smtClean="0"/>
+              <a:t>25 February 2026</a:t>
+            </a:fld>
+            <a:endParaRPr lang="en-US"/>
+          </a:p>
+        </p:txBody>
+      </p:sp>
+      <p:sp>
+        <p:nvSpPr>
+          <p:cNvPr id="5" name="Footer Placeholder 4">
+            <a:extLst>
+              <a:ext uri="{FF2B5EF4-FFF2-40B4-BE49-F238E27FC236}">
+                <a16:creationId xmlns:a16="http://schemas.microsoft.com/office/drawing/2014/main" id="{D2C40B51-E8A7-3290-CFC8-A80E5B0E2E3C}"/>
+              </a:ext>
+            </a:extLst>
+          </p:cNvPr>
+          <p:cNvSpPr>
+            <a:spLocks noGrp="1"/>
+          </p:cNvSpPr>
+          <p:nvPr>
+            <p:ph type="ftr" sz="quarter" idx="11"/>
+          </p:nvPr>
+        </p:nvSpPr>
+        <p:spPr/>
+        <p:txBody>
+          <a:bodyPr/>
+          <a:lstStyle/>
+          <a:p>
+            <a:r>
+              <a:rPr lang="en-US"/>
+              <a:t>ELL305: Computer Architecture</a:t>
+            </a:r>
+            <a:endParaRPr lang="en-US" dirty="0"/>
+          </a:p>
+        </p:txBody>
+      </p:sp>
+      <p:sp>
+        <p:nvSpPr>
+          <p:cNvPr id="6" name="Slide Number Placeholder 5">
+            <a:extLst>
+              <a:ext uri="{FF2B5EF4-FFF2-40B4-BE49-F238E27FC236}">
+                <a16:creationId xmlns:a16="http://schemas.microsoft.com/office/drawing/2014/main" id="{3F414D1D-02B9-1551-DD0A-1D522240C914}"/>
+              </a:ext>
+            </a:extLst>
+          </p:cNvPr>
+          <p:cNvSpPr>
+            <a:spLocks noGrp="1"/>
+          </p:cNvSpPr>
+          <p:nvPr>
+            <p:ph type="sldNum" sz="quarter" idx="12"/>
+          </p:nvPr>
+        </p:nvSpPr>
+        <p:spPr/>
+        <p:txBody>
+          <a:bodyPr/>
+          <a:lstStyle/>
+          <a:p>
+            <a:fld id="{98AC3541-01C1-4CA5-B68F-FEE868C7D1AF}" type="slidenum">
+              <a:rPr lang="en-US" smtClean="0"/>
+              <a:t>22</a:t>
+            </a:fld>
+            <a:endParaRPr lang="en-US"/>
+          </a:p>
+        </p:txBody>
+      </p:sp>
+      <p:pic>
+        <p:nvPicPr>
+          <p:cNvPr id="8" name="Picture 7">
+            <a:extLst>
+              <a:ext uri="{FF2B5EF4-FFF2-40B4-BE49-F238E27FC236}">
+                <a16:creationId xmlns:a16="http://schemas.microsoft.com/office/drawing/2014/main" id="{C8F9BD40-F573-44C9-115C-5F880AFCFDF0}"/>
+              </a:ext>
+            </a:extLst>
+          </p:cNvPr>
+          <p:cNvPicPr>
+            <a:picLocks noChangeAspect="1"/>
+          </p:cNvPicPr>
+          <p:nvPr/>
+        </p:nvPicPr>
+        <p:blipFill>
+          <a:blip r:embed="rId2"/>
+          <a:stretch>
+            <a:fillRect/>
+          </a:stretch>
+        </p:blipFill>
+        <p:spPr>
+          <a:xfrm>
+            <a:off x="1188962" y="1178405"/>
+            <a:ext cx="6766076" cy="4501191"/>
+          </a:xfrm>
+          <a:prstGeom prst="rect">
+            <a:avLst/>
+          </a:prstGeom>
+        </p:spPr>
+      </p:pic>
+    </p:spTree>
+    <p:extLst>
+      <p:ext uri="{BB962C8B-B14F-4D97-AF65-F5344CB8AC3E}">
+        <p14:creationId xmlns:p14="http://schemas.microsoft.com/office/powerpoint/2010/main" val="2493914522"/>
+      </p:ext>
+    </p:extLst>
+  </p:cSld>
+  <p:clrMapOvr>
+    <a:masterClrMapping/>
+  </p:clrMapOvr>
+</p:sld>
+</file>
+
 <file path=ppt/slides/slide3.xml><?xml version="1.0" encoding="utf-8"?>
 <p:sld xmlns:a="http://schemas.openxmlformats.org/drawingml/2006/main" xmlns:r="http://schemas.openxmlformats.org/officeDocument/2006/relationships" xmlns:p="http://schemas.openxmlformats.org/presentationml/2006/main">
   <p:cSld>
@@ -12652,7 +14001,7 @@
           <a:p>
             <a:fld id="{B4B13859-67C5-4393-B6C2-556CF3F770C0}" type="datetime3">
               <a:rPr lang="en-US" smtClean="0"/>
-              <a:t>23 February 2026</a:t>
+              <a:t>25 February 2026</a:t>
             </a:fld>
             <a:endParaRPr lang="en-US" dirty="0"/>
           </a:p>
@@ -13142,7 +14491,7 @@
           <a:p>
             <a:fld id="{B4B13859-67C5-4393-B6C2-556CF3F770C0}" type="datetime3">
               <a:rPr lang="en-US" smtClean="0"/>
-              <a:t>23 February 2026</a:t>
+              <a:t>25 February 2026</a:t>
             </a:fld>
             <a:endParaRPr lang="en-US" dirty="0"/>
           </a:p>
@@ -15566,7 +16915,7 @@
           <a:p>
             <a:fld id="{B4B13859-67C5-4393-B6C2-556CF3F770C0}" type="datetime3">
               <a:rPr lang="en-US" smtClean="0"/>
-              <a:t>23 February 2026</a:t>
+              <a:t>25 February 2026</a:t>
             </a:fld>
             <a:endParaRPr lang="en-US" dirty="0"/>
           </a:p>
@@ -16208,217 +17557,6 @@
           <p:cNvPr id="2" name="Title 1">
             <a:extLst>
               <a:ext uri="{FF2B5EF4-FFF2-40B4-BE49-F238E27FC236}">
-                <a16:creationId xmlns:a16="http://schemas.microsoft.com/office/drawing/2014/main" id="{5208E87F-58EA-4A72-840D-5BD4A4E8FDD1}"/>
-              </a:ext>
-            </a:extLst>
-          </p:cNvPr>
-          <p:cNvSpPr>
-            <a:spLocks noGrp="1"/>
-          </p:cNvSpPr>
-          <p:nvPr>
-            <p:ph type="title"/>
-          </p:nvPr>
-        </p:nvSpPr>
-        <p:spPr/>
-        <p:txBody>
-          <a:bodyPr/>
-          <a:lstStyle/>
-          <a:p>
-            <a:r>
-              <a:rPr lang="en-US" dirty="0" err="1"/>
-              <a:t>Microsequencer</a:t>
-            </a:r>
-            <a:endParaRPr lang="en-US" dirty="0"/>
-          </a:p>
-        </p:txBody>
-      </p:sp>
-      <p:pic>
-        <p:nvPicPr>
-          <p:cNvPr id="7" name="Content Placeholder 6">
-            <a:extLst>
-              <a:ext uri="{FF2B5EF4-FFF2-40B4-BE49-F238E27FC236}">
-                <a16:creationId xmlns:a16="http://schemas.microsoft.com/office/drawing/2014/main" id="{D70A806E-3D62-47B1-B889-DB40EC8902F1}"/>
-              </a:ext>
-            </a:extLst>
-          </p:cNvPr>
-          <p:cNvPicPr>
-            <a:picLocks noGrp="1" noChangeAspect="1"/>
-          </p:cNvPicPr>
-          <p:nvPr>
-            <p:ph idx="1"/>
-          </p:nvPr>
-        </p:nvPicPr>
-        <p:blipFill>
-          <a:blip r:embed="rId2">
-            <a:extLst>
-              <a:ext uri="{BEBA8EAE-BF5A-486C-A8C5-ECC9F3942E4B}">
-                <a14:imgProps xmlns:a14="http://schemas.microsoft.com/office/drawing/2010/main">
-                  <a14:imgLayer r:embed="rId3">
-                    <a14:imgEffect>
-                      <a14:artisticPhotocopy/>
-                    </a14:imgEffect>
-                  </a14:imgLayer>
-                </a14:imgProps>
-              </a:ext>
-            </a:extLst>
-          </a:blip>
-          <a:stretch>
-            <a:fillRect/>
-          </a:stretch>
-        </p:blipFill>
-        <p:spPr>
-          <a:xfrm>
-            <a:off x="0" y="1586266"/>
-            <a:ext cx="9144000" cy="4509734"/>
-          </a:xfrm>
-        </p:spPr>
-      </p:pic>
-      <p:sp>
-        <p:nvSpPr>
-          <p:cNvPr id="5" name="Slide Number Placeholder 4">
-            <a:extLst>
-              <a:ext uri="{FF2B5EF4-FFF2-40B4-BE49-F238E27FC236}">
-                <a16:creationId xmlns:a16="http://schemas.microsoft.com/office/drawing/2014/main" id="{9742971A-0BE5-4A70-B7C5-3CB3A41B5FDE}"/>
-              </a:ext>
-            </a:extLst>
-          </p:cNvPr>
-          <p:cNvSpPr>
-            <a:spLocks noGrp="1"/>
-          </p:cNvSpPr>
-          <p:nvPr>
-            <p:ph type="sldNum" sz="quarter" idx="12"/>
-          </p:nvPr>
-        </p:nvSpPr>
-        <p:spPr/>
-        <p:txBody>
-          <a:bodyPr/>
-          <a:lstStyle/>
-          <a:p>
-            <a:pPr>
-              <a:defRPr/>
-            </a:pPr>
-            <a:fld id="{CA887A73-1AE0-46F8-856A-18EA1CF30A1B}" type="slidenum">
-              <a:rPr lang="en-US" altLang="en-US" smtClean="0"/>
-              <a:pPr>
-                <a:defRPr/>
-              </a:pPr>
-              <a:t>6</a:t>
-            </a:fld>
-            <a:endParaRPr lang="en-US" altLang="en-US"/>
-          </a:p>
-        </p:txBody>
-      </p:sp>
-      <p:pic>
-        <p:nvPicPr>
-          <p:cNvPr id="9" name="Picture 8">
-            <a:extLst>
-              <a:ext uri="{FF2B5EF4-FFF2-40B4-BE49-F238E27FC236}">
-                <a16:creationId xmlns:a16="http://schemas.microsoft.com/office/drawing/2014/main" id="{EB222876-D8B4-4D1D-968D-D2073DD115E8}"/>
-              </a:ext>
-            </a:extLst>
-          </p:cNvPr>
-          <p:cNvPicPr>
-            <a:picLocks noChangeAspect="1"/>
-          </p:cNvPicPr>
-          <p:nvPr/>
-        </p:nvPicPr>
-        <p:blipFill>
-          <a:blip r:embed="rId4">
-            <a:extLst>
-              <a:ext uri="{BEBA8EAE-BF5A-486C-A8C5-ECC9F3942E4B}">
-                <a14:imgProps xmlns:a14="http://schemas.microsoft.com/office/drawing/2010/main">
-                  <a14:imgLayer r:embed="rId5">
-                    <a14:imgEffect>
-                      <a14:artisticPhotocopy trans="68000" detail="10"/>
-                    </a14:imgEffect>
-                  </a14:imgLayer>
-                </a14:imgProps>
-              </a:ext>
-            </a:extLst>
-          </a:blip>
-          <a:stretch>
-            <a:fillRect/>
-          </a:stretch>
-        </p:blipFill>
-        <p:spPr>
-          <a:xfrm>
-            <a:off x="7200629" y="4648200"/>
-            <a:ext cx="1943371" cy="1867161"/>
-          </a:xfrm>
-          <a:prstGeom prst="rect">
-            <a:avLst/>
-          </a:prstGeom>
-        </p:spPr>
-      </p:pic>
-      <p:sp>
-        <p:nvSpPr>
-          <p:cNvPr id="3" name="Date Placeholder 3">
-            <a:extLst>
-              <a:ext uri="{FF2B5EF4-FFF2-40B4-BE49-F238E27FC236}">
-                <a16:creationId xmlns:a16="http://schemas.microsoft.com/office/drawing/2014/main" id="{D3C6321B-DC4B-7E7D-F10D-B8280E6228C2}"/>
-              </a:ext>
-            </a:extLst>
-          </p:cNvPr>
-          <p:cNvSpPr>
-            <a:spLocks noGrp="1"/>
-          </p:cNvSpPr>
-          <p:nvPr>
-            <p:ph type="dt" sz="half" idx="10"/>
-          </p:nvPr>
-        </p:nvSpPr>
-        <p:spPr>
-          <a:xfrm>
-            <a:off x="0" y="6599238"/>
-            <a:ext cx="1828800" cy="258762"/>
-          </a:xfrm>
-        </p:spPr>
-        <p:txBody>
-          <a:bodyPr/>
-          <a:lstStyle/>
-          <a:p>
-            <a:fld id="{B4B13859-67C5-4393-B6C2-556CF3F770C0}" type="datetime3">
-              <a:rPr lang="en-US" smtClean="0"/>
-              <a:t>23 February 2026</a:t>
-            </a:fld>
-            <a:endParaRPr lang="en-US" dirty="0"/>
-          </a:p>
-        </p:txBody>
-      </p:sp>
-    </p:spTree>
-    <p:extLst>
-      <p:ext uri="{BB962C8B-B14F-4D97-AF65-F5344CB8AC3E}">
-        <p14:creationId xmlns:p14="http://schemas.microsoft.com/office/powerpoint/2010/main" val="2680505792"/>
-      </p:ext>
-    </p:extLst>
-  </p:cSld>
-  <p:clrMapOvr>
-    <a:masterClrMapping/>
-  </p:clrMapOvr>
-</p:sld>
-</file>
-
-<file path=ppt/slides/slide7.xml><?xml version="1.0" encoding="utf-8"?>
-<p:sld xmlns:a="http://schemas.openxmlformats.org/drawingml/2006/main" xmlns:r="http://schemas.openxmlformats.org/officeDocument/2006/relationships" xmlns:p="http://schemas.openxmlformats.org/presentationml/2006/main">
-  <p:cSld>
-    <p:spTree>
-      <p:nvGrpSpPr>
-        <p:cNvPr id="1" name=""/>
-        <p:cNvGrpSpPr/>
-        <p:nvPr/>
-      </p:nvGrpSpPr>
-      <p:grpSpPr>
-        <a:xfrm>
-          <a:off x="0" y="0"/>
-          <a:ext cx="0" cy="0"/>
-          <a:chOff x="0" y="0"/>
-          <a:chExt cx="0" cy="0"/>
-        </a:xfrm>
-      </p:grpSpPr>
-      <p:sp>
-        <p:nvSpPr>
-          <p:cNvPr id="2" name="Title 1">
-            <a:extLst>
-              <a:ext uri="{FF2B5EF4-FFF2-40B4-BE49-F238E27FC236}">
                 <a16:creationId xmlns:a16="http://schemas.microsoft.com/office/drawing/2014/main" id="{3C09C2A2-E746-46D0-87A1-A23D83A7E4DC}"/>
               </a:ext>
             </a:extLst>
@@ -16584,7 +17722,7 @@
               <a:pPr>
                 <a:defRPr/>
               </a:pPr>
-              <a:t>7</a:t>
+              <a:t>6</a:t>
             </a:fld>
             <a:endParaRPr lang="en-US" altLang="en-US"/>
           </a:p>
@@ -16618,7 +17756,7 @@
           <a:p>
             <a:fld id="{B4B13859-67C5-4393-B6C2-556CF3F770C0}" type="datetime3">
               <a:rPr lang="en-US" smtClean="0"/>
-              <a:t>23 February 2026</a:t>
+              <a:t>25 February 2026</a:t>
             </a:fld>
             <a:endParaRPr lang="en-US" dirty="0"/>
           </a:p>
@@ -17111,7 +18249,7 @@
 </p:sld>
 </file>
 
-<file path=ppt/slides/slide8.xml><?xml version="1.0" encoding="utf-8"?>
+<file path=ppt/slides/slide7.xml><?xml version="1.0" encoding="utf-8"?>
 <p:sld xmlns:a="http://schemas.openxmlformats.org/drawingml/2006/main" xmlns:r="http://schemas.openxmlformats.org/officeDocument/2006/relationships" xmlns:p="http://schemas.openxmlformats.org/presentationml/2006/main">
   <p:cSld>
     <p:spTree>
@@ -17274,7 +18412,7 @@
               <a:pPr>
                 <a:defRPr/>
               </a:pPr>
-              <a:t>8</a:t>
+              <a:t>7</a:t>
             </a:fld>
             <a:endParaRPr lang="en-US" altLang="en-US"/>
           </a:p>
@@ -17308,7 +18446,7 @@
           <a:p>
             <a:fld id="{B4B13859-67C5-4393-B6C2-556CF3F770C0}" type="datetime3">
               <a:rPr lang="en-US" smtClean="0"/>
-              <a:t>23 February 2026</a:t>
+              <a:t>25 February 2026</a:t>
             </a:fld>
             <a:endParaRPr lang="en-US" dirty="0"/>
           </a:p>
@@ -17703,7 +18841,7 @@
 </p:sld>
 </file>
 
-<file path=ppt/slides/slide9.xml><?xml version="1.0" encoding="utf-8"?>
+<file path=ppt/slides/slide8.xml><?xml version="1.0" encoding="utf-8"?>
 <p:sld xmlns:a="http://schemas.openxmlformats.org/drawingml/2006/main" xmlns:r="http://schemas.openxmlformats.org/officeDocument/2006/relationships" xmlns:p="http://schemas.openxmlformats.org/presentationml/2006/main">
   <p:cSld>
     <p:spTree>
@@ -17860,7 +18998,7 @@
               <a:pPr>
                 <a:defRPr/>
               </a:pPr>
-              <a:t>9</a:t>
+              <a:t>8</a:t>
             </a:fld>
             <a:endParaRPr lang="en-US" altLang="en-US"/>
           </a:p>
@@ -17894,7 +19032,7 @@
           <a:p>
             <a:fld id="{B4B13859-67C5-4393-B6C2-556CF3F770C0}" type="datetime3">
               <a:rPr lang="en-US" smtClean="0"/>
-              <a:t>23 February 2026</a:t>
+              <a:t>25 February 2026</a:t>
             </a:fld>
             <a:endParaRPr lang="en-US" dirty="0"/>
           </a:p>
@@ -18382,6 +19520,559 @@
     </p:tnLst>
     <p:bldLst>
       <p:bldP spid="3" grpId="0" build="p"/>
+    </p:bldLst>
+  </p:timing>
+</p:sld>
+</file>
+
+<file path=ppt/slides/slide9.xml><?xml version="1.0" encoding="utf-8"?>
+<p:sld xmlns:a="http://schemas.openxmlformats.org/drawingml/2006/main" xmlns:r="http://schemas.openxmlformats.org/officeDocument/2006/relationships" xmlns:p="http://schemas.openxmlformats.org/presentationml/2006/main">
+  <p:cSld>
+    <p:spTree>
+      <p:nvGrpSpPr>
+        <p:cNvPr id="1" name=""/>
+        <p:cNvGrpSpPr/>
+        <p:nvPr/>
+      </p:nvGrpSpPr>
+      <p:grpSpPr>
+        <a:xfrm>
+          <a:off x="0" y="0"/>
+          <a:ext cx="0" cy="0"/>
+          <a:chOff x="0" y="0"/>
+          <a:chExt cx="0" cy="0"/>
+        </a:xfrm>
+      </p:grpSpPr>
+      <p:sp>
+        <p:nvSpPr>
+          <p:cNvPr id="2" name="Title 1">
+            <a:extLst>
+              <a:ext uri="{FF2B5EF4-FFF2-40B4-BE49-F238E27FC236}">
+                <a16:creationId xmlns:a16="http://schemas.microsoft.com/office/drawing/2014/main" id="{4CAFC658-A3E8-2536-00F1-50771A3CE530}"/>
+              </a:ext>
+            </a:extLst>
+          </p:cNvPr>
+          <p:cNvSpPr>
+            <a:spLocks noGrp="1"/>
+          </p:cNvSpPr>
+          <p:nvPr>
+            <p:ph type="title"/>
+          </p:nvPr>
+        </p:nvSpPr>
+        <p:spPr/>
+        <p:txBody>
+          <a:bodyPr/>
+          <a:lstStyle/>
+          <a:p>
+            <a:r>
+              <a:rPr lang="en-US" dirty="0"/>
+              <a:t>Pipelined multi-cycle processors</a:t>
+            </a:r>
+          </a:p>
+        </p:txBody>
+      </p:sp>
+      <p:sp>
+        <p:nvSpPr>
+          <p:cNvPr id="4" name="Date Placeholder 3">
+            <a:extLst>
+              <a:ext uri="{FF2B5EF4-FFF2-40B4-BE49-F238E27FC236}">
+                <a16:creationId xmlns:a16="http://schemas.microsoft.com/office/drawing/2014/main" id="{3144782F-8224-745F-F8CB-36C3361C33D3}"/>
+              </a:ext>
+            </a:extLst>
+          </p:cNvPr>
+          <p:cNvSpPr>
+            <a:spLocks noGrp="1"/>
+          </p:cNvSpPr>
+          <p:nvPr>
+            <p:ph type="dt" sz="half" idx="10"/>
+          </p:nvPr>
+        </p:nvSpPr>
+        <p:spPr/>
+        <p:txBody>
+          <a:bodyPr/>
+          <a:lstStyle/>
+          <a:p>
+            <a:fld id="{B4B13859-67C5-4393-B6C2-556CF3F770C0}" type="datetime3">
+              <a:rPr lang="en-US" smtClean="0"/>
+              <a:t>25 February 2026</a:t>
+            </a:fld>
+            <a:endParaRPr lang="en-US" dirty="0"/>
+          </a:p>
+        </p:txBody>
+      </p:sp>
+      <p:sp>
+        <p:nvSpPr>
+          <p:cNvPr id="6" name="Slide Number Placeholder 5">
+            <a:extLst>
+              <a:ext uri="{FF2B5EF4-FFF2-40B4-BE49-F238E27FC236}">
+                <a16:creationId xmlns:a16="http://schemas.microsoft.com/office/drawing/2014/main" id="{A3B7FB0D-8C4F-F5BE-4C01-E0D2071220FD}"/>
+              </a:ext>
+            </a:extLst>
+          </p:cNvPr>
+          <p:cNvSpPr>
+            <a:spLocks noGrp="1"/>
+          </p:cNvSpPr>
+          <p:nvPr>
+            <p:ph type="sldNum" sz="quarter" idx="12"/>
+          </p:nvPr>
+        </p:nvSpPr>
+        <p:spPr/>
+        <p:txBody>
+          <a:bodyPr/>
+          <a:lstStyle/>
+          <a:p>
+            <a:fld id="{98AC3541-01C1-4CA5-B68F-FEE868C7D1AF}" type="slidenum">
+              <a:rPr lang="en-US" smtClean="0"/>
+              <a:t>9</a:t>
+            </a:fld>
+            <a:endParaRPr lang="en-US"/>
+          </a:p>
+        </p:txBody>
+      </p:sp>
+      <p:pic>
+        <p:nvPicPr>
+          <p:cNvPr id="8" name="Picture 7">
+            <a:extLst>
+              <a:ext uri="{FF2B5EF4-FFF2-40B4-BE49-F238E27FC236}">
+                <a16:creationId xmlns:a16="http://schemas.microsoft.com/office/drawing/2014/main" id="{1E0C559C-E30F-8A37-C7A5-1445949A4819}"/>
+              </a:ext>
+            </a:extLst>
+          </p:cNvPr>
+          <p:cNvPicPr>
+            <a:picLocks noChangeAspect="1"/>
+          </p:cNvPicPr>
+          <p:nvPr/>
+        </p:nvPicPr>
+        <p:blipFill rotWithShape="1">
+          <a:blip r:embed="rId2"/>
+          <a:srcRect t="10612" b="1523"/>
+          <a:stretch/>
+        </p:blipFill>
+        <p:spPr>
+          <a:xfrm>
+            <a:off x="241149" y="1765935"/>
+            <a:ext cx="4444033" cy="2486025"/>
+          </a:xfrm>
+          <a:prstGeom prst="rect">
+            <a:avLst/>
+          </a:prstGeom>
+        </p:spPr>
+      </p:pic>
+      <p:pic>
+        <p:nvPicPr>
+          <p:cNvPr id="10" name="Picture 9">
+            <a:extLst>
+              <a:ext uri="{FF2B5EF4-FFF2-40B4-BE49-F238E27FC236}">
+                <a16:creationId xmlns:a16="http://schemas.microsoft.com/office/drawing/2014/main" id="{7748ABB3-2D89-8407-1CDD-F822EA50BFF0}"/>
+              </a:ext>
+            </a:extLst>
+          </p:cNvPr>
+          <p:cNvPicPr>
+            <a:picLocks noChangeAspect="1"/>
+          </p:cNvPicPr>
+          <p:nvPr/>
+        </p:nvPicPr>
+        <p:blipFill>
+          <a:blip r:embed="rId3"/>
+          <a:stretch>
+            <a:fillRect/>
+          </a:stretch>
+        </p:blipFill>
+        <p:spPr>
+          <a:xfrm>
+            <a:off x="4877180" y="1831498"/>
+            <a:ext cx="4229690" cy="2286319"/>
+          </a:xfrm>
+          <a:prstGeom prst="rect">
+            <a:avLst/>
+          </a:prstGeom>
+        </p:spPr>
+      </p:pic>
+      <p:sp>
+        <p:nvSpPr>
+          <p:cNvPr id="11" name="Content Placeholder 2">
+            <a:extLst>
+              <a:ext uri="{FF2B5EF4-FFF2-40B4-BE49-F238E27FC236}">
+                <a16:creationId xmlns:a16="http://schemas.microsoft.com/office/drawing/2014/main" id="{4B7DC311-57D1-0B8F-499D-CA039307829C}"/>
+              </a:ext>
+            </a:extLst>
+          </p:cNvPr>
+          <p:cNvSpPr>
+            <a:spLocks noGrp="1"/>
+          </p:cNvSpPr>
+          <p:nvPr>
+            <p:ph idx="1"/>
+          </p:nvPr>
+        </p:nvSpPr>
+        <p:spPr>
+          <a:xfrm>
+            <a:off x="342900" y="4349632"/>
+            <a:ext cx="8724225" cy="1898768"/>
+          </a:xfrm>
+        </p:spPr>
+        <p:txBody>
+          <a:bodyPr/>
+          <a:lstStyle/>
+          <a:p>
+            <a:r>
+              <a:rPr lang="en-US" sz="2400" dirty="0"/>
+              <a:t>Does not change the latency of individual instructions</a:t>
+            </a:r>
+          </a:p>
+          <a:p>
+            <a:r>
+              <a:rPr lang="en-US" sz="2400" dirty="0"/>
+              <a:t>Increases the throughput of instructions</a:t>
+            </a:r>
+          </a:p>
+          <a:p>
+            <a:r>
+              <a:rPr lang="en-US" sz="2400" dirty="0"/>
+              <a:t>Speedup </a:t>
+            </a:r>
+            <a:r>
+              <a:rPr lang="el-GR" sz="2400" dirty="0"/>
+              <a:t>∝</a:t>
+            </a:r>
+            <a:r>
+              <a:rPr lang="en-US" sz="2400" dirty="0"/>
+              <a:t> #stages</a:t>
+            </a:r>
+          </a:p>
+          <a:p>
+            <a:r>
+              <a:rPr lang="en-US" sz="2400" dirty="0"/>
+              <a:t>Rate limited by slowest stage</a:t>
+            </a:r>
+          </a:p>
+        </p:txBody>
+      </p:sp>
+    </p:spTree>
+    <p:extLst>
+      <p:ext uri="{BB962C8B-B14F-4D97-AF65-F5344CB8AC3E}">
+        <p14:creationId xmlns:p14="http://schemas.microsoft.com/office/powerpoint/2010/main" val="2477014179"/>
+      </p:ext>
+    </p:extLst>
+  </p:cSld>
+  <p:clrMapOvr>
+    <a:masterClrMapping/>
+  </p:clrMapOvr>
+  <p:timing>
+    <p:tnLst>
+      <p:par>
+        <p:cTn id="1" dur="indefinite" restart="never" nodeType="tmRoot">
+          <p:childTnLst>
+            <p:seq concurrent="1" nextAc="seek">
+              <p:cTn id="2" dur="indefinite" nodeType="mainSeq">
+                <p:childTnLst>
+                  <p:par>
+                    <p:cTn id="3" fill="hold">
+                      <p:stCondLst>
+                        <p:cond delay="indefinite"/>
+                      </p:stCondLst>
+                      <p:childTnLst>
+                        <p:par>
+                          <p:cTn id="4" fill="hold">
+                            <p:stCondLst>
+                              <p:cond delay="0"/>
+                            </p:stCondLst>
+                            <p:childTnLst>
+                              <p:par>
+                                <p:cTn id="5" presetID="1" presetClass="entr" presetSubtype="0" fill="hold" nodeType="clickEffect">
+                                  <p:stCondLst>
+                                    <p:cond delay="0"/>
+                                  </p:stCondLst>
+                                  <p:childTnLst>
+                                    <p:set>
+                                      <p:cBhvr>
+                                        <p:cTn id="6" dur="1" fill="hold">
+                                          <p:stCondLst>
+                                            <p:cond delay="0"/>
+                                          </p:stCondLst>
+                                        </p:cTn>
+                                        <p:tgtEl>
+                                          <p:spTgt spid="8"/>
+                                        </p:tgtEl>
+                                        <p:attrNameLst>
+                                          <p:attrName>style.visibility</p:attrName>
+                                        </p:attrNameLst>
+                                      </p:cBhvr>
+                                      <p:to>
+                                        <p:strVal val="visible"/>
+                                      </p:to>
+                                    </p:set>
+                                  </p:childTnLst>
+                                </p:cTn>
+                              </p:par>
+                            </p:childTnLst>
+                          </p:cTn>
+                        </p:par>
+                      </p:childTnLst>
+                    </p:cTn>
+                  </p:par>
+                  <p:par>
+                    <p:cTn id="7" fill="hold">
+                      <p:stCondLst>
+                        <p:cond delay="indefinite"/>
+                      </p:stCondLst>
+                      <p:childTnLst>
+                        <p:par>
+                          <p:cTn id="8" fill="hold">
+                            <p:stCondLst>
+                              <p:cond delay="0"/>
+                            </p:stCondLst>
+                            <p:childTnLst>
+                              <p:par>
+                                <p:cTn id="9" presetID="1" presetClass="entr" presetSubtype="0" fill="hold" nodeType="clickEffect">
+                                  <p:stCondLst>
+                                    <p:cond delay="0"/>
+                                  </p:stCondLst>
+                                  <p:childTnLst>
+                                    <p:set>
+                                      <p:cBhvr>
+                                        <p:cTn id="10" dur="1" fill="hold">
+                                          <p:stCondLst>
+                                            <p:cond delay="0"/>
+                                          </p:stCondLst>
+                                        </p:cTn>
+                                        <p:tgtEl>
+                                          <p:spTgt spid="10"/>
+                                        </p:tgtEl>
+                                        <p:attrNameLst>
+                                          <p:attrName>style.visibility</p:attrName>
+                                        </p:attrNameLst>
+                                      </p:cBhvr>
+                                      <p:to>
+                                        <p:strVal val="visible"/>
+                                      </p:to>
+                                    </p:set>
+                                  </p:childTnLst>
+                                </p:cTn>
+                              </p:par>
+                            </p:childTnLst>
+                          </p:cTn>
+                        </p:par>
+                      </p:childTnLst>
+                    </p:cTn>
+                  </p:par>
+                  <p:par>
+                    <p:cTn id="11" fill="hold">
+                      <p:stCondLst>
+                        <p:cond delay="indefinite"/>
+                      </p:stCondLst>
+                      <p:childTnLst>
+                        <p:par>
+                          <p:cTn id="12" fill="hold">
+                            <p:stCondLst>
+                              <p:cond delay="0"/>
+                            </p:stCondLst>
+                            <p:childTnLst>
+                              <p:par>
+                                <p:cTn id="13" presetID="1" presetClass="entr" presetSubtype="0" fill="hold" grpId="0" nodeType="clickEffect">
+                                  <p:stCondLst>
+                                    <p:cond delay="0"/>
+                                  </p:stCondLst>
+                                  <p:childTnLst>
+                                    <p:set>
+                                      <p:cBhvr>
+                                        <p:cTn id="14" dur="1" fill="hold">
+                                          <p:stCondLst>
+                                            <p:cond delay="0"/>
+                                          </p:stCondLst>
+                                        </p:cTn>
+                                        <p:tgtEl>
+                                          <p:spTgt spid="11">
+                                            <p:txEl>
+                                              <p:pRg st="0" end="0"/>
+                                            </p:txEl>
+                                          </p:spTgt>
+                                        </p:tgtEl>
+                                        <p:attrNameLst>
+                                          <p:attrName>style.visibility</p:attrName>
+                                        </p:attrNameLst>
+                                      </p:cBhvr>
+                                      <p:to>
+                                        <p:strVal val="visible"/>
+                                      </p:to>
+                                    </p:set>
+                                  </p:childTnLst>
+                                </p:cTn>
+                              </p:par>
+                            </p:childTnLst>
+                          </p:cTn>
+                        </p:par>
+                      </p:childTnLst>
+                    </p:cTn>
+                  </p:par>
+                  <p:par>
+                    <p:cTn id="15" fill="hold">
+                      <p:stCondLst>
+                        <p:cond delay="indefinite"/>
+                      </p:stCondLst>
+                      <p:childTnLst>
+                        <p:par>
+                          <p:cTn id="16" fill="hold">
+                            <p:stCondLst>
+                              <p:cond delay="0"/>
+                            </p:stCondLst>
+                            <p:childTnLst>
+                              <p:par>
+                                <p:cTn id="17" presetID="1" presetClass="entr" presetSubtype="0" fill="hold" grpId="0" nodeType="clickEffect">
+                                  <p:stCondLst>
+                                    <p:cond delay="0"/>
+                                  </p:stCondLst>
+                                  <p:childTnLst>
+                                    <p:set>
+                                      <p:cBhvr>
+                                        <p:cTn id="18" dur="1" fill="hold">
+                                          <p:stCondLst>
+                                            <p:cond delay="0"/>
+                                          </p:stCondLst>
+                                        </p:cTn>
+                                        <p:tgtEl>
+                                          <p:spTgt spid="11">
+                                            <p:txEl>
+                                              <p:pRg st="1" end="1"/>
+                                            </p:txEl>
+                                          </p:spTgt>
+                                        </p:tgtEl>
+                                        <p:attrNameLst>
+                                          <p:attrName>style.visibility</p:attrName>
+                                        </p:attrNameLst>
+                                      </p:cBhvr>
+                                      <p:to>
+                                        <p:strVal val="visible"/>
+                                      </p:to>
+                                    </p:set>
+                                  </p:childTnLst>
+                                </p:cTn>
+                              </p:par>
+                            </p:childTnLst>
+                          </p:cTn>
+                        </p:par>
+                      </p:childTnLst>
+                    </p:cTn>
+                  </p:par>
+                  <p:par>
+                    <p:cTn id="19" fill="hold">
+                      <p:stCondLst>
+                        <p:cond delay="indefinite"/>
+                      </p:stCondLst>
+                      <p:childTnLst>
+                        <p:par>
+                          <p:cTn id="20" fill="hold">
+                            <p:stCondLst>
+                              <p:cond delay="0"/>
+                            </p:stCondLst>
+                            <p:childTnLst>
+                              <p:par>
+                                <p:cTn id="21" presetID="1" presetClass="entr" presetSubtype="0" fill="hold" grpId="0" nodeType="clickEffect">
+                                  <p:stCondLst>
+                                    <p:cond delay="0"/>
+                                  </p:stCondLst>
+                                  <p:childTnLst>
+                                    <p:set>
+                                      <p:cBhvr>
+                                        <p:cTn id="22" dur="1" fill="hold">
+                                          <p:stCondLst>
+                                            <p:cond delay="0"/>
+                                          </p:stCondLst>
+                                        </p:cTn>
+                                        <p:tgtEl>
+                                          <p:spTgt spid="11">
+                                            <p:txEl>
+                                              <p:pRg st="2" end="2"/>
+                                            </p:txEl>
+                                          </p:spTgt>
+                                        </p:tgtEl>
+                                        <p:attrNameLst>
+                                          <p:attrName>style.visibility</p:attrName>
+                                        </p:attrNameLst>
+                                      </p:cBhvr>
+                                      <p:to>
+                                        <p:strVal val="visible"/>
+                                      </p:to>
+                                    </p:set>
+                                  </p:childTnLst>
+                                </p:cTn>
+                              </p:par>
+                            </p:childTnLst>
+                          </p:cTn>
+                        </p:par>
+                      </p:childTnLst>
+                    </p:cTn>
+                  </p:par>
+                  <p:par>
+                    <p:cTn id="23" fill="hold">
+                      <p:stCondLst>
+                        <p:cond delay="indefinite"/>
+                      </p:stCondLst>
+                      <p:childTnLst>
+                        <p:par>
+                          <p:cTn id="24" fill="hold">
+                            <p:stCondLst>
+                              <p:cond delay="0"/>
+                            </p:stCondLst>
+                            <p:childTnLst>
+                              <p:par>
+                                <p:cTn id="25" presetID="1" presetClass="entr" presetSubtype="0" fill="hold" grpId="0" nodeType="clickEffect">
+                                  <p:stCondLst>
+                                    <p:cond delay="0"/>
+                                  </p:stCondLst>
+                                  <p:childTnLst>
+                                    <p:set>
+                                      <p:cBhvr>
+                                        <p:cTn id="26" dur="1" fill="hold">
+                                          <p:stCondLst>
+                                            <p:cond delay="0"/>
+                                          </p:stCondLst>
+                                        </p:cTn>
+                                        <p:tgtEl>
+                                          <p:spTgt spid="11">
+                                            <p:txEl>
+                                              <p:pRg st="3" end="3"/>
+                                            </p:txEl>
+                                          </p:spTgt>
+                                        </p:tgtEl>
+                                        <p:attrNameLst>
+                                          <p:attrName>style.visibility</p:attrName>
+                                        </p:attrNameLst>
+                                      </p:cBhvr>
+                                      <p:to>
+                                        <p:strVal val="visible"/>
+                                      </p:to>
+                                    </p:set>
+                                  </p:childTnLst>
+                                </p:cTn>
+                              </p:par>
+                            </p:childTnLst>
+                          </p:cTn>
+                        </p:par>
+                      </p:childTnLst>
+                    </p:cTn>
+                  </p:par>
+                </p:childTnLst>
+              </p:cTn>
+              <p:prevCondLst>
+                <p:cond evt="onPrev" delay="0">
+                  <p:tgtEl>
+                    <p:sldTgt/>
+                  </p:tgtEl>
+                </p:cond>
+              </p:prevCondLst>
+              <p:nextCondLst>
+                <p:cond evt="onNext" delay="0">
+                  <p:tgtEl>
+                    <p:sldTgt/>
+                  </p:tgtEl>
+                </p:cond>
+              </p:nextCondLst>
+            </p:seq>
+          </p:childTnLst>
+        </p:cTn>
+      </p:par>
+    </p:tnLst>
+    <p:bldLst>
+      <p:bldP spid="11" grpId="0" build="p"/>
     </p:bldLst>
   </p:timing>
 </p:sld>

--- a/Lec-15-19-pipelined-cpu.pptx
+++ b/Lec-15-19-pipelined-cpu.pptx
@@ -5,7 +5,7 @@
     <p:sldMasterId id="2147483648" r:id="rId1"/>
   </p:sldMasterIdLst>
   <p:notesMasterIdLst>
-    <p:notesMasterId r:id="rId24"/>
+    <p:notesMasterId r:id="rId25"/>
   </p:notesMasterIdLst>
   <p:sldIdLst>
     <p:sldId id="337" r:id="rId2"/>
@@ -28,8 +28,9 @@
     <p:sldId id="355" r:id="rId19"/>
     <p:sldId id="356" r:id="rId20"/>
     <p:sldId id="357" r:id="rId21"/>
-    <p:sldId id="358" r:id="rId22"/>
-    <p:sldId id="359" r:id="rId23"/>
+    <p:sldId id="445" r:id="rId22"/>
+    <p:sldId id="358" r:id="rId23"/>
+    <p:sldId id="359" r:id="rId24"/>
   </p:sldIdLst>
   <p:sldSz cx="9144000" cy="6858000" type="screen4x3"/>
   <p:notesSz cx="6858000" cy="9144000"/>
@@ -535,7 +536,7 @@
               <a:pPr>
                 <a:defRPr/>
               </a:pPr>
-              <a:t>2/25/2026</a:t>
+              <a:t>2/27/2026</a:t>
             </a:fld>
             <a:endParaRPr lang="en-US"/>
           </a:p>
@@ -1302,7 +1303,7 @@
           <a:p>
             <a:fld id="{5F79DCCC-EBE2-44AD-8EA0-6F319820E962}" type="slidenum">
               <a:rPr lang="en-US" smtClean="0"/>
-              <a:t>21</a:t>
+              <a:t>22</a:t>
             </a:fld>
             <a:endParaRPr lang="en-US"/>
           </a:p>
@@ -6381,7 +6382,7 @@
           <a:p>
             <a:fld id="{B4B13859-67C5-4393-B6C2-556CF3F770C0}" type="datetime3">
               <a:rPr lang="en-US" smtClean="0"/>
-              <a:t>25 February 2026</a:t>
+              <a:t>27 February 2026</a:t>
             </a:fld>
             <a:endParaRPr lang="en-US" dirty="0"/>
           </a:p>
@@ -6637,7 +6638,7 @@
           <a:p>
             <a:fld id="{B4B13859-67C5-4393-B6C2-556CF3F770C0}" type="datetime3">
               <a:rPr lang="en-US" smtClean="0"/>
-              <a:t>25 February 2026</a:t>
+              <a:t>27 February 2026</a:t>
             </a:fld>
             <a:endParaRPr lang="en-US" dirty="0"/>
           </a:p>
@@ -7047,7 +7048,7 @@
           <a:p>
             <a:fld id="{B4B13859-67C5-4393-B6C2-556CF3F770C0}" type="datetime3">
               <a:rPr lang="en-US" smtClean="0"/>
-              <a:t>25 February 2026</a:t>
+              <a:t>27 February 2026</a:t>
             </a:fld>
             <a:endParaRPr lang="en-US" dirty="0"/>
           </a:p>
@@ -7319,7 +7320,7 @@
           <a:p>
             <a:fld id="{B4B13859-67C5-4393-B6C2-556CF3F770C0}" type="datetime3">
               <a:rPr lang="en-US" smtClean="0"/>
-              <a:t>25 February 2026</a:t>
+              <a:t>27 February 2026</a:t>
             </a:fld>
             <a:endParaRPr lang="en-US" dirty="0"/>
           </a:p>
@@ -7488,7 +7489,7 @@
           <a:p>
             <a:fld id="{B4B13859-67C5-4393-B6C2-556CF3F770C0}" type="datetime3">
               <a:rPr lang="en-US" smtClean="0"/>
-              <a:t>25 February 2026</a:t>
+              <a:t>27 February 2026</a:t>
             </a:fld>
             <a:endParaRPr lang="en-US"/>
           </a:p>
@@ -8387,7 +8388,7 @@
           <a:p>
             <a:fld id="{B4B13859-67C5-4393-B6C2-556CF3F770C0}" type="datetime3">
               <a:rPr lang="en-US" smtClean="0"/>
-              <a:t>25 February 2026</a:t>
+              <a:t>27 February 2026</a:t>
             </a:fld>
             <a:endParaRPr lang="en-US"/>
           </a:p>
@@ -9300,7 +9301,7 @@
           <a:p>
             <a:fld id="{B4B13859-67C5-4393-B6C2-556CF3F770C0}" type="datetime3">
               <a:rPr lang="en-US" smtClean="0"/>
-              <a:t>25 February 2026</a:t>
+              <a:t>27 February 2026</a:t>
             </a:fld>
             <a:endParaRPr lang="en-US"/>
           </a:p>
@@ -10215,7 +10216,7 @@
           <a:p>
             <a:fld id="{B4B13859-67C5-4393-B6C2-556CF3F770C0}" type="datetime3">
               <a:rPr lang="en-US" smtClean="0"/>
-              <a:t>25 February 2026</a:t>
+              <a:t>27 February 2026</a:t>
             </a:fld>
             <a:endParaRPr lang="en-US"/>
           </a:p>
@@ -10558,8 +10559,8 @@
           </a:prstGeom>
         </p:spPr>
       </p:pic>
-      <mc:AlternateContent xmlns:mc="http://schemas.openxmlformats.org/markup-compatibility/2006">
-        <mc:Choice xmlns:p14="http://schemas.microsoft.com/office/powerpoint/2010/main" Requires="p14">
+      <mc:AlternateContent xmlns:mc="http://schemas.openxmlformats.org/markup-compatibility/2006" xmlns:p14="http://schemas.microsoft.com/office/powerpoint/2010/main">
+        <mc:Choice Requires="p14">
           <p:contentPart p14:bwMode="auto" r:id="rId4">
             <p14:nvContentPartPr>
               <p14:cNvPr id="7" name="Ink 6">
@@ -10578,7 +10579,7 @@
             </p14:xfrm>
           </p:contentPart>
         </mc:Choice>
-        <mc:Fallback>
+        <mc:Fallback xmlns="">
           <p:pic>
             <p:nvPicPr>
               <p:cNvPr id="7" name="Ink 6">
@@ -10609,8 +10610,8 @@
           </p:pic>
         </mc:Fallback>
       </mc:AlternateContent>
-      <mc:AlternateContent xmlns:mc="http://schemas.openxmlformats.org/markup-compatibility/2006">
-        <mc:Choice xmlns:p14="http://schemas.microsoft.com/office/powerpoint/2010/main" Requires="p14">
+      <mc:AlternateContent xmlns:mc="http://schemas.openxmlformats.org/markup-compatibility/2006" xmlns:p14="http://schemas.microsoft.com/office/powerpoint/2010/main">
+        <mc:Choice Requires="p14">
           <p:contentPart p14:bwMode="auto" r:id="rId6">
             <p14:nvContentPartPr>
               <p14:cNvPr id="10" name="Ink 9">
@@ -10629,7 +10630,7 @@
             </p14:xfrm>
           </p:contentPart>
         </mc:Choice>
-        <mc:Fallback>
+        <mc:Fallback xmlns="">
           <p:pic>
             <p:nvPicPr>
               <p:cNvPr id="10" name="Ink 9">
@@ -10660,8 +10661,8 @@
           </p:pic>
         </mc:Fallback>
       </mc:AlternateContent>
-      <mc:AlternateContent xmlns:mc="http://schemas.openxmlformats.org/markup-compatibility/2006">
-        <mc:Choice xmlns:p14="http://schemas.microsoft.com/office/powerpoint/2010/main" Requires="p14">
+      <mc:AlternateContent xmlns:mc="http://schemas.openxmlformats.org/markup-compatibility/2006" xmlns:p14="http://schemas.microsoft.com/office/powerpoint/2010/main">
+        <mc:Choice Requires="p14">
           <p:contentPart p14:bwMode="auto" r:id="rId8">
             <p14:nvContentPartPr>
               <p14:cNvPr id="26" name="Ink 25">
@@ -10680,7 +10681,7 @@
             </p14:xfrm>
           </p:contentPart>
         </mc:Choice>
-        <mc:Fallback>
+        <mc:Fallback xmlns="">
           <p:pic>
             <p:nvPicPr>
               <p:cNvPr id="26" name="Ink 25">
@@ -10731,8 +10732,8 @@
             <a:chExt cx="614160" cy="835920"/>
           </a:xfrm>
         </p:grpSpPr>
-        <mc:AlternateContent xmlns:mc="http://schemas.openxmlformats.org/markup-compatibility/2006">
-          <mc:Choice xmlns:p14="http://schemas.microsoft.com/office/powerpoint/2010/main" Requires="p14">
+        <mc:AlternateContent xmlns:mc="http://schemas.openxmlformats.org/markup-compatibility/2006" xmlns:p14="http://schemas.microsoft.com/office/powerpoint/2010/main">
+          <mc:Choice Requires="p14">
             <p:contentPart p14:bwMode="auto" r:id="rId10">
               <p14:nvContentPartPr>
                 <p14:cNvPr id="27" name="Ink 26">
@@ -10751,7 +10752,7 @@
               </p14:xfrm>
             </p:contentPart>
           </mc:Choice>
-          <mc:Fallback>
+          <mc:Fallback xmlns="">
             <p:pic>
               <p:nvPicPr>
                 <p:cNvPr id="27" name="Ink 26">
@@ -10782,8 +10783,8 @@
             </p:pic>
           </mc:Fallback>
         </mc:AlternateContent>
-        <mc:AlternateContent xmlns:mc="http://schemas.openxmlformats.org/markup-compatibility/2006">
-          <mc:Choice xmlns:p14="http://schemas.microsoft.com/office/powerpoint/2010/main" Requires="p14">
+        <mc:AlternateContent xmlns:mc="http://schemas.openxmlformats.org/markup-compatibility/2006" xmlns:p14="http://schemas.microsoft.com/office/powerpoint/2010/main">
+          <mc:Choice Requires="p14">
             <p:contentPart p14:bwMode="auto" r:id="rId12">
               <p14:nvContentPartPr>
                 <p14:cNvPr id="28" name="Ink 27">
@@ -10802,7 +10803,7 @@
               </p14:xfrm>
             </p:contentPart>
           </mc:Choice>
-          <mc:Fallback>
+          <mc:Fallback xmlns="">
             <p:pic>
               <p:nvPicPr>
                 <p:cNvPr id="28" name="Ink 27">
@@ -10833,8 +10834,8 @@
             </p:pic>
           </mc:Fallback>
         </mc:AlternateContent>
-        <mc:AlternateContent xmlns:mc="http://schemas.openxmlformats.org/markup-compatibility/2006">
-          <mc:Choice xmlns:p14="http://schemas.microsoft.com/office/powerpoint/2010/main" Requires="p14">
+        <mc:AlternateContent xmlns:mc="http://schemas.openxmlformats.org/markup-compatibility/2006" xmlns:p14="http://schemas.microsoft.com/office/powerpoint/2010/main">
+          <mc:Choice Requires="p14">
             <p:contentPart p14:bwMode="auto" r:id="rId14">
               <p14:nvContentPartPr>
                 <p14:cNvPr id="30" name="Ink 29">
@@ -10853,7 +10854,7 @@
               </p14:xfrm>
             </p:contentPart>
           </mc:Choice>
-          <mc:Fallback>
+          <mc:Fallback xmlns="">
             <p:pic>
               <p:nvPicPr>
                 <p:cNvPr id="30" name="Ink 29">
@@ -10884,8 +10885,8 @@
             </p:pic>
           </mc:Fallback>
         </mc:AlternateContent>
-        <mc:AlternateContent xmlns:mc="http://schemas.openxmlformats.org/markup-compatibility/2006">
-          <mc:Choice xmlns:p14="http://schemas.microsoft.com/office/powerpoint/2010/main" Requires="p14">
+        <mc:AlternateContent xmlns:mc="http://schemas.openxmlformats.org/markup-compatibility/2006" xmlns:p14="http://schemas.microsoft.com/office/powerpoint/2010/main">
+          <mc:Choice Requires="p14">
             <p:contentPart p14:bwMode="auto" r:id="rId16">
               <p14:nvContentPartPr>
                 <p14:cNvPr id="31" name="Ink 30">
@@ -10904,7 +10905,7 @@
               </p14:xfrm>
             </p:contentPart>
           </mc:Choice>
-          <mc:Fallback>
+          <mc:Fallback xmlns="">
             <p:pic>
               <p:nvPicPr>
                 <p:cNvPr id="31" name="Ink 30">
@@ -11545,7 +11546,7 @@
           <a:p>
             <a:fld id="{B4B13859-67C5-4393-B6C2-556CF3F770C0}" type="datetime3">
               <a:rPr lang="en-US" smtClean="0"/>
-              <a:t>25 February 2026</a:t>
+              <a:t>27 February 2026</a:t>
             </a:fld>
             <a:endParaRPr lang="en-US"/>
           </a:p>
@@ -11745,7 +11746,7 @@
           <a:p>
             <a:fld id="{B4B13859-67C5-4393-B6C2-556CF3F770C0}" type="datetime3">
               <a:rPr lang="en-US" smtClean="0"/>
-              <a:t>25 February 2026</a:t>
+              <a:t>27 February 2026</a:t>
             </a:fld>
             <a:endParaRPr lang="en-US"/>
           </a:p>
@@ -11825,8 +11826,8 @@
         </p:nvSpPr>
         <p:spPr>
           <a:xfrm>
-            <a:off x="4953000" y="1803546"/>
-            <a:ext cx="4035254" cy="1976101"/>
+            <a:off x="4953000" y="1910455"/>
+            <a:ext cx="4035254" cy="1869192"/>
           </a:xfrm>
           <a:prstGeom prst="rect">
             <a:avLst/>
@@ -12000,12 +12001,6 @@
               </a:defRPr>
             </a:lvl9pPr>
           </a:lstStyle>
-          <a:p>
-            <a:r>
-              <a:rPr lang="en-US" sz="2000" dirty="0"/>
-              <a:t>Hardware can stall the pipeline – hardware interlocks</a:t>
-            </a:r>
-          </a:p>
           <a:p>
             <a:r>
               <a:rPr lang="en-US" sz="2000" dirty="0"/>
@@ -12308,7 +12303,7 @@
                             </p:stCondLst>
                             <p:childTnLst>
                               <p:par>
-                                <p:cTn id="21" presetID="1" presetClass="entr" presetSubtype="0" fill="hold" grpId="0" nodeType="clickEffect">
+                                <p:cTn id="21" presetID="1" presetClass="entr" presetSubtype="0" fill="hold" nodeType="clickEffect">
                                   <p:stCondLst>
                                     <p:cond delay="0"/>
                                   </p:stCondLst>
@@ -12316,55 +12311,6 @@
                                     <p:set>
                                       <p:cBhvr>
                                         <p:cTn id="22" dur="1" fill="hold">
-                                          <p:stCondLst>
-                                            <p:cond delay="0"/>
-                                          </p:stCondLst>
-                                        </p:cTn>
-                                        <p:tgtEl>
-                                          <p:spTgt spid="9">
-                                            <p:txEl>
-                                              <p:pRg st="2" end="2"/>
-                                            </p:txEl>
-                                          </p:spTgt>
-                                        </p:tgtEl>
-                                        <p:attrNameLst>
-                                          <p:attrName>style.visibility</p:attrName>
-                                        </p:attrNameLst>
-                                      </p:cBhvr>
-                                      <p:to>
-                                        <p:strVal val="visible"/>
-                                      </p:to>
-                                    </p:set>
-                                  </p:childTnLst>
-                                </p:cTn>
-                              </p:par>
-                            </p:childTnLst>
-                          </p:cTn>
-                        </p:par>
-                      </p:childTnLst>
-                    </p:cTn>
-                  </p:par>
-                  <p:par>
-                    <p:cTn id="23" fill="hold">
-                      <p:stCondLst>
-                        <p:cond delay="indefinite"/>
-                      </p:stCondLst>
-                      <p:childTnLst>
-                        <p:par>
-                          <p:cTn id="24" fill="hold">
-                            <p:stCondLst>
-                              <p:cond delay="0"/>
-                            </p:stCondLst>
-                            <p:childTnLst>
-                              <p:par>
-                                <p:cTn id="25" presetID="1" presetClass="entr" presetSubtype="0" fill="hold" nodeType="clickEffect">
-                                  <p:stCondLst>
-                                    <p:cond delay="0"/>
-                                  </p:stCondLst>
-                                  <p:childTnLst>
-                                    <p:set>
-                                      <p:cBhvr>
-                                        <p:cTn id="26" dur="1" fill="hold">
                                           <p:stCondLst>
                                             <p:cond delay="0"/>
                                           </p:stCondLst>
@@ -12588,7 +12534,7 @@
           <a:p>
             <a:fld id="{B4B13859-67C5-4393-B6C2-556CF3F770C0}" type="datetime3">
               <a:rPr lang="en-US" smtClean="0"/>
-              <a:t>25 February 2026</a:t>
+              <a:t>27 February 2026</a:t>
             </a:fld>
             <a:endParaRPr lang="en-US" dirty="0"/>
           </a:p>
@@ -12948,8 +12894,8 @@
         </p:nvSpPr>
         <p:spPr>
           <a:xfrm>
-            <a:off x="94576" y="1609809"/>
-            <a:ext cx="8840559" cy="3963076"/>
+            <a:off x="94576" y="1447800"/>
+            <a:ext cx="8840559" cy="4724399"/>
           </a:xfrm>
         </p:spPr>
         <p:txBody>
@@ -12970,7 +12916,41 @@
           <a:p>
             <a:r>
               <a:rPr lang="en-US" dirty="0"/>
-              <a:t>Result isn’t known until end of execute</a:t>
+              <a:t>Result isn’t known until end of what stage?</a:t>
+            </a:r>
+          </a:p>
+          <a:p>
+            <a:pPr lvl="1"/>
+            <a:r>
+              <a:rPr lang="en-US" dirty="0"/>
+              <a:t>Execute (conventional)</a:t>
+            </a:r>
+          </a:p>
+          <a:p>
+            <a:pPr lvl="1"/>
+            <a:r>
+              <a:rPr lang="en-US" dirty="0"/>
+              <a:t>Wastes 2 cycles if branch taken</a:t>
+            </a:r>
+          </a:p>
+          <a:p>
+            <a:pPr lvl="1"/>
+            <a:r>
+              <a:rPr lang="en-US" dirty="0"/>
+              <a:t>Decode (slightly better design)</a:t>
+            </a:r>
+          </a:p>
+          <a:p>
+            <a:pPr lvl="1"/>
+            <a:r>
+              <a:rPr lang="en-US" dirty="0"/>
+              <a:t>Wastes 1 cycle if branch taken</a:t>
+            </a:r>
+          </a:p>
+          <a:p>
+            <a:r>
+              <a:rPr lang="en-US" dirty="0"/>
+              <a:t>Stall IF till branch decision</a:t>
             </a:r>
           </a:p>
         </p:txBody>
@@ -12998,7 +12978,7 @@
           <a:p>
             <a:fld id="{B4B13859-67C5-4393-B6C2-556CF3F770C0}" type="datetime3">
               <a:rPr lang="en-US" smtClean="0"/>
-              <a:t>25 February 2026</a:t>
+              <a:t>27 February 2026</a:t>
             </a:fld>
             <a:endParaRPr lang="en-US"/>
           </a:p>
@@ -13072,10 +13052,1175 @@
   <p:clrMapOvr>
     <a:masterClrMapping/>
   </p:clrMapOvr>
+  <p:timing>
+    <p:tnLst>
+      <p:par>
+        <p:cTn id="1" dur="indefinite" restart="never" nodeType="tmRoot">
+          <p:childTnLst>
+            <p:seq concurrent="1" nextAc="seek">
+              <p:cTn id="2" dur="indefinite" nodeType="mainSeq">
+                <p:childTnLst>
+                  <p:par>
+                    <p:cTn id="3" fill="hold">
+                      <p:stCondLst>
+                        <p:cond delay="indefinite"/>
+                      </p:stCondLst>
+                      <p:childTnLst>
+                        <p:par>
+                          <p:cTn id="4" fill="hold">
+                            <p:stCondLst>
+                              <p:cond delay="0"/>
+                            </p:stCondLst>
+                            <p:childTnLst>
+                              <p:par>
+                                <p:cTn id="5" presetID="1" presetClass="entr" presetSubtype="0" fill="hold" grpId="0" nodeType="clickEffect">
+                                  <p:stCondLst>
+                                    <p:cond delay="0"/>
+                                  </p:stCondLst>
+                                  <p:childTnLst>
+                                    <p:set>
+                                      <p:cBhvr>
+                                        <p:cTn id="6" dur="1" fill="hold">
+                                          <p:stCondLst>
+                                            <p:cond delay="0"/>
+                                          </p:stCondLst>
+                                        </p:cTn>
+                                        <p:tgtEl>
+                                          <p:spTgt spid="3">
+                                            <p:txEl>
+                                              <p:pRg st="0" end="0"/>
+                                            </p:txEl>
+                                          </p:spTgt>
+                                        </p:tgtEl>
+                                        <p:attrNameLst>
+                                          <p:attrName>style.visibility</p:attrName>
+                                        </p:attrNameLst>
+                                      </p:cBhvr>
+                                      <p:to>
+                                        <p:strVal val="visible"/>
+                                      </p:to>
+                                    </p:set>
+                                  </p:childTnLst>
+                                </p:cTn>
+                              </p:par>
+                            </p:childTnLst>
+                          </p:cTn>
+                        </p:par>
+                      </p:childTnLst>
+                    </p:cTn>
+                  </p:par>
+                  <p:par>
+                    <p:cTn id="7" fill="hold">
+                      <p:stCondLst>
+                        <p:cond delay="indefinite"/>
+                      </p:stCondLst>
+                      <p:childTnLst>
+                        <p:par>
+                          <p:cTn id="8" fill="hold">
+                            <p:stCondLst>
+                              <p:cond delay="0"/>
+                            </p:stCondLst>
+                            <p:childTnLst>
+                              <p:par>
+                                <p:cTn id="9" presetID="1" presetClass="entr" presetSubtype="0" fill="hold" grpId="0" nodeType="clickEffect">
+                                  <p:stCondLst>
+                                    <p:cond delay="0"/>
+                                  </p:stCondLst>
+                                  <p:childTnLst>
+                                    <p:set>
+                                      <p:cBhvr>
+                                        <p:cTn id="10" dur="1" fill="hold">
+                                          <p:stCondLst>
+                                            <p:cond delay="0"/>
+                                          </p:stCondLst>
+                                        </p:cTn>
+                                        <p:tgtEl>
+                                          <p:spTgt spid="3">
+                                            <p:txEl>
+                                              <p:pRg st="1" end="1"/>
+                                            </p:txEl>
+                                          </p:spTgt>
+                                        </p:tgtEl>
+                                        <p:attrNameLst>
+                                          <p:attrName>style.visibility</p:attrName>
+                                        </p:attrNameLst>
+                                      </p:cBhvr>
+                                      <p:to>
+                                        <p:strVal val="visible"/>
+                                      </p:to>
+                                    </p:set>
+                                  </p:childTnLst>
+                                </p:cTn>
+                              </p:par>
+                            </p:childTnLst>
+                          </p:cTn>
+                        </p:par>
+                      </p:childTnLst>
+                    </p:cTn>
+                  </p:par>
+                  <p:par>
+                    <p:cTn id="11" fill="hold">
+                      <p:stCondLst>
+                        <p:cond delay="indefinite"/>
+                      </p:stCondLst>
+                      <p:childTnLst>
+                        <p:par>
+                          <p:cTn id="12" fill="hold">
+                            <p:stCondLst>
+                              <p:cond delay="0"/>
+                            </p:stCondLst>
+                            <p:childTnLst>
+                              <p:par>
+                                <p:cTn id="13" presetID="1" presetClass="entr" presetSubtype="0" fill="hold" grpId="0" nodeType="clickEffect">
+                                  <p:stCondLst>
+                                    <p:cond delay="0"/>
+                                  </p:stCondLst>
+                                  <p:childTnLst>
+                                    <p:set>
+                                      <p:cBhvr>
+                                        <p:cTn id="14" dur="1" fill="hold">
+                                          <p:stCondLst>
+                                            <p:cond delay="0"/>
+                                          </p:stCondLst>
+                                        </p:cTn>
+                                        <p:tgtEl>
+                                          <p:spTgt spid="3">
+                                            <p:txEl>
+                                              <p:pRg st="2" end="2"/>
+                                            </p:txEl>
+                                          </p:spTgt>
+                                        </p:tgtEl>
+                                        <p:attrNameLst>
+                                          <p:attrName>style.visibility</p:attrName>
+                                        </p:attrNameLst>
+                                      </p:cBhvr>
+                                      <p:to>
+                                        <p:strVal val="visible"/>
+                                      </p:to>
+                                    </p:set>
+                                  </p:childTnLst>
+                                </p:cTn>
+                              </p:par>
+                            </p:childTnLst>
+                          </p:cTn>
+                        </p:par>
+                      </p:childTnLst>
+                    </p:cTn>
+                  </p:par>
+                  <p:par>
+                    <p:cTn id="15" fill="hold">
+                      <p:stCondLst>
+                        <p:cond delay="indefinite"/>
+                      </p:stCondLst>
+                      <p:childTnLst>
+                        <p:par>
+                          <p:cTn id="16" fill="hold">
+                            <p:stCondLst>
+                              <p:cond delay="0"/>
+                            </p:stCondLst>
+                            <p:childTnLst>
+                              <p:par>
+                                <p:cTn id="17" presetID="1" presetClass="entr" presetSubtype="0" fill="hold" grpId="0" nodeType="clickEffect">
+                                  <p:stCondLst>
+                                    <p:cond delay="0"/>
+                                  </p:stCondLst>
+                                  <p:childTnLst>
+                                    <p:set>
+                                      <p:cBhvr>
+                                        <p:cTn id="18" dur="1" fill="hold">
+                                          <p:stCondLst>
+                                            <p:cond delay="0"/>
+                                          </p:stCondLst>
+                                        </p:cTn>
+                                        <p:tgtEl>
+                                          <p:spTgt spid="3">
+                                            <p:txEl>
+                                              <p:pRg st="3" end="3"/>
+                                            </p:txEl>
+                                          </p:spTgt>
+                                        </p:tgtEl>
+                                        <p:attrNameLst>
+                                          <p:attrName>style.visibility</p:attrName>
+                                        </p:attrNameLst>
+                                      </p:cBhvr>
+                                      <p:to>
+                                        <p:strVal val="visible"/>
+                                      </p:to>
+                                    </p:set>
+                                  </p:childTnLst>
+                                </p:cTn>
+                              </p:par>
+                            </p:childTnLst>
+                          </p:cTn>
+                        </p:par>
+                      </p:childTnLst>
+                    </p:cTn>
+                  </p:par>
+                  <p:par>
+                    <p:cTn id="19" fill="hold">
+                      <p:stCondLst>
+                        <p:cond delay="indefinite"/>
+                      </p:stCondLst>
+                      <p:childTnLst>
+                        <p:par>
+                          <p:cTn id="20" fill="hold">
+                            <p:stCondLst>
+                              <p:cond delay="0"/>
+                            </p:stCondLst>
+                            <p:childTnLst>
+                              <p:par>
+                                <p:cTn id="21" presetID="1" presetClass="entr" presetSubtype="0" fill="hold" grpId="0" nodeType="clickEffect">
+                                  <p:stCondLst>
+                                    <p:cond delay="0"/>
+                                  </p:stCondLst>
+                                  <p:childTnLst>
+                                    <p:set>
+                                      <p:cBhvr>
+                                        <p:cTn id="22" dur="1" fill="hold">
+                                          <p:stCondLst>
+                                            <p:cond delay="0"/>
+                                          </p:stCondLst>
+                                        </p:cTn>
+                                        <p:tgtEl>
+                                          <p:spTgt spid="3">
+                                            <p:txEl>
+                                              <p:pRg st="4" end="4"/>
+                                            </p:txEl>
+                                          </p:spTgt>
+                                        </p:tgtEl>
+                                        <p:attrNameLst>
+                                          <p:attrName>style.visibility</p:attrName>
+                                        </p:attrNameLst>
+                                      </p:cBhvr>
+                                      <p:to>
+                                        <p:strVal val="visible"/>
+                                      </p:to>
+                                    </p:set>
+                                  </p:childTnLst>
+                                </p:cTn>
+                              </p:par>
+                            </p:childTnLst>
+                          </p:cTn>
+                        </p:par>
+                      </p:childTnLst>
+                    </p:cTn>
+                  </p:par>
+                  <p:par>
+                    <p:cTn id="23" fill="hold">
+                      <p:stCondLst>
+                        <p:cond delay="indefinite"/>
+                      </p:stCondLst>
+                      <p:childTnLst>
+                        <p:par>
+                          <p:cTn id="24" fill="hold">
+                            <p:stCondLst>
+                              <p:cond delay="0"/>
+                            </p:stCondLst>
+                            <p:childTnLst>
+                              <p:par>
+                                <p:cTn id="25" presetID="1" presetClass="entr" presetSubtype="0" fill="hold" grpId="0" nodeType="clickEffect">
+                                  <p:stCondLst>
+                                    <p:cond delay="0"/>
+                                  </p:stCondLst>
+                                  <p:childTnLst>
+                                    <p:set>
+                                      <p:cBhvr>
+                                        <p:cTn id="26" dur="1" fill="hold">
+                                          <p:stCondLst>
+                                            <p:cond delay="0"/>
+                                          </p:stCondLst>
+                                        </p:cTn>
+                                        <p:tgtEl>
+                                          <p:spTgt spid="3">
+                                            <p:txEl>
+                                              <p:pRg st="5" end="5"/>
+                                            </p:txEl>
+                                          </p:spTgt>
+                                        </p:tgtEl>
+                                        <p:attrNameLst>
+                                          <p:attrName>style.visibility</p:attrName>
+                                        </p:attrNameLst>
+                                      </p:cBhvr>
+                                      <p:to>
+                                        <p:strVal val="visible"/>
+                                      </p:to>
+                                    </p:set>
+                                  </p:childTnLst>
+                                </p:cTn>
+                              </p:par>
+                            </p:childTnLst>
+                          </p:cTn>
+                        </p:par>
+                      </p:childTnLst>
+                    </p:cTn>
+                  </p:par>
+                  <p:par>
+                    <p:cTn id="27" fill="hold">
+                      <p:stCondLst>
+                        <p:cond delay="indefinite"/>
+                      </p:stCondLst>
+                      <p:childTnLst>
+                        <p:par>
+                          <p:cTn id="28" fill="hold">
+                            <p:stCondLst>
+                              <p:cond delay="0"/>
+                            </p:stCondLst>
+                            <p:childTnLst>
+                              <p:par>
+                                <p:cTn id="29" presetID="1" presetClass="entr" presetSubtype="0" fill="hold" grpId="0" nodeType="clickEffect">
+                                  <p:stCondLst>
+                                    <p:cond delay="0"/>
+                                  </p:stCondLst>
+                                  <p:childTnLst>
+                                    <p:set>
+                                      <p:cBhvr>
+                                        <p:cTn id="30" dur="1" fill="hold">
+                                          <p:stCondLst>
+                                            <p:cond delay="0"/>
+                                          </p:stCondLst>
+                                        </p:cTn>
+                                        <p:tgtEl>
+                                          <p:spTgt spid="3">
+                                            <p:txEl>
+                                              <p:pRg st="6" end="6"/>
+                                            </p:txEl>
+                                          </p:spTgt>
+                                        </p:tgtEl>
+                                        <p:attrNameLst>
+                                          <p:attrName>style.visibility</p:attrName>
+                                        </p:attrNameLst>
+                                      </p:cBhvr>
+                                      <p:to>
+                                        <p:strVal val="visible"/>
+                                      </p:to>
+                                    </p:set>
+                                  </p:childTnLst>
+                                </p:cTn>
+                              </p:par>
+                            </p:childTnLst>
+                          </p:cTn>
+                        </p:par>
+                      </p:childTnLst>
+                    </p:cTn>
+                  </p:par>
+                  <p:par>
+                    <p:cTn id="31" fill="hold">
+                      <p:stCondLst>
+                        <p:cond delay="indefinite"/>
+                      </p:stCondLst>
+                      <p:childTnLst>
+                        <p:par>
+                          <p:cTn id="32" fill="hold">
+                            <p:stCondLst>
+                              <p:cond delay="0"/>
+                            </p:stCondLst>
+                            <p:childTnLst>
+                              <p:par>
+                                <p:cTn id="33" presetID="1" presetClass="entr" presetSubtype="0" fill="hold" grpId="0" nodeType="clickEffect">
+                                  <p:stCondLst>
+                                    <p:cond delay="0"/>
+                                  </p:stCondLst>
+                                  <p:childTnLst>
+                                    <p:set>
+                                      <p:cBhvr>
+                                        <p:cTn id="34" dur="1" fill="hold">
+                                          <p:stCondLst>
+                                            <p:cond delay="0"/>
+                                          </p:stCondLst>
+                                        </p:cTn>
+                                        <p:tgtEl>
+                                          <p:spTgt spid="3">
+                                            <p:txEl>
+                                              <p:pRg st="7" end="7"/>
+                                            </p:txEl>
+                                          </p:spTgt>
+                                        </p:tgtEl>
+                                        <p:attrNameLst>
+                                          <p:attrName>style.visibility</p:attrName>
+                                        </p:attrNameLst>
+                                      </p:cBhvr>
+                                      <p:to>
+                                        <p:strVal val="visible"/>
+                                      </p:to>
+                                    </p:set>
+                                  </p:childTnLst>
+                                </p:cTn>
+                              </p:par>
+                            </p:childTnLst>
+                          </p:cTn>
+                        </p:par>
+                      </p:childTnLst>
+                    </p:cTn>
+                  </p:par>
+                </p:childTnLst>
+              </p:cTn>
+              <p:prevCondLst>
+                <p:cond evt="onPrev" delay="0">
+                  <p:tgtEl>
+                    <p:sldTgt/>
+                  </p:tgtEl>
+                </p:cond>
+              </p:prevCondLst>
+              <p:nextCondLst>
+                <p:cond evt="onNext" delay="0">
+                  <p:tgtEl>
+                    <p:sldTgt/>
+                  </p:tgtEl>
+                </p:cond>
+              </p:nextCondLst>
+            </p:seq>
+          </p:childTnLst>
+        </p:cTn>
+      </p:par>
+    </p:tnLst>
+    <p:bldLst>
+      <p:bldP spid="3" grpId="0" build="p"/>
+    </p:bldLst>
+  </p:timing>
 </p:sld>
 </file>
 
 <file path=ppt/slides/slide21.xml><?xml version="1.0" encoding="utf-8"?>
+<p:sld xmlns:a="http://schemas.openxmlformats.org/drawingml/2006/main" xmlns:r="http://schemas.openxmlformats.org/officeDocument/2006/relationships" xmlns:p="http://schemas.openxmlformats.org/presentationml/2006/main">
+  <p:cSld>
+    <p:spTree>
+      <p:nvGrpSpPr>
+        <p:cNvPr id="1" name=""/>
+        <p:cNvGrpSpPr/>
+        <p:nvPr/>
+      </p:nvGrpSpPr>
+      <p:grpSpPr>
+        <a:xfrm>
+          <a:off x="0" y="0"/>
+          <a:ext cx="0" cy="0"/>
+          <a:chOff x="0" y="0"/>
+          <a:chExt cx="0" cy="0"/>
+        </a:xfrm>
+      </p:grpSpPr>
+      <p:sp>
+        <p:nvSpPr>
+          <p:cNvPr id="2" name="Title 1">
+            <a:extLst>
+              <a:ext uri="{FF2B5EF4-FFF2-40B4-BE49-F238E27FC236}">
+                <a16:creationId xmlns:a16="http://schemas.microsoft.com/office/drawing/2014/main" id="{ADEBA3D5-28E6-8B09-2A59-4CEE2E8B155F}"/>
+              </a:ext>
+            </a:extLst>
+          </p:cNvPr>
+          <p:cNvSpPr>
+            <a:spLocks noGrp="1"/>
+          </p:cNvSpPr>
+          <p:nvPr>
+            <p:ph type="title"/>
+          </p:nvPr>
+        </p:nvSpPr>
+        <p:spPr/>
+        <p:txBody>
+          <a:bodyPr/>
+          <a:lstStyle/>
+          <a:p>
+            <a:r>
+              <a:rPr lang="en-US" dirty="0"/>
+              <a:t>Control hazard – solutions</a:t>
+            </a:r>
+            <a:endParaRPr lang="en-IN" dirty="0"/>
+          </a:p>
+        </p:txBody>
+      </p:sp>
+      <p:sp>
+        <p:nvSpPr>
+          <p:cNvPr id="3" name="Content Placeholder 2">
+            <a:extLst>
+              <a:ext uri="{FF2B5EF4-FFF2-40B4-BE49-F238E27FC236}">
+                <a16:creationId xmlns:a16="http://schemas.microsoft.com/office/drawing/2014/main" id="{C107E721-7941-75D9-29C5-0174E3B27B3D}"/>
+              </a:ext>
+            </a:extLst>
+          </p:cNvPr>
+          <p:cNvSpPr>
+            <a:spLocks noGrp="1"/>
+          </p:cNvSpPr>
+          <p:nvPr>
+            <p:ph idx="1"/>
+          </p:nvPr>
+        </p:nvSpPr>
+        <p:spPr/>
+        <p:txBody>
+          <a:bodyPr>
+            <a:normAutofit fontScale="92500" lnSpcReduction="10000"/>
+          </a:bodyPr>
+          <a:lstStyle/>
+          <a:p>
+            <a:r>
+              <a:rPr lang="en-US" dirty="0"/>
+              <a:t>Prefetch one of the branches; flush the two instructions if wrong ones were prefetched</a:t>
+            </a:r>
+          </a:p>
+          <a:p>
+            <a:pPr lvl="1"/>
+            <a:r>
+              <a:rPr lang="en-US" dirty="0"/>
+              <a:t>How does flush happen?</a:t>
+            </a:r>
+          </a:p>
+          <a:p>
+            <a:r>
+              <a:rPr lang="en-US" dirty="0"/>
+              <a:t>Delayed branch:</a:t>
+            </a:r>
+          </a:p>
+          <a:p>
+            <a:pPr lvl="1"/>
+            <a:r>
+              <a:rPr lang="en-US" dirty="0"/>
+              <a:t>compare in one instruction</a:t>
+            </a:r>
+          </a:p>
+          <a:p>
+            <a:pPr lvl="1"/>
+            <a:r>
+              <a:rPr lang="en-US" dirty="0"/>
+              <a:t>execute some unrelated instructions for next 1-2cycles</a:t>
+            </a:r>
+          </a:p>
+          <a:p>
+            <a:pPr lvl="1"/>
+            <a:r>
+              <a:rPr lang="en-US" dirty="0"/>
+              <a:t>continue based on branch decision</a:t>
+            </a:r>
+          </a:p>
+          <a:p>
+            <a:pPr lvl="1"/>
+            <a:r>
+              <a:rPr lang="en-US" dirty="0"/>
+              <a:t>Software solution, rarely used in modern processors</a:t>
+            </a:r>
+          </a:p>
+          <a:p>
+            <a:r>
+              <a:rPr lang="en-US" dirty="0"/>
+              <a:t>Branch prediction – fancy algorithms</a:t>
+            </a:r>
+          </a:p>
+          <a:p>
+            <a:pPr lvl="1"/>
+            <a:r>
+              <a:rPr lang="en-US" dirty="0"/>
+              <a:t>Branch history table</a:t>
+            </a:r>
+          </a:p>
+          <a:p>
+            <a:pPr lvl="1"/>
+            <a:r>
+              <a:rPr lang="en-US" dirty="0"/>
+              <a:t>Modern processors can predict ~95% of branches!</a:t>
+            </a:r>
+            <a:endParaRPr lang="en-IN" dirty="0"/>
+          </a:p>
+        </p:txBody>
+      </p:sp>
+      <p:sp>
+        <p:nvSpPr>
+          <p:cNvPr id="4" name="Date Placeholder 3">
+            <a:extLst>
+              <a:ext uri="{FF2B5EF4-FFF2-40B4-BE49-F238E27FC236}">
+                <a16:creationId xmlns:a16="http://schemas.microsoft.com/office/drawing/2014/main" id="{C9F12717-393D-3AD4-C575-7F1559F8A6FB}"/>
+              </a:ext>
+            </a:extLst>
+          </p:cNvPr>
+          <p:cNvSpPr>
+            <a:spLocks noGrp="1"/>
+          </p:cNvSpPr>
+          <p:nvPr>
+            <p:ph type="dt" sz="half" idx="10"/>
+          </p:nvPr>
+        </p:nvSpPr>
+        <p:spPr/>
+        <p:txBody>
+          <a:bodyPr/>
+          <a:lstStyle/>
+          <a:p>
+            <a:pPr>
+              <a:defRPr/>
+            </a:pPr>
+            <a:r>
+              <a:rPr lang="en-US"/>
+              <a:t>21/12/2020</a:t>
+            </a:r>
+          </a:p>
+        </p:txBody>
+      </p:sp>
+      <p:sp>
+        <p:nvSpPr>
+          <p:cNvPr id="5" name="Slide Number Placeholder 4">
+            <a:extLst>
+              <a:ext uri="{FF2B5EF4-FFF2-40B4-BE49-F238E27FC236}">
+                <a16:creationId xmlns:a16="http://schemas.microsoft.com/office/drawing/2014/main" id="{C8D44CD3-5142-C8D7-EAE3-D71BBC8CB7DA}"/>
+              </a:ext>
+            </a:extLst>
+          </p:cNvPr>
+          <p:cNvSpPr>
+            <a:spLocks noGrp="1"/>
+          </p:cNvSpPr>
+          <p:nvPr>
+            <p:ph type="sldNum" sz="quarter" idx="12"/>
+          </p:nvPr>
+        </p:nvSpPr>
+        <p:spPr/>
+        <p:txBody>
+          <a:bodyPr/>
+          <a:lstStyle/>
+          <a:p>
+            <a:pPr>
+              <a:defRPr/>
+            </a:pPr>
+            <a:fld id="{CA887A73-1AE0-46F8-856A-18EA1CF30A1B}" type="slidenum">
+              <a:rPr lang="en-US" altLang="en-US" smtClean="0"/>
+              <a:pPr>
+                <a:defRPr/>
+              </a:pPr>
+              <a:t>21</a:t>
+            </a:fld>
+            <a:endParaRPr lang="en-US" altLang="en-US"/>
+          </a:p>
+        </p:txBody>
+      </p:sp>
+    </p:spTree>
+    <p:extLst>
+      <p:ext uri="{BB962C8B-B14F-4D97-AF65-F5344CB8AC3E}">
+        <p14:creationId xmlns:p14="http://schemas.microsoft.com/office/powerpoint/2010/main" val="4159454190"/>
+      </p:ext>
+    </p:extLst>
+  </p:cSld>
+  <p:clrMapOvr>
+    <a:masterClrMapping/>
+  </p:clrMapOvr>
+  <p:timing>
+    <p:tnLst>
+      <p:par>
+        <p:cTn id="1" dur="indefinite" restart="never" nodeType="tmRoot">
+          <p:childTnLst>
+            <p:seq concurrent="1" nextAc="seek">
+              <p:cTn id="2" dur="indefinite" nodeType="mainSeq">
+                <p:childTnLst>
+                  <p:par>
+                    <p:cTn id="3" fill="hold">
+                      <p:stCondLst>
+                        <p:cond delay="indefinite"/>
+                      </p:stCondLst>
+                      <p:childTnLst>
+                        <p:par>
+                          <p:cTn id="4" fill="hold">
+                            <p:stCondLst>
+                              <p:cond delay="0"/>
+                            </p:stCondLst>
+                            <p:childTnLst>
+                              <p:par>
+                                <p:cTn id="5" presetID="1" presetClass="entr" presetSubtype="0" fill="hold" grpId="0" nodeType="clickEffect">
+                                  <p:stCondLst>
+                                    <p:cond delay="0"/>
+                                  </p:stCondLst>
+                                  <p:childTnLst>
+                                    <p:set>
+                                      <p:cBhvr>
+                                        <p:cTn id="6" dur="1" fill="hold">
+                                          <p:stCondLst>
+                                            <p:cond delay="0"/>
+                                          </p:stCondLst>
+                                        </p:cTn>
+                                        <p:tgtEl>
+                                          <p:spTgt spid="3">
+                                            <p:txEl>
+                                              <p:pRg st="0" end="0"/>
+                                            </p:txEl>
+                                          </p:spTgt>
+                                        </p:tgtEl>
+                                        <p:attrNameLst>
+                                          <p:attrName>style.visibility</p:attrName>
+                                        </p:attrNameLst>
+                                      </p:cBhvr>
+                                      <p:to>
+                                        <p:strVal val="visible"/>
+                                      </p:to>
+                                    </p:set>
+                                  </p:childTnLst>
+                                </p:cTn>
+                              </p:par>
+                            </p:childTnLst>
+                          </p:cTn>
+                        </p:par>
+                      </p:childTnLst>
+                    </p:cTn>
+                  </p:par>
+                  <p:par>
+                    <p:cTn id="7" fill="hold">
+                      <p:stCondLst>
+                        <p:cond delay="indefinite"/>
+                      </p:stCondLst>
+                      <p:childTnLst>
+                        <p:par>
+                          <p:cTn id="8" fill="hold">
+                            <p:stCondLst>
+                              <p:cond delay="0"/>
+                            </p:stCondLst>
+                            <p:childTnLst>
+                              <p:par>
+                                <p:cTn id="9" presetID="1" presetClass="entr" presetSubtype="0" fill="hold" grpId="0" nodeType="clickEffect">
+                                  <p:stCondLst>
+                                    <p:cond delay="0"/>
+                                  </p:stCondLst>
+                                  <p:childTnLst>
+                                    <p:set>
+                                      <p:cBhvr>
+                                        <p:cTn id="10" dur="1" fill="hold">
+                                          <p:stCondLst>
+                                            <p:cond delay="0"/>
+                                          </p:stCondLst>
+                                        </p:cTn>
+                                        <p:tgtEl>
+                                          <p:spTgt spid="3">
+                                            <p:txEl>
+                                              <p:pRg st="1" end="1"/>
+                                            </p:txEl>
+                                          </p:spTgt>
+                                        </p:tgtEl>
+                                        <p:attrNameLst>
+                                          <p:attrName>style.visibility</p:attrName>
+                                        </p:attrNameLst>
+                                      </p:cBhvr>
+                                      <p:to>
+                                        <p:strVal val="visible"/>
+                                      </p:to>
+                                    </p:set>
+                                  </p:childTnLst>
+                                </p:cTn>
+                              </p:par>
+                            </p:childTnLst>
+                          </p:cTn>
+                        </p:par>
+                      </p:childTnLst>
+                    </p:cTn>
+                  </p:par>
+                  <p:par>
+                    <p:cTn id="11" fill="hold">
+                      <p:stCondLst>
+                        <p:cond delay="indefinite"/>
+                      </p:stCondLst>
+                      <p:childTnLst>
+                        <p:par>
+                          <p:cTn id="12" fill="hold">
+                            <p:stCondLst>
+                              <p:cond delay="0"/>
+                            </p:stCondLst>
+                            <p:childTnLst>
+                              <p:par>
+                                <p:cTn id="13" presetID="1" presetClass="entr" presetSubtype="0" fill="hold" grpId="0" nodeType="clickEffect">
+                                  <p:stCondLst>
+                                    <p:cond delay="0"/>
+                                  </p:stCondLst>
+                                  <p:childTnLst>
+                                    <p:set>
+                                      <p:cBhvr>
+                                        <p:cTn id="14" dur="1" fill="hold">
+                                          <p:stCondLst>
+                                            <p:cond delay="0"/>
+                                          </p:stCondLst>
+                                        </p:cTn>
+                                        <p:tgtEl>
+                                          <p:spTgt spid="3">
+                                            <p:txEl>
+                                              <p:pRg st="2" end="2"/>
+                                            </p:txEl>
+                                          </p:spTgt>
+                                        </p:tgtEl>
+                                        <p:attrNameLst>
+                                          <p:attrName>style.visibility</p:attrName>
+                                        </p:attrNameLst>
+                                      </p:cBhvr>
+                                      <p:to>
+                                        <p:strVal val="visible"/>
+                                      </p:to>
+                                    </p:set>
+                                  </p:childTnLst>
+                                </p:cTn>
+                              </p:par>
+                            </p:childTnLst>
+                          </p:cTn>
+                        </p:par>
+                      </p:childTnLst>
+                    </p:cTn>
+                  </p:par>
+                  <p:par>
+                    <p:cTn id="15" fill="hold">
+                      <p:stCondLst>
+                        <p:cond delay="indefinite"/>
+                      </p:stCondLst>
+                      <p:childTnLst>
+                        <p:par>
+                          <p:cTn id="16" fill="hold">
+                            <p:stCondLst>
+                              <p:cond delay="0"/>
+                            </p:stCondLst>
+                            <p:childTnLst>
+                              <p:par>
+                                <p:cTn id="17" presetID="1" presetClass="entr" presetSubtype="0" fill="hold" grpId="0" nodeType="clickEffect">
+                                  <p:stCondLst>
+                                    <p:cond delay="0"/>
+                                  </p:stCondLst>
+                                  <p:childTnLst>
+                                    <p:set>
+                                      <p:cBhvr>
+                                        <p:cTn id="18" dur="1" fill="hold">
+                                          <p:stCondLst>
+                                            <p:cond delay="0"/>
+                                          </p:stCondLst>
+                                        </p:cTn>
+                                        <p:tgtEl>
+                                          <p:spTgt spid="3">
+                                            <p:txEl>
+                                              <p:pRg st="3" end="3"/>
+                                            </p:txEl>
+                                          </p:spTgt>
+                                        </p:tgtEl>
+                                        <p:attrNameLst>
+                                          <p:attrName>style.visibility</p:attrName>
+                                        </p:attrNameLst>
+                                      </p:cBhvr>
+                                      <p:to>
+                                        <p:strVal val="visible"/>
+                                      </p:to>
+                                    </p:set>
+                                  </p:childTnLst>
+                                </p:cTn>
+                              </p:par>
+                            </p:childTnLst>
+                          </p:cTn>
+                        </p:par>
+                      </p:childTnLst>
+                    </p:cTn>
+                  </p:par>
+                  <p:par>
+                    <p:cTn id="19" fill="hold">
+                      <p:stCondLst>
+                        <p:cond delay="indefinite"/>
+                      </p:stCondLst>
+                      <p:childTnLst>
+                        <p:par>
+                          <p:cTn id="20" fill="hold">
+                            <p:stCondLst>
+                              <p:cond delay="0"/>
+                            </p:stCondLst>
+                            <p:childTnLst>
+                              <p:par>
+                                <p:cTn id="21" presetID="1" presetClass="entr" presetSubtype="0" fill="hold" grpId="0" nodeType="clickEffect">
+                                  <p:stCondLst>
+                                    <p:cond delay="0"/>
+                                  </p:stCondLst>
+                                  <p:childTnLst>
+                                    <p:set>
+                                      <p:cBhvr>
+                                        <p:cTn id="22" dur="1" fill="hold">
+                                          <p:stCondLst>
+                                            <p:cond delay="0"/>
+                                          </p:stCondLst>
+                                        </p:cTn>
+                                        <p:tgtEl>
+                                          <p:spTgt spid="3">
+                                            <p:txEl>
+                                              <p:pRg st="4" end="4"/>
+                                            </p:txEl>
+                                          </p:spTgt>
+                                        </p:tgtEl>
+                                        <p:attrNameLst>
+                                          <p:attrName>style.visibility</p:attrName>
+                                        </p:attrNameLst>
+                                      </p:cBhvr>
+                                      <p:to>
+                                        <p:strVal val="visible"/>
+                                      </p:to>
+                                    </p:set>
+                                  </p:childTnLst>
+                                </p:cTn>
+                              </p:par>
+                            </p:childTnLst>
+                          </p:cTn>
+                        </p:par>
+                      </p:childTnLst>
+                    </p:cTn>
+                  </p:par>
+                  <p:par>
+                    <p:cTn id="23" fill="hold">
+                      <p:stCondLst>
+                        <p:cond delay="indefinite"/>
+                      </p:stCondLst>
+                      <p:childTnLst>
+                        <p:par>
+                          <p:cTn id="24" fill="hold">
+                            <p:stCondLst>
+                              <p:cond delay="0"/>
+                            </p:stCondLst>
+                            <p:childTnLst>
+                              <p:par>
+                                <p:cTn id="25" presetID="1" presetClass="entr" presetSubtype="0" fill="hold" grpId="0" nodeType="clickEffect">
+                                  <p:stCondLst>
+                                    <p:cond delay="0"/>
+                                  </p:stCondLst>
+                                  <p:childTnLst>
+                                    <p:set>
+                                      <p:cBhvr>
+                                        <p:cTn id="26" dur="1" fill="hold">
+                                          <p:stCondLst>
+                                            <p:cond delay="0"/>
+                                          </p:stCondLst>
+                                        </p:cTn>
+                                        <p:tgtEl>
+                                          <p:spTgt spid="3">
+                                            <p:txEl>
+                                              <p:pRg st="5" end="5"/>
+                                            </p:txEl>
+                                          </p:spTgt>
+                                        </p:tgtEl>
+                                        <p:attrNameLst>
+                                          <p:attrName>style.visibility</p:attrName>
+                                        </p:attrNameLst>
+                                      </p:cBhvr>
+                                      <p:to>
+                                        <p:strVal val="visible"/>
+                                      </p:to>
+                                    </p:set>
+                                  </p:childTnLst>
+                                </p:cTn>
+                              </p:par>
+                            </p:childTnLst>
+                          </p:cTn>
+                        </p:par>
+                      </p:childTnLst>
+                    </p:cTn>
+                  </p:par>
+                  <p:par>
+                    <p:cTn id="27" fill="hold">
+                      <p:stCondLst>
+                        <p:cond delay="indefinite"/>
+                      </p:stCondLst>
+                      <p:childTnLst>
+                        <p:par>
+                          <p:cTn id="28" fill="hold">
+                            <p:stCondLst>
+                              <p:cond delay="0"/>
+                            </p:stCondLst>
+                            <p:childTnLst>
+                              <p:par>
+                                <p:cTn id="29" presetID="1" presetClass="entr" presetSubtype="0" fill="hold" grpId="0" nodeType="clickEffect">
+                                  <p:stCondLst>
+                                    <p:cond delay="0"/>
+                                  </p:stCondLst>
+                                  <p:childTnLst>
+                                    <p:set>
+                                      <p:cBhvr>
+                                        <p:cTn id="30" dur="1" fill="hold">
+                                          <p:stCondLst>
+                                            <p:cond delay="0"/>
+                                          </p:stCondLst>
+                                        </p:cTn>
+                                        <p:tgtEl>
+                                          <p:spTgt spid="3">
+                                            <p:txEl>
+                                              <p:pRg st="6" end="6"/>
+                                            </p:txEl>
+                                          </p:spTgt>
+                                        </p:tgtEl>
+                                        <p:attrNameLst>
+                                          <p:attrName>style.visibility</p:attrName>
+                                        </p:attrNameLst>
+                                      </p:cBhvr>
+                                      <p:to>
+                                        <p:strVal val="visible"/>
+                                      </p:to>
+                                    </p:set>
+                                  </p:childTnLst>
+                                </p:cTn>
+                              </p:par>
+                            </p:childTnLst>
+                          </p:cTn>
+                        </p:par>
+                      </p:childTnLst>
+                    </p:cTn>
+                  </p:par>
+                  <p:par>
+                    <p:cTn id="31" fill="hold">
+                      <p:stCondLst>
+                        <p:cond delay="indefinite"/>
+                      </p:stCondLst>
+                      <p:childTnLst>
+                        <p:par>
+                          <p:cTn id="32" fill="hold">
+                            <p:stCondLst>
+                              <p:cond delay="0"/>
+                            </p:stCondLst>
+                            <p:childTnLst>
+                              <p:par>
+                                <p:cTn id="33" presetID="1" presetClass="entr" presetSubtype="0" fill="hold" grpId="0" nodeType="clickEffect">
+                                  <p:stCondLst>
+                                    <p:cond delay="0"/>
+                                  </p:stCondLst>
+                                  <p:childTnLst>
+                                    <p:set>
+                                      <p:cBhvr>
+                                        <p:cTn id="34" dur="1" fill="hold">
+                                          <p:stCondLst>
+                                            <p:cond delay="0"/>
+                                          </p:stCondLst>
+                                        </p:cTn>
+                                        <p:tgtEl>
+                                          <p:spTgt spid="3">
+                                            <p:txEl>
+                                              <p:pRg st="7" end="7"/>
+                                            </p:txEl>
+                                          </p:spTgt>
+                                        </p:tgtEl>
+                                        <p:attrNameLst>
+                                          <p:attrName>style.visibility</p:attrName>
+                                        </p:attrNameLst>
+                                      </p:cBhvr>
+                                      <p:to>
+                                        <p:strVal val="visible"/>
+                                      </p:to>
+                                    </p:set>
+                                  </p:childTnLst>
+                                </p:cTn>
+                              </p:par>
+                            </p:childTnLst>
+                          </p:cTn>
+                        </p:par>
+                      </p:childTnLst>
+                    </p:cTn>
+                  </p:par>
+                  <p:par>
+                    <p:cTn id="35" fill="hold">
+                      <p:stCondLst>
+                        <p:cond delay="indefinite"/>
+                      </p:stCondLst>
+                      <p:childTnLst>
+                        <p:par>
+                          <p:cTn id="36" fill="hold">
+                            <p:stCondLst>
+                              <p:cond delay="0"/>
+                            </p:stCondLst>
+                            <p:childTnLst>
+                              <p:par>
+                                <p:cTn id="37" presetID="1" presetClass="entr" presetSubtype="0" fill="hold" grpId="0" nodeType="clickEffect">
+                                  <p:stCondLst>
+                                    <p:cond delay="0"/>
+                                  </p:stCondLst>
+                                  <p:childTnLst>
+                                    <p:set>
+                                      <p:cBhvr>
+                                        <p:cTn id="38" dur="1" fill="hold">
+                                          <p:stCondLst>
+                                            <p:cond delay="0"/>
+                                          </p:stCondLst>
+                                        </p:cTn>
+                                        <p:tgtEl>
+                                          <p:spTgt spid="3">
+                                            <p:txEl>
+                                              <p:pRg st="8" end="8"/>
+                                            </p:txEl>
+                                          </p:spTgt>
+                                        </p:tgtEl>
+                                        <p:attrNameLst>
+                                          <p:attrName>style.visibility</p:attrName>
+                                        </p:attrNameLst>
+                                      </p:cBhvr>
+                                      <p:to>
+                                        <p:strVal val="visible"/>
+                                      </p:to>
+                                    </p:set>
+                                  </p:childTnLst>
+                                </p:cTn>
+                              </p:par>
+                            </p:childTnLst>
+                          </p:cTn>
+                        </p:par>
+                      </p:childTnLst>
+                    </p:cTn>
+                  </p:par>
+                  <p:par>
+                    <p:cTn id="39" fill="hold">
+                      <p:stCondLst>
+                        <p:cond delay="indefinite"/>
+                      </p:stCondLst>
+                      <p:childTnLst>
+                        <p:par>
+                          <p:cTn id="40" fill="hold">
+                            <p:stCondLst>
+                              <p:cond delay="0"/>
+                            </p:stCondLst>
+                            <p:childTnLst>
+                              <p:par>
+                                <p:cTn id="41" presetID="1" presetClass="entr" presetSubtype="0" fill="hold" grpId="0" nodeType="clickEffect">
+                                  <p:stCondLst>
+                                    <p:cond delay="0"/>
+                                  </p:stCondLst>
+                                  <p:childTnLst>
+                                    <p:set>
+                                      <p:cBhvr>
+                                        <p:cTn id="42" dur="1" fill="hold">
+                                          <p:stCondLst>
+                                            <p:cond delay="0"/>
+                                          </p:stCondLst>
+                                        </p:cTn>
+                                        <p:tgtEl>
+                                          <p:spTgt spid="3">
+                                            <p:txEl>
+                                              <p:pRg st="9" end="9"/>
+                                            </p:txEl>
+                                          </p:spTgt>
+                                        </p:tgtEl>
+                                        <p:attrNameLst>
+                                          <p:attrName>style.visibility</p:attrName>
+                                        </p:attrNameLst>
+                                      </p:cBhvr>
+                                      <p:to>
+                                        <p:strVal val="visible"/>
+                                      </p:to>
+                                    </p:set>
+                                  </p:childTnLst>
+                                </p:cTn>
+                              </p:par>
+                            </p:childTnLst>
+                          </p:cTn>
+                        </p:par>
+                      </p:childTnLst>
+                    </p:cTn>
+                  </p:par>
+                </p:childTnLst>
+              </p:cTn>
+              <p:prevCondLst>
+                <p:cond evt="onPrev" delay="0">
+                  <p:tgtEl>
+                    <p:sldTgt/>
+                  </p:tgtEl>
+                </p:cond>
+              </p:prevCondLst>
+              <p:nextCondLst>
+                <p:cond evt="onNext" delay="0">
+                  <p:tgtEl>
+                    <p:sldTgt/>
+                  </p:tgtEl>
+                </p:cond>
+              </p:nextCondLst>
+            </p:seq>
+          </p:childTnLst>
+        </p:cTn>
+      </p:par>
+    </p:tnLst>
+    <p:bldLst>
+      <p:bldP spid="3" grpId="0" build="p"/>
+    </p:bldLst>
+  </p:timing>
+</p:sld>
+</file>
+
+<file path=ppt/slides/slide22.xml><?xml version="1.0" encoding="utf-8"?>
 <p:sld xmlns:a="http://schemas.openxmlformats.org/drawingml/2006/main" xmlns:r="http://schemas.openxmlformats.org/officeDocument/2006/relationships" xmlns:p="http://schemas.openxmlformats.org/presentationml/2006/main">
   <p:cSld>
     <p:spTree>
@@ -13182,7 +14327,7 @@
           <a:p>
             <a:fld id="{B4B13859-67C5-4393-B6C2-556CF3F770C0}" type="datetime3">
               <a:rPr lang="en-US" smtClean="0"/>
-              <a:t>25 February 2026</a:t>
+              <a:t>27 February 2026</a:t>
             </a:fld>
             <a:endParaRPr lang="en-US"/>
           </a:p>
@@ -13240,7 +14385,7 @@
           <a:p>
             <a:fld id="{98AC3541-01C1-4CA5-B68F-FEE868C7D1AF}" type="slidenum">
               <a:rPr lang="en-US" smtClean="0"/>
-              <a:t>21</a:t>
+              <a:t>22</a:t>
             </a:fld>
             <a:endParaRPr lang="en-US"/>
           </a:p>
@@ -13666,7 +14811,7 @@
 </p:sld>
 </file>
 
-<file path=ppt/slides/slide22.xml><?xml version="1.0" encoding="utf-8"?>
+<file path=ppt/slides/slide23.xml><?xml version="1.0" encoding="utf-8"?>
 <p:sld xmlns:a="http://schemas.openxmlformats.org/drawingml/2006/main" xmlns:r="http://schemas.openxmlformats.org/officeDocument/2006/relationships" xmlns:p="http://schemas.openxmlformats.org/presentationml/2006/main">
   <p:cSld>
     <p:spTree>
@@ -13706,7 +14851,7 @@
           <a:p>
             <a:fld id="{B4B13859-67C5-4393-B6C2-556CF3F770C0}" type="datetime3">
               <a:rPr lang="en-US" smtClean="0"/>
-              <a:t>25 February 2026</a:t>
+              <a:t>27 February 2026</a:t>
             </a:fld>
             <a:endParaRPr lang="en-US"/>
           </a:p>
@@ -13764,7 +14909,7 @@
           <a:p>
             <a:fld id="{98AC3541-01C1-4CA5-B68F-FEE868C7D1AF}" type="slidenum">
               <a:rPr lang="en-US" smtClean="0"/>
-              <a:t>22</a:t>
+              <a:t>23</a:t>
             </a:fld>
             <a:endParaRPr lang="en-US"/>
           </a:p>
@@ -14001,7 +15146,7 @@
           <a:p>
             <a:fld id="{B4B13859-67C5-4393-B6C2-556CF3F770C0}" type="datetime3">
               <a:rPr lang="en-US" smtClean="0"/>
-              <a:t>25 February 2026</a:t>
+              <a:t>27 February 2026</a:t>
             </a:fld>
             <a:endParaRPr lang="en-US" dirty="0"/>
           </a:p>
@@ -14491,7 +15636,7 @@
           <a:p>
             <a:fld id="{B4B13859-67C5-4393-B6C2-556CF3F770C0}" type="datetime3">
               <a:rPr lang="en-US" smtClean="0"/>
-              <a:t>25 February 2026</a:t>
+              <a:t>27 February 2026</a:t>
             </a:fld>
             <a:endParaRPr lang="en-US" dirty="0"/>
           </a:p>
@@ -16915,7 +18060,7 @@
           <a:p>
             <a:fld id="{B4B13859-67C5-4393-B6C2-556CF3F770C0}" type="datetime3">
               <a:rPr lang="en-US" smtClean="0"/>
-              <a:t>25 February 2026</a:t>
+              <a:t>27 February 2026</a:t>
             </a:fld>
             <a:endParaRPr lang="en-US" dirty="0"/>
           </a:p>
@@ -17756,7 +18901,7 @@
           <a:p>
             <a:fld id="{B4B13859-67C5-4393-B6C2-556CF3F770C0}" type="datetime3">
               <a:rPr lang="en-US" smtClean="0"/>
-              <a:t>25 February 2026</a:t>
+              <a:t>27 February 2026</a:t>
             </a:fld>
             <a:endParaRPr lang="en-US" dirty="0"/>
           </a:p>
@@ -18446,7 +19591,7 @@
           <a:p>
             <a:fld id="{B4B13859-67C5-4393-B6C2-556CF3F770C0}" type="datetime3">
               <a:rPr lang="en-US" smtClean="0"/>
-              <a:t>25 February 2026</a:t>
+              <a:t>27 February 2026</a:t>
             </a:fld>
             <a:endParaRPr lang="en-US" dirty="0"/>
           </a:p>
@@ -19032,7 +20177,7 @@
           <a:p>
             <a:fld id="{B4B13859-67C5-4393-B6C2-556CF3F770C0}" type="datetime3">
               <a:rPr lang="en-US" smtClean="0"/>
-              <a:t>25 February 2026</a:t>
+              <a:t>27 February 2026</a:t>
             </a:fld>
             <a:endParaRPr lang="en-US" dirty="0"/>
           </a:p>
@@ -19593,7 +20738,7 @@
           <a:p>
             <a:fld id="{B4B13859-67C5-4393-B6C2-556CF3F770C0}" type="datetime3">
               <a:rPr lang="en-US" smtClean="0"/>
-              <a:t>25 February 2026</a:t>
+              <a:t>27 February 2026</a:t>
             </a:fld>
             <a:endParaRPr lang="en-US" dirty="0"/>
           </a:p>
